--- a/docs/livrables/Support_soutenance_POC_ElectioAnalytics.pptx
+++ b/docs/livrables/Support_soutenance_POC_ElectioAnalytics.pptx
@@ -17,9 +17,12 @@
     <p:sldId id="265" r:id="rId11"/>
     <p:sldId id="266" r:id="rId12"/>
     <p:sldId id="267" r:id="rId13"/>
+    <p:sldId id="268" r:id="rId14"/>
+    <p:sldId id="269" r:id="rId15"/>
+    <p:sldId id="270" r:id="rId16"/>
   </p:sldIdLst>
   <p:notesMasterIdLst>
-    <p:notesMasterId r:id="rId14"/>
+    <p:notesMasterId r:id="rId17"/>
   </p:notesMasterIdLst>
   <p:sldSz cx="12192000" cy="6858000"/>
   <p:notesSz cx="6858000" cy="12192000"/>
@@ -819,6 +822,270 @@
 </p:notes>
 </file>
 
+<file path=ppt/notesSlides/notesSlide13.xml><?xml version="1.0" encoding="utf-8"?>
+<p:notes xmlns:a="http://schemas.openxmlformats.org/drawingml/2006/main" xmlns:r="http://schemas.openxmlformats.org/officeDocument/2006/relationships" xmlns:p="http://schemas.openxmlformats.org/presentationml/2006/main">
+  <p:cSld>
+    <p:spTree>
+      <p:nvGrpSpPr>
+        <p:cNvPr id="1" name=""/>
+        <p:cNvGrpSpPr/>
+        <p:nvPr/>
+      </p:nvGrpSpPr>
+      <p:grpSpPr>
+        <a:xfrm>
+          <a:off x="0" y="0"/>
+          <a:ext cx="0" cy="0"/>
+          <a:chOff x="0" y="0"/>
+          <a:chExt cx="0" cy="0"/>
+        </a:xfrm>
+      </p:grpSpPr>
+      <p:sp>
+        <p:nvSpPr>
+          <p:cNvPr id="2" name="Slide Image Placeholder 1"/>
+          <p:cNvSpPr>
+            <a:spLocks noGrp="1" noRot="1" noChangeAspect="1"/>
+          </p:cNvSpPr>
+          <p:nvPr>
+            <p:ph type="sldImg"/>
+          </p:nvPr>
+        </p:nvSpPr>
+        <p:spPr/>
+      </p:sp>
+      <p:sp>
+        <p:nvSpPr>
+          <p:cNvPr id="3" name="Notes Placeholder 2"/>
+          <p:cNvSpPr>
+            <a:spLocks noGrp="1"/>
+          </p:cNvSpPr>
+          <p:nvPr>
+            <p:ph type="body" idx="1"/>
+          </p:nvPr>
+        </p:nvSpPr>
+        <p:spPr/>
+        <p:txBody>
+          <a:bodyPr/>
+          <a:lstStyle/>
+          <a:p>
+            <a:r>
+              <a:rPr lang="en-US" dirty="0"/>
+              <a:t/>
+            </a:r>
+            <a:endParaRPr lang="en-US" dirty="0"/>
+          </a:p>
+        </p:txBody>
+      </p:sp>
+      <p:sp>
+        <p:nvSpPr>
+          <p:cNvPr id="4" name="Slide Number Placeholder 3"/>
+          <p:cNvSpPr>
+            <a:spLocks noGrp="1"/>
+          </p:cNvSpPr>
+          <p:nvPr>
+            <p:ph type="sldNum" sz="quarter" idx="10"/>
+          </p:nvPr>
+        </p:nvSpPr>
+        <p:spPr/>
+        <p:txBody>
+          <a:bodyPr/>
+          <a:lstStyle/>
+          <a:p>
+            <a:fld id="{F7021451-1387-4CA6-816F-3879F97B5CBC}" type="slidenum">
+              <a:rPr lang="en-US"/>
+              <a:t>13</a:t>
+            </a:fld>
+            <a:endParaRPr lang="en-US"/>
+          </a:p>
+        </p:txBody>
+      </p:sp>
+    </p:spTree>
+    <p:extLst>
+      <p:ext uri="{BB962C8B-B14F-4D97-AF65-F5344CB8AC3E}">
+        <p14:creationId xmlns:p14="http://schemas.microsoft.com/office/powerpoint/2010/main" val="1024086991"/>
+      </p:ext>
+    </p:extLst>
+  </p:cSld>
+  <p:clrMapOvr>
+    <a:masterClrMapping/>
+  </p:clrMapOvr>
+</p:notes>
+</file>
+
+<file path=ppt/notesSlides/notesSlide14.xml><?xml version="1.0" encoding="utf-8"?>
+<p:notes xmlns:a="http://schemas.openxmlformats.org/drawingml/2006/main" xmlns:r="http://schemas.openxmlformats.org/officeDocument/2006/relationships" xmlns:p="http://schemas.openxmlformats.org/presentationml/2006/main">
+  <p:cSld>
+    <p:spTree>
+      <p:nvGrpSpPr>
+        <p:cNvPr id="1" name=""/>
+        <p:cNvGrpSpPr/>
+        <p:nvPr/>
+      </p:nvGrpSpPr>
+      <p:grpSpPr>
+        <a:xfrm>
+          <a:off x="0" y="0"/>
+          <a:ext cx="0" cy="0"/>
+          <a:chOff x="0" y="0"/>
+          <a:chExt cx="0" cy="0"/>
+        </a:xfrm>
+      </p:grpSpPr>
+      <p:sp>
+        <p:nvSpPr>
+          <p:cNvPr id="2" name="Slide Image Placeholder 1"/>
+          <p:cNvSpPr>
+            <a:spLocks noGrp="1" noRot="1" noChangeAspect="1"/>
+          </p:cNvSpPr>
+          <p:nvPr>
+            <p:ph type="sldImg"/>
+          </p:nvPr>
+        </p:nvSpPr>
+        <p:spPr/>
+      </p:sp>
+      <p:sp>
+        <p:nvSpPr>
+          <p:cNvPr id="3" name="Notes Placeholder 2"/>
+          <p:cNvSpPr>
+            <a:spLocks noGrp="1"/>
+          </p:cNvSpPr>
+          <p:nvPr>
+            <p:ph type="body" idx="1"/>
+          </p:nvPr>
+        </p:nvSpPr>
+        <p:spPr/>
+        <p:txBody>
+          <a:bodyPr/>
+          <a:lstStyle/>
+          <a:p>
+            <a:r>
+              <a:rPr lang="en-US" dirty="0"/>
+              <a:t/>
+            </a:r>
+            <a:endParaRPr lang="en-US" dirty="0"/>
+          </a:p>
+        </p:txBody>
+      </p:sp>
+      <p:sp>
+        <p:nvSpPr>
+          <p:cNvPr id="4" name="Slide Number Placeholder 3"/>
+          <p:cNvSpPr>
+            <a:spLocks noGrp="1"/>
+          </p:cNvSpPr>
+          <p:nvPr>
+            <p:ph type="sldNum" sz="quarter" idx="10"/>
+          </p:nvPr>
+        </p:nvSpPr>
+        <p:spPr/>
+        <p:txBody>
+          <a:bodyPr/>
+          <a:lstStyle/>
+          <a:p>
+            <a:fld id="{F7021451-1387-4CA6-816F-3879F97B5CBC}" type="slidenum">
+              <a:rPr lang="en-US"/>
+              <a:t>14</a:t>
+            </a:fld>
+            <a:endParaRPr lang="en-US"/>
+          </a:p>
+        </p:txBody>
+      </p:sp>
+    </p:spTree>
+    <p:extLst>
+      <p:ext uri="{BB962C8B-B14F-4D97-AF65-F5344CB8AC3E}">
+        <p14:creationId xmlns:p14="http://schemas.microsoft.com/office/powerpoint/2010/main" val="1024086991"/>
+      </p:ext>
+    </p:extLst>
+  </p:cSld>
+  <p:clrMapOvr>
+    <a:masterClrMapping/>
+  </p:clrMapOvr>
+</p:notes>
+</file>
+
+<file path=ppt/notesSlides/notesSlide15.xml><?xml version="1.0" encoding="utf-8"?>
+<p:notes xmlns:a="http://schemas.openxmlformats.org/drawingml/2006/main" xmlns:r="http://schemas.openxmlformats.org/officeDocument/2006/relationships" xmlns:p="http://schemas.openxmlformats.org/presentationml/2006/main">
+  <p:cSld>
+    <p:spTree>
+      <p:nvGrpSpPr>
+        <p:cNvPr id="1" name=""/>
+        <p:cNvGrpSpPr/>
+        <p:nvPr/>
+      </p:nvGrpSpPr>
+      <p:grpSpPr>
+        <a:xfrm>
+          <a:off x="0" y="0"/>
+          <a:ext cx="0" cy="0"/>
+          <a:chOff x="0" y="0"/>
+          <a:chExt cx="0" cy="0"/>
+        </a:xfrm>
+      </p:grpSpPr>
+      <p:sp>
+        <p:nvSpPr>
+          <p:cNvPr id="2" name="Slide Image Placeholder 1"/>
+          <p:cNvSpPr>
+            <a:spLocks noGrp="1" noRot="1" noChangeAspect="1"/>
+          </p:cNvSpPr>
+          <p:nvPr>
+            <p:ph type="sldImg"/>
+          </p:nvPr>
+        </p:nvSpPr>
+        <p:spPr/>
+      </p:sp>
+      <p:sp>
+        <p:nvSpPr>
+          <p:cNvPr id="3" name="Notes Placeholder 2"/>
+          <p:cNvSpPr>
+            <a:spLocks noGrp="1"/>
+          </p:cNvSpPr>
+          <p:nvPr>
+            <p:ph type="body" idx="1"/>
+          </p:nvPr>
+        </p:nvSpPr>
+        <p:spPr/>
+        <p:txBody>
+          <a:bodyPr/>
+          <a:lstStyle/>
+          <a:p>
+            <a:r>
+              <a:rPr lang="en-US" dirty="0"/>
+              <a:t/>
+            </a:r>
+            <a:endParaRPr lang="en-US" dirty="0"/>
+          </a:p>
+        </p:txBody>
+      </p:sp>
+      <p:sp>
+        <p:nvSpPr>
+          <p:cNvPr id="4" name="Slide Number Placeholder 3"/>
+          <p:cNvSpPr>
+            <a:spLocks noGrp="1"/>
+          </p:cNvSpPr>
+          <p:nvPr>
+            <p:ph type="sldNum" sz="quarter" idx="10"/>
+          </p:nvPr>
+        </p:nvSpPr>
+        <p:spPr/>
+        <p:txBody>
+          <a:bodyPr/>
+          <a:lstStyle/>
+          <a:p>
+            <a:fld id="{F7021451-1387-4CA6-816F-3879F97B5CBC}" type="slidenum">
+              <a:rPr lang="en-US"/>
+              <a:t>15</a:t>
+            </a:fld>
+            <a:endParaRPr lang="en-US"/>
+          </a:p>
+        </p:txBody>
+      </p:sp>
+    </p:spTree>
+    <p:extLst>
+      <p:ext uri="{BB962C8B-B14F-4D97-AF65-F5344CB8AC3E}">
+        <p14:creationId xmlns:p14="http://schemas.microsoft.com/office/powerpoint/2010/main" val="1024086991"/>
+      </p:ext>
+    </p:extLst>
+  </p:cSld>
+  <p:clrMapOvr>
+    <a:masterClrMapping/>
+  </p:clrMapOvr>
+</p:notes>
+</file>
+
 <file path=ppt/notesSlides/notesSlide2.xml><?xml version="1.0" encoding="utf-8"?>
 <p:notes xmlns:a="http://schemas.openxmlformats.org/drawingml/2006/main" xmlns:r="http://schemas.openxmlformats.org/officeDocument/2006/relationships" xmlns:p="http://schemas.openxmlformats.org/presentationml/2006/main">
   <p:cSld>
@@ -2029,7 +2296,7 @@
                   <a:srgbClr val="AAB4D8"/>
                 </a:solidFill>
               </a:rPr>
-              <a:t>96 départements · 5 scrutins · pipeline ETL reproductible</a:t>
+              <a:t>96 départements · 5 scrutins · holdout 2022 = 0,53 · pipeline ETL reproductible</a:t>
             </a:r>
             <a:endParaRPr lang="en-US" sz="1500" dirty="0"/>
           </a:p>
@@ -2153,7 +2420,7 @@
                   <a:srgbClr val="FFFFFF"/>
                 </a:solidFill>
               </a:rPr>
-              <a:t>08</a:t>
+              <a:t>07</a:t>
             </a:r>
             <a:endParaRPr lang="en-US" sz="1300" dirty="0"/>
           </a:p>
@@ -2189,7 +2456,7 @@
                   <a:srgbClr val="1B2A5E"/>
                 </a:solidFill>
               </a:rPr>
-              <a:t>RGPD &amp; Sécurité</a:t>
+              <a:t>Qualité DQM &amp; restitution Metabase</a:t>
             </a:r>
             <a:endParaRPr lang="en-US" sz="2900" dirty="0"/>
           </a:p>
@@ -2217,7 +2484,43 @@
       </p:sp>
       <p:sp>
         <p:nvSpPr>
-          <p:cNvPr id="6" name="Shape 4"/>
+          <p:cNvPr id="6" name="Text 4"/>
+          <p:cNvSpPr/>
+          <p:nvPr/>
+        </p:nvSpPr>
+        <p:spPr>
+          <a:xfrm>
+            <a:off x="457200" y="1033272"/>
+            <a:ext cx="10058400" cy="365760"/>
+          </a:xfrm>
+          <a:prstGeom prst="rect">
+            <a:avLst/>
+          </a:prstGeom>
+          <a:noFill/>
+          <a:ln/>
+        </p:spPr>
+        <p:txBody>
+          <a:bodyPr wrap="square" lIns="0" tIns="0" rIns="0" bIns="0" rtlCol="0" anchor="ctr"/>
+          <a:lstStyle/>
+          <a:p>
+            <a:pPr indent="0" marL="0">
+              <a:buNone/>
+            </a:pPr>
+            <a:r>
+              <a:rPr lang="en-US" sz="1400" i="1" dirty="0">
+                <a:solidFill>
+                  <a:srgbClr val="0066CC"/>
+                </a:solidFill>
+              </a:rPr>
+              <a:t>Suite DQM interne + BI jury</a:t>
+            </a:r>
+            <a:endParaRPr lang="en-US" sz="1400" dirty="0"/>
+          </a:p>
+        </p:txBody>
+      </p:sp>
+      <p:sp>
+        <p:nvSpPr>
+          <p:cNvPr id="7" name="Shape 5"/>
           <p:cNvSpPr/>
           <p:nvPr/>
         </p:nvSpPr>
@@ -2237,7 +2540,7 @@
       </p:sp>
       <p:sp>
         <p:nvSpPr>
-          <p:cNvPr id="7" name="Shape 5"/>
+          <p:cNvPr id="8" name="Shape 6"/>
           <p:cNvSpPr/>
           <p:nvPr/>
         </p:nvSpPr>
@@ -2257,7 +2560,7 @@
       </p:sp>
       <p:sp>
         <p:nvSpPr>
-          <p:cNvPr id="8" name="Shape 6"/>
+          <p:cNvPr id="9" name="Shape 7"/>
           <p:cNvSpPr/>
           <p:nvPr/>
         </p:nvSpPr>
@@ -2277,18 +2580,211 @@
       </p:sp>
       <p:sp>
         <p:nvSpPr>
-          <p:cNvPr id="9" name="Shape 7"/>
-          <p:cNvSpPr/>
-          <p:nvPr/>
-        </p:nvSpPr>
-        <p:spPr>
-          <a:xfrm>
-            <a:off x="502920" y="1645920"/>
-            <a:ext cx="5440680" cy="4206240"/>
+          <p:cNvPr id="10" name="Shape 8"/>
+          <p:cNvSpPr/>
+          <p:nvPr/>
+        </p:nvSpPr>
+        <p:spPr>
+          <a:xfrm>
+            <a:off x="502920" y="1600200"/>
+            <a:ext cx="5486400" cy="4572000"/>
           </a:xfrm>
           <a:prstGeom prst="roundRect">
             <a:avLst>
-              <a:gd name="adj" fmla="val 1739"/>
+              <a:gd name="adj" fmla="val 1600"/>
+            </a:avLst>
+          </a:prstGeom>
+          <a:solidFill>
+            <a:srgbClr val="F2F3F7"/>
+          </a:solidFill>
+          <a:ln w="15875">
+            <a:solidFill>
+              <a:srgbClr val="1B2A5E"/>
+            </a:solidFill>
+            <a:prstDash val="solid"/>
+          </a:ln>
+        </p:spPr>
+      </p:sp>
+      <p:sp>
+        <p:nvSpPr>
+          <p:cNvPr id="11" name="Text 9"/>
+          <p:cNvSpPr/>
+          <p:nvPr/>
+        </p:nvSpPr>
+        <p:spPr>
+          <a:xfrm>
+            <a:off x="502920" y="1728216"/>
+            <a:ext cx="5486400" cy="411480"/>
+          </a:xfrm>
+          <a:prstGeom prst="rect">
+            <a:avLst/>
+          </a:prstGeom>
+          <a:noFill/>
+          <a:ln/>
+        </p:spPr>
+        <p:txBody>
+          <a:bodyPr wrap="square" lIns="0" tIns="0" rIns="0" bIns="0" rtlCol="0" anchor="ctr"/>
+          <a:lstStyle/>
+          <a:p>
+            <a:pPr algn="ctr" indent="0" marL="0">
+              <a:buNone/>
+            </a:pPr>
+            <a:r>
+              <a:rPr lang="en-US" sz="1600" b="1" dirty="0">
+                <a:solidFill>
+                  <a:srgbClr val="1B2A5E"/>
+                </a:solidFill>
+              </a:rPr>
+              <a:t>Suite DQM exécutable</a:t>
+            </a:r>
+            <a:endParaRPr lang="en-US" sz="1600" dirty="0"/>
+          </a:p>
+        </p:txBody>
+      </p:sp>
+      <p:sp>
+        <p:nvSpPr>
+          <p:cNvPr id="12" name="Text 10"/>
+          <p:cNvSpPr/>
+          <p:nvPr/>
+        </p:nvSpPr>
+        <p:spPr>
+          <a:xfrm>
+            <a:off x="704088" y="2194560"/>
+            <a:ext cx="5084064" cy="3840480"/>
+          </a:xfrm>
+          <a:prstGeom prst="rect">
+            <a:avLst/>
+          </a:prstGeom>
+          <a:noFill/>
+          <a:ln/>
+        </p:spPr>
+        <p:txBody>
+          <a:bodyPr wrap="square" rtlCol="0" anchor="t"/>
+          <a:lstStyle/>
+          <a:p>
+            <a:pPr marL="342900" indent="-342900">
+              <a:spcAft>
+                <a:spcPts val="700"/>
+              </a:spcAft>
+              <a:buSzPct val="100000"/>
+              <a:buChar char="•"/>
+            </a:pPr>
+            <a:r>
+              <a:rPr lang="en-US" sz="1250" dirty="0">
+                <a:solidFill>
+                  <a:srgbClr val="222222"/>
+                </a:solidFill>
+              </a:rPr>
+              <a:t>Module dqm/ — outil interne</a:t>
+            </a:r>
+            <a:endParaRPr lang="en-US" sz="1250" dirty="0"/>
+          </a:p>
+          <a:p>
+            <a:pPr marL="342900" indent="-342900">
+              <a:spcAft>
+                <a:spcPts val="700"/>
+              </a:spcAft>
+              <a:buSzPct val="100000"/>
+              <a:buChar char="•"/>
+            </a:pPr>
+            <a:r>
+              <a:rPr lang="en-US" sz="1250" dirty="0">
+                <a:solidFill>
+                  <a:srgbClr val="222222"/>
+                </a:solidFill>
+              </a:rPr>
+              <a:t>Inspiré du pattern « expectations »</a:t>
+            </a:r>
+            <a:endParaRPr lang="en-US" sz="1250" dirty="0"/>
+          </a:p>
+          <a:p>
+            <a:pPr marL="342900" indent="-342900">
+              <a:spcAft>
+                <a:spcPts val="700"/>
+              </a:spcAft>
+              <a:buSzPct val="100000"/>
+              <a:buChar char="•"/>
+            </a:pPr>
+            <a:r>
+              <a:rPr lang="en-US" sz="1250" dirty="0">
+                <a:solidFill>
+                  <a:srgbClr val="222222"/>
+                </a:solidFill>
+              </a:rPr>
+              <a:t>5 contrôles Silver/Gold exécutables</a:t>
+            </a:r>
+            <a:endParaRPr lang="en-US" sz="1250" dirty="0"/>
+          </a:p>
+          <a:p>
+            <a:pPr marL="342900" indent="-342900">
+              <a:spcAft>
+                <a:spcPts val="700"/>
+              </a:spcAft>
+              <a:buSzPct val="100000"/>
+              <a:buChar char="•"/>
+            </a:pPr>
+            <a:r>
+              <a:rPr lang="en-US" sz="1250" dirty="0">
+                <a:solidFill>
+                  <a:srgbClr val="222222"/>
+                </a:solidFill>
+              </a:rPr>
+              <a:t>Pas de lib great_expectations installée</a:t>
+            </a:r>
+            <a:endParaRPr lang="en-US" sz="1250" dirty="0"/>
+          </a:p>
+          <a:p>
+            <a:pPr marL="342900" indent="-342900">
+              <a:spcAft>
+                <a:spcPts val="700"/>
+              </a:spcAft>
+              <a:buSzPct val="100000"/>
+              <a:buChar char="•"/>
+            </a:pPr>
+            <a:r>
+              <a:rPr lang="en-US" sz="1250" dirty="0">
+                <a:solidFill>
+                  <a:srgbClr val="222222"/>
+                </a:solidFill>
+              </a:rPr>
+              <a:t>Complète pytest + quality_report.txt</a:t>
+            </a:r>
+            <a:endParaRPr lang="en-US" sz="1250" dirty="0"/>
+          </a:p>
+          <a:p>
+            <a:pPr marL="342900" indent="-342900">
+              <a:spcAft>
+                <a:spcPts val="700"/>
+              </a:spcAft>
+              <a:buSzPct val="100000"/>
+              <a:buChar char="•"/>
+            </a:pPr>
+            <a:r>
+              <a:rPr lang="en-US" sz="1250" dirty="0">
+                <a:solidFill>
+                  <a:srgbClr val="222222"/>
+                </a:solidFill>
+              </a:rPr>
+              <a:t>make dqm → JSON + HTML de preuve</a:t>
+            </a:r>
+            <a:endParaRPr lang="en-US" sz="1250" dirty="0"/>
+          </a:p>
+        </p:txBody>
+      </p:sp>
+      <p:sp>
+        <p:nvSpPr>
+          <p:cNvPr id="13" name="Shape 11"/>
+          <p:cNvSpPr/>
+          <p:nvPr/>
+        </p:nvSpPr>
+        <p:spPr>
+          <a:xfrm>
+            <a:off x="6217920" y="1600200"/>
+            <a:ext cx="5486400" cy="4572000"/>
+          </a:xfrm>
+          <a:prstGeom prst="roundRect">
+            <a:avLst>
+              <a:gd name="adj" fmla="val 1600"/>
             </a:avLst>
           </a:prstGeom>
           <a:solidFill>
@@ -2304,14 +2800,14 @@
       </p:sp>
       <p:sp>
         <p:nvSpPr>
-          <p:cNvPr id="10" name="Text 8"/>
-          <p:cNvSpPr/>
-          <p:nvPr/>
-        </p:nvSpPr>
-        <p:spPr>
-          <a:xfrm>
-            <a:off x="502920" y="1773936"/>
-            <a:ext cx="5440680" cy="411480"/>
+          <p:cNvPr id="14" name="Text 12"/>
+          <p:cNvSpPr/>
+          <p:nvPr/>
+        </p:nvSpPr>
+        <p:spPr>
+          <a:xfrm>
+            <a:off x="6217920" y="1728216"/>
+            <a:ext cx="5486400" cy="411480"/>
           </a:xfrm>
           <a:prstGeom prst="rect">
             <a:avLst/>
@@ -2332,7 +2828,7 @@
                   <a:srgbClr val="0066CC"/>
                 </a:solidFill>
               </a:rPr>
-              <a:t>Conformité</a:t>
+              <a:t>Metabase (profil Docker bi)</a:t>
             </a:r>
             <a:endParaRPr lang="en-US" sz="1600" dirty="0"/>
           </a:p>
@@ -2340,14 +2836,14 @@
       </p:sp>
       <p:sp>
         <p:nvSpPr>
-          <p:cNvPr id="11" name="Text 9"/>
-          <p:cNvSpPr/>
-          <p:nvPr/>
-        </p:nvSpPr>
-        <p:spPr>
-          <a:xfrm>
-            <a:off x="704088" y="2240280"/>
-            <a:ext cx="5038344" cy="3474720"/>
+          <p:cNvPr id="15" name="Text 13"/>
+          <p:cNvSpPr/>
+          <p:nvPr/>
+        </p:nvSpPr>
+        <p:spPr>
+          <a:xfrm>
+            <a:off x="6419088" y="2194560"/>
+            <a:ext cx="5084064" cy="3840480"/>
           </a:xfrm>
           <a:prstGeom prst="rect">
             <a:avLst/>
@@ -2372,7 +2868,7 @@
                   <a:srgbClr val="222222"/>
                 </a:solidFill>
               </a:rPr>
-              <a:t>Données publiques agrégées : aucune donnée personnelle</a:t>
+              <a:t>docker compose --profile bi up -d</a:t>
             </a:r>
             <a:endParaRPr lang="en-US" sz="1250" dirty="0"/>
           </a:p>
@@ -2390,7 +2886,7 @@
                   <a:srgbClr val="222222"/>
                 </a:solidFill>
               </a:rPr>
-              <a:t>Aucun risque de ré-identification (maille dépt.)</a:t>
+              <a:t>UI http://localhost:3000</a:t>
             </a:r>
             <a:endParaRPr lang="en-US" sz="1250" dirty="0"/>
           </a:p>
@@ -2408,95 +2904,10 @@
                   <a:srgbClr val="222222"/>
                 </a:solidFill>
               </a:rPr>
-              <a:t>Licence Ouverte v2.0 — sources mentionnées</a:t>
+              <a:t>Branche sur Gold / Postgres</a:t>
             </a:r>
             <a:endParaRPr lang="en-US" sz="1250" dirty="0"/>
           </a:p>
-        </p:txBody>
-      </p:sp>
-      <p:sp>
-        <p:nvSpPr>
-          <p:cNvPr id="12" name="Shape 10"/>
-          <p:cNvSpPr/>
-          <p:nvPr/>
-        </p:nvSpPr>
-        <p:spPr>
-          <a:xfrm>
-            <a:off x="6126480" y="1645920"/>
-            <a:ext cx="5577840" cy="4206240"/>
-          </a:xfrm>
-          <a:prstGeom prst="roundRect">
-            <a:avLst>
-              <a:gd name="adj" fmla="val 1739"/>
-            </a:avLst>
-          </a:prstGeom>
-          <a:solidFill>
-            <a:srgbClr val="F2F3F7"/>
-          </a:solidFill>
-          <a:ln w="15875">
-            <a:solidFill>
-              <a:srgbClr val="1B2A5E"/>
-            </a:solidFill>
-            <a:prstDash val="solid"/>
-          </a:ln>
-        </p:spPr>
-      </p:sp>
-      <p:sp>
-        <p:nvSpPr>
-          <p:cNvPr id="13" name="Text 11"/>
-          <p:cNvSpPr/>
-          <p:nvPr/>
-        </p:nvSpPr>
-        <p:spPr>
-          <a:xfrm>
-            <a:off x="6126480" y="1773936"/>
-            <a:ext cx="5577840" cy="411480"/>
-          </a:xfrm>
-          <a:prstGeom prst="rect">
-            <a:avLst/>
-          </a:prstGeom>
-          <a:noFill/>
-          <a:ln/>
-        </p:spPr>
-        <p:txBody>
-          <a:bodyPr wrap="square" lIns="0" tIns="0" rIns="0" bIns="0" rtlCol="0" anchor="ctr"/>
-          <a:lstStyle/>
-          <a:p>
-            <a:pPr algn="ctr" indent="0" marL="0">
-              <a:buNone/>
-            </a:pPr>
-            <a:r>
-              <a:rPr lang="en-US" sz="1600" b="1" dirty="0">
-                <a:solidFill>
-                  <a:srgbClr val="1B2A5E"/>
-                </a:solidFill>
-              </a:rPr>
-              <a:t>Traçabilité &amp; bonnes pratiques</a:t>
-            </a:r>
-            <a:endParaRPr lang="en-US" sz="1600" dirty="0"/>
-          </a:p>
-        </p:txBody>
-      </p:sp>
-      <p:sp>
-        <p:nvSpPr>
-          <p:cNvPr id="14" name="Text 12"/>
-          <p:cNvSpPr/>
-          <p:nvPr/>
-        </p:nvSpPr>
-        <p:spPr>
-          <a:xfrm>
-            <a:off x="6327648" y="2240280"/>
-            <a:ext cx="5175504" cy="3474720"/>
-          </a:xfrm>
-          <a:prstGeom prst="rect">
-            <a:avLst/>
-          </a:prstGeom>
-          <a:noFill/>
-          <a:ln/>
-        </p:spPr>
-        <p:txBody>
-          <a:bodyPr wrap="square" rtlCol="0" anchor="t"/>
-          <a:lstStyle/>
           <a:p>
             <a:pPr marL="342900" indent="-342900">
               <a:spcAft>
@@ -2511,7 +2922,7 @@
                   <a:srgbClr val="222222"/>
                 </a:solidFill>
               </a:rPr>
-              <a:t>Couche BRONZE immuable + journal qualité</a:t>
+              <a:t>Dashboards KPI &amp; exploration</a:t>
             </a:r>
             <a:endParaRPr lang="en-US" sz="1250" dirty="0"/>
           </a:p>
@@ -2529,7 +2940,7 @@
                   <a:srgbClr val="222222"/>
                 </a:solidFill>
               </a:rPr>
-              <a:t>Tests automatisés + code versionné</a:t>
+              <a:t>Guide : docs/mspr/05_bi_restitution/</a:t>
             </a:r>
             <a:endParaRPr lang="en-US" sz="1250" dirty="0"/>
           </a:p>
@@ -2547,7 +2958,7 @@
                   <a:srgbClr val="222222"/>
                 </a:solidFill>
               </a:rPr>
-              <a:t>Extension opinion/réseaux sociaux → AIPD préalable</a:t>
+              <a:t>Complète Dash + FastAPI du POC</a:t>
             </a:r>
             <a:endParaRPr lang="en-US" sz="1250" dirty="0"/>
           </a:p>
@@ -2635,7 +3046,7 @@
                   <a:srgbClr val="FFFFFF"/>
                 </a:solidFill>
               </a:rPr>
-              <a:t>09</a:t>
+              <a:t>08</a:t>
             </a:r>
             <a:endParaRPr lang="en-US" sz="1300" dirty="0"/>
           </a:p>
@@ -2671,7 +3082,7 @@
                   <a:srgbClr val="1B2A5E"/>
                 </a:solidFill>
               </a:rPr>
-              <a:t>Limites &amp; axes d’amélioration</a:t>
+              <a:t>Visualisations</a:t>
             </a:r>
             <a:endParaRPr lang="en-US" sz="2900" dirty="0"/>
           </a:p>
@@ -2699,7 +3110,43 @@
       </p:sp>
       <p:sp>
         <p:nvSpPr>
-          <p:cNvPr id="6" name="Shape 4"/>
+          <p:cNvPr id="6" name="Text 4"/>
+          <p:cNvSpPr/>
+          <p:nvPr/>
+        </p:nvSpPr>
+        <p:spPr>
+          <a:xfrm>
+            <a:off x="457200" y="1033272"/>
+            <a:ext cx="10058400" cy="365760"/>
+          </a:xfrm>
+          <a:prstGeom prst="rect">
+            <a:avLst/>
+          </a:prstGeom>
+          <a:noFill/>
+          <a:ln/>
+        </p:spPr>
+        <p:txBody>
+          <a:bodyPr wrap="square" lIns="0" tIns="0" rIns="0" bIns="0" rtlCol="0" anchor="ctr"/>
+          <a:lstStyle/>
+          <a:p>
+            <a:pPr indent="0" marL="0">
+              <a:buNone/>
+            </a:pPr>
+            <a:r>
+              <a:rPr lang="en-US" sz="1400" i="1" dirty="0">
+                <a:solidFill>
+                  <a:srgbClr val="0066CC"/>
+                </a:solidFill>
+              </a:rPr>
+              <a:t>Exploration &amp; restitution</a:t>
+            </a:r>
+            <a:endParaRPr lang="en-US" sz="1400" dirty="0"/>
+          </a:p>
+        </p:txBody>
+      </p:sp>
+      <p:sp>
+        <p:nvSpPr>
+          <p:cNvPr id="7" name="Shape 5"/>
           <p:cNvSpPr/>
           <p:nvPr/>
         </p:nvSpPr>
@@ -2719,7 +3166,7 @@
       </p:sp>
       <p:sp>
         <p:nvSpPr>
-          <p:cNvPr id="7" name="Shape 5"/>
+          <p:cNvPr id="8" name="Shape 6"/>
           <p:cNvSpPr/>
           <p:nvPr/>
         </p:nvSpPr>
@@ -2739,7 +3186,7 @@
       </p:sp>
       <p:sp>
         <p:nvSpPr>
-          <p:cNvPr id="8" name="Shape 6"/>
+          <p:cNvPr id="9" name="Shape 7"/>
           <p:cNvSpPr/>
           <p:nvPr/>
         </p:nvSpPr>
@@ -2757,284 +3204,78 @@
           <a:ln/>
         </p:spPr>
       </p:sp>
-      <p:sp>
-        <p:nvSpPr>
-          <p:cNvPr id="9" name="Shape 7"/>
-          <p:cNvSpPr/>
-          <p:nvPr/>
-        </p:nvSpPr>
-        <p:spPr>
-          <a:xfrm>
-            <a:off x="502920" y="1645920"/>
-            <a:ext cx="5440680" cy="4206240"/>
-          </a:xfrm>
-          <a:prstGeom prst="roundRect">
-            <a:avLst>
-              <a:gd name="adj" fmla="val 1739"/>
-            </a:avLst>
-          </a:prstGeom>
-          <a:solidFill>
-            <a:srgbClr val="F2F3F7"/>
-          </a:solidFill>
-          <a:ln w="15875">
-            <a:solidFill>
-              <a:srgbClr val="E31B23"/>
-            </a:solidFill>
-            <a:prstDash val="solid"/>
-          </a:ln>
-        </p:spPr>
-      </p:sp>
-      <p:sp>
-        <p:nvSpPr>
-          <p:cNvPr id="10" name="Text 8"/>
-          <p:cNvSpPr/>
-          <p:nvPr/>
-        </p:nvSpPr>
-        <p:spPr>
-          <a:xfrm>
-            <a:off x="502920" y="1773936"/>
-            <a:ext cx="5440680" cy="411480"/>
-          </a:xfrm>
-          <a:prstGeom prst="rect">
-            <a:avLst/>
-          </a:prstGeom>
-          <a:noFill/>
-          <a:ln/>
-        </p:spPr>
-        <p:txBody>
-          <a:bodyPr wrap="square" lIns="0" tIns="0" rIns="0" bIns="0" rtlCol="0" anchor="ctr"/>
-          <a:lstStyle/>
-          <a:p>
-            <a:pPr algn="ctr" indent="0" marL="0">
-              <a:buNone/>
-            </a:pPr>
-            <a:r>
-              <a:rPr lang="en-US" sz="1600" b="1" dirty="0">
-                <a:solidFill>
-                  <a:srgbClr val="E31B23"/>
-                </a:solidFill>
-              </a:rPr>
-              <a:t>Limites assumées</a:t>
-            </a:r>
-            <a:endParaRPr lang="en-US" sz="1600" dirty="0"/>
-          </a:p>
-        </p:txBody>
-      </p:sp>
-      <p:sp>
-        <p:nvSpPr>
-          <p:cNvPr id="11" name="Text 9"/>
-          <p:cNvSpPr/>
-          <p:nvPr/>
-        </p:nvSpPr>
-        <p:spPr>
-          <a:xfrm>
-            <a:off x="704088" y="2240280"/>
-            <a:ext cx="5038344" cy="3474720"/>
-          </a:xfrm>
-          <a:prstGeom prst="rect">
-            <a:avLst/>
-          </a:prstGeom>
-          <a:noFill/>
-          <a:ln/>
-        </p:spPr>
-        <p:txBody>
-          <a:bodyPr wrap="square" rtlCol="0" anchor="t"/>
-          <a:lstStyle/>
-          <a:p>
-            <a:pPr marL="342900" indent="-342900">
-              <a:spcAft>
-                <a:spcPts val="700"/>
-              </a:spcAft>
-              <a:buSzPct val="100000"/>
-              <a:buChar char="•"/>
-            </a:pPr>
-            <a:r>
-              <a:rPr lang="en-US" sz="1250" dirty="0">
-                <a:solidFill>
-                  <a:srgbClr val="222222"/>
-                </a:solidFill>
-              </a:rPr>
-              <a:t>Modèle socio-éco : ignore campagne &amp; offre politique</a:t>
-            </a:r>
-            <a:endParaRPr lang="en-US" sz="1250" dirty="0"/>
-          </a:p>
-          <a:p>
-            <a:pPr marL="342900" indent="-342900">
-              <a:spcAft>
-                <a:spcPts val="700"/>
-              </a:spcAft>
-              <a:buSzPct val="100000"/>
-              <a:buChar char="•"/>
-            </a:pPr>
-            <a:r>
-              <a:rPr lang="en-US" sz="1250" dirty="0">
-                <a:solidFill>
-                  <a:srgbClr val="222222"/>
-                </a:solidFill>
-              </a:rPr>
-              <a:t>Capte des tendances de fond, pas l’issue exacte</a:t>
-            </a:r>
-            <a:endParaRPr lang="en-US" sz="1250" dirty="0"/>
-          </a:p>
-          <a:p>
-            <a:pPr marL="342900" indent="-342900">
-              <a:spcAft>
-                <a:spcPts val="700"/>
-              </a:spcAft>
-              <a:buSzPct val="100000"/>
-              <a:buChar char="•"/>
-            </a:pPr>
-            <a:r>
-              <a:rPr lang="en-US" sz="1250" dirty="0">
-                <a:solidFill>
-                  <a:srgbClr val="222222"/>
-                </a:solidFill>
-              </a:rPr>
-              <a:t>POC = méthode + industrialisation démontrées</a:t>
-            </a:r>
-            <a:endParaRPr lang="en-US" sz="1250" dirty="0"/>
-          </a:p>
-        </p:txBody>
-      </p:sp>
-      <p:sp>
-        <p:nvSpPr>
-          <p:cNvPr id="12" name="Shape 10"/>
-          <p:cNvSpPr/>
-          <p:nvPr/>
-        </p:nvSpPr>
-        <p:spPr>
-          <a:xfrm>
-            <a:off x="6126480" y="1645920"/>
-            <a:ext cx="5577840" cy="4206240"/>
-          </a:xfrm>
-          <a:prstGeom prst="roundRect">
-            <a:avLst>
-              <a:gd name="adj" fmla="val 1739"/>
-            </a:avLst>
-          </a:prstGeom>
-          <a:solidFill>
-            <a:srgbClr val="F2F3F7"/>
-          </a:solidFill>
-          <a:ln w="15875">
-            <a:solidFill>
-              <a:srgbClr val="0066CC"/>
-            </a:solidFill>
-            <a:prstDash val="solid"/>
-          </a:ln>
-        </p:spPr>
-      </p:sp>
-      <p:sp>
-        <p:nvSpPr>
-          <p:cNvPr id="13" name="Text 11"/>
-          <p:cNvSpPr/>
-          <p:nvPr/>
-        </p:nvSpPr>
-        <p:spPr>
-          <a:xfrm>
-            <a:off x="6126480" y="1773936"/>
-            <a:ext cx="5577840" cy="411480"/>
-          </a:xfrm>
-          <a:prstGeom prst="rect">
-            <a:avLst/>
-          </a:prstGeom>
-          <a:noFill/>
-          <a:ln/>
-        </p:spPr>
-        <p:txBody>
-          <a:bodyPr wrap="square" lIns="0" tIns="0" rIns="0" bIns="0" rtlCol="0" anchor="ctr"/>
-          <a:lstStyle/>
-          <a:p>
-            <a:pPr algn="ctr" indent="0" marL="0">
-              <a:buNone/>
-            </a:pPr>
-            <a:r>
-              <a:rPr lang="en-US" sz="1600" b="1" dirty="0">
-                <a:solidFill>
-                  <a:srgbClr val="0066CC"/>
-                </a:solidFill>
-              </a:rPr>
-              <a:t>Améliorations</a:t>
-            </a:r>
-            <a:endParaRPr lang="en-US" sz="1600" dirty="0"/>
-          </a:p>
-        </p:txBody>
-      </p:sp>
-      <p:sp>
-        <p:nvSpPr>
-          <p:cNvPr id="14" name="Text 12"/>
-          <p:cNvSpPr/>
-          <p:nvPr/>
-        </p:nvSpPr>
-        <p:spPr>
-          <a:xfrm>
-            <a:off x="6327648" y="2240280"/>
-            <a:ext cx="5175504" cy="3474720"/>
-          </a:xfrm>
-          <a:prstGeom prst="rect">
-            <a:avLst/>
-          </a:prstGeom>
-          <a:noFill/>
-          <a:ln/>
-        </p:spPr>
-        <p:txBody>
-          <a:bodyPr wrap="square" rtlCol="0" anchor="t"/>
-          <a:lstStyle/>
-          <a:p>
-            <a:pPr marL="342900" indent="-342900">
-              <a:spcAft>
-                <a:spcPts val="700"/>
-              </a:spcAft>
-              <a:buSzPct val="100000"/>
-              <a:buChar char="•"/>
-            </a:pPr>
-            <a:r>
-              <a:rPr lang="en-US" sz="1250" dirty="0">
-                <a:solidFill>
-                  <a:srgbClr val="222222"/>
-                </a:solidFill>
-              </a:rPr>
-              <a:t>Enrichir : sécurité, démographie, infra-départemental</a:t>
-            </a:r>
-            <a:endParaRPr lang="en-US" sz="1250" dirty="0"/>
-          </a:p>
-          <a:p>
-            <a:pPr marL="342900" indent="-342900">
-              <a:spcAft>
-                <a:spcPts val="700"/>
-              </a:spcAft>
-              <a:buSzPct val="100000"/>
-              <a:buChar char="•"/>
-            </a:pPr>
-            <a:r>
-              <a:rPr lang="en-US" sz="1250" dirty="0">
-                <a:solidFill>
-                  <a:srgbClr val="222222"/>
-                </a:solidFill>
-              </a:rPr>
-              <a:t>Modèles séquentiels + intervalles de confiance</a:t>
-            </a:r>
-            <a:endParaRPr lang="en-US" sz="1250" dirty="0"/>
-          </a:p>
-          <a:p>
-            <a:pPr marL="342900" indent="-342900">
-              <a:spcAft>
-                <a:spcPts val="700"/>
-              </a:spcAft>
-              <a:buSzPct val="100000"/>
-              <a:buChar char="•"/>
-            </a:pPr>
-            <a:r>
-              <a:rPr lang="en-US" sz="1250" dirty="0">
-                <a:solidFill>
-                  <a:srgbClr val="222222"/>
-                </a:solidFill>
-              </a:rPr>
-              <a:t>Orchestration Airflow, dashboard PowerBI</a:t>
-            </a:r>
-            <a:endParaRPr lang="en-US" sz="1250" dirty="0"/>
-          </a:p>
-        </p:txBody>
-      </p:sp>
+      <p:pic>
+        <p:nvPicPr>
+          <p:cNvPr id="10" name="Image 0" descr="C:\Users\amine\Downloads\POC_ElectioAnalytics_projet_complet\viz\output\1_evolution_blocs.png">    </p:cNvPr>
+          <p:cNvPicPr>
+            <a:picLocks noChangeAspect="1"/>
+          </p:cNvPicPr>
+          <p:nvPr/>
+        </p:nvPicPr>
+        <p:blipFill>
+          <a:blip r:embed="rId1"/>
+          <a:stretch>
+            <a:fillRect/>
+          </a:stretch>
+        </p:blipFill>
+        <p:spPr>
+          <a:xfrm>
+            <a:off x="502920" y="1600200"/>
+            <a:ext cx="5486400" cy="3044952"/>
+          </a:xfrm>
+          <a:prstGeom prst="rect">
+            <a:avLst/>
+          </a:prstGeom>
+        </p:spPr>
+      </p:pic>
+      <p:pic>
+        <p:nvPicPr>
+          <p:cNvPr id="11" name="Image 1" descr="C:\Users\amine\Downloads\POC_ElectioAnalytics_projet_complet\viz\output\3_correlations.png">    </p:cNvPr>
+          <p:cNvPicPr>
+            <a:picLocks noChangeAspect="1"/>
+          </p:cNvPicPr>
+          <p:nvPr/>
+        </p:nvPicPr>
+        <p:blipFill>
+          <a:blip r:embed="rId2"/>
+          <a:stretch>
+            <a:fillRect/>
+          </a:stretch>
+        </p:blipFill>
+        <p:spPr>
+          <a:xfrm>
+            <a:off x="6309360" y="1600200"/>
+            <a:ext cx="4572000" cy="3712464"/>
+          </a:xfrm>
+          <a:prstGeom prst="rect">
+            <a:avLst/>
+          </a:prstGeom>
+        </p:spPr>
+      </p:pic>
+      <p:pic>
+        <p:nvPicPr>
+          <p:cNvPr id="12" name="Image 2" descr="C:\Users\amine\Downloads\POC_ElectioAnalytics_projet_complet\viz\output\4_chomage_par_bloc.png">    </p:cNvPr>
+          <p:cNvPicPr>
+            <a:picLocks noChangeAspect="1"/>
+          </p:cNvPicPr>
+          <p:nvPr/>
+        </p:nvPicPr>
+        <p:blipFill>
+          <a:blip r:embed="rId3"/>
+          <a:stretch>
+            <a:fillRect/>
+          </a:stretch>
+        </p:blipFill>
+        <p:spPr>
+          <a:xfrm>
+            <a:off x="502920" y="4754880"/>
+            <a:ext cx="4572000" cy="1737360"/>
+          </a:xfrm>
+          <a:prstGeom prst="rect">
+            <a:avLst/>
+          </a:prstGeom>
+        </p:spPr>
+      </p:pic>
     </p:spTree>
   </p:cSld>
   <p:clrMapOvr>
@@ -3046,6 +3287,1233 @@
 <file path=ppt/slides/slide12.xml><?xml version="1.0" encoding="utf-8"?>
 <p:sld xmlns:a="http://schemas.openxmlformats.org/drawingml/2006/main" xmlns:r="http://schemas.openxmlformats.org/officeDocument/2006/relationships" xmlns:p="http://schemas.openxmlformats.org/presentationml/2006/main">
   <p:cSld name="Slide 12">
+    <p:bg>
+      <p:bgPr>
+        <a:solidFill>
+          <a:srgbClr val="FFFFFF"/>
+        </a:solidFill>
+      </p:bgPr>
+    </p:bg>
+    <p:spTree>
+      <p:nvGrpSpPr>
+        <p:cNvPr id="1" name=""/>
+        <p:cNvGrpSpPr/>
+        <p:nvPr/>
+      </p:nvGrpSpPr>
+      <p:grpSpPr>
+        <a:xfrm>
+          <a:off x="0" y="0"/>
+          <a:ext cx="0" cy="0"/>
+          <a:chOff x="0" y="0"/>
+          <a:chExt cx="0" cy="0"/>
+        </a:xfrm>
+      </p:grpSpPr>
+      <p:sp>
+        <p:nvSpPr>
+          <p:cNvPr id="2" name="Shape 0"/>
+          <p:cNvSpPr/>
+          <p:nvPr/>
+        </p:nvSpPr>
+        <p:spPr>
+          <a:xfrm>
+            <a:off x="11475720" y="256032"/>
+            <a:ext cx="457200" cy="457200"/>
+          </a:xfrm>
+          <a:prstGeom prst="rect">
+            <a:avLst/>
+          </a:prstGeom>
+          <a:solidFill>
+            <a:srgbClr val="1B2A5E"/>
+          </a:solidFill>
+          <a:ln/>
+        </p:spPr>
+      </p:sp>
+      <p:sp>
+        <p:nvSpPr>
+          <p:cNvPr id="3" name="Text 1"/>
+          <p:cNvSpPr/>
+          <p:nvPr/>
+        </p:nvSpPr>
+        <p:spPr>
+          <a:xfrm>
+            <a:off x="11475720" y="256032"/>
+            <a:ext cx="457200" cy="457200"/>
+          </a:xfrm>
+          <a:prstGeom prst="rect">
+            <a:avLst/>
+          </a:prstGeom>
+          <a:noFill/>
+          <a:ln/>
+        </p:spPr>
+        <p:txBody>
+          <a:bodyPr wrap="square" lIns="0" tIns="0" rIns="0" bIns="0" rtlCol="0" anchor="ctr"/>
+          <a:lstStyle/>
+          <a:p>
+            <a:pPr algn="ctr" indent="0" marL="0">
+              <a:buNone/>
+            </a:pPr>
+            <a:r>
+              <a:rPr lang="en-US" sz="1300" b="1" dirty="0">
+                <a:solidFill>
+                  <a:srgbClr val="FFFFFF"/>
+                </a:solidFill>
+              </a:rPr>
+              <a:t>09</a:t>
+            </a:r>
+            <a:endParaRPr lang="en-US" sz="1300" dirty="0"/>
+          </a:p>
+        </p:txBody>
+      </p:sp>
+      <p:sp>
+        <p:nvSpPr>
+          <p:cNvPr id="4" name="Text 2"/>
+          <p:cNvSpPr/>
+          <p:nvPr/>
+        </p:nvSpPr>
+        <p:spPr>
+          <a:xfrm>
+            <a:off x="457200" y="292608"/>
+            <a:ext cx="10698480" cy="658368"/>
+          </a:xfrm>
+          <a:prstGeom prst="rect">
+            <a:avLst/>
+          </a:prstGeom>
+          <a:noFill/>
+          <a:ln/>
+        </p:spPr>
+        <p:txBody>
+          <a:bodyPr wrap="square" lIns="0" tIns="0" rIns="0" bIns="0" rtlCol="0" anchor="ctr"/>
+          <a:lstStyle/>
+          <a:p>
+            <a:pPr indent="0" marL="0">
+              <a:buNone/>
+            </a:pPr>
+            <a:r>
+              <a:rPr lang="en-US" sz="2900" b="1" dirty="0">
+                <a:solidFill>
+                  <a:srgbClr val="1B2A5E"/>
+                </a:solidFill>
+              </a:rPr>
+              <a:t>Scale-out production</a:t>
+            </a:r>
+            <a:endParaRPr lang="en-US" sz="2900" dirty="0"/>
+          </a:p>
+        </p:txBody>
+      </p:sp>
+      <p:sp>
+        <p:nvSpPr>
+          <p:cNvPr id="5" name="Shape 3"/>
+          <p:cNvSpPr/>
+          <p:nvPr/>
+        </p:nvSpPr>
+        <p:spPr>
+          <a:xfrm>
+            <a:off x="457200" y="950976"/>
+            <a:ext cx="822960" cy="54864"/>
+          </a:xfrm>
+          <a:prstGeom prst="rect">
+            <a:avLst/>
+          </a:prstGeom>
+          <a:solidFill>
+            <a:srgbClr val="E31B23"/>
+          </a:solidFill>
+          <a:ln/>
+        </p:spPr>
+      </p:sp>
+      <p:sp>
+        <p:nvSpPr>
+          <p:cNvPr id="6" name="Text 4"/>
+          <p:cNvSpPr/>
+          <p:nvPr/>
+        </p:nvSpPr>
+        <p:spPr>
+          <a:xfrm>
+            <a:off x="457200" y="1033272"/>
+            <a:ext cx="10058400" cy="365760"/>
+          </a:xfrm>
+          <a:prstGeom prst="rect">
+            <a:avLst/>
+          </a:prstGeom>
+          <a:noFill/>
+          <a:ln/>
+        </p:spPr>
+        <p:txBody>
+          <a:bodyPr wrap="square" lIns="0" tIns="0" rIns="0" bIns="0" rtlCol="0" anchor="ctr"/>
+          <a:lstStyle/>
+          <a:p>
+            <a:pPr indent="0" marL="0">
+              <a:buNone/>
+            </a:pPr>
+            <a:r>
+              <a:rPr lang="en-US" sz="1400" i="1" dirty="0">
+                <a:solidFill>
+                  <a:srgbClr val="0066CC"/>
+                </a:solidFill>
+              </a:rPr>
+              <a:t>Airflow + partitionnement Spark (cible)</a:t>
+            </a:r>
+            <a:endParaRPr lang="en-US" sz="1400" dirty="0"/>
+          </a:p>
+        </p:txBody>
+      </p:sp>
+      <p:sp>
+        <p:nvSpPr>
+          <p:cNvPr id="7" name="Shape 5"/>
+          <p:cNvSpPr/>
+          <p:nvPr/>
+        </p:nvSpPr>
+        <p:spPr>
+          <a:xfrm>
+            <a:off x="457200" y="6565392"/>
+            <a:ext cx="3931920" cy="64008"/>
+          </a:xfrm>
+          <a:prstGeom prst="rect">
+            <a:avLst/>
+          </a:prstGeom>
+          <a:solidFill>
+            <a:srgbClr val="1B2A5E"/>
+          </a:solidFill>
+          <a:ln/>
+        </p:spPr>
+      </p:sp>
+      <p:sp>
+        <p:nvSpPr>
+          <p:cNvPr id="8" name="Shape 6"/>
+          <p:cNvSpPr/>
+          <p:nvPr/>
+        </p:nvSpPr>
+        <p:spPr>
+          <a:xfrm>
+            <a:off x="4389120" y="6565392"/>
+            <a:ext cx="3383280" cy="64008"/>
+          </a:xfrm>
+          <a:prstGeom prst="rect">
+            <a:avLst/>
+          </a:prstGeom>
+          <a:solidFill>
+            <a:srgbClr val="DDDDDD"/>
+          </a:solidFill>
+          <a:ln/>
+        </p:spPr>
+      </p:sp>
+      <p:sp>
+        <p:nvSpPr>
+          <p:cNvPr id="9" name="Shape 7"/>
+          <p:cNvSpPr/>
+          <p:nvPr/>
+        </p:nvSpPr>
+        <p:spPr>
+          <a:xfrm>
+            <a:off x="7772400" y="6565392"/>
+            <a:ext cx="3931920" cy="64008"/>
+          </a:xfrm>
+          <a:prstGeom prst="rect">
+            <a:avLst/>
+          </a:prstGeom>
+          <a:solidFill>
+            <a:srgbClr val="E31B23"/>
+          </a:solidFill>
+          <a:ln/>
+        </p:spPr>
+      </p:sp>
+      <p:pic>
+        <p:nvPicPr>
+          <p:cNvPr id="10" name="Image 0" descr="C:\Users\amine\Downloads\POC_ElectioAnalytics_projet_complet\docs\mspr\02_architecture\diagrams\scale_out.png">    </p:cNvPr>
+          <p:cNvPicPr>
+            <a:picLocks noChangeAspect="1"/>
+          </p:cNvPicPr>
+          <p:nvPr/>
+        </p:nvPicPr>
+        <p:blipFill>
+          <a:blip r:embed="rId1"/>
+          <a:srcRect l="0" r="0" t="0" b="0"/>
+          <a:stretch/>
+        </p:blipFill>
+        <p:spPr>
+          <a:xfrm>
+            <a:off x="1097280" y="1417320"/>
+            <a:ext cx="10058400" cy="4846320"/>
+          </a:xfrm>
+          <a:prstGeom prst="rect">
+            <a:avLst/>
+          </a:prstGeom>
+        </p:spPr>
+      </p:pic>
+    </p:spTree>
+  </p:cSld>
+  <p:clrMapOvr>
+    <a:masterClrMapping/>
+  </p:clrMapOvr>
+</p:sld>
+</file>
+
+<file path=ppt/slides/slide13.xml><?xml version="1.0" encoding="utf-8"?>
+<p:sld xmlns:a="http://schemas.openxmlformats.org/drawingml/2006/main" xmlns:r="http://schemas.openxmlformats.org/officeDocument/2006/relationships" xmlns:p="http://schemas.openxmlformats.org/presentationml/2006/main">
+  <p:cSld name="Slide 13">
+    <p:bg>
+      <p:bgPr>
+        <a:solidFill>
+          <a:srgbClr val="FFFFFF"/>
+        </a:solidFill>
+      </p:bgPr>
+    </p:bg>
+    <p:spTree>
+      <p:nvGrpSpPr>
+        <p:cNvPr id="1" name=""/>
+        <p:cNvGrpSpPr/>
+        <p:nvPr/>
+      </p:nvGrpSpPr>
+      <p:grpSpPr>
+        <a:xfrm>
+          <a:off x="0" y="0"/>
+          <a:ext cx="0" cy="0"/>
+          <a:chOff x="0" y="0"/>
+          <a:chExt cx="0" cy="0"/>
+        </a:xfrm>
+      </p:grpSpPr>
+      <p:sp>
+        <p:nvSpPr>
+          <p:cNvPr id="2" name="Shape 0"/>
+          <p:cNvSpPr/>
+          <p:nvPr/>
+        </p:nvSpPr>
+        <p:spPr>
+          <a:xfrm>
+            <a:off x="11475720" y="256032"/>
+            <a:ext cx="457200" cy="457200"/>
+          </a:xfrm>
+          <a:prstGeom prst="rect">
+            <a:avLst/>
+          </a:prstGeom>
+          <a:solidFill>
+            <a:srgbClr val="1B2A5E"/>
+          </a:solidFill>
+          <a:ln/>
+        </p:spPr>
+      </p:sp>
+      <p:sp>
+        <p:nvSpPr>
+          <p:cNvPr id="3" name="Text 1"/>
+          <p:cNvSpPr/>
+          <p:nvPr/>
+        </p:nvSpPr>
+        <p:spPr>
+          <a:xfrm>
+            <a:off x="11475720" y="256032"/>
+            <a:ext cx="457200" cy="457200"/>
+          </a:xfrm>
+          <a:prstGeom prst="rect">
+            <a:avLst/>
+          </a:prstGeom>
+          <a:noFill/>
+          <a:ln/>
+        </p:spPr>
+        <p:txBody>
+          <a:bodyPr wrap="square" lIns="0" tIns="0" rIns="0" bIns="0" rtlCol="0" anchor="ctr"/>
+          <a:lstStyle/>
+          <a:p>
+            <a:pPr algn="ctr" indent="0" marL="0">
+              <a:buNone/>
+            </a:pPr>
+            <a:r>
+              <a:rPr lang="en-US" sz="1300" b="1" dirty="0">
+                <a:solidFill>
+                  <a:srgbClr val="FFFFFF"/>
+                </a:solidFill>
+              </a:rPr>
+              <a:t>10</a:t>
+            </a:r>
+            <a:endParaRPr lang="en-US" sz="1300" dirty="0"/>
+          </a:p>
+        </p:txBody>
+      </p:sp>
+      <p:sp>
+        <p:nvSpPr>
+          <p:cNvPr id="4" name="Text 2"/>
+          <p:cNvSpPr/>
+          <p:nvPr/>
+        </p:nvSpPr>
+        <p:spPr>
+          <a:xfrm>
+            <a:off x="457200" y="292608"/>
+            <a:ext cx="10698480" cy="658368"/>
+          </a:xfrm>
+          <a:prstGeom prst="rect">
+            <a:avLst/>
+          </a:prstGeom>
+          <a:noFill/>
+          <a:ln/>
+        </p:spPr>
+        <p:txBody>
+          <a:bodyPr wrap="square" lIns="0" tIns="0" rIns="0" bIns="0" rtlCol="0" anchor="ctr"/>
+          <a:lstStyle/>
+          <a:p>
+            <a:pPr indent="0" marL="0">
+              <a:buNone/>
+            </a:pPr>
+            <a:r>
+              <a:rPr lang="en-US" sz="2900" b="1" dirty="0">
+                <a:solidFill>
+                  <a:srgbClr val="1B2A5E"/>
+                </a:solidFill>
+              </a:rPr>
+              <a:t>RGPD &amp; Sécurité</a:t>
+            </a:r>
+            <a:endParaRPr lang="en-US" sz="2900" dirty="0"/>
+          </a:p>
+        </p:txBody>
+      </p:sp>
+      <p:sp>
+        <p:nvSpPr>
+          <p:cNvPr id="5" name="Shape 3"/>
+          <p:cNvSpPr/>
+          <p:nvPr/>
+        </p:nvSpPr>
+        <p:spPr>
+          <a:xfrm>
+            <a:off x="457200" y="950976"/>
+            <a:ext cx="822960" cy="54864"/>
+          </a:xfrm>
+          <a:prstGeom prst="rect">
+            <a:avLst/>
+          </a:prstGeom>
+          <a:solidFill>
+            <a:srgbClr val="E31B23"/>
+          </a:solidFill>
+          <a:ln/>
+        </p:spPr>
+      </p:sp>
+      <p:sp>
+        <p:nvSpPr>
+          <p:cNvPr id="6" name="Shape 4"/>
+          <p:cNvSpPr/>
+          <p:nvPr/>
+        </p:nvSpPr>
+        <p:spPr>
+          <a:xfrm>
+            <a:off x="457200" y="6565392"/>
+            <a:ext cx="3931920" cy="64008"/>
+          </a:xfrm>
+          <a:prstGeom prst="rect">
+            <a:avLst/>
+          </a:prstGeom>
+          <a:solidFill>
+            <a:srgbClr val="1B2A5E"/>
+          </a:solidFill>
+          <a:ln/>
+        </p:spPr>
+      </p:sp>
+      <p:sp>
+        <p:nvSpPr>
+          <p:cNvPr id="7" name="Shape 5"/>
+          <p:cNvSpPr/>
+          <p:nvPr/>
+        </p:nvSpPr>
+        <p:spPr>
+          <a:xfrm>
+            <a:off x="4389120" y="6565392"/>
+            <a:ext cx="3383280" cy="64008"/>
+          </a:xfrm>
+          <a:prstGeom prst="rect">
+            <a:avLst/>
+          </a:prstGeom>
+          <a:solidFill>
+            <a:srgbClr val="DDDDDD"/>
+          </a:solidFill>
+          <a:ln/>
+        </p:spPr>
+      </p:sp>
+      <p:sp>
+        <p:nvSpPr>
+          <p:cNvPr id="8" name="Shape 6"/>
+          <p:cNvSpPr/>
+          <p:nvPr/>
+        </p:nvSpPr>
+        <p:spPr>
+          <a:xfrm>
+            <a:off x="7772400" y="6565392"/>
+            <a:ext cx="3931920" cy="64008"/>
+          </a:xfrm>
+          <a:prstGeom prst="rect">
+            <a:avLst/>
+          </a:prstGeom>
+          <a:solidFill>
+            <a:srgbClr val="E31B23"/>
+          </a:solidFill>
+          <a:ln/>
+        </p:spPr>
+      </p:sp>
+      <p:sp>
+        <p:nvSpPr>
+          <p:cNvPr id="9" name="Shape 7"/>
+          <p:cNvSpPr/>
+          <p:nvPr/>
+        </p:nvSpPr>
+        <p:spPr>
+          <a:xfrm>
+            <a:off x="502920" y="1645920"/>
+            <a:ext cx="5440680" cy="4206240"/>
+          </a:xfrm>
+          <a:prstGeom prst="roundRect">
+            <a:avLst>
+              <a:gd name="adj" fmla="val 1739"/>
+            </a:avLst>
+          </a:prstGeom>
+          <a:solidFill>
+            <a:srgbClr val="F2F3F7"/>
+          </a:solidFill>
+          <a:ln w="15875">
+            <a:solidFill>
+              <a:srgbClr val="0066CC"/>
+            </a:solidFill>
+            <a:prstDash val="solid"/>
+          </a:ln>
+        </p:spPr>
+      </p:sp>
+      <p:sp>
+        <p:nvSpPr>
+          <p:cNvPr id="10" name="Text 8"/>
+          <p:cNvSpPr/>
+          <p:nvPr/>
+        </p:nvSpPr>
+        <p:spPr>
+          <a:xfrm>
+            <a:off x="502920" y="1773936"/>
+            <a:ext cx="5440680" cy="411480"/>
+          </a:xfrm>
+          <a:prstGeom prst="rect">
+            <a:avLst/>
+          </a:prstGeom>
+          <a:noFill/>
+          <a:ln/>
+        </p:spPr>
+        <p:txBody>
+          <a:bodyPr wrap="square" lIns="0" tIns="0" rIns="0" bIns="0" rtlCol="0" anchor="ctr"/>
+          <a:lstStyle/>
+          <a:p>
+            <a:pPr algn="ctr" indent="0" marL="0">
+              <a:buNone/>
+            </a:pPr>
+            <a:r>
+              <a:rPr lang="en-US" sz="1600" b="1" dirty="0">
+                <a:solidFill>
+                  <a:srgbClr val="0066CC"/>
+                </a:solidFill>
+              </a:rPr>
+              <a:t>Conformité</a:t>
+            </a:r>
+            <a:endParaRPr lang="en-US" sz="1600" dirty="0"/>
+          </a:p>
+        </p:txBody>
+      </p:sp>
+      <p:sp>
+        <p:nvSpPr>
+          <p:cNvPr id="11" name="Text 9"/>
+          <p:cNvSpPr/>
+          <p:nvPr/>
+        </p:nvSpPr>
+        <p:spPr>
+          <a:xfrm>
+            <a:off x="704088" y="2240280"/>
+            <a:ext cx="5038344" cy="3474720"/>
+          </a:xfrm>
+          <a:prstGeom prst="rect">
+            <a:avLst/>
+          </a:prstGeom>
+          <a:noFill/>
+          <a:ln/>
+        </p:spPr>
+        <p:txBody>
+          <a:bodyPr wrap="square" rtlCol="0" anchor="t"/>
+          <a:lstStyle/>
+          <a:p>
+            <a:pPr marL="342900" indent="-342900">
+              <a:spcAft>
+                <a:spcPts val="700"/>
+              </a:spcAft>
+              <a:buSzPct val="100000"/>
+              <a:buChar char="•"/>
+            </a:pPr>
+            <a:r>
+              <a:rPr lang="en-US" sz="1250" dirty="0">
+                <a:solidFill>
+                  <a:srgbClr val="222222"/>
+                </a:solidFill>
+              </a:rPr>
+              <a:t>Données publiques agrégées : aucune donnée personnelle</a:t>
+            </a:r>
+            <a:endParaRPr lang="en-US" sz="1250" dirty="0"/>
+          </a:p>
+          <a:p>
+            <a:pPr marL="342900" indent="-342900">
+              <a:spcAft>
+                <a:spcPts val="700"/>
+              </a:spcAft>
+              <a:buSzPct val="100000"/>
+              <a:buChar char="•"/>
+            </a:pPr>
+            <a:r>
+              <a:rPr lang="en-US" sz="1250" dirty="0">
+                <a:solidFill>
+                  <a:srgbClr val="222222"/>
+                </a:solidFill>
+              </a:rPr>
+              <a:t>Aucun risque de ré-identification (maille dépt.)</a:t>
+            </a:r>
+            <a:endParaRPr lang="en-US" sz="1250" dirty="0"/>
+          </a:p>
+          <a:p>
+            <a:pPr marL="342900" indent="-342900">
+              <a:spcAft>
+                <a:spcPts val="700"/>
+              </a:spcAft>
+              <a:buSzPct val="100000"/>
+              <a:buChar char="•"/>
+            </a:pPr>
+            <a:r>
+              <a:rPr lang="en-US" sz="1250" dirty="0">
+                <a:solidFill>
+                  <a:srgbClr val="222222"/>
+                </a:solidFill>
+              </a:rPr>
+              <a:t>Licence Ouverte v2.0 — sources mentionnées</a:t>
+            </a:r>
+            <a:endParaRPr lang="en-US" sz="1250" dirty="0"/>
+          </a:p>
+        </p:txBody>
+      </p:sp>
+      <p:sp>
+        <p:nvSpPr>
+          <p:cNvPr id="12" name="Shape 10"/>
+          <p:cNvSpPr/>
+          <p:nvPr/>
+        </p:nvSpPr>
+        <p:spPr>
+          <a:xfrm>
+            <a:off x="6126480" y="1645920"/>
+            <a:ext cx="5577840" cy="4206240"/>
+          </a:xfrm>
+          <a:prstGeom prst="roundRect">
+            <a:avLst>
+              <a:gd name="adj" fmla="val 1739"/>
+            </a:avLst>
+          </a:prstGeom>
+          <a:solidFill>
+            <a:srgbClr val="F2F3F7"/>
+          </a:solidFill>
+          <a:ln w="15875">
+            <a:solidFill>
+              <a:srgbClr val="1B2A5E"/>
+            </a:solidFill>
+            <a:prstDash val="solid"/>
+          </a:ln>
+        </p:spPr>
+      </p:sp>
+      <p:sp>
+        <p:nvSpPr>
+          <p:cNvPr id="13" name="Text 11"/>
+          <p:cNvSpPr/>
+          <p:nvPr/>
+        </p:nvSpPr>
+        <p:spPr>
+          <a:xfrm>
+            <a:off x="6126480" y="1773936"/>
+            <a:ext cx="5577840" cy="411480"/>
+          </a:xfrm>
+          <a:prstGeom prst="rect">
+            <a:avLst/>
+          </a:prstGeom>
+          <a:noFill/>
+          <a:ln/>
+        </p:spPr>
+        <p:txBody>
+          <a:bodyPr wrap="square" lIns="0" tIns="0" rIns="0" bIns="0" rtlCol="0" anchor="ctr"/>
+          <a:lstStyle/>
+          <a:p>
+            <a:pPr algn="ctr" indent="0" marL="0">
+              <a:buNone/>
+            </a:pPr>
+            <a:r>
+              <a:rPr lang="en-US" sz="1600" b="1" dirty="0">
+                <a:solidFill>
+                  <a:srgbClr val="1B2A5E"/>
+                </a:solidFill>
+              </a:rPr>
+              <a:t>Traçabilité &amp; bonnes pratiques</a:t>
+            </a:r>
+            <a:endParaRPr lang="en-US" sz="1600" dirty="0"/>
+          </a:p>
+        </p:txBody>
+      </p:sp>
+      <p:sp>
+        <p:nvSpPr>
+          <p:cNvPr id="14" name="Text 12"/>
+          <p:cNvSpPr/>
+          <p:nvPr/>
+        </p:nvSpPr>
+        <p:spPr>
+          <a:xfrm>
+            <a:off x="6327648" y="2240280"/>
+            <a:ext cx="5175504" cy="3474720"/>
+          </a:xfrm>
+          <a:prstGeom prst="rect">
+            <a:avLst/>
+          </a:prstGeom>
+          <a:noFill/>
+          <a:ln/>
+        </p:spPr>
+        <p:txBody>
+          <a:bodyPr wrap="square" rtlCol="0" anchor="t"/>
+          <a:lstStyle/>
+          <a:p>
+            <a:pPr marL="342900" indent="-342900">
+              <a:spcAft>
+                <a:spcPts val="700"/>
+              </a:spcAft>
+              <a:buSzPct val="100000"/>
+              <a:buChar char="•"/>
+            </a:pPr>
+            <a:r>
+              <a:rPr lang="en-US" sz="1250" dirty="0">
+                <a:solidFill>
+                  <a:srgbClr val="222222"/>
+                </a:solidFill>
+              </a:rPr>
+              <a:t>Couche BRONZE immuable + journal qualité</a:t>
+            </a:r>
+            <a:endParaRPr lang="en-US" sz="1250" dirty="0"/>
+          </a:p>
+          <a:p>
+            <a:pPr marL="342900" indent="-342900">
+              <a:spcAft>
+                <a:spcPts val="700"/>
+              </a:spcAft>
+              <a:buSzPct val="100000"/>
+              <a:buChar char="•"/>
+            </a:pPr>
+            <a:r>
+              <a:rPr lang="en-US" sz="1250" dirty="0">
+                <a:solidFill>
+                  <a:srgbClr val="222222"/>
+                </a:solidFill>
+              </a:rPr>
+              <a:t>Tests automatisés + suite DQM</a:t>
+            </a:r>
+            <a:endParaRPr lang="en-US" sz="1250" dirty="0"/>
+          </a:p>
+          <a:p>
+            <a:pPr marL="342900" indent="-342900">
+              <a:spcAft>
+                <a:spcPts val="700"/>
+              </a:spcAft>
+              <a:buSzPct val="100000"/>
+              <a:buChar char="•"/>
+            </a:pPr>
+            <a:r>
+              <a:rPr lang="en-US" sz="1250" dirty="0">
+                <a:solidFill>
+                  <a:srgbClr val="222222"/>
+                </a:solidFill>
+              </a:rPr>
+              <a:t>Extension opinion/réseaux sociaux → AIPD préalable</a:t>
+            </a:r>
+            <a:endParaRPr lang="en-US" sz="1250" dirty="0"/>
+          </a:p>
+        </p:txBody>
+      </p:sp>
+    </p:spTree>
+  </p:cSld>
+  <p:clrMapOvr>
+    <a:masterClrMapping/>
+  </p:clrMapOvr>
+</p:sld>
+</file>
+
+<file path=ppt/slides/slide14.xml><?xml version="1.0" encoding="utf-8"?>
+<p:sld xmlns:a="http://schemas.openxmlformats.org/drawingml/2006/main" xmlns:r="http://schemas.openxmlformats.org/officeDocument/2006/relationships" xmlns:p="http://schemas.openxmlformats.org/presentationml/2006/main">
+  <p:cSld name="Slide 14">
+    <p:bg>
+      <p:bgPr>
+        <a:solidFill>
+          <a:srgbClr val="FFFFFF"/>
+        </a:solidFill>
+      </p:bgPr>
+    </p:bg>
+    <p:spTree>
+      <p:nvGrpSpPr>
+        <p:cNvPr id="1" name=""/>
+        <p:cNvGrpSpPr/>
+        <p:nvPr/>
+      </p:nvGrpSpPr>
+      <p:grpSpPr>
+        <a:xfrm>
+          <a:off x="0" y="0"/>
+          <a:ext cx="0" cy="0"/>
+          <a:chOff x="0" y="0"/>
+          <a:chExt cx="0" cy="0"/>
+        </a:xfrm>
+      </p:grpSpPr>
+      <p:sp>
+        <p:nvSpPr>
+          <p:cNvPr id="2" name="Shape 0"/>
+          <p:cNvSpPr/>
+          <p:nvPr/>
+        </p:nvSpPr>
+        <p:spPr>
+          <a:xfrm>
+            <a:off x="11475720" y="256032"/>
+            <a:ext cx="457200" cy="457200"/>
+          </a:xfrm>
+          <a:prstGeom prst="rect">
+            <a:avLst/>
+          </a:prstGeom>
+          <a:solidFill>
+            <a:srgbClr val="1B2A5E"/>
+          </a:solidFill>
+          <a:ln/>
+        </p:spPr>
+      </p:sp>
+      <p:sp>
+        <p:nvSpPr>
+          <p:cNvPr id="3" name="Text 1"/>
+          <p:cNvSpPr/>
+          <p:nvPr/>
+        </p:nvSpPr>
+        <p:spPr>
+          <a:xfrm>
+            <a:off x="11475720" y="256032"/>
+            <a:ext cx="457200" cy="457200"/>
+          </a:xfrm>
+          <a:prstGeom prst="rect">
+            <a:avLst/>
+          </a:prstGeom>
+          <a:noFill/>
+          <a:ln/>
+        </p:spPr>
+        <p:txBody>
+          <a:bodyPr wrap="square" lIns="0" tIns="0" rIns="0" bIns="0" rtlCol="0" anchor="ctr"/>
+          <a:lstStyle/>
+          <a:p>
+            <a:pPr algn="ctr" indent="0" marL="0">
+              <a:buNone/>
+            </a:pPr>
+            <a:r>
+              <a:rPr lang="en-US" sz="1300" b="1" dirty="0">
+                <a:solidFill>
+                  <a:srgbClr val="FFFFFF"/>
+                </a:solidFill>
+              </a:rPr>
+              <a:t>11</a:t>
+            </a:r>
+            <a:endParaRPr lang="en-US" sz="1300" dirty="0"/>
+          </a:p>
+        </p:txBody>
+      </p:sp>
+      <p:sp>
+        <p:nvSpPr>
+          <p:cNvPr id="4" name="Text 2"/>
+          <p:cNvSpPr/>
+          <p:nvPr/>
+        </p:nvSpPr>
+        <p:spPr>
+          <a:xfrm>
+            <a:off x="457200" y="292608"/>
+            <a:ext cx="10698480" cy="658368"/>
+          </a:xfrm>
+          <a:prstGeom prst="rect">
+            <a:avLst/>
+          </a:prstGeom>
+          <a:noFill/>
+          <a:ln/>
+        </p:spPr>
+        <p:txBody>
+          <a:bodyPr wrap="square" lIns="0" tIns="0" rIns="0" bIns="0" rtlCol="0" anchor="ctr"/>
+          <a:lstStyle/>
+          <a:p>
+            <a:pPr indent="0" marL="0">
+              <a:buNone/>
+            </a:pPr>
+            <a:r>
+              <a:rPr lang="en-US" sz="2900" b="1" dirty="0">
+                <a:solidFill>
+                  <a:srgbClr val="1B2A5E"/>
+                </a:solidFill>
+              </a:rPr>
+              <a:t>Limites &amp; axes d’amélioration</a:t>
+            </a:r>
+            <a:endParaRPr lang="en-US" sz="2900" dirty="0"/>
+          </a:p>
+        </p:txBody>
+      </p:sp>
+      <p:sp>
+        <p:nvSpPr>
+          <p:cNvPr id="5" name="Shape 3"/>
+          <p:cNvSpPr/>
+          <p:nvPr/>
+        </p:nvSpPr>
+        <p:spPr>
+          <a:xfrm>
+            <a:off x="457200" y="950976"/>
+            <a:ext cx="822960" cy="54864"/>
+          </a:xfrm>
+          <a:prstGeom prst="rect">
+            <a:avLst/>
+          </a:prstGeom>
+          <a:solidFill>
+            <a:srgbClr val="E31B23"/>
+          </a:solidFill>
+          <a:ln/>
+        </p:spPr>
+      </p:sp>
+      <p:sp>
+        <p:nvSpPr>
+          <p:cNvPr id="6" name="Shape 4"/>
+          <p:cNvSpPr/>
+          <p:nvPr/>
+        </p:nvSpPr>
+        <p:spPr>
+          <a:xfrm>
+            <a:off x="457200" y="6565392"/>
+            <a:ext cx="3931920" cy="64008"/>
+          </a:xfrm>
+          <a:prstGeom prst="rect">
+            <a:avLst/>
+          </a:prstGeom>
+          <a:solidFill>
+            <a:srgbClr val="1B2A5E"/>
+          </a:solidFill>
+          <a:ln/>
+        </p:spPr>
+      </p:sp>
+      <p:sp>
+        <p:nvSpPr>
+          <p:cNvPr id="7" name="Shape 5"/>
+          <p:cNvSpPr/>
+          <p:nvPr/>
+        </p:nvSpPr>
+        <p:spPr>
+          <a:xfrm>
+            <a:off x="4389120" y="6565392"/>
+            <a:ext cx="3383280" cy="64008"/>
+          </a:xfrm>
+          <a:prstGeom prst="rect">
+            <a:avLst/>
+          </a:prstGeom>
+          <a:solidFill>
+            <a:srgbClr val="DDDDDD"/>
+          </a:solidFill>
+          <a:ln/>
+        </p:spPr>
+      </p:sp>
+      <p:sp>
+        <p:nvSpPr>
+          <p:cNvPr id="8" name="Shape 6"/>
+          <p:cNvSpPr/>
+          <p:nvPr/>
+        </p:nvSpPr>
+        <p:spPr>
+          <a:xfrm>
+            <a:off x="7772400" y="6565392"/>
+            <a:ext cx="3931920" cy="64008"/>
+          </a:xfrm>
+          <a:prstGeom prst="rect">
+            <a:avLst/>
+          </a:prstGeom>
+          <a:solidFill>
+            <a:srgbClr val="E31B23"/>
+          </a:solidFill>
+          <a:ln/>
+        </p:spPr>
+      </p:sp>
+      <p:sp>
+        <p:nvSpPr>
+          <p:cNvPr id="9" name="Shape 7"/>
+          <p:cNvSpPr/>
+          <p:nvPr/>
+        </p:nvSpPr>
+        <p:spPr>
+          <a:xfrm>
+            <a:off x="502920" y="1645920"/>
+            <a:ext cx="5440680" cy="4206240"/>
+          </a:xfrm>
+          <a:prstGeom prst="roundRect">
+            <a:avLst>
+              <a:gd name="adj" fmla="val 1739"/>
+            </a:avLst>
+          </a:prstGeom>
+          <a:solidFill>
+            <a:srgbClr val="F2F3F7"/>
+          </a:solidFill>
+          <a:ln w="15875">
+            <a:solidFill>
+              <a:srgbClr val="E31B23"/>
+            </a:solidFill>
+            <a:prstDash val="solid"/>
+          </a:ln>
+        </p:spPr>
+      </p:sp>
+      <p:sp>
+        <p:nvSpPr>
+          <p:cNvPr id="10" name="Text 8"/>
+          <p:cNvSpPr/>
+          <p:nvPr/>
+        </p:nvSpPr>
+        <p:spPr>
+          <a:xfrm>
+            <a:off x="502920" y="1773936"/>
+            <a:ext cx="5440680" cy="411480"/>
+          </a:xfrm>
+          <a:prstGeom prst="rect">
+            <a:avLst/>
+          </a:prstGeom>
+          <a:noFill/>
+          <a:ln/>
+        </p:spPr>
+        <p:txBody>
+          <a:bodyPr wrap="square" lIns="0" tIns="0" rIns="0" bIns="0" rtlCol="0" anchor="ctr"/>
+          <a:lstStyle/>
+          <a:p>
+            <a:pPr algn="ctr" indent="0" marL="0">
+              <a:buNone/>
+            </a:pPr>
+            <a:r>
+              <a:rPr lang="en-US" sz="1600" b="1" dirty="0">
+                <a:solidFill>
+                  <a:srgbClr val="E31B23"/>
+                </a:solidFill>
+              </a:rPr>
+              <a:t>Limites assumées</a:t>
+            </a:r>
+            <a:endParaRPr lang="en-US" sz="1600" dirty="0"/>
+          </a:p>
+        </p:txBody>
+      </p:sp>
+      <p:sp>
+        <p:nvSpPr>
+          <p:cNvPr id="11" name="Text 9"/>
+          <p:cNvSpPr/>
+          <p:nvPr/>
+        </p:nvSpPr>
+        <p:spPr>
+          <a:xfrm>
+            <a:off x="704088" y="2240280"/>
+            <a:ext cx="5038344" cy="3474720"/>
+          </a:xfrm>
+          <a:prstGeom prst="rect">
+            <a:avLst/>
+          </a:prstGeom>
+          <a:noFill/>
+          <a:ln/>
+        </p:spPr>
+        <p:txBody>
+          <a:bodyPr wrap="square" rtlCol="0" anchor="t"/>
+          <a:lstStyle/>
+          <a:p>
+            <a:pPr marL="342900" indent="-342900">
+              <a:spcAft>
+                <a:spcPts val="700"/>
+              </a:spcAft>
+              <a:buSzPct val="100000"/>
+              <a:buChar char="•"/>
+            </a:pPr>
+            <a:r>
+              <a:rPr lang="en-US" sz="1250" dirty="0">
+                <a:solidFill>
+                  <a:srgbClr val="222222"/>
+                </a:solidFill>
+              </a:rPr>
+              <a:t>Modèle socio-éco : ignore campagne &amp; offre politique</a:t>
+            </a:r>
+            <a:endParaRPr lang="en-US" sz="1250" dirty="0"/>
+          </a:p>
+          <a:p>
+            <a:pPr marL="342900" indent="-342900">
+              <a:spcAft>
+                <a:spcPts val="700"/>
+              </a:spcAft>
+              <a:buSzPct val="100000"/>
+              <a:buChar char="•"/>
+            </a:pPr>
+            <a:r>
+              <a:rPr lang="en-US" sz="1250" dirty="0">
+                <a:solidFill>
+                  <a:srgbClr val="222222"/>
+                </a:solidFill>
+              </a:rPr>
+              <a:t>Capte des tendances de fond, pas l’issue exacte</a:t>
+            </a:r>
+            <a:endParaRPr lang="en-US" sz="1250" dirty="0"/>
+          </a:p>
+          <a:p>
+            <a:pPr marL="342900" indent="-342900">
+              <a:spcAft>
+                <a:spcPts val="700"/>
+              </a:spcAft>
+              <a:buSzPct val="100000"/>
+              <a:buChar char="•"/>
+            </a:pPr>
+            <a:r>
+              <a:rPr lang="en-US" sz="1250" dirty="0">
+                <a:solidFill>
+                  <a:srgbClr val="222222"/>
+                </a:solidFill>
+              </a:rPr>
+              <a:t>POC = méthode + industrialisation démontrées</a:t>
+            </a:r>
+            <a:endParaRPr lang="en-US" sz="1250" dirty="0"/>
+          </a:p>
+        </p:txBody>
+      </p:sp>
+      <p:sp>
+        <p:nvSpPr>
+          <p:cNvPr id="12" name="Shape 10"/>
+          <p:cNvSpPr/>
+          <p:nvPr/>
+        </p:nvSpPr>
+        <p:spPr>
+          <a:xfrm>
+            <a:off x="6126480" y="1645920"/>
+            <a:ext cx="5577840" cy="4206240"/>
+          </a:xfrm>
+          <a:prstGeom prst="roundRect">
+            <a:avLst>
+              <a:gd name="adj" fmla="val 1739"/>
+            </a:avLst>
+          </a:prstGeom>
+          <a:solidFill>
+            <a:srgbClr val="F2F3F7"/>
+          </a:solidFill>
+          <a:ln w="15875">
+            <a:solidFill>
+              <a:srgbClr val="0066CC"/>
+            </a:solidFill>
+            <a:prstDash val="solid"/>
+          </a:ln>
+        </p:spPr>
+      </p:sp>
+      <p:sp>
+        <p:nvSpPr>
+          <p:cNvPr id="13" name="Text 11"/>
+          <p:cNvSpPr/>
+          <p:nvPr/>
+        </p:nvSpPr>
+        <p:spPr>
+          <a:xfrm>
+            <a:off x="6126480" y="1773936"/>
+            <a:ext cx="5577840" cy="411480"/>
+          </a:xfrm>
+          <a:prstGeom prst="rect">
+            <a:avLst/>
+          </a:prstGeom>
+          <a:noFill/>
+          <a:ln/>
+        </p:spPr>
+        <p:txBody>
+          <a:bodyPr wrap="square" lIns="0" tIns="0" rIns="0" bIns="0" rtlCol="0" anchor="ctr"/>
+          <a:lstStyle/>
+          <a:p>
+            <a:pPr algn="ctr" indent="0" marL="0">
+              <a:buNone/>
+            </a:pPr>
+            <a:r>
+              <a:rPr lang="en-US" sz="1600" b="1" dirty="0">
+                <a:solidFill>
+                  <a:srgbClr val="0066CC"/>
+                </a:solidFill>
+              </a:rPr>
+              <a:t>Améliorations</a:t>
+            </a:r>
+            <a:endParaRPr lang="en-US" sz="1600" dirty="0"/>
+          </a:p>
+        </p:txBody>
+      </p:sp>
+      <p:sp>
+        <p:nvSpPr>
+          <p:cNvPr id="14" name="Text 12"/>
+          <p:cNvSpPr/>
+          <p:nvPr/>
+        </p:nvSpPr>
+        <p:spPr>
+          <a:xfrm>
+            <a:off x="6327648" y="2240280"/>
+            <a:ext cx="5175504" cy="3474720"/>
+          </a:xfrm>
+          <a:prstGeom prst="rect">
+            <a:avLst/>
+          </a:prstGeom>
+          <a:noFill/>
+          <a:ln/>
+        </p:spPr>
+        <p:txBody>
+          <a:bodyPr wrap="square" rtlCol="0" anchor="t"/>
+          <a:lstStyle/>
+          <a:p>
+            <a:pPr marL="342900" indent="-342900">
+              <a:spcAft>
+                <a:spcPts val="700"/>
+              </a:spcAft>
+              <a:buSzPct val="100000"/>
+              <a:buChar char="•"/>
+            </a:pPr>
+            <a:r>
+              <a:rPr lang="en-US" sz="1250" dirty="0">
+                <a:solidFill>
+                  <a:srgbClr val="222222"/>
+                </a:solidFill>
+              </a:rPr>
+              <a:t>Enrichir : sécurité, démographie, infra-départemental</a:t>
+            </a:r>
+            <a:endParaRPr lang="en-US" sz="1250" dirty="0"/>
+          </a:p>
+          <a:p>
+            <a:pPr marL="342900" indent="-342900">
+              <a:spcAft>
+                <a:spcPts val="700"/>
+              </a:spcAft>
+              <a:buSzPct val="100000"/>
+              <a:buChar char="•"/>
+            </a:pPr>
+            <a:r>
+              <a:rPr lang="en-US" sz="1250" dirty="0">
+                <a:solidFill>
+                  <a:srgbClr val="222222"/>
+                </a:solidFill>
+              </a:rPr>
+              <a:t>Modèles séquentiels + intervalles de confiance</a:t>
+            </a:r>
+            <a:endParaRPr lang="en-US" sz="1250" dirty="0"/>
+          </a:p>
+          <a:p>
+            <a:pPr marL="342900" indent="-342900">
+              <a:spcAft>
+                <a:spcPts val="700"/>
+              </a:spcAft>
+              <a:buSzPct val="100000"/>
+              <a:buChar char="•"/>
+            </a:pPr>
+            <a:r>
+              <a:rPr lang="en-US" sz="1250" dirty="0">
+                <a:solidFill>
+                  <a:srgbClr val="222222"/>
+                </a:solidFill>
+              </a:rPr>
+              <a:t>Orchestration Airflow, Metabase en prod</a:t>
+            </a:r>
+            <a:endParaRPr lang="en-US" sz="1250" dirty="0"/>
+          </a:p>
+        </p:txBody>
+      </p:sp>
+    </p:spTree>
+  </p:cSld>
+  <p:clrMapOvr>
+    <a:masterClrMapping/>
+  </p:clrMapOvr>
+</p:sld>
+</file>
+
+<file path=ppt/slides/slide15.xml><?xml version="1.0" encoding="utf-8"?>
+<p:sld xmlns:a="http://schemas.openxmlformats.org/drawingml/2006/main" xmlns:r="http://schemas.openxmlformats.org/officeDocument/2006/relationships" xmlns:p="http://schemas.openxmlformats.org/presentationml/2006/main">
+  <p:cSld name="Slide 15">
     <p:bg>
       <p:bgPr>
         <a:solidFill>
@@ -3173,7 +4641,7 @@
                   <a:srgbClr val="AAB4D8"/>
                 </a:solidFill>
               </a:rPr>
-              <a:t>POC Electio-Analytics · MSPR TPRE813</a:t>
+              <a:t>POC Electio-Analytics · MSPR TPRE813 · holdout 0,53 · DQM + Metabase</a:t>
             </a:r>
             <a:endParaRPr lang="en-US" sz="1500" dirty="0"/>
           </a:p>
@@ -3611,7 +5079,7 @@
                   <a:srgbClr val="1B2A5E"/>
                 </a:solidFill>
               </a:rPr>
-              <a:t>Sources de données</a:t>
+              <a:t>Sources &amp; référentiel</a:t>
             </a:r>
             <a:endParaRPr lang="en-US" sz="1500" dirty="0"/>
           </a:p>
@@ -3728,7 +5196,7 @@
                   <a:srgbClr val="1B2A5E"/>
                 </a:solidFill>
               </a:rPr>
-              <a:t>Pipeline ETL (médaillon)</a:t>
+              <a:t>Pipeline ETL (diagramme)</a:t>
             </a:r>
             <a:endParaRPr lang="en-US" sz="1500" dirty="0"/>
           </a:p>
@@ -4196,7 +5664,7 @@
                   <a:srgbClr val="1B2A5E"/>
                 </a:solidFill>
               </a:rPr>
-              <a:t>Visualisations</a:t>
+              <a:t>Qualité DQM &amp; Metabase</a:t>
             </a:r>
             <a:endParaRPr lang="en-US" sz="1500" dirty="0"/>
           </a:p>
@@ -4313,7 +5781,7 @@
                   <a:srgbClr val="1B2A5E"/>
                 </a:solidFill>
               </a:rPr>
-              <a:t>RGPD &amp; Sécurité</a:t>
+              <a:t>Visualisations</a:t>
             </a:r>
             <a:endParaRPr lang="en-US" sz="1500" dirty="0"/>
           </a:p>
@@ -4409,6 +5877,123 @@
         <p:spPr>
           <a:xfrm>
             <a:off x="7040880" y="4489704"/>
+            <a:ext cx="4114800" cy="658368"/>
+          </a:xfrm>
+          <a:prstGeom prst="rect">
+            <a:avLst/>
+          </a:prstGeom>
+          <a:noFill/>
+          <a:ln/>
+        </p:spPr>
+        <p:txBody>
+          <a:bodyPr wrap="square" lIns="0" tIns="0" rIns="0" bIns="0" rtlCol="0" anchor="ctr"/>
+          <a:lstStyle/>
+          <a:p>
+            <a:pPr indent="0" marL="0">
+              <a:buNone/>
+            </a:pPr>
+            <a:r>
+              <a:rPr lang="en-US" sz="1500" b="1" dirty="0">
+                <a:solidFill>
+                  <a:srgbClr val="1B2A5E"/>
+                </a:solidFill>
+              </a:rPr>
+              <a:t>RGPD &amp; Sécurité</a:t>
+            </a:r>
+            <a:endParaRPr lang="en-US" sz="1500" dirty="0"/>
+          </a:p>
+        </p:txBody>
+      </p:sp>
+      <p:sp>
+        <p:nvSpPr>
+          <p:cNvPr id="45" name="Shape 43"/>
+          <p:cNvSpPr/>
+          <p:nvPr/>
+        </p:nvSpPr>
+        <p:spPr>
+          <a:xfrm>
+            <a:off x="6400800" y="5422392"/>
+            <a:ext cx="502920" cy="658368"/>
+          </a:xfrm>
+          <a:prstGeom prst="rect">
+            <a:avLst/>
+          </a:prstGeom>
+          <a:solidFill>
+            <a:srgbClr val="1B2A5E"/>
+          </a:solidFill>
+          <a:ln/>
+        </p:spPr>
+      </p:sp>
+      <p:sp>
+        <p:nvSpPr>
+          <p:cNvPr id="46" name="Text 44"/>
+          <p:cNvSpPr/>
+          <p:nvPr/>
+        </p:nvSpPr>
+        <p:spPr>
+          <a:xfrm>
+            <a:off x="6400800" y="5422392"/>
+            <a:ext cx="502920" cy="658368"/>
+          </a:xfrm>
+          <a:prstGeom prst="rect">
+            <a:avLst/>
+          </a:prstGeom>
+          <a:noFill/>
+          <a:ln/>
+        </p:spPr>
+        <p:txBody>
+          <a:bodyPr wrap="square" lIns="0" tIns="0" rIns="0" bIns="0" rtlCol="0" anchor="ctr"/>
+          <a:lstStyle/>
+          <a:p>
+            <a:pPr algn="ctr" indent="0" marL="0">
+              <a:buNone/>
+            </a:pPr>
+            <a:r>
+              <a:rPr lang="en-US" sz="1600" b="1" dirty="0">
+                <a:solidFill>
+                  <a:srgbClr val="FFFFFF"/>
+                </a:solidFill>
+              </a:rPr>
+              <a:t>10</a:t>
+            </a:r>
+            <a:endParaRPr lang="en-US" sz="1600" dirty="0"/>
+          </a:p>
+        </p:txBody>
+      </p:sp>
+      <p:sp>
+        <p:nvSpPr>
+          <p:cNvPr id="47" name="Shape 45"/>
+          <p:cNvSpPr/>
+          <p:nvPr/>
+        </p:nvSpPr>
+        <p:spPr>
+          <a:xfrm>
+            <a:off x="6903720" y="5422392"/>
+            <a:ext cx="4297680" cy="658368"/>
+          </a:xfrm>
+          <a:prstGeom prst="rect">
+            <a:avLst/>
+          </a:prstGeom>
+          <a:solidFill>
+            <a:srgbClr val="F2F3F7"/>
+          </a:solidFill>
+          <a:ln w="12700">
+            <a:solidFill>
+              <a:srgbClr val="1B2A5E"/>
+            </a:solidFill>
+            <a:prstDash val="solid"/>
+          </a:ln>
+        </p:spPr>
+      </p:sp>
+      <p:sp>
+        <p:nvSpPr>
+          <p:cNvPr id="48" name="Text 46"/>
+          <p:cNvSpPr/>
+          <p:nvPr/>
+        </p:nvSpPr>
+        <p:spPr>
+          <a:xfrm>
+            <a:off x="7040880" y="5422392"/>
             <a:ext cx="4114800" cy="658368"/>
           </a:xfrm>
           <a:prstGeom prst="rect">
@@ -4948,7 +6533,7 @@
                   <a:srgbClr val="222222"/>
                 </a:solidFill>
               </a:rPr>
-              <a:t>384 observations exploitables : volume nécessaire au ML</a:t>
+              <a:t>480 lignes GOLD · 384 obs. ML (avec lag)</a:t>
             </a:r>
             <a:endParaRPr lang="en-US" sz="1250" dirty="0"/>
           </a:p>
@@ -4966,7 +6551,7 @@
                   <a:srgbClr val="222222"/>
                 </a:solidFill>
               </a:rPr>
-              <a:t>Maille unique = jointures fiables, traçabilité</a:t>
+              <a:t>Maille unique = jointures fiables</a:t>
             </a:r>
             <a:endParaRPr lang="en-US" sz="1250" dirty="0"/>
           </a:p>
@@ -5069,7 +6654,7 @@
                   <a:srgbClr val="222222"/>
                 </a:solidFill>
               </a:rPr>
-              <a:t>Accuracy &gt; 0,5 sur le jeu de test</a:t>
+              <a:t>Holdout 2022 &gt; 0,5 → atteint (0,53)</a:t>
             </a:r>
             <a:endParaRPr lang="en-US" sz="1250" dirty="0"/>
           </a:p>
@@ -5105,7 +6690,7 @@
                   <a:srgbClr val="222222"/>
                 </a:solidFill>
               </a:rPr>
-              <a:t>Livrables SQL / CSV / notebook / visualisations</a:t>
+              <a:t>Livrables SQL / CSV / notebook / viz</a:t>
             </a:r>
             <a:endParaRPr lang="en-US" sz="1250" dirty="0"/>
           </a:p>
@@ -5247,7 +6832,7 @@
                   <a:srgbClr val="1B2A5E"/>
                 </a:solidFill>
               </a:rPr>
-              <a:t>Sources de données retenues</a:t>
+              <a:t>Sources &amp; référentiel de données</a:t>
             </a:r>
             <a:endParaRPr lang="en-US" sz="2900" dirty="0"/>
           </a:p>
@@ -5303,7 +6888,7 @@
                   <a:srgbClr val="0066CC"/>
                 </a:solidFill>
               </a:rPr>
-              <a:t>Collecte — couche BRONZE (Licence Ouverte v2.0)</a:t>
+              <a:t>Contrats Bronze + Licence Ouverte v2.0</a:t>
             </a:r>
             <a:endParaRPr lang="en-US" sz="1400" dirty="0"/>
           </a:p>
@@ -5384,7 +6969,7 @@
           </p:nvPr>
         </p:nvGraphicFramePr>
         <p:xfrm>
-          <a:off x="502920" y="1600200"/>
+          <a:off x="502920" y="1508760"/>
           <a:ext cx="11201400" cy="914400"/>
         </p:xfrm>
         <a:graphic>
@@ -5397,7 +6982,7 @@
                 <a:gridCol w="2011680"/>
                 <a:gridCol w="2743200"/>
               </a:tblGrid>
-              <a:tr h="457200">
+              <a:tr h="438912">
                 <a:tc>
                   <a:txBody>
                     <a:bodyPr/>
@@ -5643,7 +7228,7 @@
                   </a:tcPr>
                 </a:tc>
               </a:tr>
-              <a:tr h="457200">
+              <a:tr h="438912">
                 <a:tc>
                   <a:txBody>
                     <a:bodyPr/>
@@ -5653,14 +7238,14 @@
                         <a:buNone/>
                       </a:pPr>
                       <a:r>
-                        <a:rPr lang="en-US" sz="1250" dirty="0">
+                        <a:rPr lang="en-US" sz="1200" dirty="0">
                           <a:solidFill>
                             <a:srgbClr val="000000"/>
                           </a:solidFill>
                         </a:rPr>
                         <a:t>data.gouv.fr — Présidentielles T1</a:t>
                       </a:r>
-                      <a:endParaRPr lang="en-US" sz="1250" dirty="0"/>
+                      <a:endParaRPr lang="en-US" sz="1200" dirty="0"/>
                     </a:p>
                   </a:txBody>
                   <a:tcPr marL="91440" marR="91440" marT="45720" marB="45720" anchor="ctr">
@@ -5711,14 +7296,14 @@
                         <a:buNone/>
                       </a:pPr>
                       <a:r>
-                        <a:rPr lang="en-US" sz="1250" dirty="0">
+                        <a:rPr lang="en-US" sz="1200" dirty="0">
                           <a:solidFill>
                             <a:srgbClr val="000000"/>
                           </a:solidFill>
                         </a:rPr>
                         <a:t>Résultats → 5 blocs politiques</a:t>
                       </a:r>
-                      <a:endParaRPr lang="en-US" sz="1250" dirty="0"/>
+                      <a:endParaRPr lang="en-US" sz="1200" dirty="0"/>
                     </a:p>
                   </a:txBody>
                   <a:tcPr marL="91440" marR="91440" marT="45720" marB="45720" anchor="ctr">
@@ -5769,14 +7354,14 @@
                         <a:buNone/>
                       </a:pPr>
                       <a:r>
-                        <a:rPr lang="en-US" sz="1250" dirty="0">
+                        <a:rPr lang="en-US" sz="1200" dirty="0">
                           <a:solidFill>
                             <a:srgbClr val="000000"/>
                           </a:solidFill>
                         </a:rPr>
                         <a:t>Département</a:t>
                       </a:r>
-                      <a:endParaRPr lang="en-US" sz="1250" dirty="0"/>
+                      <a:endParaRPr lang="en-US" sz="1200" dirty="0"/>
                     </a:p>
                   </a:txBody>
                   <a:tcPr marL="91440" marR="91440" marT="45720" marB="45720" anchor="ctr">
@@ -5827,14 +7412,14 @@
                         <a:buNone/>
                       </a:pPr>
                       <a:r>
-                        <a:rPr lang="en-US" sz="1250" dirty="0">
+                        <a:rPr lang="en-US" sz="1200" dirty="0">
                           <a:solidFill>
                             <a:srgbClr val="000000"/>
                           </a:solidFill>
                         </a:rPr>
                         <a:t>Variable cible + lag</a:t>
                       </a:r>
-                      <a:endParaRPr lang="en-US" sz="1250" dirty="0"/>
+                      <a:endParaRPr lang="en-US" sz="1200" dirty="0"/>
                     </a:p>
                   </a:txBody>
                   <a:tcPr marL="91440" marR="91440" marT="45720" marB="45720" anchor="ctr">
@@ -5877,7 +7462,7 @@
                   </a:tcPr>
                 </a:tc>
               </a:tr>
-              <a:tr h="457200">
+              <a:tr h="438912">
                 <a:tc>
                   <a:txBody>
                     <a:bodyPr/>
@@ -5887,14 +7472,14 @@
                         <a:buNone/>
                       </a:pPr>
                       <a:r>
-                        <a:rPr lang="en-US" sz="1250" dirty="0">
+                        <a:rPr lang="en-US" sz="1200" dirty="0">
                           <a:solidFill>
                             <a:srgbClr val="000000"/>
                           </a:solidFill>
                         </a:rPr>
                         <a:t>INSEE — Chômage localisé</a:t>
                       </a:r>
-                      <a:endParaRPr lang="en-US" sz="1250" dirty="0"/>
+                      <a:endParaRPr lang="en-US" sz="1200" dirty="0"/>
                     </a:p>
                   </a:txBody>
                   <a:tcPr marL="91440" marR="91440" marT="45720" marB="45720" anchor="ctr">
@@ -5945,14 +7530,14 @@
                         <a:buNone/>
                       </a:pPr>
                       <a:r>
-                        <a:rPr lang="en-US" sz="1250" dirty="0">
+                        <a:rPr lang="en-US" sz="1200" dirty="0">
                           <a:solidFill>
                             <a:srgbClr val="000000"/>
                           </a:solidFill>
                         </a:rPr>
                         <a:t>Taux trimestriel</a:t>
                       </a:r>
-                      <a:endParaRPr lang="en-US" sz="1250" dirty="0"/>
+                      <a:endParaRPr lang="en-US" sz="1200" dirty="0"/>
                     </a:p>
                   </a:txBody>
                   <a:tcPr marL="91440" marR="91440" marT="45720" marB="45720" anchor="ctr">
@@ -6003,14 +7588,14 @@
                         <a:buNone/>
                       </a:pPr>
                       <a:r>
-                        <a:rPr lang="en-US" sz="1250" dirty="0">
+                        <a:rPr lang="en-US" sz="1200" dirty="0">
                           <a:solidFill>
                             <a:srgbClr val="000000"/>
                           </a:solidFill>
                         </a:rPr>
                         <a:t>Dépt. (trim.)</a:t>
                       </a:r>
-                      <a:endParaRPr lang="en-US" sz="1250" dirty="0"/>
+                      <a:endParaRPr lang="en-US" sz="1200" dirty="0"/>
                     </a:p>
                   </a:txBody>
                   <a:tcPr marL="91440" marR="91440" marT="45720" marB="45720" anchor="ctr">
@@ -6061,14 +7646,14 @@
                         <a:buNone/>
                       </a:pPr>
                       <a:r>
-                        <a:rPr lang="en-US" sz="1250" dirty="0">
+                        <a:rPr lang="en-US" sz="1200" dirty="0">
                           <a:solidFill>
                             <a:srgbClr val="000000"/>
                           </a:solidFill>
                         </a:rPr>
                         <a:t>Chômage N-1, delta 5 ans</a:t>
                       </a:r>
-                      <a:endParaRPr lang="en-US" sz="1250" dirty="0"/>
+                      <a:endParaRPr lang="en-US" sz="1200" dirty="0"/>
                     </a:p>
                   </a:txBody>
                   <a:tcPr marL="91440" marR="91440" marT="45720" marB="45720" anchor="ctr">
@@ -6111,7 +7696,7 @@
                   </a:tcPr>
                 </a:tc>
               </a:tr>
-              <a:tr h="457200">
+              <a:tr h="438912">
                 <a:tc>
                   <a:txBody>
                     <a:bodyPr/>
@@ -6121,14 +7706,14 @@
                         <a:buNone/>
                       </a:pPr>
                       <a:r>
-                        <a:rPr lang="en-US" sz="1250" dirty="0">
+                        <a:rPr lang="en-US" sz="1200" dirty="0">
                           <a:solidFill>
                             <a:srgbClr val="000000"/>
                           </a:solidFill>
                         </a:rPr>
                         <a:t>INSEE — Emploi salarié</a:t>
                       </a:r>
-                      <a:endParaRPr lang="en-US" sz="1250" dirty="0"/>
+                      <a:endParaRPr lang="en-US" sz="1200" dirty="0"/>
                     </a:p>
                   </a:txBody>
                   <a:tcPr marL="91440" marR="91440" marT="45720" marB="45720" anchor="ctr">
@@ -6179,14 +7764,14 @@
                         <a:buNone/>
                       </a:pPr>
                       <a:r>
-                        <a:rPr lang="en-US" sz="1250" dirty="0">
+                        <a:rPr lang="en-US" sz="1200" dirty="0">
                           <a:solidFill>
                             <a:srgbClr val="000000"/>
                           </a:solidFill>
                         </a:rPr>
                         <a:t>Emploi total trimestriel</a:t>
                       </a:r>
-                      <a:endParaRPr lang="en-US" sz="1250" dirty="0"/>
+                      <a:endParaRPr lang="en-US" sz="1200" dirty="0"/>
                     </a:p>
                   </a:txBody>
                   <a:tcPr marL="91440" marR="91440" marT="45720" marB="45720" anchor="ctr">
@@ -6237,14 +7822,14 @@
                         <a:buNone/>
                       </a:pPr>
                       <a:r>
-                        <a:rPr lang="en-US" sz="1250" dirty="0">
+                        <a:rPr lang="en-US" sz="1200" dirty="0">
                           <a:solidFill>
                             <a:srgbClr val="000000"/>
                           </a:solidFill>
                         </a:rPr>
                         <a:t>Dépt. (trim.)</a:t>
                       </a:r>
-                      <a:endParaRPr lang="en-US" sz="1250" dirty="0"/>
+                      <a:endParaRPr lang="en-US" sz="1200" dirty="0"/>
                     </a:p>
                   </a:txBody>
                   <a:tcPr marL="91440" marR="91440" marT="45720" marB="45720" anchor="ctr">
@@ -6295,14 +7880,14 @@
                         <a:buNone/>
                       </a:pPr>
                       <a:r>
-                        <a:rPr lang="en-US" sz="1250" dirty="0">
+                        <a:rPr lang="en-US" sz="1200" dirty="0">
                           <a:solidFill>
                             <a:srgbClr val="000000"/>
                           </a:solidFill>
                         </a:rPr>
                         <a:t>Emploi/1000 hab, croissance</a:t>
                       </a:r>
-                      <a:endParaRPr lang="en-US" sz="1250" dirty="0"/>
+                      <a:endParaRPr lang="en-US" sz="1200" dirty="0"/>
                     </a:p>
                   </a:txBody>
                   <a:tcPr marL="91440" marR="91440" marT="45720" marB="45720" anchor="ctr">
@@ -6345,7 +7930,7 @@
                   </a:tcPr>
                 </a:tc>
               </a:tr>
-              <a:tr h="457200">
+              <a:tr h="438912">
                 <a:tc>
                   <a:txBody>
                     <a:bodyPr/>
@@ -6355,14 +7940,14 @@
                         <a:buNone/>
                       </a:pPr>
                       <a:r>
-                        <a:rPr lang="en-US" sz="1250" dirty="0">
+                        <a:rPr lang="en-US" sz="1200" dirty="0">
                           <a:solidFill>
                             <a:srgbClr val="000000"/>
                           </a:solidFill>
                         </a:rPr>
                         <a:t>INSEE — Population</a:t>
                       </a:r>
-                      <a:endParaRPr lang="en-US" sz="1250" dirty="0"/>
+                      <a:endParaRPr lang="en-US" sz="1200" dirty="0"/>
                     </a:p>
                   </a:txBody>
                   <a:tcPr marL="91440" marR="91440" marT="45720" marB="45720" anchor="ctr">
@@ -6413,14 +7998,14 @@
                         <a:buNone/>
                       </a:pPr>
                       <a:r>
-                        <a:rPr lang="en-US" sz="1250" dirty="0">
+                        <a:rPr lang="en-US" sz="1200" dirty="0">
                           <a:solidFill>
                             <a:srgbClr val="000000"/>
                           </a:solidFill>
                         </a:rPr>
                         <a:t>Population annuelle</a:t>
                       </a:r>
-                      <a:endParaRPr lang="en-US" sz="1250" dirty="0"/>
+                      <a:endParaRPr lang="en-US" sz="1200" dirty="0"/>
                     </a:p>
                   </a:txBody>
                   <a:tcPr marL="91440" marR="91440" marT="45720" marB="45720" anchor="ctr">
@@ -6471,14 +8056,14 @@
                         <a:buNone/>
                       </a:pPr>
                       <a:r>
-                        <a:rPr lang="en-US" sz="1250" dirty="0">
+                        <a:rPr lang="en-US" sz="1200" dirty="0">
                           <a:solidFill>
                             <a:srgbClr val="000000"/>
                           </a:solidFill>
                         </a:rPr>
                         <a:t>Dépt. (annuel)</a:t>
                       </a:r>
-                      <a:endParaRPr lang="en-US" sz="1250" dirty="0"/>
+                      <a:endParaRPr lang="en-US" sz="1200" dirty="0"/>
                     </a:p>
                   </a:txBody>
                   <a:tcPr marL="91440" marR="91440" marT="45720" marB="45720" anchor="ctr">
@@ -6529,14 +8114,14 @@
                         <a:buNone/>
                       </a:pPr>
                       <a:r>
-                        <a:rPr lang="en-US" sz="1250" dirty="0">
+                        <a:rPr lang="en-US" sz="1200" dirty="0">
                           <a:solidFill>
                             <a:srgbClr val="000000"/>
                           </a:solidFill>
                         </a:rPr>
                         <a:t>Normalisation</a:t>
                       </a:r>
-                      <a:endParaRPr lang="en-US" sz="1250" dirty="0"/>
+                      <a:endParaRPr lang="en-US" sz="1200" dirty="0"/>
                     </a:p>
                   </a:txBody>
                   <a:tcPr marL="91440" marR="91440" marT="45720" marB="45720" anchor="ctr">
@@ -6579,7 +8164,7 @@
                   </a:tcPr>
                 </a:tc>
               </a:tr>
-              <a:tr h="457200">
+              <a:tr h="438912">
                 <a:tc>
                   <a:txBody>
                     <a:bodyPr/>
@@ -6589,14 +8174,14 @@
                         <a:buNone/>
                       </a:pPr>
                       <a:r>
-                        <a:rPr lang="en-US" sz="1250" dirty="0">
+                        <a:rPr lang="en-US" sz="1200" dirty="0">
                           <a:solidFill>
                             <a:srgbClr val="000000"/>
                           </a:solidFill>
                         </a:rPr>
                         <a:t>INSEE — Pauvreté (Filosofi)</a:t>
                       </a:r>
-                      <a:endParaRPr lang="en-US" sz="1250" dirty="0"/>
+                      <a:endParaRPr lang="en-US" sz="1200" dirty="0"/>
                     </a:p>
                   </a:txBody>
                   <a:tcPr marL="91440" marR="91440" marT="45720" marB="45720" anchor="ctr">
@@ -6647,14 +8232,14 @@
                         <a:buNone/>
                       </a:pPr>
                       <a:r>
-                        <a:rPr lang="en-US" sz="1250" dirty="0">
+                        <a:rPr lang="en-US" sz="1200" dirty="0">
                           <a:solidFill>
                             <a:srgbClr val="000000"/>
                           </a:solidFill>
                         </a:rPr>
                         <a:t>Taux de pauvreté</a:t>
                       </a:r>
-                      <a:endParaRPr lang="en-US" sz="1250" dirty="0"/>
+                      <a:endParaRPr lang="en-US" sz="1200" dirty="0"/>
                     </a:p>
                   </a:txBody>
                   <a:tcPr marL="91440" marR="91440" marT="45720" marB="45720" anchor="ctr">
@@ -6705,14 +8290,14 @@
                         <a:buNone/>
                       </a:pPr>
                       <a:r>
-                        <a:rPr lang="en-US" sz="1250" dirty="0">
+                        <a:rPr lang="en-US" sz="1200" dirty="0">
                           <a:solidFill>
                             <a:srgbClr val="000000"/>
                           </a:solidFill>
                         </a:rPr>
                         <a:t>Dépt. (annuel)</a:t>
                       </a:r>
-                      <a:endParaRPr lang="en-US" sz="1250" dirty="0"/>
+                      <a:endParaRPr lang="en-US" sz="1200" dirty="0"/>
                     </a:p>
                   </a:txBody>
                   <a:tcPr marL="91440" marR="91440" marT="45720" marB="45720" anchor="ctr">
@@ -6763,14 +8348,14 @@
                         <a:buNone/>
                       </a:pPr>
                       <a:r>
-                        <a:rPr lang="en-US" sz="1250" dirty="0">
+                        <a:rPr lang="en-US" sz="1200" dirty="0">
                           <a:solidFill>
                             <a:srgbClr val="000000"/>
                           </a:solidFill>
                         </a:rPr>
-                        <a:t>Tension sociale</a:t>
+                        <a:t>BI / GOLD (40 % N-1)</a:t>
                       </a:r>
-                      <a:endParaRPr lang="en-US" sz="1250" dirty="0"/>
+                      <a:endParaRPr lang="en-US" sz="1200" dirty="0"/>
                     </a:p>
                   </a:txBody>
                   <a:tcPr marL="91440" marR="91440" marT="45720" marB="45720" anchor="ctr">
@@ -6813,7 +8398,7 @@
                   </a:tcPr>
                 </a:tc>
               </a:tr>
-              <a:tr h="457200">
+              <a:tr h="438912">
                 <a:tc>
                   <a:txBody>
                     <a:bodyPr/>
@@ -6823,14 +8408,14 @@
                         <a:buNone/>
                       </a:pPr>
                       <a:r>
-                        <a:rPr lang="en-US" sz="1250" dirty="0">
+                        <a:rPr lang="en-US" sz="1200" dirty="0">
                           <a:solidFill>
                             <a:srgbClr val="000000"/>
                           </a:solidFill>
                         </a:rPr>
                         <a:t>INSEE — Créations d’entreprises</a:t>
                       </a:r>
-                      <a:endParaRPr lang="en-US" sz="1250" dirty="0"/>
+                      <a:endParaRPr lang="en-US" sz="1200" dirty="0"/>
                     </a:p>
                   </a:txBody>
                   <a:tcPr marL="91440" marR="91440" marT="45720" marB="45720" anchor="ctr">
@@ -6881,14 +8466,14 @@
                         <a:buNone/>
                       </a:pPr>
                       <a:r>
-                        <a:rPr lang="en-US" sz="1250" dirty="0">
+                        <a:rPr lang="en-US" sz="1200" dirty="0">
                           <a:solidFill>
                             <a:srgbClr val="000000"/>
                           </a:solidFill>
                         </a:rPr>
                         <a:t>Créations pour 10k hab.</a:t>
                       </a:r>
-                      <a:endParaRPr lang="en-US" sz="1250" dirty="0"/>
+                      <a:endParaRPr lang="en-US" sz="1200" dirty="0"/>
                     </a:p>
                   </a:txBody>
                   <a:tcPr marL="91440" marR="91440" marT="45720" marB="45720" anchor="ctr">
@@ -6939,14 +8524,14 @@
                         <a:buNone/>
                       </a:pPr>
                       <a:r>
-                        <a:rPr lang="en-US" sz="1250" dirty="0">
+                        <a:rPr lang="en-US" sz="1200" dirty="0">
                           <a:solidFill>
                             <a:srgbClr val="000000"/>
                           </a:solidFill>
                         </a:rPr>
                         <a:t>Dépt. (annuel)</a:t>
                       </a:r>
-                      <a:endParaRPr lang="en-US" sz="1250" dirty="0"/>
+                      <a:endParaRPr lang="en-US" sz="1200" dirty="0"/>
                     </a:p>
                   </a:txBody>
                   <a:tcPr marL="91440" marR="91440" marT="45720" marB="45720" anchor="ctr">
@@ -6997,14 +8582,14 @@
                         <a:buNone/>
                       </a:pPr>
                       <a:r>
-                        <a:rPr lang="en-US" sz="1250" dirty="0">
+                        <a:rPr lang="en-US" sz="1200" dirty="0">
                           <a:solidFill>
                             <a:srgbClr val="000000"/>
                           </a:solidFill>
                         </a:rPr>
                         <a:t>Dynamisme économique</a:t>
                       </a:r>
-                      <a:endParaRPr lang="en-US" sz="1250" dirty="0"/>
+                      <a:endParaRPr lang="en-US" sz="1200" dirty="0"/>
                     </a:p>
                   </a:txBody>
                   <a:tcPr marL="91440" marR="91440" marT="45720" marB="45720" anchor="ctr">
@@ -7059,6 +8644,78 @@
         </p:nvSpPr>
         <p:spPr>
           <a:xfrm>
+            <a:off x="502920" y="4754880"/>
+            <a:ext cx="11201400" cy="411480"/>
+          </a:xfrm>
+          <a:prstGeom prst="rect">
+            <a:avLst/>
+          </a:prstGeom>
+          <a:noFill/>
+          <a:ln/>
+        </p:spPr>
+        <p:txBody>
+          <a:bodyPr wrap="square" rtlCol="0" anchor="ctr"/>
+          <a:lstStyle/>
+          <a:p>
+            <a:pPr indent="0" marL="0">
+              <a:buNone/>
+            </a:pPr>
+            <a:r>
+              <a:rPr lang="en-US" sz="1300" i="1" dirty="0">
+                <a:solidFill>
+                  <a:srgbClr val="1B2A5E"/>
+                </a:solidFill>
+              </a:rPr>
+              <a:t>Référentiel : etl/referentiels.py + docs/mspr/03_donnees/REFERENTIEL_DONNEES.md — schémas Bronze, 96 dépts, régions, blocs.</a:t>
+            </a:r>
+            <a:endParaRPr lang="en-US" sz="1300" dirty="0"/>
+          </a:p>
+        </p:txBody>
+      </p:sp>
+      <p:sp>
+        <p:nvSpPr>
+          <p:cNvPr id="12" name="Text 9"/>
+          <p:cNvSpPr/>
+          <p:nvPr/>
+        </p:nvSpPr>
+        <p:spPr>
+          <a:xfrm>
+            <a:off x="502920" y="5212080"/>
+            <a:ext cx="11201400" cy="411480"/>
+          </a:xfrm>
+          <a:prstGeom prst="rect">
+            <a:avLst/>
+          </a:prstGeom>
+          <a:noFill/>
+          <a:ln/>
+        </p:spPr>
+        <p:txBody>
+          <a:bodyPr wrap="square" rtlCol="0" anchor="ctr"/>
+          <a:lstStyle/>
+          <a:p>
+            <a:pPr indent="0" marL="0">
+              <a:buNone/>
+            </a:pPr>
+            <a:r>
+              <a:rPr lang="en-US" sz="1300" dirty="0">
+                <a:solidFill>
+                  <a:srgbClr val="222222"/>
+                </a:solidFill>
+              </a:rPr>
+              <a:t>Pauvreté N−1 : 40 % de complétude GOLD (2017 &amp; 2022, Filosofi historique) — hors features ML (fuite / couverture).</a:t>
+            </a:r>
+            <a:endParaRPr lang="en-US" sz="1300" dirty="0"/>
+          </a:p>
+        </p:txBody>
+      </p:sp>
+      <p:sp>
+        <p:nvSpPr>
+          <p:cNvPr id="13" name="Text 10"/>
+          <p:cNvSpPr/>
+          <p:nvPr/>
+        </p:nvSpPr>
+        <p:spPr>
+          <a:xfrm>
             <a:off x="502920" y="5806440"/>
             <a:ext cx="11201400" cy="365760"/>
           </a:xfrm>
@@ -7205,7 +8862,7 @@
                   <a:srgbClr val="1B2A5E"/>
                 </a:solidFill>
               </a:rPr>
-              <a:t>Pipeline ETL</a:t>
+              <a:t>Pipeline ETL — diagramme de flux</a:t>
             </a:r>
             <a:endParaRPr lang="en-US" sz="2900" dirty="0"/>
           </a:p>
@@ -7261,7 +8918,7 @@
                   <a:srgbClr val="0066CC"/>
                 </a:solidFill>
               </a:rPr>
-              <a:t>Architecture médaillon Bronze → Silver → Gold</a:t>
+              <a:t>Architecture médailon RAW → Bronze → Silver → Gold</a:t>
             </a:r>
             <a:endParaRPr lang="en-US" sz="1400" dirty="0"/>
           </a:p>
@@ -7327,591 +8984,29 @@
           <a:ln/>
         </p:spPr>
       </p:sp>
-      <p:sp>
-        <p:nvSpPr>
-          <p:cNvPr id="10" name="Shape 8"/>
-          <p:cNvSpPr/>
-          <p:nvPr/>
-        </p:nvSpPr>
-        <p:spPr>
-          <a:xfrm>
-            <a:off x="685800" y="1828800"/>
-            <a:ext cx="3337560" cy="3200400"/>
-          </a:xfrm>
-          <a:prstGeom prst="roundRect">
-            <a:avLst>
-              <a:gd name="adj" fmla="val 2857"/>
-            </a:avLst>
-          </a:prstGeom>
-          <a:solidFill>
-            <a:srgbClr val="F2F3F7"/>
-          </a:solidFill>
-          <a:ln w="31750">
-            <a:solidFill>
-              <a:srgbClr val="B87333"/>
-            </a:solidFill>
-            <a:prstDash val="solid"/>
-          </a:ln>
-        </p:spPr>
-      </p:sp>
-      <p:sp>
-        <p:nvSpPr>
-          <p:cNvPr id="11" name="Shape 9"/>
-          <p:cNvSpPr/>
-          <p:nvPr/>
-        </p:nvSpPr>
-        <p:spPr>
-          <a:xfrm>
-            <a:off x="685800" y="1828800"/>
-            <a:ext cx="3337560" cy="548640"/>
-          </a:xfrm>
-          <a:prstGeom prst="rect">
-            <a:avLst/>
-          </a:prstGeom>
-          <a:solidFill>
-            <a:srgbClr val="B87333"/>
-          </a:solidFill>
-          <a:ln/>
-        </p:spPr>
-      </p:sp>
-      <p:sp>
-        <p:nvSpPr>
-          <p:cNvPr id="12" name="Text 10"/>
-          <p:cNvSpPr/>
-          <p:nvPr/>
-        </p:nvSpPr>
-        <p:spPr>
-          <a:xfrm>
-            <a:off x="685800" y="1828800"/>
-            <a:ext cx="3337560" cy="548640"/>
-          </a:xfrm>
-          <a:prstGeom prst="rect">
-            <a:avLst/>
-          </a:prstGeom>
-          <a:noFill/>
-          <a:ln/>
-        </p:spPr>
-        <p:txBody>
-          <a:bodyPr wrap="square" lIns="0" tIns="0" rIns="0" bIns="0" rtlCol="0" anchor="ctr"/>
-          <a:lstStyle/>
-          <a:p>
-            <a:pPr algn="ctr" indent="0" marL="0">
-              <a:buNone/>
-            </a:pPr>
-            <a:r>
-              <a:rPr lang="en-US" sz="1800" b="1" dirty="0">
-                <a:solidFill>
-                  <a:srgbClr val="FFFFFF"/>
-                </a:solidFill>
-              </a:rPr>
-              <a:t>BRONZE</a:t>
-            </a:r>
-            <a:endParaRPr lang="en-US" sz="1800" dirty="0"/>
-          </a:p>
-        </p:txBody>
-      </p:sp>
-      <p:sp>
-        <p:nvSpPr>
-          <p:cNvPr id="13" name="Text 11"/>
-          <p:cNvSpPr/>
-          <p:nvPr/>
-        </p:nvSpPr>
-        <p:spPr>
-          <a:xfrm>
-            <a:off x="914400" y="2560320"/>
-            <a:ext cx="2880360" cy="2286000"/>
-          </a:xfrm>
-          <a:prstGeom prst="rect">
-            <a:avLst/>
-          </a:prstGeom>
-          <a:noFill/>
-          <a:ln/>
-        </p:spPr>
-        <p:txBody>
-          <a:bodyPr wrap="square" rtlCol="0" anchor="t"/>
-          <a:lstStyle/>
-          <a:p>
-            <a:pPr marL="342900" indent="-342900">
-              <a:spcAft>
-                <a:spcPts val="900"/>
-              </a:spcAft>
-              <a:buSzPct val="100000"/>
-              <a:buChar char="•"/>
-            </a:pPr>
-            <a:r>
-              <a:rPr lang="en-US" sz="1300" dirty="0">
-                <a:solidFill>
-                  <a:srgbClr val="222222"/>
-                </a:solidFill>
-              </a:rPr>
-              <a:t>CSV bruts data.gouv / INSEE</a:t>
-            </a:r>
-            <a:endParaRPr lang="en-US" sz="1300" dirty="0"/>
-          </a:p>
-          <a:p>
-            <a:pPr marL="342900" indent="-342900">
-              <a:spcAft>
-                <a:spcPts val="900"/>
-              </a:spcAft>
-              <a:buSzPct val="100000"/>
-              <a:buChar char="•"/>
-            </a:pPr>
-            <a:r>
-              <a:rPr lang="en-US" sz="1300" dirty="0">
-                <a:solidFill>
-                  <a:srgbClr val="222222"/>
-                </a:solidFill>
-              </a:rPr>
-              <a:t>Jamais modifiés</a:t>
-            </a:r>
-            <a:endParaRPr lang="en-US" sz="1300" dirty="0"/>
-          </a:p>
-          <a:p>
-            <a:pPr marL="342900" indent="-342900">
-              <a:spcAft>
-                <a:spcPts val="900"/>
-              </a:spcAft>
-              <a:buSzPct val="100000"/>
-              <a:buChar char="•"/>
-            </a:pPr>
-            <a:r>
-              <a:rPr lang="en-US" sz="1300" dirty="0">
-                <a:solidFill>
-                  <a:srgbClr val="222222"/>
-                </a:solidFill>
-              </a:rPr>
-              <a:t>Traçabilité totale</a:t>
-            </a:r>
-            <a:endParaRPr lang="en-US" sz="1300" dirty="0"/>
-          </a:p>
-        </p:txBody>
-      </p:sp>
-      <p:sp>
-        <p:nvSpPr>
-          <p:cNvPr id="14" name="Text 12"/>
-          <p:cNvSpPr/>
-          <p:nvPr/>
-        </p:nvSpPr>
-        <p:spPr>
-          <a:xfrm>
-            <a:off x="4023360" y="3063240"/>
-            <a:ext cx="640080" cy="731520"/>
-          </a:xfrm>
-          <a:prstGeom prst="rect">
-            <a:avLst/>
-          </a:prstGeom>
-          <a:noFill/>
-          <a:ln/>
-        </p:spPr>
-        <p:txBody>
-          <a:bodyPr wrap="square" lIns="0" tIns="0" rIns="0" bIns="0" rtlCol="0" anchor="ctr"/>
-          <a:lstStyle/>
-          <a:p>
-            <a:pPr algn="ctr" indent="0" marL="0">
-              <a:buNone/>
-            </a:pPr>
-            <a:r>
-              <a:rPr lang="en-US" sz="3400" b="1" dirty="0">
-                <a:solidFill>
-                  <a:srgbClr val="1B2A5E"/>
-                </a:solidFill>
-              </a:rPr>
-              <a:t>→</a:t>
-            </a:r>
-            <a:endParaRPr lang="en-US" sz="3400" dirty="0"/>
-          </a:p>
-        </p:txBody>
-      </p:sp>
-      <p:sp>
-        <p:nvSpPr>
-          <p:cNvPr id="15" name="Shape 13"/>
-          <p:cNvSpPr/>
-          <p:nvPr/>
-        </p:nvSpPr>
-        <p:spPr>
-          <a:xfrm>
-            <a:off x="4663440" y="1828800"/>
-            <a:ext cx="3337560" cy="3200400"/>
-          </a:xfrm>
-          <a:prstGeom prst="roundRect">
-            <a:avLst>
-              <a:gd name="adj" fmla="val 2857"/>
-            </a:avLst>
-          </a:prstGeom>
-          <a:solidFill>
-            <a:srgbClr val="F2F3F7"/>
-          </a:solidFill>
-          <a:ln w="31750">
-            <a:solidFill>
-              <a:srgbClr val="8A8D93"/>
-            </a:solidFill>
-            <a:prstDash val="solid"/>
-          </a:ln>
-        </p:spPr>
-      </p:sp>
-      <p:sp>
-        <p:nvSpPr>
-          <p:cNvPr id="16" name="Shape 14"/>
-          <p:cNvSpPr/>
-          <p:nvPr/>
-        </p:nvSpPr>
-        <p:spPr>
-          <a:xfrm>
-            <a:off x="4663440" y="1828800"/>
-            <a:ext cx="3337560" cy="548640"/>
-          </a:xfrm>
-          <a:prstGeom prst="rect">
-            <a:avLst/>
-          </a:prstGeom>
-          <a:solidFill>
-            <a:srgbClr val="8A8D93"/>
-          </a:solidFill>
-          <a:ln/>
-        </p:spPr>
-      </p:sp>
-      <p:sp>
-        <p:nvSpPr>
-          <p:cNvPr id="17" name="Text 15"/>
-          <p:cNvSpPr/>
-          <p:nvPr/>
-        </p:nvSpPr>
-        <p:spPr>
-          <a:xfrm>
-            <a:off x="4663440" y="1828800"/>
-            <a:ext cx="3337560" cy="548640"/>
-          </a:xfrm>
-          <a:prstGeom prst="rect">
-            <a:avLst/>
-          </a:prstGeom>
-          <a:noFill/>
-          <a:ln/>
-        </p:spPr>
-        <p:txBody>
-          <a:bodyPr wrap="square" lIns="0" tIns="0" rIns="0" bIns="0" rtlCol="0" anchor="ctr"/>
-          <a:lstStyle/>
-          <a:p>
-            <a:pPr algn="ctr" indent="0" marL="0">
-              <a:buNone/>
-            </a:pPr>
-            <a:r>
-              <a:rPr lang="en-US" sz="1800" b="1" dirty="0">
-                <a:solidFill>
-                  <a:srgbClr val="FFFFFF"/>
-                </a:solidFill>
-              </a:rPr>
-              <a:t>SILVER</a:t>
-            </a:r>
-            <a:endParaRPr lang="en-US" sz="1800" dirty="0"/>
-          </a:p>
-        </p:txBody>
-      </p:sp>
-      <p:sp>
-        <p:nvSpPr>
-          <p:cNvPr id="18" name="Text 16"/>
-          <p:cNvSpPr/>
-          <p:nvPr/>
-        </p:nvSpPr>
-        <p:spPr>
-          <a:xfrm>
-            <a:off x="4892040" y="2560320"/>
-            <a:ext cx="2880360" cy="2286000"/>
-          </a:xfrm>
-          <a:prstGeom prst="rect">
-            <a:avLst/>
-          </a:prstGeom>
-          <a:noFill/>
-          <a:ln/>
-        </p:spPr>
-        <p:txBody>
-          <a:bodyPr wrap="square" rtlCol="0" anchor="t"/>
-          <a:lstStyle/>
-          <a:p>
-            <a:pPr marL="342900" indent="-342900">
-              <a:spcAft>
-                <a:spcPts val="900"/>
-              </a:spcAft>
-              <a:buSzPct val="100000"/>
-              <a:buChar char="•"/>
-            </a:pPr>
-            <a:r>
-              <a:rPr lang="en-US" sz="1300" dirty="0">
-                <a:solidFill>
-                  <a:srgbClr val="222222"/>
-                </a:solidFill>
-              </a:rPr>
-              <a:t>Typage + déduplication</a:t>
-            </a:r>
-            <a:endParaRPr lang="en-US" sz="1300" dirty="0"/>
-          </a:p>
-          <a:p>
-            <a:pPr marL="342900" indent="-342900">
-              <a:spcAft>
-                <a:spcPts val="900"/>
-              </a:spcAft>
-              <a:buSzPct val="100000"/>
-              <a:buChar char="•"/>
-            </a:pPr>
-            <a:r>
-              <a:rPr lang="en-US" sz="1300" dirty="0">
-                <a:solidFill>
-                  <a:srgbClr val="222222"/>
-                </a:solidFill>
-              </a:rPr>
-              <a:t>Contrôles de bornes</a:t>
-            </a:r>
-            <a:endParaRPr lang="en-US" sz="1300" dirty="0"/>
-          </a:p>
-          <a:p>
-            <a:pPr marL="342900" indent="-342900">
-              <a:spcAft>
-                <a:spcPts val="900"/>
-              </a:spcAft>
-              <a:buSzPct val="100000"/>
-              <a:buChar char="•"/>
-            </a:pPr>
-            <a:r>
-              <a:rPr lang="en-US" sz="1300" dirty="0">
-                <a:solidFill>
-                  <a:srgbClr val="222222"/>
-                </a:solidFill>
-              </a:rPr>
-              <a:t>Journal qualité</a:t>
-            </a:r>
-            <a:endParaRPr lang="en-US" sz="1300" dirty="0"/>
-          </a:p>
-        </p:txBody>
-      </p:sp>
-      <p:sp>
-        <p:nvSpPr>
-          <p:cNvPr id="19" name="Text 17"/>
-          <p:cNvSpPr/>
-          <p:nvPr/>
-        </p:nvSpPr>
-        <p:spPr>
-          <a:xfrm>
-            <a:off x="8001000" y="3063240"/>
-            <a:ext cx="640080" cy="731520"/>
-          </a:xfrm>
-          <a:prstGeom prst="rect">
-            <a:avLst/>
-          </a:prstGeom>
-          <a:noFill/>
-          <a:ln/>
-        </p:spPr>
-        <p:txBody>
-          <a:bodyPr wrap="square" lIns="0" tIns="0" rIns="0" bIns="0" rtlCol="0" anchor="ctr"/>
-          <a:lstStyle/>
-          <a:p>
-            <a:pPr algn="ctr" indent="0" marL="0">
-              <a:buNone/>
-            </a:pPr>
-            <a:r>
-              <a:rPr lang="en-US" sz="3400" b="1" dirty="0">
-                <a:solidFill>
-                  <a:srgbClr val="1B2A5E"/>
-                </a:solidFill>
-              </a:rPr>
-              <a:t>→</a:t>
-            </a:r>
-            <a:endParaRPr lang="en-US" sz="3400" dirty="0"/>
-          </a:p>
-        </p:txBody>
-      </p:sp>
-      <p:sp>
-        <p:nvSpPr>
-          <p:cNvPr id="20" name="Shape 18"/>
-          <p:cNvSpPr/>
-          <p:nvPr/>
-        </p:nvSpPr>
-        <p:spPr>
-          <a:xfrm>
-            <a:off x="8641080" y="1828800"/>
-            <a:ext cx="3337560" cy="3200400"/>
-          </a:xfrm>
-          <a:prstGeom prst="roundRect">
-            <a:avLst>
-              <a:gd name="adj" fmla="val 2857"/>
-            </a:avLst>
-          </a:prstGeom>
-          <a:solidFill>
-            <a:srgbClr val="F2F3F7"/>
-          </a:solidFill>
-          <a:ln w="31750">
-            <a:solidFill>
-              <a:srgbClr val="C9A227"/>
-            </a:solidFill>
-            <a:prstDash val="solid"/>
-          </a:ln>
-        </p:spPr>
-      </p:sp>
-      <p:sp>
-        <p:nvSpPr>
-          <p:cNvPr id="21" name="Shape 19"/>
-          <p:cNvSpPr/>
-          <p:nvPr/>
-        </p:nvSpPr>
-        <p:spPr>
-          <a:xfrm>
-            <a:off x="8641080" y="1828800"/>
-            <a:ext cx="3337560" cy="548640"/>
-          </a:xfrm>
-          <a:prstGeom prst="rect">
-            <a:avLst/>
-          </a:prstGeom>
-          <a:solidFill>
-            <a:srgbClr val="C9A227"/>
-          </a:solidFill>
-          <a:ln/>
-        </p:spPr>
-      </p:sp>
-      <p:sp>
-        <p:nvSpPr>
-          <p:cNvPr id="22" name="Text 20"/>
-          <p:cNvSpPr/>
-          <p:nvPr/>
-        </p:nvSpPr>
-        <p:spPr>
-          <a:xfrm>
-            <a:off x="8641080" y="1828800"/>
-            <a:ext cx="3337560" cy="548640"/>
-          </a:xfrm>
-          <a:prstGeom prst="rect">
-            <a:avLst/>
-          </a:prstGeom>
-          <a:noFill/>
-          <a:ln/>
-        </p:spPr>
-        <p:txBody>
-          <a:bodyPr wrap="square" lIns="0" tIns="0" rIns="0" bIns="0" rtlCol="0" anchor="ctr"/>
-          <a:lstStyle/>
-          <a:p>
-            <a:pPr algn="ctr" indent="0" marL="0">
-              <a:buNone/>
-            </a:pPr>
-            <a:r>
-              <a:rPr lang="en-US" sz="1800" b="1" dirty="0">
-                <a:solidFill>
-                  <a:srgbClr val="FFFFFF"/>
-                </a:solidFill>
-              </a:rPr>
-              <a:t>GOLD</a:t>
-            </a:r>
-            <a:endParaRPr lang="en-US" sz="1800" dirty="0"/>
-          </a:p>
-        </p:txBody>
-      </p:sp>
-      <p:sp>
-        <p:nvSpPr>
-          <p:cNvPr id="23" name="Text 21"/>
-          <p:cNvSpPr/>
-          <p:nvPr/>
-        </p:nvSpPr>
-        <p:spPr>
-          <a:xfrm>
-            <a:off x="8869680" y="2560320"/>
-            <a:ext cx="2880360" cy="2286000"/>
-          </a:xfrm>
-          <a:prstGeom prst="rect">
-            <a:avLst/>
-          </a:prstGeom>
-          <a:noFill/>
-          <a:ln/>
-        </p:spPr>
-        <p:txBody>
-          <a:bodyPr wrap="square" rtlCol="0" anchor="t"/>
-          <a:lstStyle/>
-          <a:p>
-            <a:pPr marL="342900" indent="-342900">
-              <a:spcAft>
-                <a:spcPts val="900"/>
-              </a:spcAft>
-              <a:buSzPct val="100000"/>
-              <a:buChar char="•"/>
-            </a:pPr>
-            <a:r>
-              <a:rPr lang="en-US" sz="1300" dirty="0">
-                <a:solidFill>
-                  <a:srgbClr val="222222"/>
-                </a:solidFill>
-              </a:rPr>
-              <a:t>1 ligne = 1 (dépt, élection)</a:t>
-            </a:r>
-            <a:endParaRPr lang="en-US" sz="1300" dirty="0"/>
-          </a:p>
-          <a:p>
-            <a:pPr marL="342900" indent="-342900">
-              <a:spcAft>
-                <a:spcPts val="900"/>
-              </a:spcAft>
-              <a:buSzPct val="100000"/>
-              <a:buChar char="•"/>
-            </a:pPr>
-            <a:r>
-              <a:rPr lang="en-US" sz="1300" dirty="0">
-                <a:solidFill>
-                  <a:srgbClr val="222222"/>
-                </a:solidFill>
-              </a:rPr>
-              <a:t>Features anti-leakage</a:t>
-            </a:r>
-            <a:endParaRPr lang="en-US" sz="1300" dirty="0"/>
-          </a:p>
-          <a:p>
-            <a:pPr marL="342900" indent="-342900">
-              <a:spcAft>
-                <a:spcPts val="900"/>
-              </a:spcAft>
-              <a:buSzPct val="100000"/>
-              <a:buChar char="•"/>
-            </a:pPr>
-            <a:r>
-              <a:rPr lang="en-US" sz="1300" dirty="0">
-                <a:solidFill>
-                  <a:srgbClr val="222222"/>
-                </a:solidFill>
-              </a:rPr>
-              <a:t>SQLite + CSV indexés</a:t>
-            </a:r>
-            <a:endParaRPr lang="en-US" sz="1300" dirty="0"/>
-          </a:p>
-        </p:txBody>
-      </p:sp>
-      <p:sp>
-        <p:nvSpPr>
-          <p:cNvPr id="24" name="Text 22"/>
-          <p:cNvSpPr/>
-          <p:nvPr/>
-        </p:nvSpPr>
-        <p:spPr>
-          <a:xfrm>
-            <a:off x="685800" y="5486400"/>
-            <a:ext cx="10972800" cy="457200"/>
-          </a:xfrm>
-          <a:prstGeom prst="rect">
-            <a:avLst/>
-          </a:prstGeom>
-          <a:noFill/>
-          <a:ln/>
-        </p:spPr>
-        <p:txBody>
-          <a:bodyPr wrap="square" rtlCol="0" anchor="ctr"/>
-          <a:lstStyle/>
-          <a:p>
-            <a:pPr algn="ctr" indent="0" marL="0">
-              <a:buNone/>
-            </a:pPr>
-            <a:r>
-              <a:rPr lang="en-US" sz="1300" i="1" dirty="0">
-                <a:solidFill>
-                  <a:srgbClr val="1B2A5E"/>
-                </a:solidFill>
-              </a:rPr>
-              <a:t>Orchestration : run_pipeline.py enchaîne les étapes · tests automatisés (pytest) · anti data-leakage garanti</a:t>
-            </a:r>
-            <a:endParaRPr lang="en-US" sz="1300" dirty="0"/>
-          </a:p>
-        </p:txBody>
-      </p:sp>
+      <p:pic>
+        <p:nvPicPr>
+          <p:cNvPr id="10" name="Image 0" descr="C:\Users\amine\Downloads\POC_ElectioAnalytics_projet_complet\docs\mspr\02_architecture\diagrams\flux_etl_medaillon.png">    </p:cNvPr>
+          <p:cNvPicPr>
+            <a:picLocks noChangeAspect="1"/>
+          </p:cNvPicPr>
+          <p:nvPr/>
+        </p:nvPicPr>
+        <p:blipFill>
+          <a:blip r:embed="rId1"/>
+          <a:srcRect l="0" r="0" t="0" b="0"/>
+          <a:stretch/>
+        </p:blipFill>
+        <p:spPr>
+          <a:xfrm>
+            <a:off x="365760" y="1417320"/>
+            <a:ext cx="11430000" cy="4846320"/>
+          </a:xfrm>
+          <a:prstGeom prst="rect">
+            <a:avLst/>
+          </a:prstGeom>
+        </p:spPr>
+      </p:pic>
     </p:spTree>
   </p:cSld>
   <p:clrMapOvr>
@@ -7994,7 +9089,7 @@
                   <a:srgbClr val="FFFFFF"/>
                 </a:solidFill>
               </a:rPr>
-              <a:t>04</a:t>
+              <a:t>03</a:t>
             </a:r>
             <a:endParaRPr lang="en-US" sz="1300" dirty="0"/>
           </a:p>
@@ -8030,7 +9125,7 @@
                   <a:srgbClr val="1B2A5E"/>
                 </a:solidFill>
               </a:rPr>
-              <a:t>Modèle de données</a:t>
+              <a:t>Couches médailon</a:t>
             </a:r>
             <a:endParaRPr lang="en-US" sz="2900" dirty="0"/>
           </a:p>
@@ -8086,7 +9181,7 @@
                   <a:srgbClr val="0066CC"/>
                 </a:solidFill>
               </a:rPr>
-              <a:t>Schéma en étoile — nommage explicite</a:t>
+              <a:t>Rôles Bronze / Silver / Gold</a:t>
             </a:r>
             <a:endParaRPr lang="en-US" sz="1400" dirty="0"/>
           </a:p>
@@ -8160,20 +9255,20 @@
         </p:nvSpPr>
         <p:spPr>
           <a:xfrm>
-            <a:off x="502920" y="1645920"/>
-            <a:ext cx="3611880" cy="4023360"/>
+            <a:off x="685800" y="1828800"/>
+            <a:ext cx="3337560" cy="3200400"/>
           </a:xfrm>
           <a:prstGeom prst="roundRect">
             <a:avLst>
-              <a:gd name="adj" fmla="val 2025"/>
+              <a:gd name="adj" fmla="val 2857"/>
             </a:avLst>
           </a:prstGeom>
           <a:solidFill>
             <a:srgbClr val="F2F3F7"/>
           </a:solidFill>
-          <a:ln w="15875">
+          <a:ln w="31750">
             <a:solidFill>
-              <a:srgbClr val="0066CC"/>
+              <a:srgbClr val="B87333"/>
             </a:solidFill>
             <a:prstDash val="solid"/>
           </a:ln>
@@ -8181,14 +9276,34 @@
       </p:sp>
       <p:sp>
         <p:nvSpPr>
-          <p:cNvPr id="11" name="Text 9"/>
-          <p:cNvSpPr/>
-          <p:nvPr/>
-        </p:nvSpPr>
-        <p:spPr>
-          <a:xfrm>
-            <a:off x="502920" y="1773936"/>
-            <a:ext cx="3611880" cy="411480"/>
+          <p:cNvPr id="11" name="Shape 9"/>
+          <p:cNvSpPr/>
+          <p:nvPr/>
+        </p:nvSpPr>
+        <p:spPr>
+          <a:xfrm>
+            <a:off x="685800" y="1828800"/>
+            <a:ext cx="3337560" cy="548640"/>
+          </a:xfrm>
+          <a:prstGeom prst="rect">
+            <a:avLst/>
+          </a:prstGeom>
+          <a:solidFill>
+            <a:srgbClr val="B87333"/>
+          </a:solidFill>
+          <a:ln/>
+        </p:spPr>
+      </p:sp>
+      <p:sp>
+        <p:nvSpPr>
+          <p:cNvPr id="12" name="Text 10"/>
+          <p:cNvSpPr/>
+          <p:nvPr/>
+        </p:nvSpPr>
+        <p:spPr>
+          <a:xfrm>
+            <a:off x="685800" y="1828800"/>
+            <a:ext cx="3337560" cy="548640"/>
           </a:xfrm>
           <a:prstGeom prst="rect">
             <a:avLst/>
@@ -8204,27 +9319,27 @@
               <a:buNone/>
             </a:pPr>
             <a:r>
-              <a:rPr lang="en-US" sz="1600" b="1" dirty="0">
-                <a:solidFill>
-                  <a:srgbClr val="0066CC"/>
-                </a:solidFill>
-              </a:rPr>
-              <a:t>Dimensions</a:t>
-            </a:r>
-            <a:endParaRPr lang="en-US" sz="1600" dirty="0"/>
-          </a:p>
-        </p:txBody>
-      </p:sp>
-      <p:sp>
-        <p:nvSpPr>
-          <p:cNvPr id="12" name="Text 10"/>
-          <p:cNvSpPr/>
-          <p:nvPr/>
-        </p:nvSpPr>
-        <p:spPr>
-          <a:xfrm>
-            <a:off x="704088" y="2240280"/>
-            <a:ext cx="3209544" cy="3291840"/>
+              <a:rPr lang="en-US" sz="1800" b="1" dirty="0">
+                <a:solidFill>
+                  <a:srgbClr val="FFFFFF"/>
+                </a:solidFill>
+              </a:rPr>
+              <a:t>BRONZE</a:t>
+            </a:r>
+            <a:endParaRPr lang="en-US" sz="1800" dirty="0"/>
+          </a:p>
+        </p:txBody>
+      </p:sp>
+      <p:sp>
+        <p:nvSpPr>
+          <p:cNvPr id="13" name="Text 11"/>
+          <p:cNvSpPr/>
+          <p:nvPr/>
+        </p:nvSpPr>
+        <p:spPr>
+          <a:xfrm>
+            <a:off x="914400" y="2560320"/>
+            <a:ext cx="2880360" cy="2286000"/>
           </a:xfrm>
           <a:prstGeom prst="rect">
             <a:avLst/>
@@ -8238,81 +9353,117 @@
           <a:p>
             <a:pPr marL="342900" indent="-342900">
               <a:spcAft>
-                <a:spcPts val="700"/>
+                <a:spcPts val="900"/>
               </a:spcAft>
               <a:buSzPct val="100000"/>
               <a:buChar char="•"/>
             </a:pPr>
             <a:r>
-              <a:rPr lang="en-US" sz="1250" dirty="0">
+              <a:rPr lang="en-US" sz="1300" dirty="0">
                 <a:solidFill>
                   <a:srgbClr val="222222"/>
                 </a:solidFill>
               </a:rPr>
-              <a:t>dim_departement</a:t>
-            </a:r>
-            <a:endParaRPr lang="en-US" sz="1250" dirty="0"/>
+              <a:t>CSV bruts normalisés</a:t>
+            </a:r>
+            <a:endParaRPr lang="en-US" sz="1300" dirty="0"/>
           </a:p>
           <a:p>
             <a:pPr marL="342900" indent="-342900">
               <a:spcAft>
-                <a:spcPts val="700"/>
+                <a:spcPts val="900"/>
               </a:spcAft>
               <a:buSzPct val="100000"/>
               <a:buChar char="•"/>
             </a:pPr>
             <a:r>
-              <a:rPr lang="en-US" sz="1250" dirty="0">
+              <a:rPr lang="en-US" sz="1300" dirty="0">
                 <a:solidFill>
                   <a:srgbClr val="222222"/>
                 </a:solidFill>
               </a:rPr>
-              <a:t>dim_annee</a:t>
-            </a:r>
-            <a:endParaRPr lang="en-US" sz="1250" dirty="0"/>
+              <a:t>Contrats + manifests JSON</a:t>
+            </a:r>
+            <a:endParaRPr lang="en-US" sz="1300" dirty="0"/>
           </a:p>
           <a:p>
             <a:pPr marL="342900" indent="-342900">
               <a:spcAft>
-                <a:spcPts val="700"/>
+                <a:spcPts val="900"/>
               </a:spcAft>
               <a:buSzPct val="100000"/>
               <a:buChar char="•"/>
             </a:pPr>
             <a:r>
-              <a:rPr lang="en-US" sz="1250" dirty="0">
+              <a:rPr lang="en-US" sz="1300" dirty="0">
                 <a:solidFill>
                   <a:srgbClr val="222222"/>
                 </a:solidFill>
               </a:rPr>
-              <a:t>(clés de référence)</a:t>
-            </a:r>
-            <a:endParaRPr lang="en-US" sz="1250" dirty="0"/>
-          </a:p>
-        </p:txBody>
-      </p:sp>
-      <p:sp>
-        <p:nvSpPr>
-          <p:cNvPr id="13" name="Shape 11"/>
-          <p:cNvSpPr/>
-          <p:nvPr/>
-        </p:nvSpPr>
-        <p:spPr>
-          <a:xfrm>
-            <a:off x="4297680" y="1645920"/>
-            <a:ext cx="3611880" cy="4023360"/>
+              <a:t>Jamais modifiés après écriture</a:t>
+            </a:r>
+            <a:endParaRPr lang="en-US" sz="1300" dirty="0"/>
+          </a:p>
+        </p:txBody>
+      </p:sp>
+      <p:sp>
+        <p:nvSpPr>
+          <p:cNvPr id="14" name="Text 12"/>
+          <p:cNvSpPr/>
+          <p:nvPr/>
+        </p:nvSpPr>
+        <p:spPr>
+          <a:xfrm>
+            <a:off x="4023360" y="3063240"/>
+            <a:ext cx="640080" cy="731520"/>
+          </a:xfrm>
+          <a:prstGeom prst="rect">
+            <a:avLst/>
+          </a:prstGeom>
+          <a:noFill/>
+          <a:ln/>
+        </p:spPr>
+        <p:txBody>
+          <a:bodyPr wrap="square" lIns="0" tIns="0" rIns="0" bIns="0" rtlCol="0" anchor="ctr"/>
+          <a:lstStyle/>
+          <a:p>
+            <a:pPr algn="ctr" indent="0" marL="0">
+              <a:buNone/>
+            </a:pPr>
+            <a:r>
+              <a:rPr lang="en-US" sz="3400" b="1" dirty="0">
+                <a:solidFill>
+                  <a:srgbClr val="1B2A5E"/>
+                </a:solidFill>
+              </a:rPr>
+              <a:t>→</a:t>
+            </a:r>
+            <a:endParaRPr lang="en-US" sz="3400" dirty="0"/>
+          </a:p>
+        </p:txBody>
+      </p:sp>
+      <p:sp>
+        <p:nvSpPr>
+          <p:cNvPr id="15" name="Shape 13"/>
+          <p:cNvSpPr/>
+          <p:nvPr/>
+        </p:nvSpPr>
+        <p:spPr>
+          <a:xfrm>
+            <a:off x="4663440" y="1828800"/>
+            <a:ext cx="3337560" cy="3200400"/>
           </a:xfrm>
           <a:prstGeom prst="roundRect">
             <a:avLst>
-              <a:gd name="adj" fmla="val 2025"/>
+              <a:gd name="adj" fmla="val 2857"/>
             </a:avLst>
           </a:prstGeom>
           <a:solidFill>
             <a:srgbClr val="F2F3F7"/>
           </a:solidFill>
-          <a:ln w="15875">
+          <a:ln w="31750">
             <a:solidFill>
-              <a:srgbClr val="1B2A5E"/>
+              <a:srgbClr val="8A8D93"/>
             </a:solidFill>
             <a:prstDash val="solid"/>
           </a:ln>
@@ -8320,14 +9471,34 @@
       </p:sp>
       <p:sp>
         <p:nvSpPr>
-          <p:cNvPr id="14" name="Text 12"/>
-          <p:cNvSpPr/>
-          <p:nvPr/>
-        </p:nvSpPr>
-        <p:spPr>
-          <a:xfrm>
-            <a:off x="4297680" y="1773936"/>
-            <a:ext cx="3611880" cy="411480"/>
+          <p:cNvPr id="16" name="Shape 14"/>
+          <p:cNvSpPr/>
+          <p:nvPr/>
+        </p:nvSpPr>
+        <p:spPr>
+          <a:xfrm>
+            <a:off x="4663440" y="1828800"/>
+            <a:ext cx="3337560" cy="548640"/>
+          </a:xfrm>
+          <a:prstGeom prst="rect">
+            <a:avLst/>
+          </a:prstGeom>
+          <a:solidFill>
+            <a:srgbClr val="8A8D93"/>
+          </a:solidFill>
+          <a:ln/>
+        </p:spPr>
+      </p:sp>
+      <p:sp>
+        <p:nvSpPr>
+          <p:cNvPr id="17" name="Text 15"/>
+          <p:cNvSpPr/>
+          <p:nvPr/>
+        </p:nvSpPr>
+        <p:spPr>
+          <a:xfrm>
+            <a:off x="4663440" y="1828800"/>
+            <a:ext cx="3337560" cy="548640"/>
           </a:xfrm>
           <a:prstGeom prst="rect">
             <a:avLst/>
@@ -8343,27 +9514,27 @@
               <a:buNone/>
             </a:pPr>
             <a:r>
-              <a:rPr lang="en-US" sz="1600" b="1" dirty="0">
-                <a:solidFill>
-                  <a:srgbClr val="1B2A5E"/>
-                </a:solidFill>
-              </a:rPr>
-              <a:t>Faits</a:t>
-            </a:r>
-            <a:endParaRPr lang="en-US" sz="1600" dirty="0"/>
-          </a:p>
-        </p:txBody>
-      </p:sp>
-      <p:sp>
-        <p:nvSpPr>
-          <p:cNvPr id="15" name="Text 13"/>
-          <p:cNvSpPr/>
-          <p:nvPr/>
-        </p:nvSpPr>
-        <p:spPr>
-          <a:xfrm>
-            <a:off x="4498848" y="2240280"/>
-            <a:ext cx="3209544" cy="3291840"/>
+              <a:rPr lang="en-US" sz="1800" b="1" dirty="0">
+                <a:solidFill>
+                  <a:srgbClr val="FFFFFF"/>
+                </a:solidFill>
+              </a:rPr>
+              <a:t>SILVER</a:t>
+            </a:r>
+            <a:endParaRPr lang="en-US" sz="1800" dirty="0"/>
+          </a:p>
+        </p:txBody>
+      </p:sp>
+      <p:sp>
+        <p:nvSpPr>
+          <p:cNvPr id="18" name="Text 16"/>
+          <p:cNvSpPr/>
+          <p:nvPr/>
+        </p:nvSpPr>
+        <p:spPr>
+          <a:xfrm>
+            <a:off x="4892040" y="2560320"/>
+            <a:ext cx="2880360" cy="2286000"/>
           </a:xfrm>
           <a:prstGeom prst="rect">
             <a:avLst/>
@@ -8377,79 +9548,115 @@
           <a:p>
             <a:pPr marL="342900" indent="-342900">
               <a:spcAft>
-                <a:spcPts val="700"/>
+                <a:spcPts val="900"/>
               </a:spcAft>
               <a:buSzPct val="100000"/>
               <a:buChar char="•"/>
             </a:pPr>
             <a:r>
-              <a:rPr lang="en-US" sz="1250" dirty="0">
+              <a:rPr lang="en-US" sz="1300" dirty="0">
                 <a:solidFill>
                   <a:srgbClr val="222222"/>
                 </a:solidFill>
               </a:rPr>
-              <a:t>fait_resultat_election</a:t>
-            </a:r>
-            <a:endParaRPr lang="en-US" sz="1250" dirty="0"/>
+              <a:t>Typage + déduplication</a:t>
+            </a:r>
+            <a:endParaRPr lang="en-US" sz="1300" dirty="0"/>
           </a:p>
           <a:p>
             <a:pPr marL="342900" indent="-342900">
               <a:spcAft>
-                <a:spcPts val="700"/>
+                <a:spcPts val="900"/>
               </a:spcAft>
               <a:buSzPct val="100000"/>
               <a:buChar char="•"/>
             </a:pPr>
             <a:r>
-              <a:rPr lang="en-US" sz="1250" dirty="0">
+              <a:rPr lang="en-US" sz="1300" dirty="0">
                 <a:solidFill>
                   <a:srgbClr val="222222"/>
                 </a:solidFill>
               </a:rPr>
-              <a:t>fait_chomage_trimestriel</a:t>
-            </a:r>
-            <a:endParaRPr lang="en-US" sz="1250" dirty="0"/>
+              <a:t>DQM (16 contrôles)</a:t>
+            </a:r>
+            <a:endParaRPr lang="en-US" sz="1300" dirty="0"/>
           </a:p>
           <a:p>
             <a:pPr marL="342900" indent="-342900">
               <a:spcAft>
-                <a:spcPts val="700"/>
+                <a:spcPts val="900"/>
               </a:spcAft>
               <a:buSzPct val="100000"/>
               <a:buChar char="•"/>
             </a:pPr>
             <a:r>
-              <a:rPr lang="en-US" sz="1250" dirty="0">
+              <a:rPr lang="en-US" sz="1300" dirty="0">
                 <a:solidFill>
                   <a:srgbClr val="222222"/>
                 </a:solidFill>
               </a:rPr>
-              <a:t>fait_emploi_trimestriel</a:t>
-            </a:r>
-            <a:endParaRPr lang="en-US" sz="1250" dirty="0"/>
-          </a:p>
-        </p:txBody>
-      </p:sp>
-      <p:sp>
-        <p:nvSpPr>
-          <p:cNvPr id="16" name="Shape 14"/>
-          <p:cNvSpPr/>
-          <p:nvPr/>
-        </p:nvSpPr>
-        <p:spPr>
-          <a:xfrm>
-            <a:off x="8092440" y="1645920"/>
-            <a:ext cx="3611880" cy="4023360"/>
+              <a:t>Agrégats socioeco_annuel</a:t>
+            </a:r>
+            <a:endParaRPr lang="en-US" sz="1300" dirty="0"/>
+          </a:p>
+        </p:txBody>
+      </p:sp>
+      <p:sp>
+        <p:nvSpPr>
+          <p:cNvPr id="19" name="Text 17"/>
+          <p:cNvSpPr/>
+          <p:nvPr/>
+        </p:nvSpPr>
+        <p:spPr>
+          <a:xfrm>
+            <a:off x="8001000" y="3063240"/>
+            <a:ext cx="640080" cy="731520"/>
+          </a:xfrm>
+          <a:prstGeom prst="rect">
+            <a:avLst/>
+          </a:prstGeom>
+          <a:noFill/>
+          <a:ln/>
+        </p:spPr>
+        <p:txBody>
+          <a:bodyPr wrap="square" lIns="0" tIns="0" rIns="0" bIns="0" rtlCol="0" anchor="ctr"/>
+          <a:lstStyle/>
+          <a:p>
+            <a:pPr algn="ctr" indent="0" marL="0">
+              <a:buNone/>
+            </a:pPr>
+            <a:r>
+              <a:rPr lang="en-US" sz="3400" b="1" dirty="0">
+                <a:solidFill>
+                  <a:srgbClr val="1B2A5E"/>
+                </a:solidFill>
+              </a:rPr>
+              <a:t>→</a:t>
+            </a:r>
+            <a:endParaRPr lang="en-US" sz="3400" dirty="0"/>
+          </a:p>
+        </p:txBody>
+      </p:sp>
+      <p:sp>
+        <p:nvSpPr>
+          <p:cNvPr id="20" name="Shape 18"/>
+          <p:cNvSpPr/>
+          <p:nvPr/>
+        </p:nvSpPr>
+        <p:spPr>
+          <a:xfrm>
+            <a:off x="8641080" y="1828800"/>
+            <a:ext cx="3337560" cy="3200400"/>
           </a:xfrm>
           <a:prstGeom prst="roundRect">
             <a:avLst>
-              <a:gd name="adj" fmla="val 2025"/>
+              <a:gd name="adj" fmla="val 2857"/>
             </a:avLst>
           </a:prstGeom>
           <a:solidFill>
             <a:srgbClr val="F2F3F7"/>
           </a:solidFill>
-          <a:ln w="15875">
+          <a:ln w="31750">
             <a:solidFill>
               <a:srgbClr val="C9A227"/>
             </a:solidFill>
@@ -8459,14 +9666,34 @@
       </p:sp>
       <p:sp>
         <p:nvSpPr>
-          <p:cNvPr id="17" name="Text 15"/>
-          <p:cNvSpPr/>
-          <p:nvPr/>
-        </p:nvSpPr>
-        <p:spPr>
-          <a:xfrm>
-            <a:off x="8092440" y="1773936"/>
-            <a:ext cx="3611880" cy="411480"/>
+          <p:cNvPr id="21" name="Shape 19"/>
+          <p:cNvSpPr/>
+          <p:nvPr/>
+        </p:nvSpPr>
+        <p:spPr>
+          <a:xfrm>
+            <a:off x="8641080" y="1828800"/>
+            <a:ext cx="3337560" cy="548640"/>
+          </a:xfrm>
+          <a:prstGeom prst="rect">
+            <a:avLst/>
+          </a:prstGeom>
+          <a:solidFill>
+            <a:srgbClr val="C9A227"/>
+          </a:solidFill>
+          <a:ln/>
+        </p:spPr>
+      </p:sp>
+      <p:sp>
+        <p:nvSpPr>
+          <p:cNvPr id="22" name="Text 20"/>
+          <p:cNvSpPr/>
+          <p:nvPr/>
+        </p:nvSpPr>
+        <p:spPr>
+          <a:xfrm>
+            <a:off x="8641080" y="1828800"/>
+            <a:ext cx="3337560" cy="548640"/>
           </a:xfrm>
           <a:prstGeom prst="rect">
             <a:avLst/>
@@ -8482,27 +9709,27 @@
               <a:buNone/>
             </a:pPr>
             <a:r>
-              <a:rPr lang="en-US" sz="1600" b="1" dirty="0">
-                <a:solidFill>
-                  <a:srgbClr val="C9A227"/>
-                </a:solidFill>
-              </a:rPr>
-              <a:t>Gold (analytique)</a:t>
-            </a:r>
-            <a:endParaRPr lang="en-US" sz="1600" dirty="0"/>
-          </a:p>
-        </p:txBody>
-      </p:sp>
-      <p:sp>
-        <p:nvSpPr>
-          <p:cNvPr id="18" name="Text 16"/>
-          <p:cNvSpPr/>
-          <p:nvPr/>
-        </p:nvSpPr>
-        <p:spPr>
-          <a:xfrm>
-            <a:off x="8293608" y="2240280"/>
-            <a:ext cx="3209544" cy="3291840"/>
+              <a:rPr lang="en-US" sz="1800" b="1" dirty="0">
+                <a:solidFill>
+                  <a:srgbClr val="FFFFFF"/>
+                </a:solidFill>
+              </a:rPr>
+              <a:t>GOLD</a:t>
+            </a:r>
+            <a:endParaRPr lang="en-US" sz="1800" dirty="0"/>
+          </a:p>
+        </p:txBody>
+      </p:sp>
+      <p:sp>
+        <p:nvSpPr>
+          <p:cNvPr id="23" name="Text 21"/>
+          <p:cNvSpPr/>
+          <p:nvPr/>
+        </p:nvSpPr>
+        <p:spPr>
+          <a:xfrm>
+            <a:off x="8869680" y="2560320"/>
+            <a:ext cx="2880360" cy="2286000"/>
           </a:xfrm>
           <a:prstGeom prst="rect">
             <a:avLst/>
@@ -8516,69 +9743,69 @@
           <a:p>
             <a:pPr marL="342900" indent="-342900">
               <a:spcAft>
-                <a:spcPts val="700"/>
+                <a:spcPts val="900"/>
               </a:spcAft>
               <a:buSzPct val="100000"/>
               <a:buChar char="•"/>
             </a:pPr>
             <a:r>
-              <a:rPr lang="en-US" sz="1250" dirty="0">
+              <a:rPr lang="en-US" sz="1300" dirty="0">
                 <a:solidFill>
                   <a:srgbClr val="222222"/>
                 </a:solidFill>
               </a:rPr>
-              <a:t>gold_dataset_analytique</a:t>
-            </a:r>
-            <a:endParaRPr lang="en-US" sz="1250" dirty="0"/>
+              <a:t>1 ligne = 1 (dépt, élection)</a:t>
+            </a:r>
+            <a:endParaRPr lang="en-US" sz="1300" dirty="0"/>
           </a:p>
           <a:p>
             <a:pPr marL="342900" indent="-342900">
               <a:spcAft>
-                <a:spcPts val="700"/>
+                <a:spcPts val="900"/>
               </a:spcAft>
               <a:buSzPct val="100000"/>
               <a:buChar char="•"/>
             </a:pPr>
             <a:r>
-              <a:rPr lang="en-US" sz="1250" dirty="0">
+              <a:rPr lang="en-US" sz="1300" dirty="0">
                 <a:solidFill>
                   <a:srgbClr val="222222"/>
                 </a:solidFill>
               </a:rPr>
-              <a:t>Dénormalisée pour ML &amp; BI</a:t>
-            </a:r>
-            <a:endParaRPr lang="en-US" sz="1250" dirty="0"/>
+              <a:t>Features anti-leakage ≤ N−1</a:t>
+            </a:r>
+            <a:endParaRPr lang="en-US" sz="1300" dirty="0"/>
           </a:p>
           <a:p>
             <a:pPr marL="342900" indent="-342900">
               <a:spcAft>
-                <a:spcPts val="700"/>
+                <a:spcPts val="900"/>
               </a:spcAft>
               <a:buSzPct val="100000"/>
               <a:buChar char="•"/>
             </a:pPr>
             <a:r>
-              <a:rPr lang="en-US" sz="1250" dirty="0">
+              <a:rPr lang="en-US" sz="1300" dirty="0">
                 <a:solidFill>
                   <a:srgbClr val="222222"/>
                 </a:solidFill>
               </a:rPr>
-              <a:t>SQLite indexé : electio_poc.db</a:t>
-            </a:r>
-            <a:endParaRPr lang="en-US" sz="1250" dirty="0"/>
-          </a:p>
-        </p:txBody>
-      </p:sp>
-      <p:sp>
-        <p:nvSpPr>
-          <p:cNvPr id="19" name="Text 17"/>
-          <p:cNvSpPr/>
-          <p:nvPr/>
-        </p:nvSpPr>
-        <p:spPr>
-          <a:xfrm>
-            <a:off x="502920" y="5852160"/>
-            <a:ext cx="11201400" cy="365760"/>
+              <a:t>SQLite + KPI + Postgres</a:t>
+            </a:r>
+            <a:endParaRPr lang="en-US" sz="1300" dirty="0"/>
+          </a:p>
+        </p:txBody>
+      </p:sp>
+      <p:sp>
+        <p:nvSpPr>
+          <p:cNvPr id="24" name="Text 22"/>
+          <p:cNvSpPr/>
+          <p:nvPr/>
+        </p:nvSpPr>
+        <p:spPr>
+          <a:xfrm>
+            <a:off x="685800" y="5486400"/>
+            <a:ext cx="10972800" cy="457200"/>
           </a:xfrm>
           <a:prstGeom prst="rect">
             <a:avLst/>
@@ -8599,7 +9826,7 @@
                   <a:srgbClr val="1B2A5E"/>
                 </a:solidFill>
               </a:rPr>
-              <a:t>384 observations · 96 départements × élections · 6 indicateurs + lag politique</a:t>
+              <a:t>Orchestration : run_pipeline.py · tests pytest · suite DQM (dqm/run_checkpoint.py)</a:t>
             </a:r>
             <a:endParaRPr lang="en-US" sz="1300" dirty="0"/>
           </a:p>
@@ -8687,7 +9914,7 @@
                   <a:srgbClr val="FFFFFF"/>
                 </a:solidFill>
               </a:rPr>
-              <a:t>05</a:t>
+              <a:t>04</a:t>
             </a:r>
             <a:endParaRPr lang="en-US" sz="1300" dirty="0"/>
           </a:p>
@@ -8723,7 +9950,7 @@
                   <a:srgbClr val="1B2A5E"/>
                 </a:solidFill>
               </a:rPr>
-              <a:t>Machine Learning</a:t>
+              <a:t>Modèle de données</a:t>
             </a:r>
             <a:endParaRPr lang="en-US" sz="2900" dirty="0"/>
           </a:p>
@@ -8779,7 +10006,7 @@
                   <a:srgbClr val="0066CC"/>
                 </a:solidFill>
               </a:rPr>
-              <a:t>Classification supervisée du bloc en tête</a:t>
+              <a:t>Schéma en étoile — nommage explicite</a:t>
             </a:r>
             <a:endParaRPr lang="en-US" sz="1400" dirty="0"/>
           </a:p>
@@ -8854,11 +10081,150 @@
         <p:spPr>
           <a:xfrm>
             <a:off x="502920" y="1645920"/>
-            <a:ext cx="5440680" cy="4206240"/>
+            <a:ext cx="3611880" cy="4023360"/>
           </a:xfrm>
           <a:prstGeom prst="roundRect">
             <a:avLst>
-              <a:gd name="adj" fmla="val 1739"/>
+              <a:gd name="adj" fmla="val 2025"/>
+            </a:avLst>
+          </a:prstGeom>
+          <a:solidFill>
+            <a:srgbClr val="F2F3F7"/>
+          </a:solidFill>
+          <a:ln w="15875">
+            <a:solidFill>
+              <a:srgbClr val="0066CC"/>
+            </a:solidFill>
+            <a:prstDash val="solid"/>
+          </a:ln>
+        </p:spPr>
+      </p:sp>
+      <p:sp>
+        <p:nvSpPr>
+          <p:cNvPr id="11" name="Text 9"/>
+          <p:cNvSpPr/>
+          <p:nvPr/>
+        </p:nvSpPr>
+        <p:spPr>
+          <a:xfrm>
+            <a:off x="502920" y="1773936"/>
+            <a:ext cx="3611880" cy="411480"/>
+          </a:xfrm>
+          <a:prstGeom prst="rect">
+            <a:avLst/>
+          </a:prstGeom>
+          <a:noFill/>
+          <a:ln/>
+        </p:spPr>
+        <p:txBody>
+          <a:bodyPr wrap="square" lIns="0" tIns="0" rIns="0" bIns="0" rtlCol="0" anchor="ctr"/>
+          <a:lstStyle/>
+          <a:p>
+            <a:pPr algn="ctr" indent="0" marL="0">
+              <a:buNone/>
+            </a:pPr>
+            <a:r>
+              <a:rPr lang="en-US" sz="1600" b="1" dirty="0">
+                <a:solidFill>
+                  <a:srgbClr val="0066CC"/>
+                </a:solidFill>
+              </a:rPr>
+              <a:t>Dimensions</a:t>
+            </a:r>
+            <a:endParaRPr lang="en-US" sz="1600" dirty="0"/>
+          </a:p>
+        </p:txBody>
+      </p:sp>
+      <p:sp>
+        <p:nvSpPr>
+          <p:cNvPr id="12" name="Text 10"/>
+          <p:cNvSpPr/>
+          <p:nvPr/>
+        </p:nvSpPr>
+        <p:spPr>
+          <a:xfrm>
+            <a:off x="704088" y="2240280"/>
+            <a:ext cx="3209544" cy="3291840"/>
+          </a:xfrm>
+          <a:prstGeom prst="rect">
+            <a:avLst/>
+          </a:prstGeom>
+          <a:noFill/>
+          <a:ln/>
+        </p:spPr>
+        <p:txBody>
+          <a:bodyPr wrap="square" rtlCol="0" anchor="t"/>
+          <a:lstStyle/>
+          <a:p>
+            <a:pPr marL="342900" indent="-342900">
+              <a:spcAft>
+                <a:spcPts val="700"/>
+              </a:spcAft>
+              <a:buSzPct val="100000"/>
+              <a:buChar char="•"/>
+            </a:pPr>
+            <a:r>
+              <a:rPr lang="en-US" sz="1250" dirty="0">
+                <a:solidFill>
+                  <a:srgbClr val="222222"/>
+                </a:solidFill>
+              </a:rPr>
+              <a:t>dim_departement</a:t>
+            </a:r>
+            <a:endParaRPr lang="en-US" sz="1250" dirty="0"/>
+          </a:p>
+          <a:p>
+            <a:pPr marL="342900" indent="-342900">
+              <a:spcAft>
+                <a:spcPts val="700"/>
+              </a:spcAft>
+              <a:buSzPct val="100000"/>
+              <a:buChar char="•"/>
+            </a:pPr>
+            <a:r>
+              <a:rPr lang="en-US" sz="1250" dirty="0">
+                <a:solidFill>
+                  <a:srgbClr val="222222"/>
+                </a:solidFill>
+              </a:rPr>
+              <a:t>dim_annee</a:t>
+            </a:r>
+            <a:endParaRPr lang="en-US" sz="1250" dirty="0"/>
+          </a:p>
+          <a:p>
+            <a:pPr marL="342900" indent="-342900">
+              <a:spcAft>
+                <a:spcPts val="700"/>
+              </a:spcAft>
+              <a:buSzPct val="100000"/>
+              <a:buChar char="•"/>
+            </a:pPr>
+            <a:r>
+              <a:rPr lang="en-US" sz="1250" dirty="0">
+                <a:solidFill>
+                  <a:srgbClr val="222222"/>
+                </a:solidFill>
+              </a:rPr>
+              <a:t>dim_bloc</a:t>
+            </a:r>
+            <a:endParaRPr lang="en-US" sz="1250" dirty="0"/>
+          </a:p>
+        </p:txBody>
+      </p:sp>
+      <p:sp>
+        <p:nvSpPr>
+          <p:cNvPr id="13" name="Shape 11"/>
+          <p:cNvSpPr/>
+          <p:nvPr/>
+        </p:nvSpPr>
+        <p:spPr>
+          <a:xfrm>
+            <a:off x="4297680" y="1645920"/>
+            <a:ext cx="3611880" cy="4023360"/>
+          </a:xfrm>
+          <a:prstGeom prst="roundRect">
+            <a:avLst>
+              <a:gd name="adj" fmla="val 2025"/>
             </a:avLst>
           </a:prstGeom>
           <a:solidFill>
@@ -8874,14 +10240,14 @@
       </p:sp>
       <p:sp>
         <p:nvSpPr>
-          <p:cNvPr id="11" name="Text 9"/>
-          <p:cNvSpPr/>
-          <p:nvPr/>
-        </p:nvSpPr>
-        <p:spPr>
-          <a:xfrm>
-            <a:off x="502920" y="1773936"/>
-            <a:ext cx="5440680" cy="411480"/>
+          <p:cNvPr id="14" name="Text 12"/>
+          <p:cNvSpPr/>
+          <p:nvPr/>
+        </p:nvSpPr>
+        <p:spPr>
+          <a:xfrm>
+            <a:off x="4297680" y="1773936"/>
+            <a:ext cx="3611880" cy="411480"/>
           </a:xfrm>
           <a:prstGeom prst="rect">
             <a:avLst/>
@@ -8902,7 +10268,7 @@
                   <a:srgbClr val="1B2A5E"/>
                 </a:solidFill>
               </a:rPr>
-              <a:t>Protocole rigoureux</a:t>
+              <a:t>Faits</a:t>
             </a:r>
             <a:endParaRPr lang="en-US" sz="1600" dirty="0"/>
           </a:p>
@@ -8910,14 +10276,14 @@
       </p:sp>
       <p:sp>
         <p:nvSpPr>
-          <p:cNvPr id="12" name="Text 10"/>
-          <p:cNvSpPr/>
-          <p:nvPr/>
-        </p:nvSpPr>
-        <p:spPr>
-          <a:xfrm>
-            <a:off x="704088" y="2240280"/>
-            <a:ext cx="5038344" cy="3474720"/>
+          <p:cNvPr id="15" name="Text 13"/>
+          <p:cNvSpPr/>
+          <p:nvPr/>
+        </p:nvSpPr>
+        <p:spPr>
+          <a:xfrm>
+            <a:off x="4498848" y="2240280"/>
+            <a:ext cx="3209544" cy="3291840"/>
           </a:xfrm>
           <a:prstGeom prst="rect">
             <a:avLst/>
@@ -8942,7 +10308,7 @@
                   <a:srgbClr val="222222"/>
                 </a:solidFill>
               </a:rPr>
-              <a:t>Split temporel : test = scrutin le plus récent</a:t>
+              <a:t>fait_resultat_election</a:t>
             </a:r>
             <a:endParaRPr lang="en-US" sz="1250" dirty="0"/>
           </a:p>
@@ -8960,7 +10326,7 @@
                   <a:srgbClr val="222222"/>
                 </a:solidFill>
               </a:rPr>
-              <a:t>Validation croisée GroupKFold par département</a:t>
+              <a:t>fait_chomage_trimestriel</a:t>
             </a:r>
             <a:endParaRPr lang="en-US" sz="1250" dirty="0"/>
           </a:p>
@@ -8978,10 +10344,95 @@
                   <a:srgbClr val="222222"/>
                 </a:solidFill>
               </a:rPr>
-              <a:t>Un dépt jamais en train ET en test (anti-leakage)</a:t>
+              <a:t>fait_emploi_trimestriel</a:t>
             </a:r>
             <a:endParaRPr lang="en-US" sz="1250" dirty="0"/>
           </a:p>
+        </p:txBody>
+      </p:sp>
+      <p:sp>
+        <p:nvSpPr>
+          <p:cNvPr id="16" name="Shape 14"/>
+          <p:cNvSpPr/>
+          <p:nvPr/>
+        </p:nvSpPr>
+        <p:spPr>
+          <a:xfrm>
+            <a:off x="8092440" y="1645920"/>
+            <a:ext cx="3611880" cy="4023360"/>
+          </a:xfrm>
+          <a:prstGeom prst="roundRect">
+            <a:avLst>
+              <a:gd name="adj" fmla="val 2025"/>
+            </a:avLst>
+          </a:prstGeom>
+          <a:solidFill>
+            <a:srgbClr val="F2F3F7"/>
+          </a:solidFill>
+          <a:ln w="15875">
+            <a:solidFill>
+              <a:srgbClr val="C9A227"/>
+            </a:solidFill>
+            <a:prstDash val="solid"/>
+          </a:ln>
+        </p:spPr>
+      </p:sp>
+      <p:sp>
+        <p:nvSpPr>
+          <p:cNvPr id="17" name="Text 15"/>
+          <p:cNvSpPr/>
+          <p:nvPr/>
+        </p:nvSpPr>
+        <p:spPr>
+          <a:xfrm>
+            <a:off x="8092440" y="1773936"/>
+            <a:ext cx="3611880" cy="411480"/>
+          </a:xfrm>
+          <a:prstGeom prst="rect">
+            <a:avLst/>
+          </a:prstGeom>
+          <a:noFill/>
+          <a:ln/>
+        </p:spPr>
+        <p:txBody>
+          <a:bodyPr wrap="square" lIns="0" tIns="0" rIns="0" bIns="0" rtlCol="0" anchor="ctr"/>
+          <a:lstStyle/>
+          <a:p>
+            <a:pPr algn="ctr" indent="0" marL="0">
+              <a:buNone/>
+            </a:pPr>
+            <a:r>
+              <a:rPr lang="en-US" sz="1600" b="1" dirty="0">
+                <a:solidFill>
+                  <a:srgbClr val="C9A227"/>
+                </a:solidFill>
+              </a:rPr>
+              <a:t>Gold (analytique)</a:t>
+            </a:r>
+            <a:endParaRPr lang="en-US" sz="1600" dirty="0"/>
+          </a:p>
+        </p:txBody>
+      </p:sp>
+      <p:sp>
+        <p:nvSpPr>
+          <p:cNvPr id="18" name="Text 16"/>
+          <p:cNvSpPr/>
+          <p:nvPr/>
+        </p:nvSpPr>
+        <p:spPr>
+          <a:xfrm>
+            <a:off x="8293608" y="2240280"/>
+            <a:ext cx="3209544" cy="3291840"/>
+          </a:xfrm>
+          <a:prstGeom prst="rect">
+            <a:avLst/>
+          </a:prstGeom>
+          <a:noFill/>
+          <a:ln/>
+        </p:spPr>
+        <p:txBody>
+          <a:bodyPr wrap="square" rtlCol="0" anchor="t"/>
+          <a:lstStyle/>
           <a:p>
             <a:pPr marL="342900" indent="-342900">
               <a:spcAft>
@@ -8996,95 +10447,10 @@
                   <a:srgbClr val="222222"/>
                 </a:solidFill>
               </a:rPr>
-              <a:t>Métriques : accuracy + F1 macro (classes déséquilibrées)</a:t>
+              <a:t>gold_dataset_analytique</a:t>
             </a:r>
             <a:endParaRPr lang="en-US" sz="1250" dirty="0"/>
           </a:p>
-        </p:txBody>
-      </p:sp>
-      <p:sp>
-        <p:nvSpPr>
-          <p:cNvPr id="13" name="Shape 11"/>
-          <p:cNvSpPr/>
-          <p:nvPr/>
-        </p:nvSpPr>
-        <p:spPr>
-          <a:xfrm>
-            <a:off x="6126480" y="1645920"/>
-            <a:ext cx="5577840" cy="4206240"/>
-          </a:xfrm>
-          <a:prstGeom prst="roundRect">
-            <a:avLst>
-              <a:gd name="adj" fmla="val 1739"/>
-            </a:avLst>
-          </a:prstGeom>
-          <a:solidFill>
-            <a:srgbClr val="F2F3F7"/>
-          </a:solidFill>
-          <a:ln w="15875">
-            <a:solidFill>
-              <a:srgbClr val="0066CC"/>
-            </a:solidFill>
-            <a:prstDash val="solid"/>
-          </a:ln>
-        </p:spPr>
-      </p:sp>
-      <p:sp>
-        <p:nvSpPr>
-          <p:cNvPr id="14" name="Text 12"/>
-          <p:cNvSpPr/>
-          <p:nvPr/>
-        </p:nvSpPr>
-        <p:spPr>
-          <a:xfrm>
-            <a:off x="6126480" y="1773936"/>
-            <a:ext cx="5577840" cy="411480"/>
-          </a:xfrm>
-          <a:prstGeom prst="rect">
-            <a:avLst/>
-          </a:prstGeom>
-          <a:noFill/>
-          <a:ln/>
-        </p:spPr>
-        <p:txBody>
-          <a:bodyPr wrap="square" lIns="0" tIns="0" rIns="0" bIns="0" rtlCol="0" anchor="ctr"/>
-          <a:lstStyle/>
-          <a:p>
-            <a:pPr algn="ctr" indent="0" marL="0">
-              <a:buNone/>
-            </a:pPr>
-            <a:r>
-              <a:rPr lang="en-US" sz="1600" b="1" dirty="0">
-                <a:solidFill>
-                  <a:srgbClr val="0066CC"/>
-                </a:solidFill>
-              </a:rPr>
-              <a:t>5 modèles comparés</a:t>
-            </a:r>
-            <a:endParaRPr lang="en-US" sz="1600" dirty="0"/>
-          </a:p>
-        </p:txBody>
-      </p:sp>
-      <p:sp>
-        <p:nvSpPr>
-          <p:cNvPr id="15" name="Text 13"/>
-          <p:cNvSpPr/>
-          <p:nvPr/>
-        </p:nvSpPr>
-        <p:spPr>
-          <a:xfrm>
-            <a:off x="6327648" y="2240280"/>
-            <a:ext cx="5175504" cy="3474720"/>
-          </a:xfrm>
-          <a:prstGeom prst="rect">
-            <a:avLst/>
-          </a:prstGeom>
-          <a:noFill/>
-          <a:ln/>
-        </p:spPr>
-        <p:txBody>
-          <a:bodyPr wrap="square" rtlCol="0" anchor="t"/>
-          <a:lstStyle/>
           <a:p>
             <a:pPr marL="342900" indent="-342900">
               <a:spcAft>
@@ -9099,7 +10465,7 @@
                   <a:srgbClr val="222222"/>
                 </a:solidFill>
               </a:rPr>
-              <a:t>Baseline (classe majoritaire) — référence</a:t>
+              <a:t>Dénormalisée pour ML &amp; BI</a:t>
             </a:r>
             <a:endParaRPr lang="en-US" sz="1250" dirty="0"/>
           </a:p>
@@ -9117,63 +10483,45 @@
                   <a:srgbClr val="222222"/>
                 </a:solidFill>
               </a:rPr>
-              <a:t>Régression logistique</a:t>
+              <a:t>SQLite indexé : electio_poc.db</a:t>
             </a:r>
             <a:endParaRPr lang="en-US" sz="1250" dirty="0"/>
           </a:p>
-          <a:p>
-            <a:pPr marL="342900" indent="-342900">
-              <a:spcAft>
-                <a:spcPts val="700"/>
-              </a:spcAft>
-              <a:buSzPct val="100000"/>
-              <a:buChar char="•"/>
-            </a:pPr>
-            <a:r>
-              <a:rPr lang="en-US" sz="1250" dirty="0">
-                <a:solidFill>
-                  <a:srgbClr val="222222"/>
-                </a:solidFill>
-              </a:rPr>
-              <a:t>Arbre de décision</a:t>
-            </a:r>
-            <a:endParaRPr lang="en-US" sz="1250" dirty="0"/>
-          </a:p>
-          <a:p>
-            <a:pPr marL="342900" indent="-342900">
-              <a:spcAft>
-                <a:spcPts val="700"/>
-              </a:spcAft>
-              <a:buSzPct val="100000"/>
-              <a:buChar char="•"/>
-            </a:pPr>
-            <a:r>
-              <a:rPr lang="en-US" sz="1250" dirty="0">
-                <a:solidFill>
-                  <a:srgbClr val="222222"/>
-                </a:solidFill>
-              </a:rPr>
-              <a:t>Random Forest (fort en CV géo)</a:t>
-            </a:r>
-            <a:endParaRPr lang="en-US" sz="1250" dirty="0"/>
-          </a:p>
-          <a:p>
-            <a:pPr marL="342900" indent="-342900">
-              <a:spcAft>
-                <a:spcPts val="700"/>
-              </a:spcAft>
-              <a:buSzPct val="100000"/>
-              <a:buChar char="•"/>
-            </a:pPr>
-            <a:r>
-              <a:rPr lang="en-US" sz="1250" dirty="0">
-                <a:solidFill>
-                  <a:srgbClr val="222222"/>
-                </a:solidFill>
-              </a:rPr>
-              <a:t>Gradient Boosting — retenu (walk-forward)</a:t>
-            </a:r>
-            <a:endParaRPr lang="en-US" sz="1250" dirty="0"/>
+        </p:txBody>
+      </p:sp>
+      <p:sp>
+        <p:nvSpPr>
+          <p:cNvPr id="19" name="Text 17"/>
+          <p:cNvSpPr/>
+          <p:nvPr/>
+        </p:nvSpPr>
+        <p:spPr>
+          <a:xfrm>
+            <a:off x="502920" y="5852160"/>
+            <a:ext cx="11201400" cy="365760"/>
+          </a:xfrm>
+          <a:prstGeom prst="rect">
+            <a:avLst/>
+          </a:prstGeom>
+          <a:noFill/>
+          <a:ln/>
+        </p:spPr>
+        <p:txBody>
+          <a:bodyPr wrap="square" rtlCol="0" anchor="ctr"/>
+          <a:lstStyle/>
+          <a:p>
+            <a:pPr algn="ctr" indent="0" marL="0">
+              <a:buNone/>
+            </a:pPr>
+            <a:r>
+              <a:rPr lang="en-US" sz="1300" i="1" dirty="0">
+                <a:solidFill>
+                  <a:srgbClr val="1B2A5E"/>
+                </a:solidFill>
+              </a:rPr>
+              <a:t>480 lignes GOLD · 384 observations ML · référentiel partagé ETL / SQL / Metabase</a:t>
+            </a:r>
+            <a:endParaRPr lang="en-US" sz="1300" dirty="0"/>
           </a:p>
         </p:txBody>
       </p:sp>
@@ -9259,7 +10607,7 @@
                   <a:srgbClr val="FFFFFF"/>
                 </a:solidFill>
               </a:rPr>
-              <a:t>06</a:t>
+              <a:t>05</a:t>
             </a:r>
             <a:endParaRPr lang="en-US" sz="1300" dirty="0"/>
           </a:p>
@@ -9295,7 +10643,7 @@
                   <a:srgbClr val="1B2A5E"/>
                 </a:solidFill>
               </a:rPr>
-              <a:t>Résultats &amp; accuracy</a:t>
+              <a:t>Machine Learning</a:t>
             </a:r>
             <a:endParaRPr lang="en-US" sz="2900" dirty="0"/>
           </a:p>
@@ -9351,7 +10699,7 @@
                   <a:srgbClr val="0066CC"/>
                 </a:solidFill>
               </a:rPr>
-              <a:t>Gradient Boosting — holdout 2022 = 0,53 (données réelles)</a:t>
+              <a:t>Classification supervisée du bloc en tête</a:t>
             </a:r>
             <a:endParaRPr lang="en-US" sz="1400" dirty="0"/>
           </a:p>
@@ -9417,67 +10765,20 @@
           <a:ln/>
         </p:spPr>
       </p:sp>
-      <p:pic>
-        <p:nvPicPr>
-          <p:cNvPr id="10" name="Image 0" descr="C:\Users\amine\Downloads\POC_ElectioAnalytics_projet_complet\viz\output\6_model_compare.png">    </p:cNvPr>
-          <p:cNvPicPr>
-            <a:picLocks noChangeAspect="1"/>
-          </p:cNvPicPr>
-          <p:nvPr/>
-        </p:nvPicPr>
-        <p:blipFill>
-          <a:blip r:embed="rId1"/>
-          <a:stretch>
-            <a:fillRect/>
-          </a:stretch>
-        </p:blipFill>
+      <p:sp>
+        <p:nvSpPr>
+          <p:cNvPr id="10" name="Shape 8"/>
+          <p:cNvSpPr/>
+          <p:nvPr/>
+        </p:nvSpPr>
         <p:spPr>
           <a:xfrm>
             <a:off x="502920" y="1645920"/>
-            <a:ext cx="5852160" cy="3291840"/>
-          </a:xfrm>
-          <a:prstGeom prst="rect">
-            <a:avLst/>
-          </a:prstGeom>
-        </p:spPr>
-      </p:pic>
-      <p:pic>
-        <p:nvPicPr>
-          <p:cNvPr id="11" name="Image 1" descr="C:\Users\amine\Downloads\POC_ElectioAnalytics_projet_complet\viz\output\5_confusion.png">    </p:cNvPr>
-          <p:cNvPicPr>
-            <a:picLocks noChangeAspect="1"/>
-          </p:cNvPicPr>
-          <p:nvPr/>
-        </p:nvPicPr>
-        <p:blipFill>
-          <a:blip r:embed="rId2"/>
-          <a:srcRect l="0" r="0" t="0" b="0"/>
-          <a:stretch/>
-        </p:blipFill>
-        <p:spPr>
-          <a:xfrm>
-            <a:off x="1463040" y="5029200"/>
-            <a:ext cx="3931920" cy="1371600"/>
-          </a:xfrm>
-          <a:prstGeom prst="rect">
-            <a:avLst/>
-          </a:prstGeom>
-        </p:spPr>
-      </p:pic>
-      <p:sp>
-        <p:nvSpPr>
-          <p:cNvPr id="12" name="Shape 8"/>
-          <p:cNvSpPr/>
-          <p:nvPr/>
-        </p:nvSpPr>
-        <p:spPr>
-          <a:xfrm>
-            <a:off x="6583680" y="1645920"/>
-            <a:ext cx="5120640" cy="4754880"/>
+            <a:ext cx="5440680" cy="4206240"/>
           </a:xfrm>
           <a:prstGeom prst="roundRect">
             <a:avLst>
-              <a:gd name="adj" fmla="val 1538"/>
+              <a:gd name="adj" fmla="val 1739"/>
             </a:avLst>
           </a:prstGeom>
           <a:solidFill>
@@ -9485,7 +10786,7 @@
           </a:solidFill>
           <a:ln w="15875">
             <a:solidFill>
-              <a:srgbClr val="C9A227"/>
+              <a:srgbClr val="1B2A5E"/>
             </a:solidFill>
             <a:prstDash val="solid"/>
           </a:ln>
@@ -9493,14 +10794,14 @@
       </p:sp>
       <p:sp>
         <p:nvSpPr>
-          <p:cNvPr id="13" name="Text 9"/>
-          <p:cNvSpPr/>
-          <p:nvPr/>
-        </p:nvSpPr>
-        <p:spPr>
-          <a:xfrm>
-            <a:off x="6583680" y="1773936"/>
-            <a:ext cx="5120640" cy="411480"/>
+          <p:cNvPr id="11" name="Text 9"/>
+          <p:cNvSpPr/>
+          <p:nvPr/>
+        </p:nvSpPr>
+        <p:spPr>
+          <a:xfrm>
+            <a:off x="502920" y="1773936"/>
+            <a:ext cx="5440680" cy="411480"/>
           </a:xfrm>
           <a:prstGeom prst="rect">
             <a:avLst/>
@@ -9518,10 +10819,10 @@
             <a:r>
               <a:rPr lang="en-US" sz="1600" b="1" dirty="0">
                 <a:solidFill>
-                  <a:srgbClr val="C9A227"/>
-                </a:solidFill>
-              </a:rPr>
-              <a:t>Métriques clés (données réelles)</a:t>
+                  <a:srgbClr val="1B2A5E"/>
+                </a:solidFill>
+              </a:rPr>
+              <a:t>Protocole rigoureux</a:t>
             </a:r>
             <a:endParaRPr lang="en-US" sz="1600" dirty="0"/>
           </a:p>
@@ -9529,14 +10830,14 @@
       </p:sp>
       <p:sp>
         <p:nvSpPr>
-          <p:cNvPr id="14" name="Text 10"/>
-          <p:cNvSpPr/>
-          <p:nvPr/>
-        </p:nvSpPr>
-        <p:spPr>
-          <a:xfrm>
-            <a:off x="6784848" y="2240280"/>
-            <a:ext cx="4718304" cy="4023360"/>
+          <p:cNvPr id="12" name="Text 10"/>
+          <p:cNvSpPr/>
+          <p:nvPr/>
+        </p:nvSpPr>
+        <p:spPr>
+          <a:xfrm>
+            <a:off x="704088" y="2240280"/>
+            <a:ext cx="5038344" cy="3474720"/>
           </a:xfrm>
           <a:prstGeom prst="rect">
             <a:avLst/>
@@ -9561,7 +10862,7 @@
                   <a:srgbClr val="222222"/>
                 </a:solidFill>
               </a:rPr>
-              <a:t>Holdout 2022 : 0,53 (&gt; 0,5)</a:t>
+              <a:t>Split temporel : holdout = scrutin 2022</a:t>
             </a:r>
             <a:endParaRPr lang="en-US" sz="1250" dirty="0"/>
           </a:p>
@@ -9579,7 +10880,7 @@
                   <a:srgbClr val="222222"/>
                 </a:solidFill>
               </a:rPr>
-              <a:t>Walk-forward : 0,37</a:t>
+              <a:t>Sélection : 0,4×walk-forward + 0,6×holdout</a:t>
             </a:r>
             <a:endParaRPr lang="en-US" sz="1250" dirty="0"/>
           </a:p>
@@ -9597,7 +10898,7 @@
                   <a:srgbClr val="222222"/>
                 </a:solidFill>
               </a:rPr>
-              <a:t>CV géo secondaire : 0,72</a:t>
+              <a:t>CV GroupKFold = métrique secondaire</a:t>
             </a:r>
             <a:endParaRPr lang="en-US" sz="1250" dirty="0"/>
           </a:p>
@@ -9615,10 +10916,95 @@
                   <a:srgbClr val="222222"/>
                 </a:solidFill>
               </a:rPr>
-              <a:t>Baseline CV : 0,41</a:t>
+              <a:t>Features ≤ N−1 (anti-leakage ETL)</a:t>
             </a:r>
             <a:endParaRPr lang="en-US" sz="1250" dirty="0"/>
           </a:p>
+        </p:txBody>
+      </p:sp>
+      <p:sp>
+        <p:nvSpPr>
+          <p:cNvPr id="13" name="Shape 11"/>
+          <p:cNvSpPr/>
+          <p:nvPr/>
+        </p:nvSpPr>
+        <p:spPr>
+          <a:xfrm>
+            <a:off x="6126480" y="1645920"/>
+            <a:ext cx="5577840" cy="4206240"/>
+          </a:xfrm>
+          <a:prstGeom prst="roundRect">
+            <a:avLst>
+              <a:gd name="adj" fmla="val 1739"/>
+            </a:avLst>
+          </a:prstGeom>
+          <a:solidFill>
+            <a:srgbClr val="F2F3F7"/>
+          </a:solidFill>
+          <a:ln w="15875">
+            <a:solidFill>
+              <a:srgbClr val="0066CC"/>
+            </a:solidFill>
+            <a:prstDash val="solid"/>
+          </a:ln>
+        </p:spPr>
+      </p:sp>
+      <p:sp>
+        <p:nvSpPr>
+          <p:cNvPr id="14" name="Text 12"/>
+          <p:cNvSpPr/>
+          <p:nvPr/>
+        </p:nvSpPr>
+        <p:spPr>
+          <a:xfrm>
+            <a:off x="6126480" y="1773936"/>
+            <a:ext cx="5577840" cy="411480"/>
+          </a:xfrm>
+          <a:prstGeom prst="rect">
+            <a:avLst/>
+          </a:prstGeom>
+          <a:noFill/>
+          <a:ln/>
+        </p:spPr>
+        <p:txBody>
+          <a:bodyPr wrap="square" lIns="0" tIns="0" rIns="0" bIns="0" rtlCol="0" anchor="ctr"/>
+          <a:lstStyle/>
+          <a:p>
+            <a:pPr algn="ctr" indent="0" marL="0">
+              <a:buNone/>
+            </a:pPr>
+            <a:r>
+              <a:rPr lang="en-US" sz="1600" b="1" dirty="0">
+                <a:solidFill>
+                  <a:srgbClr val="0066CC"/>
+                </a:solidFill>
+              </a:rPr>
+              <a:t>5 modèles comparés</a:t>
+            </a:r>
+            <a:endParaRPr lang="en-US" sz="1600" dirty="0"/>
+          </a:p>
+        </p:txBody>
+      </p:sp>
+      <p:sp>
+        <p:nvSpPr>
+          <p:cNvPr id="15" name="Text 13"/>
+          <p:cNvSpPr/>
+          <p:nvPr/>
+        </p:nvSpPr>
+        <p:spPr>
+          <a:xfrm>
+            <a:off x="6327648" y="2240280"/>
+            <a:ext cx="5175504" cy="3474720"/>
+          </a:xfrm>
+          <a:prstGeom prst="rect">
+            <a:avLst/>
+          </a:prstGeom>
+          <a:noFill/>
+          <a:ln/>
+        </p:spPr>
+        <p:txBody>
+          <a:bodyPr wrap="square" rtlCol="0" anchor="t"/>
+          <a:lstStyle/>
           <a:p>
             <a:pPr marL="342900" indent="-342900">
               <a:spcAft>
@@ -9633,7 +11019,7 @@
                   <a:srgbClr val="222222"/>
                 </a:solidFill>
               </a:rPr>
-              <a:t>Sélection temporelle (pas stickiness RF)</a:t>
+              <a:t>Baseline (classe majoritaire)</a:t>
             </a:r>
             <a:endParaRPr lang="en-US" sz="1250" dirty="0"/>
           </a:p>
@@ -9651,7 +11037,7 @@
                   <a:srgbClr val="222222"/>
                 </a:solidFill>
               </a:rPr>
-              <a:t>Top feature : pct gagnant précédent</a:t>
+              <a:t>Régression logistique</a:t>
             </a:r>
             <a:endParaRPr lang="en-US" sz="1250" dirty="0"/>
           </a:p>
@@ -9669,7 +11055,43 @@
                   <a:srgbClr val="222222"/>
                 </a:solidFill>
               </a:rPr>
-              <a:t>Pauvreté : 40 % GOLD, hors modèle ML</a:t>
+              <a:t>Arbre de décision</a:t>
+            </a:r>
+            <a:endParaRPr lang="en-US" sz="1250" dirty="0"/>
+          </a:p>
+          <a:p>
+            <a:pPr marL="342900" indent="-342900">
+              <a:spcAft>
+                <a:spcPts val="700"/>
+              </a:spcAft>
+              <a:buSzPct val="100000"/>
+              <a:buChar char="•"/>
+            </a:pPr>
+            <a:r>
+              <a:rPr lang="en-US" sz="1250" dirty="0">
+                <a:solidFill>
+                  <a:srgbClr val="222222"/>
+                </a:solidFill>
+              </a:rPr>
+              <a:t>Random Forest (fort en CV géo)</a:t>
+            </a:r>
+            <a:endParaRPr lang="en-US" sz="1250" dirty="0"/>
+          </a:p>
+          <a:p>
+            <a:pPr marL="342900" indent="-342900">
+              <a:spcAft>
+                <a:spcPts val="700"/>
+              </a:spcAft>
+              <a:buSzPct val="100000"/>
+              <a:buChar char="•"/>
+            </a:pPr>
+            <a:r>
+              <a:rPr lang="en-US" sz="1250" dirty="0">
+                <a:solidFill>
+                  <a:srgbClr val="222222"/>
+                </a:solidFill>
+              </a:rPr>
+              <a:t>Gradient Boosting — retenu (temporel)</a:t>
             </a:r>
             <a:endParaRPr lang="en-US" sz="1250" dirty="0"/>
           </a:p>
@@ -9757,7 +11179,7 @@
                   <a:srgbClr val="FFFFFF"/>
                 </a:solidFill>
               </a:rPr>
-              <a:t>07</a:t>
+              <a:t>06</a:t>
             </a:r>
             <a:endParaRPr lang="en-US" sz="1300" dirty="0"/>
           </a:p>
@@ -9793,7 +11215,7 @@
                   <a:srgbClr val="1B2A5E"/>
                 </a:solidFill>
               </a:rPr>
-              <a:t>Visualisations</a:t>
+              <a:t>Résultats &amp; accuracy</a:t>
             </a:r>
             <a:endParaRPr lang="en-US" sz="2900" dirty="0"/>
           </a:p>
@@ -9849,7 +11271,7 @@
                   <a:srgbClr val="0066CC"/>
                 </a:solidFill>
               </a:rPr>
-              <a:t>Exploration &amp; restitution</a:t>
+              <a:t>Gradient Boosting — holdout 2022 = 0,53 (données réelles)</a:t>
             </a:r>
             <a:endParaRPr lang="en-US" sz="1400" dirty="0"/>
           </a:p>
@@ -9917,7 +11339,7 @@
       </p:sp>
       <p:pic>
         <p:nvPicPr>
-          <p:cNvPr id="10" name="Image 0" descr="C:\Users\amine\Downloads\POC_ElectioAnalytics_projet_complet\viz\output\1_evolution_blocs.png">    </p:cNvPr>
+          <p:cNvPr id="10" name="Image 0" descr="C:\Users\amine\Downloads\POC_ElectioAnalytics_projet_complet\viz\output\6_model_compare.png">    </p:cNvPr>
           <p:cNvPicPr>
             <a:picLocks noChangeAspect="1"/>
           </p:cNvPicPr>
@@ -9931,8 +11353,8 @@
         </p:blipFill>
         <p:spPr>
           <a:xfrm>
-            <a:off x="502920" y="1600200"/>
-            <a:ext cx="5486400" cy="3044952"/>
+            <a:off x="502920" y="1645920"/>
+            <a:ext cx="5852160" cy="3291840"/>
           </a:xfrm>
           <a:prstGeom prst="rect">
             <a:avLst/>
@@ -9941,7 +11363,7 @@
       </p:pic>
       <p:pic>
         <p:nvPicPr>
-          <p:cNvPr id="11" name="Image 1" descr="C:\Users\amine\Downloads\POC_ElectioAnalytics_projet_complet\viz\output\3_correlations.png">    </p:cNvPr>
+          <p:cNvPr id="11" name="Image 1" descr="C:\Users\amine\Downloads\POC_ElectioAnalytics_projet_complet\viz\output\5_confusion.png">    </p:cNvPr>
           <p:cNvPicPr>
             <a:picLocks noChangeAspect="1"/>
           </p:cNvPicPr>
@@ -9949,44 +11371,230 @@
         </p:nvPicPr>
         <p:blipFill>
           <a:blip r:embed="rId2"/>
-          <a:stretch>
-            <a:fillRect/>
-          </a:stretch>
+          <a:srcRect l="0" r="0" t="0" b="0"/>
+          <a:stretch/>
         </p:blipFill>
         <p:spPr>
           <a:xfrm>
-            <a:off x="6309360" y="1600200"/>
-            <a:ext cx="4572000" cy="3712464"/>
+            <a:off x="1463040" y="5029200"/>
+            <a:ext cx="3931920" cy="1371600"/>
           </a:xfrm>
           <a:prstGeom prst="rect">
             <a:avLst/>
           </a:prstGeom>
         </p:spPr>
       </p:pic>
-      <p:pic>
-        <p:nvPicPr>
-          <p:cNvPr id="12" name="Image 2" descr="C:\Users\amine\Downloads\POC_ElectioAnalytics_projet_complet\viz\output\4_chomage_par_bloc.png">    </p:cNvPr>
-          <p:cNvPicPr>
-            <a:picLocks noChangeAspect="1"/>
-          </p:cNvPicPr>
-          <p:nvPr/>
-        </p:nvPicPr>
-        <p:blipFill>
-          <a:blip r:embed="rId3"/>
-          <a:stretch>
-            <a:fillRect/>
-          </a:stretch>
-        </p:blipFill>
-        <p:spPr>
-          <a:xfrm>
-            <a:off x="502920" y="4754880"/>
-            <a:ext cx="4572000" cy="1737360"/>
-          </a:xfrm>
-          <a:prstGeom prst="rect">
-            <a:avLst/>
-          </a:prstGeom>
-        </p:spPr>
-      </p:pic>
+      <p:sp>
+        <p:nvSpPr>
+          <p:cNvPr id="12" name="Shape 8"/>
+          <p:cNvSpPr/>
+          <p:nvPr/>
+        </p:nvSpPr>
+        <p:spPr>
+          <a:xfrm>
+            <a:off x="6583680" y="1645920"/>
+            <a:ext cx="5120640" cy="4754880"/>
+          </a:xfrm>
+          <a:prstGeom prst="roundRect">
+            <a:avLst>
+              <a:gd name="adj" fmla="val 1538"/>
+            </a:avLst>
+          </a:prstGeom>
+          <a:solidFill>
+            <a:srgbClr val="F2F3F7"/>
+          </a:solidFill>
+          <a:ln w="15875">
+            <a:solidFill>
+              <a:srgbClr val="C9A227"/>
+            </a:solidFill>
+            <a:prstDash val="solid"/>
+          </a:ln>
+        </p:spPr>
+      </p:sp>
+      <p:sp>
+        <p:nvSpPr>
+          <p:cNvPr id="13" name="Text 9"/>
+          <p:cNvSpPr/>
+          <p:nvPr/>
+        </p:nvSpPr>
+        <p:spPr>
+          <a:xfrm>
+            <a:off x="6583680" y="1773936"/>
+            <a:ext cx="5120640" cy="411480"/>
+          </a:xfrm>
+          <a:prstGeom prst="rect">
+            <a:avLst/>
+          </a:prstGeom>
+          <a:noFill/>
+          <a:ln/>
+        </p:spPr>
+        <p:txBody>
+          <a:bodyPr wrap="square" lIns="0" tIns="0" rIns="0" bIns="0" rtlCol="0" anchor="ctr"/>
+          <a:lstStyle/>
+          <a:p>
+            <a:pPr algn="ctr" indent="0" marL="0">
+              <a:buNone/>
+            </a:pPr>
+            <a:r>
+              <a:rPr lang="en-US" sz="1600" b="1" dirty="0">
+                <a:solidFill>
+                  <a:srgbClr val="C9A227"/>
+                </a:solidFill>
+              </a:rPr>
+              <a:t>Chiffres figés (CHIFFRES_FIGES.md)</a:t>
+            </a:r>
+            <a:endParaRPr lang="en-US" sz="1600" dirty="0"/>
+          </a:p>
+        </p:txBody>
+      </p:sp>
+      <p:sp>
+        <p:nvSpPr>
+          <p:cNvPr id="14" name="Text 10"/>
+          <p:cNvSpPr/>
+          <p:nvPr/>
+        </p:nvSpPr>
+        <p:spPr>
+          <a:xfrm>
+            <a:off x="6784848" y="2240280"/>
+            <a:ext cx="4718304" cy="4023360"/>
+          </a:xfrm>
+          <a:prstGeom prst="rect">
+            <a:avLst/>
+          </a:prstGeom>
+          <a:noFill/>
+          <a:ln/>
+        </p:spPr>
+        <p:txBody>
+          <a:bodyPr wrap="square" rtlCol="0" anchor="t"/>
+          <a:lstStyle/>
+          <a:p>
+            <a:pPr marL="342900" indent="-342900">
+              <a:spcAft>
+                <a:spcPts val="700"/>
+              </a:spcAft>
+              <a:buSzPct val="100000"/>
+              <a:buChar char="•"/>
+            </a:pPr>
+            <a:r>
+              <a:rPr lang="en-US" sz="1250" dirty="0">
+                <a:solidFill>
+                  <a:srgbClr val="222222"/>
+                </a:solidFill>
+              </a:rPr>
+              <a:t>Holdout 2022 : 0,53 (&gt; 0,5)</a:t>
+            </a:r>
+            <a:endParaRPr lang="en-US" sz="1250" dirty="0"/>
+          </a:p>
+          <a:p>
+            <a:pPr marL="342900" indent="-342900">
+              <a:spcAft>
+                <a:spcPts val="700"/>
+              </a:spcAft>
+              <a:buSzPct val="100000"/>
+              <a:buChar char="•"/>
+            </a:pPr>
+            <a:r>
+              <a:rPr lang="en-US" sz="1250" dirty="0">
+                <a:solidFill>
+                  <a:srgbClr val="222222"/>
+                </a:solidFill>
+              </a:rPr>
+              <a:t>Walk-forward : 0,37</a:t>
+            </a:r>
+            <a:endParaRPr lang="en-US" sz="1250" dirty="0"/>
+          </a:p>
+          <a:p>
+            <a:pPr marL="342900" indent="-342900">
+              <a:spcAft>
+                <a:spcPts val="700"/>
+              </a:spcAft>
+              <a:buSzPct val="100000"/>
+              <a:buChar char="•"/>
+            </a:pPr>
+            <a:r>
+              <a:rPr lang="en-US" sz="1250" dirty="0">
+                <a:solidFill>
+                  <a:srgbClr val="222222"/>
+                </a:solidFill>
+              </a:rPr>
+              <a:t>CV géo secondaire : 0,72</a:t>
+            </a:r>
+            <a:endParaRPr lang="en-US" sz="1250" dirty="0"/>
+          </a:p>
+          <a:p>
+            <a:pPr marL="342900" indent="-342900">
+              <a:spcAft>
+                <a:spcPts val="700"/>
+              </a:spcAft>
+              <a:buSzPct val="100000"/>
+              <a:buChar char="•"/>
+            </a:pPr>
+            <a:r>
+              <a:rPr lang="en-US" sz="1250" dirty="0">
+                <a:solidFill>
+                  <a:srgbClr val="222222"/>
+                </a:solidFill>
+              </a:rPr>
+              <a:t>Baseline CV : 0,41</a:t>
+            </a:r>
+            <a:endParaRPr lang="en-US" sz="1250" dirty="0"/>
+          </a:p>
+          <a:p>
+            <a:pPr marL="342900" indent="-342900">
+              <a:spcAft>
+                <a:spcPts val="700"/>
+              </a:spcAft>
+              <a:buSzPct val="100000"/>
+              <a:buChar char="•"/>
+            </a:pPr>
+            <a:r>
+              <a:rPr lang="en-US" sz="1250" dirty="0">
+                <a:solidFill>
+                  <a:srgbClr val="222222"/>
+                </a:solidFill>
+              </a:rPr>
+              <a:t>Top feature : pct gagnant précédent</a:t>
+            </a:r>
+            <a:endParaRPr lang="en-US" sz="1250" dirty="0"/>
+          </a:p>
+          <a:p>
+            <a:pPr marL="342900" indent="-342900">
+              <a:spcAft>
+                <a:spcPts val="700"/>
+              </a:spcAft>
+              <a:buSzPct val="100000"/>
+              <a:buChar char="•"/>
+            </a:pPr>
+            <a:r>
+              <a:rPr lang="en-US" sz="1250" dirty="0">
+                <a:solidFill>
+                  <a:srgbClr val="222222"/>
+                </a:solidFill>
+              </a:rPr>
+              <a:t>Pauvreté : 40 % GOLD, hors ML</a:t>
+            </a:r>
+            <a:endParaRPr lang="en-US" sz="1250" dirty="0"/>
+          </a:p>
+          <a:p>
+            <a:pPr marL="342900" indent="-342900">
+              <a:spcAft>
+                <a:spcPts val="700"/>
+              </a:spcAft>
+              <a:buSzPct val="100000"/>
+              <a:buChar char="•"/>
+            </a:pPr>
+            <a:r>
+              <a:rPr lang="en-US" sz="1250" dirty="0">
+                <a:solidFill>
+                  <a:srgbClr val="222222"/>
+                </a:solidFill>
+              </a:rPr>
+              <a:t>Source : data/ml_report.json</a:t>
+            </a:r>
+            <a:endParaRPr lang="en-US" sz="1250" dirty="0"/>
+          </a:p>
+        </p:txBody>
+      </p:sp>
     </p:spTree>
   </p:cSld>
   <p:clrMapOvr>

--- a/docs/livrables/Support_soutenance_POC_ElectioAnalytics.pptx
+++ b/docs/livrables/Support_soutenance_POC_ElectioAnalytics.pptx
@@ -20,9 +20,10 @@
     <p:sldId id="268" r:id="rId14"/>
     <p:sldId id="269" r:id="rId15"/>
     <p:sldId id="270" r:id="rId16"/>
+    <p:sldId id="271" r:id="rId17"/>
   </p:sldIdLst>
   <p:notesMasterIdLst>
-    <p:notesMasterId r:id="rId17"/>
+    <p:notesMasterId r:id="rId18"/>
   </p:notesMasterIdLst>
   <p:sldSz cx="12192000" cy="6858000"/>
   <p:notesSz cx="6858000" cy="12192000"/>
@@ -1086,6 +1087,94 @@
 </p:notes>
 </file>
 
+<file path=ppt/notesSlides/notesSlide16.xml><?xml version="1.0" encoding="utf-8"?>
+<p:notes xmlns:a="http://schemas.openxmlformats.org/drawingml/2006/main" xmlns:r="http://schemas.openxmlformats.org/officeDocument/2006/relationships" xmlns:p="http://schemas.openxmlformats.org/presentationml/2006/main">
+  <p:cSld>
+    <p:spTree>
+      <p:nvGrpSpPr>
+        <p:cNvPr id="1" name=""/>
+        <p:cNvGrpSpPr/>
+        <p:nvPr/>
+      </p:nvGrpSpPr>
+      <p:grpSpPr>
+        <a:xfrm>
+          <a:off x="0" y="0"/>
+          <a:ext cx="0" cy="0"/>
+          <a:chOff x="0" y="0"/>
+          <a:chExt cx="0" cy="0"/>
+        </a:xfrm>
+      </p:grpSpPr>
+      <p:sp>
+        <p:nvSpPr>
+          <p:cNvPr id="2" name="Slide Image Placeholder 1"/>
+          <p:cNvSpPr>
+            <a:spLocks noGrp="1" noRot="1" noChangeAspect="1"/>
+          </p:cNvSpPr>
+          <p:nvPr>
+            <p:ph type="sldImg"/>
+          </p:nvPr>
+        </p:nvSpPr>
+        <p:spPr/>
+      </p:sp>
+      <p:sp>
+        <p:nvSpPr>
+          <p:cNvPr id="3" name="Notes Placeholder 2"/>
+          <p:cNvSpPr>
+            <a:spLocks noGrp="1"/>
+          </p:cNvSpPr>
+          <p:nvPr>
+            <p:ph type="body" idx="1"/>
+          </p:nvPr>
+        </p:nvSpPr>
+        <p:spPr/>
+        <p:txBody>
+          <a:bodyPr/>
+          <a:lstStyle/>
+          <a:p>
+            <a:r>
+              <a:rPr lang="en-US" dirty="0"/>
+              <a:t/>
+            </a:r>
+            <a:endParaRPr lang="en-US" dirty="0"/>
+          </a:p>
+        </p:txBody>
+      </p:sp>
+      <p:sp>
+        <p:nvSpPr>
+          <p:cNvPr id="4" name="Slide Number Placeholder 3"/>
+          <p:cNvSpPr>
+            <a:spLocks noGrp="1"/>
+          </p:cNvSpPr>
+          <p:nvPr>
+            <p:ph type="sldNum" sz="quarter" idx="10"/>
+          </p:nvPr>
+        </p:nvSpPr>
+        <p:spPr/>
+        <p:txBody>
+          <a:bodyPr/>
+          <a:lstStyle/>
+          <a:p>
+            <a:fld id="{F7021451-1387-4CA6-816F-3879F97B5CBC}" type="slidenum">
+              <a:rPr lang="en-US"/>
+              <a:t>16</a:t>
+            </a:fld>
+            <a:endParaRPr lang="en-US"/>
+          </a:p>
+        </p:txBody>
+      </p:sp>
+    </p:spTree>
+    <p:extLst>
+      <p:ext uri="{BB962C8B-B14F-4D97-AF65-F5344CB8AC3E}">
+        <p14:creationId xmlns:p14="http://schemas.microsoft.com/office/powerpoint/2010/main" val="1024086991"/>
+      </p:ext>
+    </p:extLst>
+  </p:cSld>
+  <p:clrMapOvr>
+    <a:masterClrMapping/>
+  </p:clrMapOvr>
+</p:notes>
+</file>
+
 <file path=ppt/notesSlides/notesSlide2.xml><?xml version="1.0" encoding="utf-8"?>
 <p:notes xmlns:a="http://schemas.openxmlformats.org/drawingml/2006/main" xmlns:r="http://schemas.openxmlformats.org/officeDocument/2006/relationships" xmlns:p="http://schemas.openxmlformats.org/presentationml/2006/main">
   <p:cSld>
@@ -2420,7 +2509,7 @@
                   <a:srgbClr val="FFFFFF"/>
                 </a:solidFill>
               </a:rPr>
-              <a:t>07</a:t>
+              <a:t>06</a:t>
             </a:r>
             <a:endParaRPr lang="en-US" sz="1300" dirty="0"/>
           </a:p>
@@ -2456,7 +2545,7 @@
                   <a:srgbClr val="1B2A5E"/>
                 </a:solidFill>
               </a:rPr>
-              <a:t>Qualité DQM &amp; restitution Metabase</a:t>
+              <a:t>Résultats &amp; accuracy</a:t>
             </a:r>
             <a:endParaRPr lang="en-US" sz="2900" dirty="0"/>
           </a:p>
@@ -2512,7 +2601,7 @@
                   <a:srgbClr val="0066CC"/>
                 </a:solidFill>
               </a:rPr>
-              <a:t>Suite DQM interne + BI jury</a:t>
+              <a:t>Gradient Boosting — holdout 2022 = 0,53 (données réelles)</a:t>
             </a:r>
             <a:endParaRPr lang="en-US" sz="1400" dirty="0"/>
           </a:p>
@@ -2578,20 +2667,67 @@
           <a:ln/>
         </p:spPr>
       </p:sp>
-      <p:sp>
-        <p:nvSpPr>
-          <p:cNvPr id="10" name="Shape 8"/>
-          <p:cNvSpPr/>
-          <p:nvPr/>
-        </p:nvSpPr>
-        <p:spPr>
-          <a:xfrm>
-            <a:off x="502920" y="1600200"/>
-            <a:ext cx="5486400" cy="4572000"/>
+      <p:pic>
+        <p:nvPicPr>
+          <p:cNvPr id="10" name="Image 0" descr="C:\Users\julie\Documents\mspr-rattrapage\viz\output\6_model_compare.png">    </p:cNvPr>
+          <p:cNvPicPr>
+            <a:picLocks noChangeAspect="1"/>
+          </p:cNvPicPr>
+          <p:nvPr/>
+        </p:nvPicPr>
+        <p:blipFill>
+          <a:blip r:embed="rId1"/>
+          <a:stretch>
+            <a:fillRect/>
+          </a:stretch>
+        </p:blipFill>
+        <p:spPr>
+          <a:xfrm>
+            <a:off x="502920" y="1645920"/>
+            <a:ext cx="5852160" cy="3291840"/>
+          </a:xfrm>
+          <a:prstGeom prst="rect">
+            <a:avLst/>
+          </a:prstGeom>
+        </p:spPr>
+      </p:pic>
+      <p:pic>
+        <p:nvPicPr>
+          <p:cNvPr id="11" name="Image 1" descr="C:\Users\julie\Documents\mspr-rattrapage\viz\output\5_confusion.png">    </p:cNvPr>
+          <p:cNvPicPr>
+            <a:picLocks noChangeAspect="1"/>
+          </p:cNvPicPr>
+          <p:nvPr/>
+        </p:nvPicPr>
+        <p:blipFill>
+          <a:blip r:embed="rId2"/>
+          <a:srcRect l="0" r="0" t="0" b="0"/>
+          <a:stretch/>
+        </p:blipFill>
+        <p:spPr>
+          <a:xfrm>
+            <a:off x="1463040" y="5029200"/>
+            <a:ext cx="3931920" cy="1371600"/>
+          </a:xfrm>
+          <a:prstGeom prst="rect">
+            <a:avLst/>
+          </a:prstGeom>
+        </p:spPr>
+      </p:pic>
+      <p:sp>
+        <p:nvSpPr>
+          <p:cNvPr id="12" name="Shape 8"/>
+          <p:cNvSpPr/>
+          <p:nvPr/>
+        </p:nvSpPr>
+        <p:spPr>
+          <a:xfrm>
+            <a:off x="6583680" y="1645920"/>
+            <a:ext cx="5120640" cy="4754880"/>
           </a:xfrm>
           <a:prstGeom prst="roundRect">
             <a:avLst>
-              <a:gd name="adj" fmla="val 1600"/>
+              <a:gd name="adj" fmla="val 1538"/>
             </a:avLst>
           </a:prstGeom>
           <a:solidFill>
@@ -2599,7 +2735,7 @@
           </a:solidFill>
           <a:ln w="15875">
             <a:solidFill>
-              <a:srgbClr val="1B2A5E"/>
+              <a:srgbClr val="C9A227"/>
             </a:solidFill>
             <a:prstDash val="solid"/>
           </a:ln>
@@ -2607,14 +2743,14 @@
       </p:sp>
       <p:sp>
         <p:nvSpPr>
-          <p:cNvPr id="11" name="Text 9"/>
-          <p:cNvSpPr/>
-          <p:nvPr/>
-        </p:nvSpPr>
-        <p:spPr>
-          <a:xfrm>
-            <a:off x="502920" y="1728216"/>
-            <a:ext cx="5486400" cy="411480"/>
+          <p:cNvPr id="13" name="Text 9"/>
+          <p:cNvSpPr/>
+          <p:nvPr/>
+        </p:nvSpPr>
+        <p:spPr>
+          <a:xfrm>
+            <a:off x="6583680" y="1773936"/>
+            <a:ext cx="5120640" cy="411480"/>
           </a:xfrm>
           <a:prstGeom prst="rect">
             <a:avLst/>
@@ -2632,10 +2768,10 @@
             <a:r>
               <a:rPr lang="en-US" sz="1600" b="1" dirty="0">
                 <a:solidFill>
-                  <a:srgbClr val="1B2A5E"/>
-                </a:solidFill>
-              </a:rPr>
-              <a:t>Suite DQM exécutable</a:t>
+                  <a:srgbClr val="C9A227"/>
+                </a:solidFill>
+              </a:rPr>
+              <a:t>Chiffres figés (CHIFFRES_FIGES.md)</a:t>
             </a:r>
             <a:endParaRPr lang="en-US" sz="1600" dirty="0"/>
           </a:p>
@@ -2643,14 +2779,14 @@
       </p:sp>
       <p:sp>
         <p:nvSpPr>
-          <p:cNvPr id="12" name="Text 10"/>
-          <p:cNvSpPr/>
-          <p:nvPr/>
-        </p:nvSpPr>
-        <p:spPr>
-          <a:xfrm>
-            <a:off x="704088" y="2194560"/>
-            <a:ext cx="5084064" cy="3840480"/>
+          <p:cNvPr id="14" name="Text 10"/>
+          <p:cNvSpPr/>
+          <p:nvPr/>
+        </p:nvSpPr>
+        <p:spPr>
+          <a:xfrm>
+            <a:off x="6784848" y="2240280"/>
+            <a:ext cx="4718304" cy="4023360"/>
           </a:xfrm>
           <a:prstGeom prst="rect">
             <a:avLst/>
@@ -2675,7 +2811,7 @@
                   <a:srgbClr val="222222"/>
                 </a:solidFill>
               </a:rPr>
-              <a:t>Module dqm/ — outil interne</a:t>
+              <a:t>Holdout 2022 : 0,53 (&gt; 0,5)</a:t>
             </a:r>
             <a:endParaRPr lang="en-US" sz="1250" dirty="0"/>
           </a:p>
@@ -2693,7 +2829,7 @@
                   <a:srgbClr val="222222"/>
                 </a:solidFill>
               </a:rPr>
-              <a:t>Inspiré du pattern « expectations »</a:t>
+              <a:t>Walk-forward : 0,37</a:t>
             </a:r>
             <a:endParaRPr lang="en-US" sz="1250" dirty="0"/>
           </a:p>
@@ -2711,7 +2847,7 @@
                   <a:srgbClr val="222222"/>
                 </a:solidFill>
               </a:rPr>
-              <a:t>5 contrôles Silver/Gold exécutables</a:t>
+              <a:t>CV géo secondaire : 0,72</a:t>
             </a:r>
             <a:endParaRPr lang="en-US" sz="1250" dirty="0"/>
           </a:p>
@@ -2729,7 +2865,7 @@
                   <a:srgbClr val="222222"/>
                 </a:solidFill>
               </a:rPr>
-              <a:t>Pas de lib great_expectations installée</a:t>
+              <a:t>Baseline CV : 0,41</a:t>
             </a:r>
             <a:endParaRPr lang="en-US" sz="1250" dirty="0"/>
           </a:p>
@@ -2747,7 +2883,7 @@
                   <a:srgbClr val="222222"/>
                 </a:solidFill>
               </a:rPr>
-              <a:t>Complète pytest + quality_report.txt</a:t>
+              <a:t>Top feature : pct gagnant précédent</a:t>
             </a:r>
             <a:endParaRPr lang="en-US" sz="1250" dirty="0"/>
           </a:p>
@@ -2765,95 +2901,10 @@
                   <a:srgbClr val="222222"/>
                 </a:solidFill>
               </a:rPr>
-              <a:t>make dqm → JSON + HTML de preuve</a:t>
+              <a:t>Pauvreté : 40 % GOLD, hors ML</a:t>
             </a:r>
             <a:endParaRPr lang="en-US" sz="1250" dirty="0"/>
           </a:p>
-        </p:txBody>
-      </p:sp>
-      <p:sp>
-        <p:nvSpPr>
-          <p:cNvPr id="13" name="Shape 11"/>
-          <p:cNvSpPr/>
-          <p:nvPr/>
-        </p:nvSpPr>
-        <p:spPr>
-          <a:xfrm>
-            <a:off x="6217920" y="1600200"/>
-            <a:ext cx="5486400" cy="4572000"/>
-          </a:xfrm>
-          <a:prstGeom prst="roundRect">
-            <a:avLst>
-              <a:gd name="adj" fmla="val 1600"/>
-            </a:avLst>
-          </a:prstGeom>
-          <a:solidFill>
-            <a:srgbClr val="F2F3F7"/>
-          </a:solidFill>
-          <a:ln w="15875">
-            <a:solidFill>
-              <a:srgbClr val="0066CC"/>
-            </a:solidFill>
-            <a:prstDash val="solid"/>
-          </a:ln>
-        </p:spPr>
-      </p:sp>
-      <p:sp>
-        <p:nvSpPr>
-          <p:cNvPr id="14" name="Text 12"/>
-          <p:cNvSpPr/>
-          <p:nvPr/>
-        </p:nvSpPr>
-        <p:spPr>
-          <a:xfrm>
-            <a:off x="6217920" y="1728216"/>
-            <a:ext cx="5486400" cy="411480"/>
-          </a:xfrm>
-          <a:prstGeom prst="rect">
-            <a:avLst/>
-          </a:prstGeom>
-          <a:noFill/>
-          <a:ln/>
-        </p:spPr>
-        <p:txBody>
-          <a:bodyPr wrap="square" lIns="0" tIns="0" rIns="0" bIns="0" rtlCol="0" anchor="ctr"/>
-          <a:lstStyle/>
-          <a:p>
-            <a:pPr algn="ctr" indent="0" marL="0">
-              <a:buNone/>
-            </a:pPr>
-            <a:r>
-              <a:rPr lang="en-US" sz="1600" b="1" dirty="0">
-                <a:solidFill>
-                  <a:srgbClr val="0066CC"/>
-                </a:solidFill>
-              </a:rPr>
-              <a:t>Metabase (profil Docker bi)</a:t>
-            </a:r>
-            <a:endParaRPr lang="en-US" sz="1600" dirty="0"/>
-          </a:p>
-        </p:txBody>
-      </p:sp>
-      <p:sp>
-        <p:nvSpPr>
-          <p:cNvPr id="15" name="Text 13"/>
-          <p:cNvSpPr/>
-          <p:nvPr/>
-        </p:nvSpPr>
-        <p:spPr>
-          <a:xfrm>
-            <a:off x="6419088" y="2194560"/>
-            <a:ext cx="5084064" cy="3840480"/>
-          </a:xfrm>
-          <a:prstGeom prst="rect">
-            <a:avLst/>
-          </a:prstGeom>
-          <a:noFill/>
-          <a:ln/>
-        </p:spPr>
-        <p:txBody>
-          <a:bodyPr wrap="square" rtlCol="0" anchor="t"/>
-          <a:lstStyle/>
           <a:p>
             <a:pPr marL="342900" indent="-342900">
               <a:spcAft>
@@ -2868,97 +2919,7 @@
                   <a:srgbClr val="222222"/>
                 </a:solidFill>
               </a:rPr>
-              <a:t>docker compose --profile bi up -d</a:t>
-            </a:r>
-            <a:endParaRPr lang="en-US" sz="1250" dirty="0"/>
-          </a:p>
-          <a:p>
-            <a:pPr marL="342900" indent="-342900">
-              <a:spcAft>
-                <a:spcPts val="700"/>
-              </a:spcAft>
-              <a:buSzPct val="100000"/>
-              <a:buChar char="•"/>
-            </a:pPr>
-            <a:r>
-              <a:rPr lang="en-US" sz="1250" dirty="0">
-                <a:solidFill>
-                  <a:srgbClr val="222222"/>
-                </a:solidFill>
-              </a:rPr>
-              <a:t>UI http://localhost:3000</a:t>
-            </a:r>
-            <a:endParaRPr lang="en-US" sz="1250" dirty="0"/>
-          </a:p>
-          <a:p>
-            <a:pPr marL="342900" indent="-342900">
-              <a:spcAft>
-                <a:spcPts val="700"/>
-              </a:spcAft>
-              <a:buSzPct val="100000"/>
-              <a:buChar char="•"/>
-            </a:pPr>
-            <a:r>
-              <a:rPr lang="en-US" sz="1250" dirty="0">
-                <a:solidFill>
-                  <a:srgbClr val="222222"/>
-                </a:solidFill>
-              </a:rPr>
-              <a:t>Branche sur Gold / Postgres</a:t>
-            </a:r>
-            <a:endParaRPr lang="en-US" sz="1250" dirty="0"/>
-          </a:p>
-          <a:p>
-            <a:pPr marL="342900" indent="-342900">
-              <a:spcAft>
-                <a:spcPts val="700"/>
-              </a:spcAft>
-              <a:buSzPct val="100000"/>
-              <a:buChar char="•"/>
-            </a:pPr>
-            <a:r>
-              <a:rPr lang="en-US" sz="1250" dirty="0">
-                <a:solidFill>
-                  <a:srgbClr val="222222"/>
-                </a:solidFill>
-              </a:rPr>
-              <a:t>Dashboards KPI &amp; exploration</a:t>
-            </a:r>
-            <a:endParaRPr lang="en-US" sz="1250" dirty="0"/>
-          </a:p>
-          <a:p>
-            <a:pPr marL="342900" indent="-342900">
-              <a:spcAft>
-                <a:spcPts val="700"/>
-              </a:spcAft>
-              <a:buSzPct val="100000"/>
-              <a:buChar char="•"/>
-            </a:pPr>
-            <a:r>
-              <a:rPr lang="en-US" sz="1250" dirty="0">
-                <a:solidFill>
-                  <a:srgbClr val="222222"/>
-                </a:solidFill>
-              </a:rPr>
-              <a:t>Guide : docs/mspr/05_bi_restitution/</a:t>
-            </a:r>
-            <a:endParaRPr lang="en-US" sz="1250" dirty="0"/>
-          </a:p>
-          <a:p>
-            <a:pPr marL="342900" indent="-342900">
-              <a:spcAft>
-                <a:spcPts val="700"/>
-              </a:spcAft>
-              <a:buSzPct val="100000"/>
-              <a:buChar char="•"/>
-            </a:pPr>
-            <a:r>
-              <a:rPr lang="en-US" sz="1250" dirty="0">
-                <a:solidFill>
-                  <a:srgbClr val="222222"/>
-                </a:solidFill>
-              </a:rPr>
-              <a:t>Complète Dash + FastAPI du POC</a:t>
+              <a:t>Source : data/ml_report.json</a:t>
             </a:r>
             <a:endParaRPr lang="en-US" sz="1250" dirty="0"/>
           </a:p>
@@ -3046,7 +3007,7 @@
                   <a:srgbClr val="FFFFFF"/>
                 </a:solidFill>
               </a:rPr>
-              <a:t>08</a:t>
+              <a:t>07</a:t>
             </a:r>
             <a:endParaRPr lang="en-US" sz="1300" dirty="0"/>
           </a:p>
@@ -3082,7 +3043,7 @@
                   <a:srgbClr val="1B2A5E"/>
                 </a:solidFill>
               </a:rPr>
-              <a:t>Visualisations</a:t>
+              <a:t>Qualité DQM &amp; restitution Metabase</a:t>
             </a:r>
             <a:endParaRPr lang="en-US" sz="2900" dirty="0"/>
           </a:p>
@@ -3138,7 +3099,7 @@
                   <a:srgbClr val="0066CC"/>
                 </a:solidFill>
               </a:rPr>
-              <a:t>Exploration &amp; restitution</a:t>
+              <a:t>Suite DQM interne + BI jury</a:t>
             </a:r>
             <a:endParaRPr lang="en-US" sz="1400" dirty="0"/>
           </a:p>
@@ -3204,78 +3165,392 @@
           <a:ln/>
         </p:spPr>
       </p:sp>
-      <p:pic>
-        <p:nvPicPr>
-          <p:cNvPr id="10" name="Image 0" descr="C:\Users\amine\Downloads\POC_ElectioAnalytics_projet_complet\viz\output\1_evolution_blocs.png">    </p:cNvPr>
-          <p:cNvPicPr>
-            <a:picLocks noChangeAspect="1"/>
-          </p:cNvPicPr>
-          <p:nvPr/>
-        </p:nvPicPr>
-        <p:blipFill>
-          <a:blip r:embed="rId1"/>
-          <a:stretch>
-            <a:fillRect/>
-          </a:stretch>
-        </p:blipFill>
+      <p:sp>
+        <p:nvSpPr>
+          <p:cNvPr id="10" name="Shape 8"/>
+          <p:cNvSpPr/>
+          <p:nvPr/>
+        </p:nvSpPr>
         <p:spPr>
           <a:xfrm>
             <a:off x="502920" y="1600200"/>
-            <a:ext cx="5486400" cy="3044952"/>
-          </a:xfrm>
-          <a:prstGeom prst="rect">
-            <a:avLst/>
-          </a:prstGeom>
-        </p:spPr>
-      </p:pic>
-      <p:pic>
-        <p:nvPicPr>
-          <p:cNvPr id="11" name="Image 1" descr="C:\Users\amine\Downloads\POC_ElectioAnalytics_projet_complet\viz\output\3_correlations.png">    </p:cNvPr>
-          <p:cNvPicPr>
-            <a:picLocks noChangeAspect="1"/>
-          </p:cNvPicPr>
-          <p:nvPr/>
-        </p:nvPicPr>
-        <p:blipFill>
-          <a:blip r:embed="rId2"/>
-          <a:stretch>
-            <a:fillRect/>
-          </a:stretch>
-        </p:blipFill>
-        <p:spPr>
-          <a:xfrm>
-            <a:off x="6309360" y="1600200"/>
-            <a:ext cx="4572000" cy="3712464"/>
-          </a:xfrm>
-          <a:prstGeom prst="rect">
-            <a:avLst/>
-          </a:prstGeom>
-        </p:spPr>
-      </p:pic>
-      <p:pic>
-        <p:nvPicPr>
-          <p:cNvPr id="12" name="Image 2" descr="C:\Users\amine\Downloads\POC_ElectioAnalytics_projet_complet\viz\output\4_chomage_par_bloc.png">    </p:cNvPr>
-          <p:cNvPicPr>
-            <a:picLocks noChangeAspect="1"/>
-          </p:cNvPicPr>
-          <p:nvPr/>
-        </p:nvPicPr>
-        <p:blipFill>
-          <a:blip r:embed="rId3"/>
-          <a:stretch>
-            <a:fillRect/>
-          </a:stretch>
-        </p:blipFill>
-        <p:spPr>
-          <a:xfrm>
-            <a:off x="502920" y="4754880"/>
-            <a:ext cx="4572000" cy="1737360"/>
-          </a:xfrm>
-          <a:prstGeom prst="rect">
-            <a:avLst/>
-          </a:prstGeom>
-        </p:spPr>
-      </p:pic>
+            <a:ext cx="5486400" cy="4572000"/>
+          </a:xfrm>
+          <a:prstGeom prst="roundRect">
+            <a:avLst>
+              <a:gd name="adj" fmla="val 1600"/>
+            </a:avLst>
+          </a:prstGeom>
+          <a:solidFill>
+            <a:srgbClr val="F2F3F7"/>
+          </a:solidFill>
+          <a:ln w="15875">
+            <a:solidFill>
+              <a:srgbClr val="1B2A5E"/>
+            </a:solidFill>
+            <a:prstDash val="solid"/>
+          </a:ln>
+        </p:spPr>
+      </p:sp>
+      <p:sp>
+        <p:nvSpPr>
+          <p:cNvPr id="11" name="Text 9"/>
+          <p:cNvSpPr/>
+          <p:nvPr/>
+        </p:nvSpPr>
+        <p:spPr>
+          <a:xfrm>
+            <a:off x="502920" y="1728216"/>
+            <a:ext cx="5486400" cy="411480"/>
+          </a:xfrm>
+          <a:prstGeom prst="rect">
+            <a:avLst/>
+          </a:prstGeom>
+          <a:noFill/>
+          <a:ln/>
+        </p:spPr>
+        <p:txBody>
+          <a:bodyPr wrap="square" lIns="0" tIns="0" rIns="0" bIns="0" rtlCol="0" anchor="ctr"/>
+          <a:lstStyle/>
+          <a:p>
+            <a:pPr algn="ctr" indent="0" marL="0">
+              <a:buNone/>
+            </a:pPr>
+            <a:r>
+              <a:rPr lang="en-US" sz="1600" b="1" dirty="0">
+                <a:solidFill>
+                  <a:srgbClr val="1B2A5E"/>
+                </a:solidFill>
+              </a:rPr>
+              <a:t>Suite DQM exécutable</a:t>
+            </a:r>
+            <a:endParaRPr lang="en-US" sz="1600" dirty="0"/>
+          </a:p>
+        </p:txBody>
+      </p:sp>
+      <p:sp>
+        <p:nvSpPr>
+          <p:cNvPr id="12" name="Text 10"/>
+          <p:cNvSpPr/>
+          <p:nvPr/>
+        </p:nvSpPr>
+        <p:spPr>
+          <a:xfrm>
+            <a:off x="704088" y="2194560"/>
+            <a:ext cx="5084064" cy="3840480"/>
+          </a:xfrm>
+          <a:prstGeom prst="rect">
+            <a:avLst/>
+          </a:prstGeom>
+          <a:noFill/>
+          <a:ln/>
+        </p:spPr>
+        <p:txBody>
+          <a:bodyPr wrap="square" rtlCol="0" anchor="t"/>
+          <a:lstStyle/>
+          <a:p>
+            <a:pPr marL="342900" indent="-342900">
+              <a:spcAft>
+                <a:spcPts val="700"/>
+              </a:spcAft>
+              <a:buSzPct val="100000"/>
+              <a:buChar char="•"/>
+            </a:pPr>
+            <a:r>
+              <a:rPr lang="en-US" sz="1250" dirty="0">
+                <a:solidFill>
+                  <a:srgbClr val="222222"/>
+                </a:solidFill>
+              </a:rPr>
+              <a:t>Module dqm/ — outil interne</a:t>
+            </a:r>
+            <a:endParaRPr lang="en-US" sz="1250" dirty="0"/>
+          </a:p>
+          <a:p>
+            <a:pPr marL="342900" indent="-342900">
+              <a:spcAft>
+                <a:spcPts val="700"/>
+              </a:spcAft>
+              <a:buSzPct val="100000"/>
+              <a:buChar char="•"/>
+            </a:pPr>
+            <a:r>
+              <a:rPr lang="en-US" sz="1250" dirty="0">
+                <a:solidFill>
+                  <a:srgbClr val="222222"/>
+                </a:solidFill>
+              </a:rPr>
+              <a:t>Inspiré du pattern « expectations »</a:t>
+            </a:r>
+            <a:endParaRPr lang="en-US" sz="1250" dirty="0"/>
+          </a:p>
+          <a:p>
+            <a:pPr marL="342900" indent="-342900">
+              <a:spcAft>
+                <a:spcPts val="700"/>
+              </a:spcAft>
+              <a:buSzPct val="100000"/>
+              <a:buChar char="•"/>
+            </a:pPr>
+            <a:r>
+              <a:rPr lang="en-US" sz="1250" dirty="0">
+                <a:solidFill>
+                  <a:srgbClr val="222222"/>
+                </a:solidFill>
+              </a:rPr>
+              <a:t>5 contrôles Silver/Gold exécutables</a:t>
+            </a:r>
+            <a:endParaRPr lang="en-US" sz="1250" dirty="0"/>
+          </a:p>
+          <a:p>
+            <a:pPr marL="342900" indent="-342900">
+              <a:spcAft>
+                <a:spcPts val="700"/>
+              </a:spcAft>
+              <a:buSzPct val="100000"/>
+              <a:buChar char="•"/>
+            </a:pPr>
+            <a:r>
+              <a:rPr lang="en-US" sz="1250" dirty="0">
+                <a:solidFill>
+                  <a:srgbClr val="222222"/>
+                </a:solidFill>
+              </a:rPr>
+              <a:t>Pas de lib great_expectations installée</a:t>
+            </a:r>
+            <a:endParaRPr lang="en-US" sz="1250" dirty="0"/>
+          </a:p>
+          <a:p>
+            <a:pPr marL="342900" indent="-342900">
+              <a:spcAft>
+                <a:spcPts val="700"/>
+              </a:spcAft>
+              <a:buSzPct val="100000"/>
+              <a:buChar char="•"/>
+            </a:pPr>
+            <a:r>
+              <a:rPr lang="en-US" sz="1250" dirty="0">
+                <a:solidFill>
+                  <a:srgbClr val="222222"/>
+                </a:solidFill>
+              </a:rPr>
+              <a:t>Complète pytest + quality_report.txt</a:t>
+            </a:r>
+            <a:endParaRPr lang="en-US" sz="1250" dirty="0"/>
+          </a:p>
+          <a:p>
+            <a:pPr marL="342900" indent="-342900">
+              <a:spcAft>
+                <a:spcPts val="700"/>
+              </a:spcAft>
+              <a:buSzPct val="100000"/>
+              <a:buChar char="•"/>
+            </a:pPr>
+            <a:r>
+              <a:rPr lang="en-US" sz="1250" dirty="0">
+                <a:solidFill>
+                  <a:srgbClr val="222222"/>
+                </a:solidFill>
+              </a:rPr>
+              <a:t>make dqm → JSON + HTML de preuve</a:t>
+            </a:r>
+            <a:endParaRPr lang="en-US" sz="1250" dirty="0"/>
+          </a:p>
+        </p:txBody>
+      </p:sp>
+      <p:sp>
+        <p:nvSpPr>
+          <p:cNvPr id="13" name="Shape 11"/>
+          <p:cNvSpPr/>
+          <p:nvPr/>
+        </p:nvSpPr>
+        <p:spPr>
+          <a:xfrm>
+            <a:off x="6217920" y="1600200"/>
+            <a:ext cx="5486400" cy="4572000"/>
+          </a:xfrm>
+          <a:prstGeom prst="roundRect">
+            <a:avLst>
+              <a:gd name="adj" fmla="val 1600"/>
+            </a:avLst>
+          </a:prstGeom>
+          <a:solidFill>
+            <a:srgbClr val="F2F3F7"/>
+          </a:solidFill>
+          <a:ln w="15875">
+            <a:solidFill>
+              <a:srgbClr val="0066CC"/>
+            </a:solidFill>
+            <a:prstDash val="solid"/>
+          </a:ln>
+        </p:spPr>
+      </p:sp>
+      <p:sp>
+        <p:nvSpPr>
+          <p:cNvPr id="14" name="Text 12"/>
+          <p:cNvSpPr/>
+          <p:nvPr/>
+        </p:nvSpPr>
+        <p:spPr>
+          <a:xfrm>
+            <a:off x="6217920" y="1728216"/>
+            <a:ext cx="5486400" cy="411480"/>
+          </a:xfrm>
+          <a:prstGeom prst="rect">
+            <a:avLst/>
+          </a:prstGeom>
+          <a:noFill/>
+          <a:ln/>
+        </p:spPr>
+        <p:txBody>
+          <a:bodyPr wrap="square" lIns="0" tIns="0" rIns="0" bIns="0" rtlCol="0" anchor="ctr"/>
+          <a:lstStyle/>
+          <a:p>
+            <a:pPr algn="ctr" indent="0" marL="0">
+              <a:buNone/>
+            </a:pPr>
+            <a:r>
+              <a:rPr lang="en-US" sz="1600" b="1" dirty="0">
+                <a:solidFill>
+                  <a:srgbClr val="0066CC"/>
+                </a:solidFill>
+              </a:rPr>
+              <a:t>Metabase (profil Docker bi)</a:t>
+            </a:r>
+            <a:endParaRPr lang="en-US" sz="1600" dirty="0"/>
+          </a:p>
+        </p:txBody>
+      </p:sp>
+      <p:sp>
+        <p:nvSpPr>
+          <p:cNvPr id="15" name="Text 13"/>
+          <p:cNvSpPr/>
+          <p:nvPr/>
+        </p:nvSpPr>
+        <p:spPr>
+          <a:xfrm>
+            <a:off x="6419088" y="2194560"/>
+            <a:ext cx="5084064" cy="3840480"/>
+          </a:xfrm>
+          <a:prstGeom prst="rect">
+            <a:avLst/>
+          </a:prstGeom>
+          <a:noFill/>
+          <a:ln/>
+        </p:spPr>
+        <p:txBody>
+          <a:bodyPr wrap="square" rtlCol="0" anchor="t"/>
+          <a:lstStyle/>
+          <a:p>
+            <a:pPr marL="342900" indent="-342900">
+              <a:spcAft>
+                <a:spcPts val="700"/>
+              </a:spcAft>
+              <a:buSzPct val="100000"/>
+              <a:buChar char="•"/>
+            </a:pPr>
+            <a:r>
+              <a:rPr lang="en-US" sz="1250" dirty="0">
+                <a:solidFill>
+                  <a:srgbClr val="222222"/>
+                </a:solidFill>
+              </a:rPr>
+              <a:t>docker compose --profile bi up -d</a:t>
+            </a:r>
+            <a:endParaRPr lang="en-US" sz="1250" dirty="0"/>
+          </a:p>
+          <a:p>
+            <a:pPr marL="342900" indent="-342900">
+              <a:spcAft>
+                <a:spcPts val="700"/>
+              </a:spcAft>
+              <a:buSzPct val="100000"/>
+              <a:buChar char="•"/>
+            </a:pPr>
+            <a:r>
+              <a:rPr lang="en-US" sz="1250" dirty="0">
+                <a:solidFill>
+                  <a:srgbClr val="222222"/>
+                </a:solidFill>
+              </a:rPr>
+              <a:t>UI http://localhost:3000</a:t>
+            </a:r>
+            <a:endParaRPr lang="en-US" sz="1250" dirty="0"/>
+          </a:p>
+          <a:p>
+            <a:pPr marL="342900" indent="-342900">
+              <a:spcAft>
+                <a:spcPts val="700"/>
+              </a:spcAft>
+              <a:buSzPct val="100000"/>
+              <a:buChar char="•"/>
+            </a:pPr>
+            <a:r>
+              <a:rPr lang="en-US" sz="1250" dirty="0">
+                <a:solidFill>
+                  <a:srgbClr val="222222"/>
+                </a:solidFill>
+              </a:rPr>
+              <a:t>Branche sur Gold / Postgres</a:t>
+            </a:r>
+            <a:endParaRPr lang="en-US" sz="1250" dirty="0"/>
+          </a:p>
+          <a:p>
+            <a:pPr marL="342900" indent="-342900">
+              <a:spcAft>
+                <a:spcPts val="700"/>
+              </a:spcAft>
+              <a:buSzPct val="100000"/>
+              <a:buChar char="•"/>
+            </a:pPr>
+            <a:r>
+              <a:rPr lang="en-US" sz="1250" dirty="0">
+                <a:solidFill>
+                  <a:srgbClr val="222222"/>
+                </a:solidFill>
+              </a:rPr>
+              <a:t>Dashboards KPI &amp; exploration</a:t>
+            </a:r>
+            <a:endParaRPr lang="en-US" sz="1250" dirty="0"/>
+          </a:p>
+          <a:p>
+            <a:pPr marL="342900" indent="-342900">
+              <a:spcAft>
+                <a:spcPts val="700"/>
+              </a:spcAft>
+              <a:buSzPct val="100000"/>
+              <a:buChar char="•"/>
+            </a:pPr>
+            <a:r>
+              <a:rPr lang="en-US" sz="1250" dirty="0">
+                <a:solidFill>
+                  <a:srgbClr val="222222"/>
+                </a:solidFill>
+              </a:rPr>
+              <a:t>Guide : docs/mspr/05_bi_restitution/</a:t>
+            </a:r>
+            <a:endParaRPr lang="en-US" sz="1250" dirty="0"/>
+          </a:p>
+          <a:p>
+            <a:pPr marL="342900" indent="-342900">
+              <a:spcAft>
+                <a:spcPts val="700"/>
+              </a:spcAft>
+              <a:buSzPct val="100000"/>
+              <a:buChar char="•"/>
+            </a:pPr>
+            <a:r>
+              <a:rPr lang="en-US" sz="1250" dirty="0">
+                <a:solidFill>
+                  <a:srgbClr val="222222"/>
+                </a:solidFill>
+              </a:rPr>
+              <a:t>Complète Dash + FastAPI du POC</a:t>
+            </a:r>
+            <a:endParaRPr lang="en-US" sz="1250" dirty="0"/>
+          </a:p>
+        </p:txBody>
+      </p:sp>
     </p:spTree>
   </p:cSld>
   <p:clrMapOvr>
@@ -3358,7 +3633,7 @@
                   <a:srgbClr val="FFFFFF"/>
                 </a:solidFill>
               </a:rPr>
-              <a:t>09</a:t>
+              <a:t>08</a:t>
             </a:r>
             <a:endParaRPr lang="en-US" sz="1300" dirty="0"/>
           </a:p>
@@ -3394,7 +3669,7 @@
                   <a:srgbClr val="1B2A5E"/>
                 </a:solidFill>
               </a:rPr>
-              <a:t>Scale-out production</a:t>
+              <a:t>Visualisations</a:t>
             </a:r>
             <a:endParaRPr lang="en-US" sz="2900" dirty="0"/>
           </a:p>
@@ -3450,7 +3725,7 @@
                   <a:srgbClr val="0066CC"/>
                 </a:solidFill>
               </a:rPr>
-              <a:t>Airflow + partitionnement Spark (cible)</a:t>
+              <a:t>Exploration &amp; restitution</a:t>
             </a:r>
             <a:endParaRPr lang="en-US" sz="1400" dirty="0"/>
           </a:p>
@@ -3518,7 +3793,7 @@
       </p:sp>
       <p:pic>
         <p:nvPicPr>
-          <p:cNvPr id="10" name="Image 0" descr="C:\Users\amine\Downloads\POC_ElectioAnalytics_projet_complet\docs\mspr\02_architecture\diagrams\scale_out.png">    </p:cNvPr>
+          <p:cNvPr id="10" name="Image 0" descr="C:\Users\julie\Documents\mspr-rattrapage\viz\output\1_evolution_blocs.png">    </p:cNvPr>
           <p:cNvPicPr>
             <a:picLocks noChangeAspect="1"/>
           </p:cNvPicPr>
@@ -3526,13 +3801,62 @@
         </p:nvPicPr>
         <p:blipFill>
           <a:blip r:embed="rId1"/>
-          <a:srcRect l="0" r="0" t="0" b="0"/>
-          <a:stretch/>
+          <a:stretch>
+            <a:fillRect/>
+          </a:stretch>
         </p:blipFill>
         <p:spPr>
           <a:xfrm>
-            <a:off x="1097280" y="1417320"/>
-            <a:ext cx="10058400" cy="4846320"/>
+            <a:off x="502920" y="1600200"/>
+            <a:ext cx="5486400" cy="3044952"/>
+          </a:xfrm>
+          <a:prstGeom prst="rect">
+            <a:avLst/>
+          </a:prstGeom>
+        </p:spPr>
+      </p:pic>
+      <p:pic>
+        <p:nvPicPr>
+          <p:cNvPr id="11" name="Image 1" descr="C:\Users\julie\Documents\mspr-rattrapage\viz\output\3_correlations.png">    </p:cNvPr>
+          <p:cNvPicPr>
+            <a:picLocks noChangeAspect="1"/>
+          </p:cNvPicPr>
+          <p:nvPr/>
+        </p:nvPicPr>
+        <p:blipFill>
+          <a:blip r:embed="rId2"/>
+          <a:stretch>
+            <a:fillRect/>
+          </a:stretch>
+        </p:blipFill>
+        <p:spPr>
+          <a:xfrm>
+            <a:off x="6309360" y="1600200"/>
+            <a:ext cx="4572000" cy="3712464"/>
+          </a:xfrm>
+          <a:prstGeom prst="rect">
+            <a:avLst/>
+          </a:prstGeom>
+        </p:spPr>
+      </p:pic>
+      <p:pic>
+        <p:nvPicPr>
+          <p:cNvPr id="12" name="Image 2" descr="C:\Users\julie\Documents\mspr-rattrapage\viz\output\4_chomage_par_bloc.png">    </p:cNvPr>
+          <p:cNvPicPr>
+            <a:picLocks noChangeAspect="1"/>
+          </p:cNvPicPr>
+          <p:nvPr/>
+        </p:nvPicPr>
+        <p:blipFill>
+          <a:blip r:embed="rId3"/>
+          <a:stretch>
+            <a:fillRect/>
+          </a:stretch>
+        </p:blipFill>
+        <p:spPr>
+          <a:xfrm>
+            <a:off x="502920" y="4754880"/>
+            <a:ext cx="4572000" cy="1737360"/>
           </a:xfrm>
           <a:prstGeom prst="rect">
             <a:avLst/>
@@ -3621,7 +3945,7 @@
                   <a:srgbClr val="FFFFFF"/>
                 </a:solidFill>
               </a:rPr>
-              <a:t>10</a:t>
+              <a:t>09</a:t>
             </a:r>
             <a:endParaRPr lang="en-US" sz="1300" dirty="0"/>
           </a:p>
@@ -3657,7 +3981,7 @@
                   <a:srgbClr val="1B2A5E"/>
                 </a:solidFill>
               </a:rPr>
-              <a:t>RGPD &amp; Sécurité</a:t>
+              <a:t>Scale-out production</a:t>
             </a:r>
             <a:endParaRPr lang="en-US" sz="2900" dirty="0"/>
           </a:p>
@@ -3685,7 +4009,43 @@
       </p:sp>
       <p:sp>
         <p:nvSpPr>
-          <p:cNvPr id="6" name="Shape 4"/>
+          <p:cNvPr id="6" name="Text 4"/>
+          <p:cNvSpPr/>
+          <p:nvPr/>
+        </p:nvSpPr>
+        <p:spPr>
+          <a:xfrm>
+            <a:off x="457200" y="1033272"/>
+            <a:ext cx="10058400" cy="365760"/>
+          </a:xfrm>
+          <a:prstGeom prst="rect">
+            <a:avLst/>
+          </a:prstGeom>
+          <a:noFill/>
+          <a:ln/>
+        </p:spPr>
+        <p:txBody>
+          <a:bodyPr wrap="square" lIns="0" tIns="0" rIns="0" bIns="0" rtlCol="0" anchor="ctr"/>
+          <a:lstStyle/>
+          <a:p>
+            <a:pPr indent="0" marL="0">
+              <a:buNone/>
+            </a:pPr>
+            <a:r>
+              <a:rPr lang="en-US" sz="1400" i="1" dirty="0">
+                <a:solidFill>
+                  <a:srgbClr val="0066CC"/>
+                </a:solidFill>
+              </a:rPr>
+              <a:t>Airflow + partitionnement Spark (cible)</a:t>
+            </a:r>
+            <a:endParaRPr lang="en-US" sz="1400" dirty="0"/>
+          </a:p>
+        </p:txBody>
+      </p:sp>
+      <p:sp>
+        <p:nvSpPr>
+          <p:cNvPr id="7" name="Shape 5"/>
           <p:cNvSpPr/>
           <p:nvPr/>
         </p:nvSpPr>
@@ -3705,7 +4065,7 @@
       </p:sp>
       <p:sp>
         <p:nvSpPr>
-          <p:cNvPr id="7" name="Shape 5"/>
+          <p:cNvPr id="8" name="Shape 6"/>
           <p:cNvSpPr/>
           <p:nvPr/>
         </p:nvSpPr>
@@ -3725,7 +4085,7 @@
       </p:sp>
       <p:sp>
         <p:nvSpPr>
-          <p:cNvPr id="8" name="Shape 6"/>
+          <p:cNvPr id="9" name="Shape 7"/>
           <p:cNvSpPr/>
           <p:nvPr/>
         </p:nvSpPr>
@@ -3743,284 +4103,29 @@
           <a:ln/>
         </p:spPr>
       </p:sp>
-      <p:sp>
-        <p:nvSpPr>
-          <p:cNvPr id="9" name="Shape 7"/>
-          <p:cNvSpPr/>
-          <p:nvPr/>
-        </p:nvSpPr>
-        <p:spPr>
-          <a:xfrm>
-            <a:off x="502920" y="1645920"/>
-            <a:ext cx="5440680" cy="4206240"/>
-          </a:xfrm>
-          <a:prstGeom prst="roundRect">
-            <a:avLst>
-              <a:gd name="adj" fmla="val 1739"/>
-            </a:avLst>
-          </a:prstGeom>
-          <a:solidFill>
-            <a:srgbClr val="F2F3F7"/>
-          </a:solidFill>
-          <a:ln w="15875">
-            <a:solidFill>
-              <a:srgbClr val="0066CC"/>
-            </a:solidFill>
-            <a:prstDash val="solid"/>
-          </a:ln>
-        </p:spPr>
-      </p:sp>
-      <p:sp>
-        <p:nvSpPr>
-          <p:cNvPr id="10" name="Text 8"/>
-          <p:cNvSpPr/>
-          <p:nvPr/>
-        </p:nvSpPr>
-        <p:spPr>
-          <a:xfrm>
-            <a:off x="502920" y="1773936"/>
-            <a:ext cx="5440680" cy="411480"/>
-          </a:xfrm>
-          <a:prstGeom prst="rect">
-            <a:avLst/>
-          </a:prstGeom>
-          <a:noFill/>
-          <a:ln/>
-        </p:spPr>
-        <p:txBody>
-          <a:bodyPr wrap="square" lIns="0" tIns="0" rIns="0" bIns="0" rtlCol="0" anchor="ctr"/>
-          <a:lstStyle/>
-          <a:p>
-            <a:pPr algn="ctr" indent="0" marL="0">
-              <a:buNone/>
-            </a:pPr>
-            <a:r>
-              <a:rPr lang="en-US" sz="1600" b="1" dirty="0">
-                <a:solidFill>
-                  <a:srgbClr val="0066CC"/>
-                </a:solidFill>
-              </a:rPr>
-              <a:t>Conformité</a:t>
-            </a:r>
-            <a:endParaRPr lang="en-US" sz="1600" dirty="0"/>
-          </a:p>
-        </p:txBody>
-      </p:sp>
-      <p:sp>
-        <p:nvSpPr>
-          <p:cNvPr id="11" name="Text 9"/>
-          <p:cNvSpPr/>
-          <p:nvPr/>
-        </p:nvSpPr>
-        <p:spPr>
-          <a:xfrm>
-            <a:off x="704088" y="2240280"/>
-            <a:ext cx="5038344" cy="3474720"/>
-          </a:xfrm>
-          <a:prstGeom prst="rect">
-            <a:avLst/>
-          </a:prstGeom>
-          <a:noFill/>
-          <a:ln/>
-        </p:spPr>
-        <p:txBody>
-          <a:bodyPr wrap="square" rtlCol="0" anchor="t"/>
-          <a:lstStyle/>
-          <a:p>
-            <a:pPr marL="342900" indent="-342900">
-              <a:spcAft>
-                <a:spcPts val="700"/>
-              </a:spcAft>
-              <a:buSzPct val="100000"/>
-              <a:buChar char="•"/>
-            </a:pPr>
-            <a:r>
-              <a:rPr lang="en-US" sz="1250" dirty="0">
-                <a:solidFill>
-                  <a:srgbClr val="222222"/>
-                </a:solidFill>
-              </a:rPr>
-              <a:t>Données publiques agrégées : aucune donnée personnelle</a:t>
-            </a:r>
-            <a:endParaRPr lang="en-US" sz="1250" dirty="0"/>
-          </a:p>
-          <a:p>
-            <a:pPr marL="342900" indent="-342900">
-              <a:spcAft>
-                <a:spcPts val="700"/>
-              </a:spcAft>
-              <a:buSzPct val="100000"/>
-              <a:buChar char="•"/>
-            </a:pPr>
-            <a:r>
-              <a:rPr lang="en-US" sz="1250" dirty="0">
-                <a:solidFill>
-                  <a:srgbClr val="222222"/>
-                </a:solidFill>
-              </a:rPr>
-              <a:t>Aucun risque de ré-identification (maille dépt.)</a:t>
-            </a:r>
-            <a:endParaRPr lang="en-US" sz="1250" dirty="0"/>
-          </a:p>
-          <a:p>
-            <a:pPr marL="342900" indent="-342900">
-              <a:spcAft>
-                <a:spcPts val="700"/>
-              </a:spcAft>
-              <a:buSzPct val="100000"/>
-              <a:buChar char="•"/>
-            </a:pPr>
-            <a:r>
-              <a:rPr lang="en-US" sz="1250" dirty="0">
-                <a:solidFill>
-                  <a:srgbClr val="222222"/>
-                </a:solidFill>
-              </a:rPr>
-              <a:t>Licence Ouverte v2.0 — sources mentionnées</a:t>
-            </a:r>
-            <a:endParaRPr lang="en-US" sz="1250" dirty="0"/>
-          </a:p>
-        </p:txBody>
-      </p:sp>
-      <p:sp>
-        <p:nvSpPr>
-          <p:cNvPr id="12" name="Shape 10"/>
-          <p:cNvSpPr/>
-          <p:nvPr/>
-        </p:nvSpPr>
-        <p:spPr>
-          <a:xfrm>
-            <a:off x="6126480" y="1645920"/>
-            <a:ext cx="5577840" cy="4206240"/>
-          </a:xfrm>
-          <a:prstGeom prst="roundRect">
-            <a:avLst>
-              <a:gd name="adj" fmla="val 1739"/>
-            </a:avLst>
-          </a:prstGeom>
-          <a:solidFill>
-            <a:srgbClr val="F2F3F7"/>
-          </a:solidFill>
-          <a:ln w="15875">
-            <a:solidFill>
-              <a:srgbClr val="1B2A5E"/>
-            </a:solidFill>
-            <a:prstDash val="solid"/>
-          </a:ln>
-        </p:spPr>
-      </p:sp>
-      <p:sp>
-        <p:nvSpPr>
-          <p:cNvPr id="13" name="Text 11"/>
-          <p:cNvSpPr/>
-          <p:nvPr/>
-        </p:nvSpPr>
-        <p:spPr>
-          <a:xfrm>
-            <a:off x="6126480" y="1773936"/>
-            <a:ext cx="5577840" cy="411480"/>
-          </a:xfrm>
-          <a:prstGeom prst="rect">
-            <a:avLst/>
-          </a:prstGeom>
-          <a:noFill/>
-          <a:ln/>
-        </p:spPr>
-        <p:txBody>
-          <a:bodyPr wrap="square" lIns="0" tIns="0" rIns="0" bIns="0" rtlCol="0" anchor="ctr"/>
-          <a:lstStyle/>
-          <a:p>
-            <a:pPr algn="ctr" indent="0" marL="0">
-              <a:buNone/>
-            </a:pPr>
-            <a:r>
-              <a:rPr lang="en-US" sz="1600" b="1" dirty="0">
-                <a:solidFill>
-                  <a:srgbClr val="1B2A5E"/>
-                </a:solidFill>
-              </a:rPr>
-              <a:t>Traçabilité &amp; bonnes pratiques</a:t>
-            </a:r>
-            <a:endParaRPr lang="en-US" sz="1600" dirty="0"/>
-          </a:p>
-        </p:txBody>
-      </p:sp>
-      <p:sp>
-        <p:nvSpPr>
-          <p:cNvPr id="14" name="Text 12"/>
-          <p:cNvSpPr/>
-          <p:nvPr/>
-        </p:nvSpPr>
-        <p:spPr>
-          <a:xfrm>
-            <a:off x="6327648" y="2240280"/>
-            <a:ext cx="5175504" cy="3474720"/>
-          </a:xfrm>
-          <a:prstGeom prst="rect">
-            <a:avLst/>
-          </a:prstGeom>
-          <a:noFill/>
-          <a:ln/>
-        </p:spPr>
-        <p:txBody>
-          <a:bodyPr wrap="square" rtlCol="0" anchor="t"/>
-          <a:lstStyle/>
-          <a:p>
-            <a:pPr marL="342900" indent="-342900">
-              <a:spcAft>
-                <a:spcPts val="700"/>
-              </a:spcAft>
-              <a:buSzPct val="100000"/>
-              <a:buChar char="•"/>
-            </a:pPr>
-            <a:r>
-              <a:rPr lang="en-US" sz="1250" dirty="0">
-                <a:solidFill>
-                  <a:srgbClr val="222222"/>
-                </a:solidFill>
-              </a:rPr>
-              <a:t>Couche BRONZE immuable + journal qualité</a:t>
-            </a:r>
-            <a:endParaRPr lang="en-US" sz="1250" dirty="0"/>
-          </a:p>
-          <a:p>
-            <a:pPr marL="342900" indent="-342900">
-              <a:spcAft>
-                <a:spcPts val="700"/>
-              </a:spcAft>
-              <a:buSzPct val="100000"/>
-              <a:buChar char="•"/>
-            </a:pPr>
-            <a:r>
-              <a:rPr lang="en-US" sz="1250" dirty="0">
-                <a:solidFill>
-                  <a:srgbClr val="222222"/>
-                </a:solidFill>
-              </a:rPr>
-              <a:t>Tests automatisés + suite DQM</a:t>
-            </a:r>
-            <a:endParaRPr lang="en-US" sz="1250" dirty="0"/>
-          </a:p>
-          <a:p>
-            <a:pPr marL="342900" indent="-342900">
-              <a:spcAft>
-                <a:spcPts val="700"/>
-              </a:spcAft>
-              <a:buSzPct val="100000"/>
-              <a:buChar char="•"/>
-            </a:pPr>
-            <a:r>
-              <a:rPr lang="en-US" sz="1250" dirty="0">
-                <a:solidFill>
-                  <a:srgbClr val="222222"/>
-                </a:solidFill>
-              </a:rPr>
-              <a:t>Extension opinion/réseaux sociaux → AIPD préalable</a:t>
-            </a:r>
-            <a:endParaRPr lang="en-US" sz="1250" dirty="0"/>
-          </a:p>
-        </p:txBody>
-      </p:sp>
+      <p:pic>
+        <p:nvPicPr>
+          <p:cNvPr id="10" name="Image 0" descr="C:\Users\julie\Documents\mspr-rattrapage\docs\mspr\02_architecture\diagrams\scale_out.png">    </p:cNvPr>
+          <p:cNvPicPr>
+            <a:picLocks noChangeAspect="1"/>
+          </p:cNvPicPr>
+          <p:nvPr/>
+        </p:nvPicPr>
+        <p:blipFill>
+          <a:blip r:embed="rId1"/>
+          <a:srcRect l="0" r="0" t="0" b="0"/>
+          <a:stretch/>
+        </p:blipFill>
+        <p:spPr>
+          <a:xfrm>
+            <a:off x="1097280" y="1417320"/>
+            <a:ext cx="10058400" cy="4846320"/>
+          </a:xfrm>
+          <a:prstGeom prst="rect">
+            <a:avLst/>
+          </a:prstGeom>
+        </p:spPr>
+      </p:pic>
     </p:spTree>
   </p:cSld>
   <p:clrMapOvr>
@@ -4103,7 +4208,7 @@
                   <a:srgbClr val="FFFFFF"/>
                 </a:solidFill>
               </a:rPr>
-              <a:t>11</a:t>
+              <a:t>10</a:t>
             </a:r>
             <a:endParaRPr lang="en-US" sz="1300" dirty="0"/>
           </a:p>
@@ -4139,7 +4244,7 @@
                   <a:srgbClr val="1B2A5E"/>
                 </a:solidFill>
               </a:rPr>
-              <a:t>Limites &amp; axes d’amélioration</a:t>
+              <a:t>RGPD &amp; Sécurité</a:t>
             </a:r>
             <a:endParaRPr lang="en-US" sz="2900" dirty="0"/>
           </a:p>
@@ -4246,7 +4351,7 @@
           </a:solidFill>
           <a:ln w="15875">
             <a:solidFill>
-              <a:srgbClr val="E31B23"/>
+              <a:srgbClr val="0066CC"/>
             </a:solidFill>
             <a:prstDash val="solid"/>
           </a:ln>
@@ -4279,10 +4384,10 @@
             <a:r>
               <a:rPr lang="en-US" sz="1600" b="1" dirty="0">
                 <a:solidFill>
-                  <a:srgbClr val="E31B23"/>
-                </a:solidFill>
-              </a:rPr>
-              <a:t>Limites assumées</a:t>
+                  <a:srgbClr val="0066CC"/>
+                </a:solidFill>
+              </a:rPr>
+              <a:t>Conformité</a:t>
             </a:r>
             <a:endParaRPr lang="en-US" sz="1600" dirty="0"/>
           </a:p>
@@ -4322,7 +4427,7 @@
                   <a:srgbClr val="222222"/>
                 </a:solidFill>
               </a:rPr>
-              <a:t>Modèle socio-éco : ignore campagne &amp; offre politique</a:t>
+              <a:t>Données publiques agrégées : aucune donnée personnelle</a:t>
             </a:r>
             <a:endParaRPr lang="en-US" sz="1250" dirty="0"/>
           </a:p>
@@ -4340,7 +4445,7 @@
                   <a:srgbClr val="222222"/>
                 </a:solidFill>
               </a:rPr>
-              <a:t>Capte des tendances de fond, pas l’issue exacte</a:t>
+              <a:t>Aucun risque de ré-identification (maille dépt.)</a:t>
             </a:r>
             <a:endParaRPr lang="en-US" sz="1250" dirty="0"/>
           </a:p>
@@ -4358,7 +4463,7 @@
                   <a:srgbClr val="222222"/>
                 </a:solidFill>
               </a:rPr>
-              <a:t>POC = méthode + industrialisation démontrées</a:t>
+              <a:t>Licence Ouverte v2.0 — sources mentionnées</a:t>
             </a:r>
             <a:endParaRPr lang="en-US" sz="1250" dirty="0"/>
           </a:p>
@@ -4385,7 +4490,7 @@
           </a:solidFill>
           <a:ln w="15875">
             <a:solidFill>
-              <a:srgbClr val="0066CC"/>
+              <a:srgbClr val="1B2A5E"/>
             </a:solidFill>
             <a:prstDash val="solid"/>
           </a:ln>
@@ -4418,10 +4523,10 @@
             <a:r>
               <a:rPr lang="en-US" sz="1600" b="1" dirty="0">
                 <a:solidFill>
-                  <a:srgbClr val="0066CC"/>
-                </a:solidFill>
-              </a:rPr>
-              <a:t>Améliorations</a:t>
+                  <a:srgbClr val="1B2A5E"/>
+                </a:solidFill>
+              </a:rPr>
+              <a:t>Traçabilité &amp; bonnes pratiques</a:t>
             </a:r>
             <a:endParaRPr lang="en-US" sz="1600" dirty="0"/>
           </a:p>
@@ -4461,7 +4566,7 @@
                   <a:srgbClr val="222222"/>
                 </a:solidFill>
               </a:rPr>
-              <a:t>Enrichir : sécurité, démographie, infra-départemental</a:t>
+              <a:t>Couche BRONZE immuable + journal qualité</a:t>
             </a:r>
             <a:endParaRPr lang="en-US" sz="1250" dirty="0"/>
           </a:p>
@@ -4479,7 +4584,7 @@
                   <a:srgbClr val="222222"/>
                 </a:solidFill>
               </a:rPr>
-              <a:t>Modèles séquentiels + intervalles de confiance</a:t>
+              <a:t>Tests automatisés + suite DQM</a:t>
             </a:r>
             <a:endParaRPr lang="en-US" sz="1250" dirty="0"/>
           </a:p>
@@ -4497,7 +4602,7 @@
                   <a:srgbClr val="222222"/>
                 </a:solidFill>
               </a:rPr>
-              <a:t>Orchestration Airflow, Metabase en prod</a:t>
+              <a:t>Extension opinion/réseaux sociaux → AIPD préalable</a:t>
             </a:r>
             <a:endParaRPr lang="en-US" sz="1250" dirty="0"/>
           </a:p>
@@ -4514,6 +4619,488 @@
 <file path=ppt/slides/slide15.xml><?xml version="1.0" encoding="utf-8"?>
 <p:sld xmlns:a="http://schemas.openxmlformats.org/drawingml/2006/main" xmlns:r="http://schemas.openxmlformats.org/officeDocument/2006/relationships" xmlns:p="http://schemas.openxmlformats.org/presentationml/2006/main">
   <p:cSld name="Slide 15">
+    <p:bg>
+      <p:bgPr>
+        <a:solidFill>
+          <a:srgbClr val="FFFFFF"/>
+        </a:solidFill>
+      </p:bgPr>
+    </p:bg>
+    <p:spTree>
+      <p:nvGrpSpPr>
+        <p:cNvPr id="1" name=""/>
+        <p:cNvGrpSpPr/>
+        <p:nvPr/>
+      </p:nvGrpSpPr>
+      <p:grpSpPr>
+        <a:xfrm>
+          <a:off x="0" y="0"/>
+          <a:ext cx="0" cy="0"/>
+          <a:chOff x="0" y="0"/>
+          <a:chExt cx="0" cy="0"/>
+        </a:xfrm>
+      </p:grpSpPr>
+      <p:sp>
+        <p:nvSpPr>
+          <p:cNvPr id="2" name="Shape 0"/>
+          <p:cNvSpPr/>
+          <p:nvPr/>
+        </p:nvSpPr>
+        <p:spPr>
+          <a:xfrm>
+            <a:off x="11475720" y="256032"/>
+            <a:ext cx="457200" cy="457200"/>
+          </a:xfrm>
+          <a:prstGeom prst="rect">
+            <a:avLst/>
+          </a:prstGeom>
+          <a:solidFill>
+            <a:srgbClr val="1B2A5E"/>
+          </a:solidFill>
+          <a:ln/>
+        </p:spPr>
+      </p:sp>
+      <p:sp>
+        <p:nvSpPr>
+          <p:cNvPr id="3" name="Text 1"/>
+          <p:cNvSpPr/>
+          <p:nvPr/>
+        </p:nvSpPr>
+        <p:spPr>
+          <a:xfrm>
+            <a:off x="11475720" y="256032"/>
+            <a:ext cx="457200" cy="457200"/>
+          </a:xfrm>
+          <a:prstGeom prst="rect">
+            <a:avLst/>
+          </a:prstGeom>
+          <a:noFill/>
+          <a:ln/>
+        </p:spPr>
+        <p:txBody>
+          <a:bodyPr wrap="square" lIns="0" tIns="0" rIns="0" bIns="0" rtlCol="0" anchor="ctr"/>
+          <a:lstStyle/>
+          <a:p>
+            <a:pPr algn="ctr" indent="0" marL="0">
+              <a:buNone/>
+            </a:pPr>
+            <a:r>
+              <a:rPr lang="en-US" sz="1300" b="1" dirty="0">
+                <a:solidFill>
+                  <a:srgbClr val="FFFFFF"/>
+                </a:solidFill>
+              </a:rPr>
+              <a:t>11</a:t>
+            </a:r>
+            <a:endParaRPr lang="en-US" sz="1300" dirty="0"/>
+          </a:p>
+        </p:txBody>
+      </p:sp>
+      <p:sp>
+        <p:nvSpPr>
+          <p:cNvPr id="4" name="Text 2"/>
+          <p:cNvSpPr/>
+          <p:nvPr/>
+        </p:nvSpPr>
+        <p:spPr>
+          <a:xfrm>
+            <a:off x="457200" y="292608"/>
+            <a:ext cx="10698480" cy="658368"/>
+          </a:xfrm>
+          <a:prstGeom prst="rect">
+            <a:avLst/>
+          </a:prstGeom>
+          <a:noFill/>
+          <a:ln/>
+        </p:spPr>
+        <p:txBody>
+          <a:bodyPr wrap="square" lIns="0" tIns="0" rIns="0" bIns="0" rtlCol="0" anchor="ctr"/>
+          <a:lstStyle/>
+          <a:p>
+            <a:pPr indent="0" marL="0">
+              <a:buNone/>
+            </a:pPr>
+            <a:r>
+              <a:rPr lang="en-US" sz="2900" b="1" dirty="0">
+                <a:solidFill>
+                  <a:srgbClr val="1B2A5E"/>
+                </a:solidFill>
+              </a:rPr>
+              <a:t>Limites &amp; axes d’amélioration</a:t>
+            </a:r>
+            <a:endParaRPr lang="en-US" sz="2900" dirty="0"/>
+          </a:p>
+        </p:txBody>
+      </p:sp>
+      <p:sp>
+        <p:nvSpPr>
+          <p:cNvPr id="5" name="Shape 3"/>
+          <p:cNvSpPr/>
+          <p:nvPr/>
+        </p:nvSpPr>
+        <p:spPr>
+          <a:xfrm>
+            <a:off x="457200" y="950976"/>
+            <a:ext cx="822960" cy="54864"/>
+          </a:xfrm>
+          <a:prstGeom prst="rect">
+            <a:avLst/>
+          </a:prstGeom>
+          <a:solidFill>
+            <a:srgbClr val="E31B23"/>
+          </a:solidFill>
+          <a:ln/>
+        </p:spPr>
+      </p:sp>
+      <p:sp>
+        <p:nvSpPr>
+          <p:cNvPr id="6" name="Shape 4"/>
+          <p:cNvSpPr/>
+          <p:nvPr/>
+        </p:nvSpPr>
+        <p:spPr>
+          <a:xfrm>
+            <a:off x="457200" y="6565392"/>
+            <a:ext cx="3931920" cy="64008"/>
+          </a:xfrm>
+          <a:prstGeom prst="rect">
+            <a:avLst/>
+          </a:prstGeom>
+          <a:solidFill>
+            <a:srgbClr val="1B2A5E"/>
+          </a:solidFill>
+          <a:ln/>
+        </p:spPr>
+      </p:sp>
+      <p:sp>
+        <p:nvSpPr>
+          <p:cNvPr id="7" name="Shape 5"/>
+          <p:cNvSpPr/>
+          <p:nvPr/>
+        </p:nvSpPr>
+        <p:spPr>
+          <a:xfrm>
+            <a:off x="4389120" y="6565392"/>
+            <a:ext cx="3383280" cy="64008"/>
+          </a:xfrm>
+          <a:prstGeom prst="rect">
+            <a:avLst/>
+          </a:prstGeom>
+          <a:solidFill>
+            <a:srgbClr val="DDDDDD"/>
+          </a:solidFill>
+          <a:ln/>
+        </p:spPr>
+      </p:sp>
+      <p:sp>
+        <p:nvSpPr>
+          <p:cNvPr id="8" name="Shape 6"/>
+          <p:cNvSpPr/>
+          <p:nvPr/>
+        </p:nvSpPr>
+        <p:spPr>
+          <a:xfrm>
+            <a:off x="7772400" y="6565392"/>
+            <a:ext cx="3931920" cy="64008"/>
+          </a:xfrm>
+          <a:prstGeom prst="rect">
+            <a:avLst/>
+          </a:prstGeom>
+          <a:solidFill>
+            <a:srgbClr val="E31B23"/>
+          </a:solidFill>
+          <a:ln/>
+        </p:spPr>
+      </p:sp>
+      <p:sp>
+        <p:nvSpPr>
+          <p:cNvPr id="9" name="Shape 7"/>
+          <p:cNvSpPr/>
+          <p:nvPr/>
+        </p:nvSpPr>
+        <p:spPr>
+          <a:xfrm>
+            <a:off x="502920" y="1645920"/>
+            <a:ext cx="5440680" cy="4206240"/>
+          </a:xfrm>
+          <a:prstGeom prst="roundRect">
+            <a:avLst>
+              <a:gd name="adj" fmla="val 1739"/>
+            </a:avLst>
+          </a:prstGeom>
+          <a:solidFill>
+            <a:srgbClr val="F2F3F7"/>
+          </a:solidFill>
+          <a:ln w="15875">
+            <a:solidFill>
+              <a:srgbClr val="E31B23"/>
+            </a:solidFill>
+            <a:prstDash val="solid"/>
+          </a:ln>
+        </p:spPr>
+      </p:sp>
+      <p:sp>
+        <p:nvSpPr>
+          <p:cNvPr id="10" name="Text 8"/>
+          <p:cNvSpPr/>
+          <p:nvPr/>
+        </p:nvSpPr>
+        <p:spPr>
+          <a:xfrm>
+            <a:off x="502920" y="1773936"/>
+            <a:ext cx="5440680" cy="411480"/>
+          </a:xfrm>
+          <a:prstGeom prst="rect">
+            <a:avLst/>
+          </a:prstGeom>
+          <a:noFill/>
+          <a:ln/>
+        </p:spPr>
+        <p:txBody>
+          <a:bodyPr wrap="square" lIns="0" tIns="0" rIns="0" bIns="0" rtlCol="0" anchor="ctr"/>
+          <a:lstStyle/>
+          <a:p>
+            <a:pPr algn="ctr" indent="0" marL="0">
+              <a:buNone/>
+            </a:pPr>
+            <a:r>
+              <a:rPr lang="en-US" sz="1600" b="1" dirty="0">
+                <a:solidFill>
+                  <a:srgbClr val="E31B23"/>
+                </a:solidFill>
+              </a:rPr>
+              <a:t>Limites assumées</a:t>
+            </a:r>
+            <a:endParaRPr lang="en-US" sz="1600" dirty="0"/>
+          </a:p>
+        </p:txBody>
+      </p:sp>
+      <p:sp>
+        <p:nvSpPr>
+          <p:cNvPr id="11" name="Text 9"/>
+          <p:cNvSpPr/>
+          <p:nvPr/>
+        </p:nvSpPr>
+        <p:spPr>
+          <a:xfrm>
+            <a:off x="704088" y="2240280"/>
+            <a:ext cx="5038344" cy="3474720"/>
+          </a:xfrm>
+          <a:prstGeom prst="rect">
+            <a:avLst/>
+          </a:prstGeom>
+          <a:noFill/>
+          <a:ln/>
+        </p:spPr>
+        <p:txBody>
+          <a:bodyPr wrap="square" rtlCol="0" anchor="t"/>
+          <a:lstStyle/>
+          <a:p>
+            <a:pPr marL="342900" indent="-342900">
+              <a:spcAft>
+                <a:spcPts val="700"/>
+              </a:spcAft>
+              <a:buSzPct val="100000"/>
+              <a:buChar char="•"/>
+            </a:pPr>
+            <a:r>
+              <a:rPr lang="en-US" sz="1250" dirty="0">
+                <a:solidFill>
+                  <a:srgbClr val="222222"/>
+                </a:solidFill>
+              </a:rPr>
+              <a:t>Modèle socio-éco : ignore campagne &amp; offre politique</a:t>
+            </a:r>
+            <a:endParaRPr lang="en-US" sz="1250" dirty="0"/>
+          </a:p>
+          <a:p>
+            <a:pPr marL="342900" indent="-342900">
+              <a:spcAft>
+                <a:spcPts val="700"/>
+              </a:spcAft>
+              <a:buSzPct val="100000"/>
+              <a:buChar char="•"/>
+            </a:pPr>
+            <a:r>
+              <a:rPr lang="en-US" sz="1250" dirty="0">
+                <a:solidFill>
+                  <a:srgbClr val="222222"/>
+                </a:solidFill>
+              </a:rPr>
+              <a:t>Capte des tendances de fond, pas l’issue exacte</a:t>
+            </a:r>
+            <a:endParaRPr lang="en-US" sz="1250" dirty="0"/>
+          </a:p>
+          <a:p>
+            <a:pPr marL="342900" indent="-342900">
+              <a:spcAft>
+                <a:spcPts val="700"/>
+              </a:spcAft>
+              <a:buSzPct val="100000"/>
+              <a:buChar char="•"/>
+            </a:pPr>
+            <a:r>
+              <a:rPr lang="en-US" sz="1250" dirty="0">
+                <a:solidFill>
+                  <a:srgbClr val="222222"/>
+                </a:solidFill>
+              </a:rPr>
+              <a:t>POC = méthode + industrialisation démontrées</a:t>
+            </a:r>
+            <a:endParaRPr lang="en-US" sz="1250" dirty="0"/>
+          </a:p>
+        </p:txBody>
+      </p:sp>
+      <p:sp>
+        <p:nvSpPr>
+          <p:cNvPr id="12" name="Shape 10"/>
+          <p:cNvSpPr/>
+          <p:nvPr/>
+        </p:nvSpPr>
+        <p:spPr>
+          <a:xfrm>
+            <a:off x="6126480" y="1645920"/>
+            <a:ext cx="5577840" cy="4206240"/>
+          </a:xfrm>
+          <a:prstGeom prst="roundRect">
+            <a:avLst>
+              <a:gd name="adj" fmla="val 1739"/>
+            </a:avLst>
+          </a:prstGeom>
+          <a:solidFill>
+            <a:srgbClr val="F2F3F7"/>
+          </a:solidFill>
+          <a:ln w="15875">
+            <a:solidFill>
+              <a:srgbClr val="0066CC"/>
+            </a:solidFill>
+            <a:prstDash val="solid"/>
+          </a:ln>
+        </p:spPr>
+      </p:sp>
+      <p:sp>
+        <p:nvSpPr>
+          <p:cNvPr id="13" name="Text 11"/>
+          <p:cNvSpPr/>
+          <p:nvPr/>
+        </p:nvSpPr>
+        <p:spPr>
+          <a:xfrm>
+            <a:off x="6126480" y="1773936"/>
+            <a:ext cx="5577840" cy="411480"/>
+          </a:xfrm>
+          <a:prstGeom prst="rect">
+            <a:avLst/>
+          </a:prstGeom>
+          <a:noFill/>
+          <a:ln/>
+        </p:spPr>
+        <p:txBody>
+          <a:bodyPr wrap="square" lIns="0" tIns="0" rIns="0" bIns="0" rtlCol="0" anchor="ctr"/>
+          <a:lstStyle/>
+          <a:p>
+            <a:pPr algn="ctr" indent="0" marL="0">
+              <a:buNone/>
+            </a:pPr>
+            <a:r>
+              <a:rPr lang="en-US" sz="1600" b="1" dirty="0">
+                <a:solidFill>
+                  <a:srgbClr val="0066CC"/>
+                </a:solidFill>
+              </a:rPr>
+              <a:t>Améliorations</a:t>
+            </a:r>
+            <a:endParaRPr lang="en-US" sz="1600" dirty="0"/>
+          </a:p>
+        </p:txBody>
+      </p:sp>
+      <p:sp>
+        <p:nvSpPr>
+          <p:cNvPr id="14" name="Text 12"/>
+          <p:cNvSpPr/>
+          <p:nvPr/>
+        </p:nvSpPr>
+        <p:spPr>
+          <a:xfrm>
+            <a:off x="6327648" y="2240280"/>
+            <a:ext cx="5175504" cy="3474720"/>
+          </a:xfrm>
+          <a:prstGeom prst="rect">
+            <a:avLst/>
+          </a:prstGeom>
+          <a:noFill/>
+          <a:ln/>
+        </p:spPr>
+        <p:txBody>
+          <a:bodyPr wrap="square" rtlCol="0" anchor="t"/>
+          <a:lstStyle/>
+          <a:p>
+            <a:pPr marL="342900" indent="-342900">
+              <a:spcAft>
+                <a:spcPts val="700"/>
+              </a:spcAft>
+              <a:buSzPct val="100000"/>
+              <a:buChar char="•"/>
+            </a:pPr>
+            <a:r>
+              <a:rPr lang="en-US" sz="1250" dirty="0">
+                <a:solidFill>
+                  <a:srgbClr val="222222"/>
+                </a:solidFill>
+              </a:rPr>
+              <a:t>Enrichir : sécurité, démographie, infra-départemental</a:t>
+            </a:r>
+            <a:endParaRPr lang="en-US" sz="1250" dirty="0"/>
+          </a:p>
+          <a:p>
+            <a:pPr marL="342900" indent="-342900">
+              <a:spcAft>
+                <a:spcPts val="700"/>
+              </a:spcAft>
+              <a:buSzPct val="100000"/>
+              <a:buChar char="•"/>
+            </a:pPr>
+            <a:r>
+              <a:rPr lang="en-US" sz="1250" dirty="0">
+                <a:solidFill>
+                  <a:srgbClr val="222222"/>
+                </a:solidFill>
+              </a:rPr>
+              <a:t>Modèles séquentiels + intervalles de confiance</a:t>
+            </a:r>
+            <a:endParaRPr lang="en-US" sz="1250" dirty="0"/>
+          </a:p>
+          <a:p>
+            <a:pPr marL="342900" indent="-342900">
+              <a:spcAft>
+                <a:spcPts val="700"/>
+              </a:spcAft>
+              <a:buSzPct val="100000"/>
+              <a:buChar char="•"/>
+            </a:pPr>
+            <a:r>
+              <a:rPr lang="en-US" sz="1250" dirty="0">
+                <a:solidFill>
+                  <a:srgbClr val="222222"/>
+                </a:solidFill>
+              </a:rPr>
+              <a:t>Orchestration Airflow, Metabase en prod</a:t>
+            </a:r>
+            <a:endParaRPr lang="en-US" sz="1250" dirty="0"/>
+          </a:p>
+        </p:txBody>
+      </p:sp>
+    </p:spTree>
+  </p:cSld>
+  <p:clrMapOvr>
+    <a:masterClrMapping/>
+  </p:clrMapOvr>
+</p:sld>
+</file>
+
+<file path=ppt/slides/slide16.xml><?xml version="1.0" encoding="utf-8"?>
+<p:sld xmlns:a="http://schemas.openxmlformats.org/drawingml/2006/main" xmlns:r="http://schemas.openxmlformats.org/officeDocument/2006/relationships" xmlns:p="http://schemas.openxmlformats.org/presentationml/2006/main">
+  <p:cSld name="Slide 16">
     <p:bg>
       <p:bgPr>
         <a:solidFill>
@@ -4859,7 +5446,7 @@
         </p:nvSpPr>
         <p:spPr>
           <a:xfrm>
-            <a:off x="640080" y="1691640"/>
+            <a:off x="640080" y="1554480"/>
             <a:ext cx="502920" cy="658368"/>
           </a:xfrm>
           <a:prstGeom prst="rect">
@@ -4879,7 +5466,7 @@
         </p:nvSpPr>
         <p:spPr>
           <a:xfrm>
-            <a:off x="640080" y="1691640"/>
+            <a:off x="640080" y="1554480"/>
             <a:ext cx="502920" cy="658368"/>
           </a:xfrm>
           <a:prstGeom prst="rect">
@@ -4915,7 +5502,7 @@
         </p:nvSpPr>
         <p:spPr>
           <a:xfrm>
-            <a:off x="1143000" y="1691640"/>
+            <a:off x="1143000" y="1554480"/>
             <a:ext cx="4297680" cy="658368"/>
           </a:xfrm>
           <a:prstGeom prst="rect">
@@ -4940,7 +5527,7 @@
         </p:nvSpPr>
         <p:spPr>
           <a:xfrm>
-            <a:off x="1280160" y="1691640"/>
+            <a:off x="1280160" y="1554480"/>
             <a:ext cx="4114800" cy="658368"/>
           </a:xfrm>
           <a:prstGeom prst="rect">
@@ -4976,7 +5563,7 @@
         </p:nvSpPr>
         <p:spPr>
           <a:xfrm>
-            <a:off x="640080" y="2624328"/>
+            <a:off x="640080" y="2359152"/>
             <a:ext cx="502920" cy="658368"/>
           </a:xfrm>
           <a:prstGeom prst="rect">
@@ -4996,7 +5583,7 @@
         </p:nvSpPr>
         <p:spPr>
           <a:xfrm>
-            <a:off x="640080" y="2624328"/>
+            <a:off x="640080" y="2359152"/>
             <a:ext cx="502920" cy="658368"/>
           </a:xfrm>
           <a:prstGeom prst="rect">
@@ -5032,7 +5619,7 @@
         </p:nvSpPr>
         <p:spPr>
           <a:xfrm>
-            <a:off x="1143000" y="2624328"/>
+            <a:off x="1143000" y="2359152"/>
             <a:ext cx="4297680" cy="658368"/>
           </a:xfrm>
           <a:prstGeom prst="rect">
@@ -5057,7 +5644,7 @@
         </p:nvSpPr>
         <p:spPr>
           <a:xfrm>
-            <a:off x="1280160" y="2624328"/>
+            <a:off x="1280160" y="2359152"/>
             <a:ext cx="4114800" cy="658368"/>
           </a:xfrm>
           <a:prstGeom prst="rect">
@@ -5093,7 +5680,7 @@
         </p:nvSpPr>
         <p:spPr>
           <a:xfrm>
-            <a:off x="640080" y="3557016"/>
+            <a:off x="640080" y="3163824"/>
             <a:ext cx="502920" cy="658368"/>
           </a:xfrm>
           <a:prstGeom prst="rect">
@@ -5113,7 +5700,7 @@
         </p:nvSpPr>
         <p:spPr>
           <a:xfrm>
-            <a:off x="640080" y="3557016"/>
+            <a:off x="640080" y="3163824"/>
             <a:ext cx="502920" cy="658368"/>
           </a:xfrm>
           <a:prstGeom prst="rect">
@@ -5149,7 +5736,7 @@
         </p:nvSpPr>
         <p:spPr>
           <a:xfrm>
-            <a:off x="1143000" y="3557016"/>
+            <a:off x="1143000" y="3163824"/>
             <a:ext cx="4297680" cy="658368"/>
           </a:xfrm>
           <a:prstGeom prst="rect">
@@ -5174,7 +5761,7 @@
         </p:nvSpPr>
         <p:spPr>
           <a:xfrm>
-            <a:off x="1280160" y="3557016"/>
+            <a:off x="1280160" y="3163824"/>
             <a:ext cx="4114800" cy="658368"/>
           </a:xfrm>
           <a:prstGeom prst="rect">
@@ -5196,7 +5783,7 @@
                   <a:srgbClr val="1B2A5E"/>
                 </a:solidFill>
               </a:rPr>
-              <a:t>Pipeline ETL (diagramme)</a:t>
+              <a:t>Architecture &amp; stack techno</a:t>
             </a:r>
             <a:endParaRPr lang="en-US" sz="1500" dirty="0"/>
           </a:p>
@@ -5210,7 +5797,7 @@
         </p:nvSpPr>
         <p:spPr>
           <a:xfrm>
-            <a:off x="640080" y="4489704"/>
+            <a:off x="640080" y="3968496"/>
             <a:ext cx="502920" cy="658368"/>
           </a:xfrm>
           <a:prstGeom prst="rect">
@@ -5230,7 +5817,7 @@
         </p:nvSpPr>
         <p:spPr>
           <a:xfrm>
-            <a:off x="640080" y="4489704"/>
+            <a:off x="640080" y="3968496"/>
             <a:ext cx="502920" cy="658368"/>
           </a:xfrm>
           <a:prstGeom prst="rect">
@@ -5266,7 +5853,7 @@
         </p:nvSpPr>
         <p:spPr>
           <a:xfrm>
-            <a:off x="1143000" y="4489704"/>
+            <a:off x="1143000" y="3968496"/>
             <a:ext cx="4297680" cy="658368"/>
           </a:xfrm>
           <a:prstGeom prst="rect">
@@ -5291,7 +5878,7 @@
         </p:nvSpPr>
         <p:spPr>
           <a:xfrm>
-            <a:off x="1280160" y="4489704"/>
+            <a:off x="1280160" y="3968496"/>
             <a:ext cx="4114800" cy="658368"/>
           </a:xfrm>
           <a:prstGeom prst="rect">
@@ -5313,7 +5900,7 @@
                   <a:srgbClr val="1B2A5E"/>
                 </a:solidFill>
               </a:rPr>
-              <a:t>Modèle de données</a:t>
+              <a:t>Pipeline ETL (diagramme)</a:t>
             </a:r>
             <a:endParaRPr lang="en-US" sz="1500" dirty="0"/>
           </a:p>
@@ -5327,7 +5914,7 @@
         </p:nvSpPr>
         <p:spPr>
           <a:xfrm>
-            <a:off x="640080" y="5422392"/>
+            <a:off x="640080" y="4773168"/>
             <a:ext cx="502920" cy="658368"/>
           </a:xfrm>
           <a:prstGeom prst="rect">
@@ -5347,7 +5934,7 @@
         </p:nvSpPr>
         <p:spPr>
           <a:xfrm>
-            <a:off x="640080" y="5422392"/>
+            <a:off x="640080" y="4773168"/>
             <a:ext cx="502920" cy="658368"/>
           </a:xfrm>
           <a:prstGeom prst="rect">
@@ -5383,7 +5970,7 @@
         </p:nvSpPr>
         <p:spPr>
           <a:xfrm>
-            <a:off x="1143000" y="5422392"/>
+            <a:off x="1143000" y="4773168"/>
             <a:ext cx="4297680" cy="658368"/>
           </a:xfrm>
           <a:prstGeom prst="rect">
@@ -5408,7 +5995,7 @@
         </p:nvSpPr>
         <p:spPr>
           <a:xfrm>
-            <a:off x="1280160" y="5422392"/>
+            <a:off x="1280160" y="4773168"/>
             <a:ext cx="4114800" cy="658368"/>
           </a:xfrm>
           <a:prstGeom prst="rect">
@@ -5430,7 +6017,7 @@
                   <a:srgbClr val="1B2A5E"/>
                 </a:solidFill>
               </a:rPr>
-              <a:t>Machine Learning</a:t>
+              <a:t>Modèle de données</a:t>
             </a:r>
             <a:endParaRPr lang="en-US" sz="1500" dirty="0"/>
           </a:p>
@@ -5444,7 +6031,7 @@
         </p:nvSpPr>
         <p:spPr>
           <a:xfrm>
-            <a:off x="6400800" y="1691640"/>
+            <a:off x="640080" y="5577840"/>
             <a:ext cx="502920" cy="658368"/>
           </a:xfrm>
           <a:prstGeom prst="rect">
@@ -5464,7 +6051,7 @@
         </p:nvSpPr>
         <p:spPr>
           <a:xfrm>
-            <a:off x="6400800" y="1691640"/>
+            <a:off x="640080" y="5577840"/>
             <a:ext cx="502920" cy="658368"/>
           </a:xfrm>
           <a:prstGeom prst="rect">
@@ -5500,7 +6087,7 @@
         </p:nvSpPr>
         <p:spPr>
           <a:xfrm>
-            <a:off x="6903720" y="1691640"/>
+            <a:off x="1143000" y="5577840"/>
             <a:ext cx="4297680" cy="658368"/>
           </a:xfrm>
           <a:prstGeom prst="rect">
@@ -5525,7 +6112,7 @@
         </p:nvSpPr>
         <p:spPr>
           <a:xfrm>
-            <a:off x="7040880" y="1691640"/>
+            <a:off x="1280160" y="5577840"/>
             <a:ext cx="4114800" cy="658368"/>
           </a:xfrm>
           <a:prstGeom prst="rect">
@@ -5547,7 +6134,7 @@
                   <a:srgbClr val="1B2A5E"/>
                 </a:solidFill>
               </a:rPr>
-              <a:t>Résultats &amp; accuracy</a:t>
+              <a:t>Machine Learning</a:t>
             </a:r>
             <a:endParaRPr lang="en-US" sz="1500" dirty="0"/>
           </a:p>
@@ -5561,7 +6148,7 @@
         </p:nvSpPr>
         <p:spPr>
           <a:xfrm>
-            <a:off x="6400800" y="2624328"/>
+            <a:off x="6400800" y="1554480"/>
             <a:ext cx="502920" cy="658368"/>
           </a:xfrm>
           <a:prstGeom prst="rect">
@@ -5581,7 +6168,7 @@
         </p:nvSpPr>
         <p:spPr>
           <a:xfrm>
-            <a:off x="6400800" y="2624328"/>
+            <a:off x="6400800" y="1554480"/>
             <a:ext cx="502920" cy="658368"/>
           </a:xfrm>
           <a:prstGeom prst="rect">
@@ -5617,7 +6204,7 @@
         </p:nvSpPr>
         <p:spPr>
           <a:xfrm>
-            <a:off x="6903720" y="2624328"/>
+            <a:off x="6903720" y="1554480"/>
             <a:ext cx="4297680" cy="658368"/>
           </a:xfrm>
           <a:prstGeom prst="rect">
@@ -5642,7 +6229,7 @@
         </p:nvSpPr>
         <p:spPr>
           <a:xfrm>
-            <a:off x="7040880" y="2624328"/>
+            <a:off x="7040880" y="1554480"/>
             <a:ext cx="4114800" cy="658368"/>
           </a:xfrm>
           <a:prstGeom prst="rect">
@@ -5664,7 +6251,7 @@
                   <a:srgbClr val="1B2A5E"/>
                 </a:solidFill>
               </a:rPr>
-              <a:t>Qualité DQM &amp; Metabase</a:t>
+              <a:t>Résultats &amp; accuracy</a:t>
             </a:r>
             <a:endParaRPr lang="en-US" sz="1500" dirty="0"/>
           </a:p>
@@ -5678,7 +6265,7 @@
         </p:nvSpPr>
         <p:spPr>
           <a:xfrm>
-            <a:off x="6400800" y="3557016"/>
+            <a:off x="6400800" y="2359152"/>
             <a:ext cx="502920" cy="658368"/>
           </a:xfrm>
           <a:prstGeom prst="rect">
@@ -5698,7 +6285,7 @@
         </p:nvSpPr>
         <p:spPr>
           <a:xfrm>
-            <a:off x="6400800" y="3557016"/>
+            <a:off x="6400800" y="2359152"/>
             <a:ext cx="502920" cy="658368"/>
           </a:xfrm>
           <a:prstGeom prst="rect">
@@ -5734,7 +6321,7 @@
         </p:nvSpPr>
         <p:spPr>
           <a:xfrm>
-            <a:off x="6903720" y="3557016"/>
+            <a:off x="6903720" y="2359152"/>
             <a:ext cx="4297680" cy="658368"/>
           </a:xfrm>
           <a:prstGeom prst="rect">
@@ -5759,7 +6346,7 @@
         </p:nvSpPr>
         <p:spPr>
           <a:xfrm>
-            <a:off x="7040880" y="3557016"/>
+            <a:off x="7040880" y="2359152"/>
             <a:ext cx="4114800" cy="658368"/>
           </a:xfrm>
           <a:prstGeom prst="rect">
@@ -5781,7 +6368,7 @@
                   <a:srgbClr val="1B2A5E"/>
                 </a:solidFill>
               </a:rPr>
-              <a:t>Visualisations</a:t>
+              <a:t>Qualité DQM &amp; Metabase</a:t>
             </a:r>
             <a:endParaRPr lang="en-US" sz="1500" dirty="0"/>
           </a:p>
@@ -5795,7 +6382,7 @@
         </p:nvSpPr>
         <p:spPr>
           <a:xfrm>
-            <a:off x="6400800" y="4489704"/>
+            <a:off x="6400800" y="3163824"/>
             <a:ext cx="502920" cy="658368"/>
           </a:xfrm>
           <a:prstGeom prst="rect">
@@ -5815,7 +6402,7 @@
         </p:nvSpPr>
         <p:spPr>
           <a:xfrm>
-            <a:off x="6400800" y="4489704"/>
+            <a:off x="6400800" y="3163824"/>
             <a:ext cx="502920" cy="658368"/>
           </a:xfrm>
           <a:prstGeom prst="rect">
@@ -5851,7 +6438,7 @@
         </p:nvSpPr>
         <p:spPr>
           <a:xfrm>
-            <a:off x="6903720" y="4489704"/>
+            <a:off x="6903720" y="3163824"/>
             <a:ext cx="4297680" cy="658368"/>
           </a:xfrm>
           <a:prstGeom prst="rect">
@@ -5876,7 +6463,7 @@
         </p:nvSpPr>
         <p:spPr>
           <a:xfrm>
-            <a:off x="7040880" y="4489704"/>
+            <a:off x="7040880" y="3163824"/>
             <a:ext cx="4114800" cy="658368"/>
           </a:xfrm>
           <a:prstGeom prst="rect">
@@ -5898,7 +6485,7 @@
                   <a:srgbClr val="1B2A5E"/>
                 </a:solidFill>
               </a:rPr>
-              <a:t>RGPD &amp; Sécurité</a:t>
+              <a:t>Visualisations</a:t>
             </a:r>
             <a:endParaRPr lang="en-US" sz="1500" dirty="0"/>
           </a:p>
@@ -5912,7 +6499,7 @@
         </p:nvSpPr>
         <p:spPr>
           <a:xfrm>
-            <a:off x="6400800" y="5422392"/>
+            <a:off x="6400800" y="3968496"/>
             <a:ext cx="502920" cy="658368"/>
           </a:xfrm>
           <a:prstGeom prst="rect">
@@ -5932,7 +6519,7 @@
         </p:nvSpPr>
         <p:spPr>
           <a:xfrm>
-            <a:off x="6400800" y="5422392"/>
+            <a:off x="6400800" y="3968496"/>
             <a:ext cx="502920" cy="658368"/>
           </a:xfrm>
           <a:prstGeom prst="rect">
@@ -5968,7 +6555,7 @@
         </p:nvSpPr>
         <p:spPr>
           <a:xfrm>
-            <a:off x="6903720" y="5422392"/>
+            <a:off x="6903720" y="3968496"/>
             <a:ext cx="4297680" cy="658368"/>
           </a:xfrm>
           <a:prstGeom prst="rect">
@@ -5993,7 +6580,124 @@
         </p:nvSpPr>
         <p:spPr>
           <a:xfrm>
-            <a:off x="7040880" y="5422392"/>
+            <a:off x="7040880" y="3968496"/>
+            <a:ext cx="4114800" cy="658368"/>
+          </a:xfrm>
+          <a:prstGeom prst="rect">
+            <a:avLst/>
+          </a:prstGeom>
+          <a:noFill/>
+          <a:ln/>
+        </p:spPr>
+        <p:txBody>
+          <a:bodyPr wrap="square" lIns="0" tIns="0" rIns="0" bIns="0" rtlCol="0" anchor="ctr"/>
+          <a:lstStyle/>
+          <a:p>
+            <a:pPr indent="0" marL="0">
+              <a:buNone/>
+            </a:pPr>
+            <a:r>
+              <a:rPr lang="en-US" sz="1500" b="1" dirty="0">
+                <a:solidFill>
+                  <a:srgbClr val="1B2A5E"/>
+                </a:solidFill>
+              </a:rPr>
+              <a:t>RGPD &amp; Sécurité</a:t>
+            </a:r>
+            <a:endParaRPr lang="en-US" sz="1500" dirty="0"/>
+          </a:p>
+        </p:txBody>
+      </p:sp>
+      <p:sp>
+        <p:nvSpPr>
+          <p:cNvPr id="49" name="Shape 47"/>
+          <p:cNvSpPr/>
+          <p:nvPr/>
+        </p:nvSpPr>
+        <p:spPr>
+          <a:xfrm>
+            <a:off x="6400800" y="4773168"/>
+            <a:ext cx="502920" cy="658368"/>
+          </a:xfrm>
+          <a:prstGeom prst="rect">
+            <a:avLst/>
+          </a:prstGeom>
+          <a:solidFill>
+            <a:srgbClr val="1B2A5E"/>
+          </a:solidFill>
+          <a:ln/>
+        </p:spPr>
+      </p:sp>
+      <p:sp>
+        <p:nvSpPr>
+          <p:cNvPr id="50" name="Text 48"/>
+          <p:cNvSpPr/>
+          <p:nvPr/>
+        </p:nvSpPr>
+        <p:spPr>
+          <a:xfrm>
+            <a:off x="6400800" y="4773168"/>
+            <a:ext cx="502920" cy="658368"/>
+          </a:xfrm>
+          <a:prstGeom prst="rect">
+            <a:avLst/>
+          </a:prstGeom>
+          <a:noFill/>
+          <a:ln/>
+        </p:spPr>
+        <p:txBody>
+          <a:bodyPr wrap="square" lIns="0" tIns="0" rIns="0" bIns="0" rtlCol="0" anchor="ctr"/>
+          <a:lstStyle/>
+          <a:p>
+            <a:pPr algn="ctr" indent="0" marL="0">
+              <a:buNone/>
+            </a:pPr>
+            <a:r>
+              <a:rPr lang="en-US" sz="1600" b="1" dirty="0">
+                <a:solidFill>
+                  <a:srgbClr val="FFFFFF"/>
+                </a:solidFill>
+              </a:rPr>
+              <a:t>11</a:t>
+            </a:r>
+            <a:endParaRPr lang="en-US" sz="1600" dirty="0"/>
+          </a:p>
+        </p:txBody>
+      </p:sp>
+      <p:sp>
+        <p:nvSpPr>
+          <p:cNvPr id="51" name="Shape 49"/>
+          <p:cNvSpPr/>
+          <p:nvPr/>
+        </p:nvSpPr>
+        <p:spPr>
+          <a:xfrm>
+            <a:off x="6903720" y="4773168"/>
+            <a:ext cx="4297680" cy="658368"/>
+          </a:xfrm>
+          <a:prstGeom prst="rect">
+            <a:avLst/>
+          </a:prstGeom>
+          <a:solidFill>
+            <a:srgbClr val="F2F3F7"/>
+          </a:solidFill>
+          <a:ln w="12700">
+            <a:solidFill>
+              <a:srgbClr val="1B2A5E"/>
+            </a:solidFill>
+            <a:prstDash val="solid"/>
+          </a:ln>
+        </p:spPr>
+      </p:sp>
+      <p:sp>
+        <p:nvSpPr>
+          <p:cNvPr id="52" name="Text 50"/>
+          <p:cNvSpPr/>
+          <p:nvPr/>
+        </p:nvSpPr>
+        <p:spPr>
+          <a:xfrm>
+            <a:off x="7040880" y="4773168"/>
             <a:ext cx="4114800" cy="658368"/>
           </a:xfrm>
           <a:prstGeom prst="rect">
@@ -8776,217 +9480,9 @@
           <a:chExt cx="0" cy="0"/>
         </a:xfrm>
       </p:grpSpPr>
-      <p:sp>
-        <p:nvSpPr>
-          <p:cNvPr id="2" name="Shape 0"/>
-          <p:cNvSpPr/>
-          <p:nvPr/>
-        </p:nvSpPr>
-        <p:spPr>
-          <a:xfrm>
-            <a:off x="11475720" y="256032"/>
-            <a:ext cx="457200" cy="457200"/>
-          </a:xfrm>
-          <a:prstGeom prst="rect">
-            <a:avLst/>
-          </a:prstGeom>
-          <a:solidFill>
-            <a:srgbClr val="1B2A5E"/>
-          </a:solidFill>
-          <a:ln/>
-        </p:spPr>
-      </p:sp>
-      <p:sp>
-        <p:nvSpPr>
-          <p:cNvPr id="3" name="Text 1"/>
-          <p:cNvSpPr/>
-          <p:nvPr/>
-        </p:nvSpPr>
-        <p:spPr>
-          <a:xfrm>
-            <a:off x="11475720" y="256032"/>
-            <a:ext cx="457200" cy="457200"/>
-          </a:xfrm>
-          <a:prstGeom prst="rect">
-            <a:avLst/>
-          </a:prstGeom>
-          <a:noFill/>
-          <a:ln/>
-        </p:spPr>
-        <p:txBody>
-          <a:bodyPr wrap="square" lIns="0" tIns="0" rIns="0" bIns="0" rtlCol="0" anchor="ctr"/>
-          <a:lstStyle/>
-          <a:p>
-            <a:pPr algn="ctr" indent="0" marL="0">
-              <a:buNone/>
-            </a:pPr>
-            <a:r>
-              <a:rPr lang="en-US" sz="1300" b="1" dirty="0">
-                <a:solidFill>
-                  <a:srgbClr val="FFFFFF"/>
-                </a:solidFill>
-              </a:rPr>
-              <a:t>03</a:t>
-            </a:r>
-            <a:endParaRPr lang="en-US" sz="1300" dirty="0"/>
-          </a:p>
-        </p:txBody>
-      </p:sp>
-      <p:sp>
-        <p:nvSpPr>
-          <p:cNvPr id="4" name="Text 2"/>
-          <p:cNvSpPr/>
-          <p:nvPr/>
-        </p:nvSpPr>
-        <p:spPr>
-          <a:xfrm>
-            <a:off x="457200" y="292608"/>
-            <a:ext cx="10698480" cy="658368"/>
-          </a:xfrm>
-          <a:prstGeom prst="rect">
-            <a:avLst/>
-          </a:prstGeom>
-          <a:noFill/>
-          <a:ln/>
-        </p:spPr>
-        <p:txBody>
-          <a:bodyPr wrap="square" lIns="0" tIns="0" rIns="0" bIns="0" rtlCol="0" anchor="ctr"/>
-          <a:lstStyle/>
-          <a:p>
-            <a:pPr indent="0" marL="0">
-              <a:buNone/>
-            </a:pPr>
-            <a:r>
-              <a:rPr lang="en-US" sz="2900" b="1" dirty="0">
-                <a:solidFill>
-                  <a:srgbClr val="1B2A5E"/>
-                </a:solidFill>
-              </a:rPr>
-              <a:t>Pipeline ETL — diagramme de flux</a:t>
-            </a:r>
-            <a:endParaRPr lang="en-US" sz="2900" dirty="0"/>
-          </a:p>
-        </p:txBody>
-      </p:sp>
-      <p:sp>
-        <p:nvSpPr>
-          <p:cNvPr id="5" name="Shape 3"/>
-          <p:cNvSpPr/>
-          <p:nvPr/>
-        </p:nvSpPr>
-        <p:spPr>
-          <a:xfrm>
-            <a:off x="457200" y="950976"/>
-            <a:ext cx="822960" cy="54864"/>
-          </a:xfrm>
-          <a:prstGeom prst="rect">
-            <a:avLst/>
-          </a:prstGeom>
-          <a:solidFill>
-            <a:srgbClr val="E31B23"/>
-          </a:solidFill>
-          <a:ln/>
-        </p:spPr>
-      </p:sp>
-      <p:sp>
-        <p:nvSpPr>
-          <p:cNvPr id="6" name="Text 4"/>
-          <p:cNvSpPr/>
-          <p:nvPr/>
-        </p:nvSpPr>
-        <p:spPr>
-          <a:xfrm>
-            <a:off x="457200" y="1033272"/>
-            <a:ext cx="10058400" cy="365760"/>
-          </a:xfrm>
-          <a:prstGeom prst="rect">
-            <a:avLst/>
-          </a:prstGeom>
-          <a:noFill/>
-          <a:ln/>
-        </p:spPr>
-        <p:txBody>
-          <a:bodyPr wrap="square" lIns="0" tIns="0" rIns="0" bIns="0" rtlCol="0" anchor="ctr"/>
-          <a:lstStyle/>
-          <a:p>
-            <a:pPr indent="0" marL="0">
-              <a:buNone/>
-            </a:pPr>
-            <a:r>
-              <a:rPr lang="en-US" sz="1400" i="1" dirty="0">
-                <a:solidFill>
-                  <a:srgbClr val="0066CC"/>
-                </a:solidFill>
-              </a:rPr>
-              <a:t>Architecture médailon RAW → Bronze → Silver → Gold</a:t>
-            </a:r>
-            <a:endParaRPr lang="en-US" sz="1400" dirty="0"/>
-          </a:p>
-        </p:txBody>
-      </p:sp>
-      <p:sp>
-        <p:nvSpPr>
-          <p:cNvPr id="7" name="Shape 5"/>
-          <p:cNvSpPr/>
-          <p:nvPr/>
-        </p:nvSpPr>
-        <p:spPr>
-          <a:xfrm>
-            <a:off x="457200" y="6565392"/>
-            <a:ext cx="3931920" cy="64008"/>
-          </a:xfrm>
-          <a:prstGeom prst="rect">
-            <a:avLst/>
-          </a:prstGeom>
-          <a:solidFill>
-            <a:srgbClr val="1B2A5E"/>
-          </a:solidFill>
-          <a:ln/>
-        </p:spPr>
-      </p:sp>
-      <p:sp>
-        <p:nvSpPr>
-          <p:cNvPr id="8" name="Shape 6"/>
-          <p:cNvSpPr/>
-          <p:nvPr/>
-        </p:nvSpPr>
-        <p:spPr>
-          <a:xfrm>
-            <a:off x="4389120" y="6565392"/>
-            <a:ext cx="3383280" cy="64008"/>
-          </a:xfrm>
-          <a:prstGeom prst="rect">
-            <a:avLst/>
-          </a:prstGeom>
-          <a:solidFill>
-            <a:srgbClr val="DDDDDD"/>
-          </a:solidFill>
-          <a:ln/>
-        </p:spPr>
-      </p:sp>
-      <p:sp>
-        <p:nvSpPr>
-          <p:cNvPr id="9" name="Shape 7"/>
-          <p:cNvSpPr/>
-          <p:nvPr/>
-        </p:nvSpPr>
-        <p:spPr>
-          <a:xfrm>
-            <a:off x="7772400" y="6565392"/>
-            <a:ext cx="3931920" cy="64008"/>
-          </a:xfrm>
-          <a:prstGeom prst="rect">
-            <a:avLst/>
-          </a:prstGeom>
-          <a:solidFill>
-            <a:srgbClr val="E31B23"/>
-          </a:solidFill>
-          <a:ln/>
-        </p:spPr>
-      </p:sp>
       <p:pic>
         <p:nvPicPr>
-          <p:cNvPr id="10" name="Image 0" descr="C:\Users\amine\Downloads\POC_ElectioAnalytics_projet_complet\docs\mspr\02_architecture\diagrams\flux_etl_medaillon.png">    </p:cNvPr>
+          <p:cNvPr id="2" name="Image 0" descr="C:\Users\julie\Documents\mspr-rattrapage\docs\mspr\02_architecture\diagrams\archi_techno_electio.png">    </p:cNvPr>
           <p:cNvPicPr>
             <a:picLocks noChangeAspect="1"/>
           </p:cNvPicPr>
@@ -8999,8 +9495,8 @@
         </p:blipFill>
         <p:spPr>
           <a:xfrm>
-            <a:off x="365760" y="1417320"/>
-            <a:ext cx="11430000" cy="4846320"/>
+            <a:off x="0" y="0"/>
+            <a:ext cx="12191695" cy="6858000"/>
           </a:xfrm>
           <a:prstGeom prst="rect">
             <a:avLst/>
@@ -9125,7 +9621,7 @@
                   <a:srgbClr val="1B2A5E"/>
                 </a:solidFill>
               </a:rPr>
-              <a:t>Couches médailon</a:t>
+              <a:t>Pipeline ETL — diagramme de flux</a:t>
             </a:r>
             <a:endParaRPr lang="en-US" sz="2900" dirty="0"/>
           </a:p>
@@ -9181,7 +9677,7 @@
                   <a:srgbClr val="0066CC"/>
                 </a:solidFill>
               </a:rPr>
-              <a:t>Rôles Bronze / Silver / Gold</a:t>
+              <a:t>Architecture médailon RAW → Bronze → Silver → Gold</a:t>
             </a:r>
             <a:endParaRPr lang="en-US" sz="1400" dirty="0"/>
           </a:p>
@@ -9247,591 +9743,29 @@
           <a:ln/>
         </p:spPr>
       </p:sp>
-      <p:sp>
-        <p:nvSpPr>
-          <p:cNvPr id="10" name="Shape 8"/>
-          <p:cNvSpPr/>
-          <p:nvPr/>
-        </p:nvSpPr>
-        <p:spPr>
-          <a:xfrm>
-            <a:off x="685800" y="1828800"/>
-            <a:ext cx="3337560" cy="3200400"/>
-          </a:xfrm>
-          <a:prstGeom prst="roundRect">
-            <a:avLst>
-              <a:gd name="adj" fmla="val 2857"/>
-            </a:avLst>
-          </a:prstGeom>
-          <a:solidFill>
-            <a:srgbClr val="F2F3F7"/>
-          </a:solidFill>
-          <a:ln w="31750">
-            <a:solidFill>
-              <a:srgbClr val="B87333"/>
-            </a:solidFill>
-            <a:prstDash val="solid"/>
-          </a:ln>
-        </p:spPr>
-      </p:sp>
-      <p:sp>
-        <p:nvSpPr>
-          <p:cNvPr id="11" name="Shape 9"/>
-          <p:cNvSpPr/>
-          <p:nvPr/>
-        </p:nvSpPr>
-        <p:spPr>
-          <a:xfrm>
-            <a:off x="685800" y="1828800"/>
-            <a:ext cx="3337560" cy="548640"/>
-          </a:xfrm>
-          <a:prstGeom prst="rect">
-            <a:avLst/>
-          </a:prstGeom>
-          <a:solidFill>
-            <a:srgbClr val="B87333"/>
-          </a:solidFill>
-          <a:ln/>
-        </p:spPr>
-      </p:sp>
-      <p:sp>
-        <p:nvSpPr>
-          <p:cNvPr id="12" name="Text 10"/>
-          <p:cNvSpPr/>
-          <p:nvPr/>
-        </p:nvSpPr>
-        <p:spPr>
-          <a:xfrm>
-            <a:off x="685800" y="1828800"/>
-            <a:ext cx="3337560" cy="548640"/>
-          </a:xfrm>
-          <a:prstGeom prst="rect">
-            <a:avLst/>
-          </a:prstGeom>
-          <a:noFill/>
-          <a:ln/>
-        </p:spPr>
-        <p:txBody>
-          <a:bodyPr wrap="square" lIns="0" tIns="0" rIns="0" bIns="0" rtlCol="0" anchor="ctr"/>
-          <a:lstStyle/>
-          <a:p>
-            <a:pPr algn="ctr" indent="0" marL="0">
-              <a:buNone/>
-            </a:pPr>
-            <a:r>
-              <a:rPr lang="en-US" sz="1800" b="1" dirty="0">
-                <a:solidFill>
-                  <a:srgbClr val="FFFFFF"/>
-                </a:solidFill>
-              </a:rPr>
-              <a:t>BRONZE</a:t>
-            </a:r>
-            <a:endParaRPr lang="en-US" sz="1800" dirty="0"/>
-          </a:p>
-        </p:txBody>
-      </p:sp>
-      <p:sp>
-        <p:nvSpPr>
-          <p:cNvPr id="13" name="Text 11"/>
-          <p:cNvSpPr/>
-          <p:nvPr/>
-        </p:nvSpPr>
-        <p:spPr>
-          <a:xfrm>
-            <a:off x="914400" y="2560320"/>
-            <a:ext cx="2880360" cy="2286000"/>
-          </a:xfrm>
-          <a:prstGeom prst="rect">
-            <a:avLst/>
-          </a:prstGeom>
-          <a:noFill/>
-          <a:ln/>
-        </p:spPr>
-        <p:txBody>
-          <a:bodyPr wrap="square" rtlCol="0" anchor="t"/>
-          <a:lstStyle/>
-          <a:p>
-            <a:pPr marL="342900" indent="-342900">
-              <a:spcAft>
-                <a:spcPts val="900"/>
-              </a:spcAft>
-              <a:buSzPct val="100000"/>
-              <a:buChar char="•"/>
-            </a:pPr>
-            <a:r>
-              <a:rPr lang="en-US" sz="1300" dirty="0">
-                <a:solidFill>
-                  <a:srgbClr val="222222"/>
-                </a:solidFill>
-              </a:rPr>
-              <a:t>CSV bruts normalisés</a:t>
-            </a:r>
-            <a:endParaRPr lang="en-US" sz="1300" dirty="0"/>
-          </a:p>
-          <a:p>
-            <a:pPr marL="342900" indent="-342900">
-              <a:spcAft>
-                <a:spcPts val="900"/>
-              </a:spcAft>
-              <a:buSzPct val="100000"/>
-              <a:buChar char="•"/>
-            </a:pPr>
-            <a:r>
-              <a:rPr lang="en-US" sz="1300" dirty="0">
-                <a:solidFill>
-                  <a:srgbClr val="222222"/>
-                </a:solidFill>
-              </a:rPr>
-              <a:t>Contrats + manifests JSON</a:t>
-            </a:r>
-            <a:endParaRPr lang="en-US" sz="1300" dirty="0"/>
-          </a:p>
-          <a:p>
-            <a:pPr marL="342900" indent="-342900">
-              <a:spcAft>
-                <a:spcPts val="900"/>
-              </a:spcAft>
-              <a:buSzPct val="100000"/>
-              <a:buChar char="•"/>
-            </a:pPr>
-            <a:r>
-              <a:rPr lang="en-US" sz="1300" dirty="0">
-                <a:solidFill>
-                  <a:srgbClr val="222222"/>
-                </a:solidFill>
-              </a:rPr>
-              <a:t>Jamais modifiés après écriture</a:t>
-            </a:r>
-            <a:endParaRPr lang="en-US" sz="1300" dirty="0"/>
-          </a:p>
-        </p:txBody>
-      </p:sp>
-      <p:sp>
-        <p:nvSpPr>
-          <p:cNvPr id="14" name="Text 12"/>
-          <p:cNvSpPr/>
-          <p:nvPr/>
-        </p:nvSpPr>
-        <p:spPr>
-          <a:xfrm>
-            <a:off x="4023360" y="3063240"/>
-            <a:ext cx="640080" cy="731520"/>
-          </a:xfrm>
-          <a:prstGeom prst="rect">
-            <a:avLst/>
-          </a:prstGeom>
-          <a:noFill/>
-          <a:ln/>
-        </p:spPr>
-        <p:txBody>
-          <a:bodyPr wrap="square" lIns="0" tIns="0" rIns="0" bIns="0" rtlCol="0" anchor="ctr"/>
-          <a:lstStyle/>
-          <a:p>
-            <a:pPr algn="ctr" indent="0" marL="0">
-              <a:buNone/>
-            </a:pPr>
-            <a:r>
-              <a:rPr lang="en-US" sz="3400" b="1" dirty="0">
-                <a:solidFill>
-                  <a:srgbClr val="1B2A5E"/>
-                </a:solidFill>
-              </a:rPr>
-              <a:t>→</a:t>
-            </a:r>
-            <a:endParaRPr lang="en-US" sz="3400" dirty="0"/>
-          </a:p>
-        </p:txBody>
-      </p:sp>
-      <p:sp>
-        <p:nvSpPr>
-          <p:cNvPr id="15" name="Shape 13"/>
-          <p:cNvSpPr/>
-          <p:nvPr/>
-        </p:nvSpPr>
-        <p:spPr>
-          <a:xfrm>
-            <a:off x="4663440" y="1828800"/>
-            <a:ext cx="3337560" cy="3200400"/>
-          </a:xfrm>
-          <a:prstGeom prst="roundRect">
-            <a:avLst>
-              <a:gd name="adj" fmla="val 2857"/>
-            </a:avLst>
-          </a:prstGeom>
-          <a:solidFill>
-            <a:srgbClr val="F2F3F7"/>
-          </a:solidFill>
-          <a:ln w="31750">
-            <a:solidFill>
-              <a:srgbClr val="8A8D93"/>
-            </a:solidFill>
-            <a:prstDash val="solid"/>
-          </a:ln>
-        </p:spPr>
-      </p:sp>
-      <p:sp>
-        <p:nvSpPr>
-          <p:cNvPr id="16" name="Shape 14"/>
-          <p:cNvSpPr/>
-          <p:nvPr/>
-        </p:nvSpPr>
-        <p:spPr>
-          <a:xfrm>
-            <a:off x="4663440" y="1828800"/>
-            <a:ext cx="3337560" cy="548640"/>
-          </a:xfrm>
-          <a:prstGeom prst="rect">
-            <a:avLst/>
-          </a:prstGeom>
-          <a:solidFill>
-            <a:srgbClr val="8A8D93"/>
-          </a:solidFill>
-          <a:ln/>
-        </p:spPr>
-      </p:sp>
-      <p:sp>
-        <p:nvSpPr>
-          <p:cNvPr id="17" name="Text 15"/>
-          <p:cNvSpPr/>
-          <p:nvPr/>
-        </p:nvSpPr>
-        <p:spPr>
-          <a:xfrm>
-            <a:off x="4663440" y="1828800"/>
-            <a:ext cx="3337560" cy="548640"/>
-          </a:xfrm>
-          <a:prstGeom prst="rect">
-            <a:avLst/>
-          </a:prstGeom>
-          <a:noFill/>
-          <a:ln/>
-        </p:spPr>
-        <p:txBody>
-          <a:bodyPr wrap="square" lIns="0" tIns="0" rIns="0" bIns="0" rtlCol="0" anchor="ctr"/>
-          <a:lstStyle/>
-          <a:p>
-            <a:pPr algn="ctr" indent="0" marL="0">
-              <a:buNone/>
-            </a:pPr>
-            <a:r>
-              <a:rPr lang="en-US" sz="1800" b="1" dirty="0">
-                <a:solidFill>
-                  <a:srgbClr val="FFFFFF"/>
-                </a:solidFill>
-              </a:rPr>
-              <a:t>SILVER</a:t>
-            </a:r>
-            <a:endParaRPr lang="en-US" sz="1800" dirty="0"/>
-          </a:p>
-        </p:txBody>
-      </p:sp>
-      <p:sp>
-        <p:nvSpPr>
-          <p:cNvPr id="18" name="Text 16"/>
-          <p:cNvSpPr/>
-          <p:nvPr/>
-        </p:nvSpPr>
-        <p:spPr>
-          <a:xfrm>
-            <a:off x="4892040" y="2560320"/>
-            <a:ext cx="2880360" cy="2286000"/>
-          </a:xfrm>
-          <a:prstGeom prst="rect">
-            <a:avLst/>
-          </a:prstGeom>
-          <a:noFill/>
-          <a:ln/>
-        </p:spPr>
-        <p:txBody>
-          <a:bodyPr wrap="square" rtlCol="0" anchor="t"/>
-          <a:lstStyle/>
-          <a:p>
-            <a:pPr marL="342900" indent="-342900">
-              <a:spcAft>
-                <a:spcPts val="900"/>
-              </a:spcAft>
-              <a:buSzPct val="100000"/>
-              <a:buChar char="•"/>
-            </a:pPr>
-            <a:r>
-              <a:rPr lang="en-US" sz="1300" dirty="0">
-                <a:solidFill>
-                  <a:srgbClr val="222222"/>
-                </a:solidFill>
-              </a:rPr>
-              <a:t>Typage + déduplication</a:t>
-            </a:r>
-            <a:endParaRPr lang="en-US" sz="1300" dirty="0"/>
-          </a:p>
-          <a:p>
-            <a:pPr marL="342900" indent="-342900">
-              <a:spcAft>
-                <a:spcPts val="900"/>
-              </a:spcAft>
-              <a:buSzPct val="100000"/>
-              <a:buChar char="•"/>
-            </a:pPr>
-            <a:r>
-              <a:rPr lang="en-US" sz="1300" dirty="0">
-                <a:solidFill>
-                  <a:srgbClr val="222222"/>
-                </a:solidFill>
-              </a:rPr>
-              <a:t>DQM (16 contrôles)</a:t>
-            </a:r>
-            <a:endParaRPr lang="en-US" sz="1300" dirty="0"/>
-          </a:p>
-          <a:p>
-            <a:pPr marL="342900" indent="-342900">
-              <a:spcAft>
-                <a:spcPts val="900"/>
-              </a:spcAft>
-              <a:buSzPct val="100000"/>
-              <a:buChar char="•"/>
-            </a:pPr>
-            <a:r>
-              <a:rPr lang="en-US" sz="1300" dirty="0">
-                <a:solidFill>
-                  <a:srgbClr val="222222"/>
-                </a:solidFill>
-              </a:rPr>
-              <a:t>Agrégats socioeco_annuel</a:t>
-            </a:r>
-            <a:endParaRPr lang="en-US" sz="1300" dirty="0"/>
-          </a:p>
-        </p:txBody>
-      </p:sp>
-      <p:sp>
-        <p:nvSpPr>
-          <p:cNvPr id="19" name="Text 17"/>
-          <p:cNvSpPr/>
-          <p:nvPr/>
-        </p:nvSpPr>
-        <p:spPr>
-          <a:xfrm>
-            <a:off x="8001000" y="3063240"/>
-            <a:ext cx="640080" cy="731520"/>
-          </a:xfrm>
-          <a:prstGeom prst="rect">
-            <a:avLst/>
-          </a:prstGeom>
-          <a:noFill/>
-          <a:ln/>
-        </p:spPr>
-        <p:txBody>
-          <a:bodyPr wrap="square" lIns="0" tIns="0" rIns="0" bIns="0" rtlCol="0" anchor="ctr"/>
-          <a:lstStyle/>
-          <a:p>
-            <a:pPr algn="ctr" indent="0" marL="0">
-              <a:buNone/>
-            </a:pPr>
-            <a:r>
-              <a:rPr lang="en-US" sz="3400" b="1" dirty="0">
-                <a:solidFill>
-                  <a:srgbClr val="1B2A5E"/>
-                </a:solidFill>
-              </a:rPr>
-              <a:t>→</a:t>
-            </a:r>
-            <a:endParaRPr lang="en-US" sz="3400" dirty="0"/>
-          </a:p>
-        </p:txBody>
-      </p:sp>
-      <p:sp>
-        <p:nvSpPr>
-          <p:cNvPr id="20" name="Shape 18"/>
-          <p:cNvSpPr/>
-          <p:nvPr/>
-        </p:nvSpPr>
-        <p:spPr>
-          <a:xfrm>
-            <a:off x="8641080" y="1828800"/>
-            <a:ext cx="3337560" cy="3200400"/>
-          </a:xfrm>
-          <a:prstGeom prst="roundRect">
-            <a:avLst>
-              <a:gd name="adj" fmla="val 2857"/>
-            </a:avLst>
-          </a:prstGeom>
-          <a:solidFill>
-            <a:srgbClr val="F2F3F7"/>
-          </a:solidFill>
-          <a:ln w="31750">
-            <a:solidFill>
-              <a:srgbClr val="C9A227"/>
-            </a:solidFill>
-            <a:prstDash val="solid"/>
-          </a:ln>
-        </p:spPr>
-      </p:sp>
-      <p:sp>
-        <p:nvSpPr>
-          <p:cNvPr id="21" name="Shape 19"/>
-          <p:cNvSpPr/>
-          <p:nvPr/>
-        </p:nvSpPr>
-        <p:spPr>
-          <a:xfrm>
-            <a:off x="8641080" y="1828800"/>
-            <a:ext cx="3337560" cy="548640"/>
-          </a:xfrm>
-          <a:prstGeom prst="rect">
-            <a:avLst/>
-          </a:prstGeom>
-          <a:solidFill>
-            <a:srgbClr val="C9A227"/>
-          </a:solidFill>
-          <a:ln/>
-        </p:spPr>
-      </p:sp>
-      <p:sp>
-        <p:nvSpPr>
-          <p:cNvPr id="22" name="Text 20"/>
-          <p:cNvSpPr/>
-          <p:nvPr/>
-        </p:nvSpPr>
-        <p:spPr>
-          <a:xfrm>
-            <a:off x="8641080" y="1828800"/>
-            <a:ext cx="3337560" cy="548640"/>
-          </a:xfrm>
-          <a:prstGeom prst="rect">
-            <a:avLst/>
-          </a:prstGeom>
-          <a:noFill/>
-          <a:ln/>
-        </p:spPr>
-        <p:txBody>
-          <a:bodyPr wrap="square" lIns="0" tIns="0" rIns="0" bIns="0" rtlCol="0" anchor="ctr"/>
-          <a:lstStyle/>
-          <a:p>
-            <a:pPr algn="ctr" indent="0" marL="0">
-              <a:buNone/>
-            </a:pPr>
-            <a:r>
-              <a:rPr lang="en-US" sz="1800" b="1" dirty="0">
-                <a:solidFill>
-                  <a:srgbClr val="FFFFFF"/>
-                </a:solidFill>
-              </a:rPr>
-              <a:t>GOLD</a:t>
-            </a:r>
-            <a:endParaRPr lang="en-US" sz="1800" dirty="0"/>
-          </a:p>
-        </p:txBody>
-      </p:sp>
-      <p:sp>
-        <p:nvSpPr>
-          <p:cNvPr id="23" name="Text 21"/>
-          <p:cNvSpPr/>
-          <p:nvPr/>
-        </p:nvSpPr>
-        <p:spPr>
-          <a:xfrm>
-            <a:off x="8869680" y="2560320"/>
-            <a:ext cx="2880360" cy="2286000"/>
-          </a:xfrm>
-          <a:prstGeom prst="rect">
-            <a:avLst/>
-          </a:prstGeom>
-          <a:noFill/>
-          <a:ln/>
-        </p:spPr>
-        <p:txBody>
-          <a:bodyPr wrap="square" rtlCol="0" anchor="t"/>
-          <a:lstStyle/>
-          <a:p>
-            <a:pPr marL="342900" indent="-342900">
-              <a:spcAft>
-                <a:spcPts val="900"/>
-              </a:spcAft>
-              <a:buSzPct val="100000"/>
-              <a:buChar char="•"/>
-            </a:pPr>
-            <a:r>
-              <a:rPr lang="en-US" sz="1300" dirty="0">
-                <a:solidFill>
-                  <a:srgbClr val="222222"/>
-                </a:solidFill>
-              </a:rPr>
-              <a:t>1 ligne = 1 (dépt, élection)</a:t>
-            </a:r>
-            <a:endParaRPr lang="en-US" sz="1300" dirty="0"/>
-          </a:p>
-          <a:p>
-            <a:pPr marL="342900" indent="-342900">
-              <a:spcAft>
-                <a:spcPts val="900"/>
-              </a:spcAft>
-              <a:buSzPct val="100000"/>
-              <a:buChar char="•"/>
-            </a:pPr>
-            <a:r>
-              <a:rPr lang="en-US" sz="1300" dirty="0">
-                <a:solidFill>
-                  <a:srgbClr val="222222"/>
-                </a:solidFill>
-              </a:rPr>
-              <a:t>Features anti-leakage ≤ N−1</a:t>
-            </a:r>
-            <a:endParaRPr lang="en-US" sz="1300" dirty="0"/>
-          </a:p>
-          <a:p>
-            <a:pPr marL="342900" indent="-342900">
-              <a:spcAft>
-                <a:spcPts val="900"/>
-              </a:spcAft>
-              <a:buSzPct val="100000"/>
-              <a:buChar char="•"/>
-            </a:pPr>
-            <a:r>
-              <a:rPr lang="en-US" sz="1300" dirty="0">
-                <a:solidFill>
-                  <a:srgbClr val="222222"/>
-                </a:solidFill>
-              </a:rPr>
-              <a:t>SQLite + KPI + Postgres</a:t>
-            </a:r>
-            <a:endParaRPr lang="en-US" sz="1300" dirty="0"/>
-          </a:p>
-        </p:txBody>
-      </p:sp>
-      <p:sp>
-        <p:nvSpPr>
-          <p:cNvPr id="24" name="Text 22"/>
-          <p:cNvSpPr/>
-          <p:nvPr/>
-        </p:nvSpPr>
-        <p:spPr>
-          <a:xfrm>
-            <a:off x="685800" y="5486400"/>
-            <a:ext cx="10972800" cy="457200"/>
-          </a:xfrm>
-          <a:prstGeom prst="rect">
-            <a:avLst/>
-          </a:prstGeom>
-          <a:noFill/>
-          <a:ln/>
-        </p:spPr>
-        <p:txBody>
-          <a:bodyPr wrap="square" rtlCol="0" anchor="ctr"/>
-          <a:lstStyle/>
-          <a:p>
-            <a:pPr algn="ctr" indent="0" marL="0">
-              <a:buNone/>
-            </a:pPr>
-            <a:r>
-              <a:rPr lang="en-US" sz="1300" i="1" dirty="0">
-                <a:solidFill>
-                  <a:srgbClr val="1B2A5E"/>
-                </a:solidFill>
-              </a:rPr>
-              <a:t>Orchestration : run_pipeline.py · tests pytest · suite DQM (dqm/run_checkpoint.py)</a:t>
-            </a:r>
-            <a:endParaRPr lang="en-US" sz="1300" dirty="0"/>
-          </a:p>
-        </p:txBody>
-      </p:sp>
+      <p:pic>
+        <p:nvPicPr>
+          <p:cNvPr id="10" name="Image 0" descr="C:\Users\julie\Documents\mspr-rattrapage\docs\mspr\02_architecture\diagrams\flux_etl_medaillon.png">    </p:cNvPr>
+          <p:cNvPicPr>
+            <a:picLocks noChangeAspect="1"/>
+          </p:cNvPicPr>
+          <p:nvPr/>
+        </p:nvPicPr>
+        <p:blipFill>
+          <a:blip r:embed="rId1"/>
+          <a:srcRect l="0" r="0" t="0" b="0"/>
+          <a:stretch/>
+        </p:blipFill>
+        <p:spPr>
+          <a:xfrm>
+            <a:off x="365760" y="1417320"/>
+            <a:ext cx="11430000" cy="4846320"/>
+          </a:xfrm>
+          <a:prstGeom prst="rect">
+            <a:avLst/>
+          </a:prstGeom>
+        </p:spPr>
+      </p:pic>
     </p:spTree>
   </p:cSld>
   <p:clrMapOvr>
@@ -9914,7 +9848,7 @@
                   <a:srgbClr val="FFFFFF"/>
                 </a:solidFill>
               </a:rPr>
-              <a:t>04</a:t>
+              <a:t>03</a:t>
             </a:r>
             <a:endParaRPr lang="en-US" sz="1300" dirty="0"/>
           </a:p>
@@ -9950,7 +9884,7 @@
                   <a:srgbClr val="1B2A5E"/>
                 </a:solidFill>
               </a:rPr>
-              <a:t>Modèle de données</a:t>
+              <a:t>Couches médailon</a:t>
             </a:r>
             <a:endParaRPr lang="en-US" sz="2900" dirty="0"/>
           </a:p>
@@ -10006,7 +9940,7 @@
                   <a:srgbClr val="0066CC"/>
                 </a:solidFill>
               </a:rPr>
-              <a:t>Schéma en étoile — nommage explicite</a:t>
+              <a:t>Rôles Bronze / Silver / Gold</a:t>
             </a:r>
             <a:endParaRPr lang="en-US" sz="1400" dirty="0"/>
           </a:p>
@@ -10080,20 +10014,20 @@
         </p:nvSpPr>
         <p:spPr>
           <a:xfrm>
-            <a:off x="502920" y="1645920"/>
-            <a:ext cx="3611880" cy="4023360"/>
+            <a:off x="685800" y="1828800"/>
+            <a:ext cx="3337560" cy="3200400"/>
           </a:xfrm>
           <a:prstGeom prst="roundRect">
             <a:avLst>
-              <a:gd name="adj" fmla="val 2025"/>
+              <a:gd name="adj" fmla="val 2857"/>
             </a:avLst>
           </a:prstGeom>
           <a:solidFill>
             <a:srgbClr val="F2F3F7"/>
           </a:solidFill>
-          <a:ln w="15875">
+          <a:ln w="31750">
             <a:solidFill>
-              <a:srgbClr val="0066CC"/>
+              <a:srgbClr val="B87333"/>
             </a:solidFill>
             <a:prstDash val="solid"/>
           </a:ln>
@@ -10101,14 +10035,34 @@
       </p:sp>
       <p:sp>
         <p:nvSpPr>
-          <p:cNvPr id="11" name="Text 9"/>
-          <p:cNvSpPr/>
-          <p:nvPr/>
-        </p:nvSpPr>
-        <p:spPr>
-          <a:xfrm>
-            <a:off x="502920" y="1773936"/>
-            <a:ext cx="3611880" cy="411480"/>
+          <p:cNvPr id="11" name="Shape 9"/>
+          <p:cNvSpPr/>
+          <p:nvPr/>
+        </p:nvSpPr>
+        <p:spPr>
+          <a:xfrm>
+            <a:off x="685800" y="1828800"/>
+            <a:ext cx="3337560" cy="548640"/>
+          </a:xfrm>
+          <a:prstGeom prst="rect">
+            <a:avLst/>
+          </a:prstGeom>
+          <a:solidFill>
+            <a:srgbClr val="B87333"/>
+          </a:solidFill>
+          <a:ln/>
+        </p:spPr>
+      </p:sp>
+      <p:sp>
+        <p:nvSpPr>
+          <p:cNvPr id="12" name="Text 10"/>
+          <p:cNvSpPr/>
+          <p:nvPr/>
+        </p:nvSpPr>
+        <p:spPr>
+          <a:xfrm>
+            <a:off x="685800" y="1828800"/>
+            <a:ext cx="3337560" cy="548640"/>
           </a:xfrm>
           <a:prstGeom prst="rect">
             <a:avLst/>
@@ -10124,27 +10078,27 @@
               <a:buNone/>
             </a:pPr>
             <a:r>
-              <a:rPr lang="en-US" sz="1600" b="1" dirty="0">
-                <a:solidFill>
-                  <a:srgbClr val="0066CC"/>
-                </a:solidFill>
-              </a:rPr>
-              <a:t>Dimensions</a:t>
-            </a:r>
-            <a:endParaRPr lang="en-US" sz="1600" dirty="0"/>
-          </a:p>
-        </p:txBody>
-      </p:sp>
-      <p:sp>
-        <p:nvSpPr>
-          <p:cNvPr id="12" name="Text 10"/>
-          <p:cNvSpPr/>
-          <p:nvPr/>
-        </p:nvSpPr>
-        <p:spPr>
-          <a:xfrm>
-            <a:off x="704088" y="2240280"/>
-            <a:ext cx="3209544" cy="3291840"/>
+              <a:rPr lang="en-US" sz="1800" b="1" dirty="0">
+                <a:solidFill>
+                  <a:srgbClr val="FFFFFF"/>
+                </a:solidFill>
+              </a:rPr>
+              <a:t>BRONZE</a:t>
+            </a:r>
+            <a:endParaRPr lang="en-US" sz="1800" dirty="0"/>
+          </a:p>
+        </p:txBody>
+      </p:sp>
+      <p:sp>
+        <p:nvSpPr>
+          <p:cNvPr id="13" name="Text 11"/>
+          <p:cNvSpPr/>
+          <p:nvPr/>
+        </p:nvSpPr>
+        <p:spPr>
+          <a:xfrm>
+            <a:off x="914400" y="2560320"/>
+            <a:ext cx="2880360" cy="2286000"/>
           </a:xfrm>
           <a:prstGeom prst="rect">
             <a:avLst/>
@@ -10158,81 +10112,117 @@
           <a:p>
             <a:pPr marL="342900" indent="-342900">
               <a:spcAft>
-                <a:spcPts val="700"/>
+                <a:spcPts val="900"/>
               </a:spcAft>
               <a:buSzPct val="100000"/>
               <a:buChar char="•"/>
             </a:pPr>
             <a:r>
-              <a:rPr lang="en-US" sz="1250" dirty="0">
+              <a:rPr lang="en-US" sz="1300" dirty="0">
                 <a:solidFill>
                   <a:srgbClr val="222222"/>
                 </a:solidFill>
               </a:rPr>
-              <a:t>dim_departement</a:t>
-            </a:r>
-            <a:endParaRPr lang="en-US" sz="1250" dirty="0"/>
+              <a:t>CSV bruts normalisés</a:t>
+            </a:r>
+            <a:endParaRPr lang="en-US" sz="1300" dirty="0"/>
           </a:p>
           <a:p>
             <a:pPr marL="342900" indent="-342900">
               <a:spcAft>
-                <a:spcPts val="700"/>
+                <a:spcPts val="900"/>
               </a:spcAft>
               <a:buSzPct val="100000"/>
               <a:buChar char="•"/>
             </a:pPr>
             <a:r>
-              <a:rPr lang="en-US" sz="1250" dirty="0">
+              <a:rPr lang="en-US" sz="1300" dirty="0">
                 <a:solidFill>
                   <a:srgbClr val="222222"/>
                 </a:solidFill>
               </a:rPr>
-              <a:t>dim_annee</a:t>
-            </a:r>
-            <a:endParaRPr lang="en-US" sz="1250" dirty="0"/>
+              <a:t>Contrats + manifests JSON</a:t>
+            </a:r>
+            <a:endParaRPr lang="en-US" sz="1300" dirty="0"/>
           </a:p>
           <a:p>
             <a:pPr marL="342900" indent="-342900">
               <a:spcAft>
-                <a:spcPts val="700"/>
+                <a:spcPts val="900"/>
               </a:spcAft>
               <a:buSzPct val="100000"/>
               <a:buChar char="•"/>
             </a:pPr>
             <a:r>
-              <a:rPr lang="en-US" sz="1250" dirty="0">
+              <a:rPr lang="en-US" sz="1300" dirty="0">
                 <a:solidFill>
                   <a:srgbClr val="222222"/>
                 </a:solidFill>
               </a:rPr>
-              <a:t>dim_bloc</a:t>
-            </a:r>
-            <a:endParaRPr lang="en-US" sz="1250" dirty="0"/>
-          </a:p>
-        </p:txBody>
-      </p:sp>
-      <p:sp>
-        <p:nvSpPr>
-          <p:cNvPr id="13" name="Shape 11"/>
-          <p:cNvSpPr/>
-          <p:nvPr/>
-        </p:nvSpPr>
-        <p:spPr>
-          <a:xfrm>
-            <a:off x="4297680" y="1645920"/>
-            <a:ext cx="3611880" cy="4023360"/>
+              <a:t>Jamais modifiés après écriture</a:t>
+            </a:r>
+            <a:endParaRPr lang="en-US" sz="1300" dirty="0"/>
+          </a:p>
+        </p:txBody>
+      </p:sp>
+      <p:sp>
+        <p:nvSpPr>
+          <p:cNvPr id="14" name="Text 12"/>
+          <p:cNvSpPr/>
+          <p:nvPr/>
+        </p:nvSpPr>
+        <p:spPr>
+          <a:xfrm>
+            <a:off x="4023360" y="3063240"/>
+            <a:ext cx="640080" cy="731520"/>
+          </a:xfrm>
+          <a:prstGeom prst="rect">
+            <a:avLst/>
+          </a:prstGeom>
+          <a:noFill/>
+          <a:ln/>
+        </p:spPr>
+        <p:txBody>
+          <a:bodyPr wrap="square" lIns="0" tIns="0" rIns="0" bIns="0" rtlCol="0" anchor="ctr"/>
+          <a:lstStyle/>
+          <a:p>
+            <a:pPr algn="ctr" indent="0" marL="0">
+              <a:buNone/>
+            </a:pPr>
+            <a:r>
+              <a:rPr lang="en-US" sz="3400" b="1" dirty="0">
+                <a:solidFill>
+                  <a:srgbClr val="1B2A5E"/>
+                </a:solidFill>
+              </a:rPr>
+              <a:t>→</a:t>
+            </a:r>
+            <a:endParaRPr lang="en-US" sz="3400" dirty="0"/>
+          </a:p>
+        </p:txBody>
+      </p:sp>
+      <p:sp>
+        <p:nvSpPr>
+          <p:cNvPr id="15" name="Shape 13"/>
+          <p:cNvSpPr/>
+          <p:nvPr/>
+        </p:nvSpPr>
+        <p:spPr>
+          <a:xfrm>
+            <a:off x="4663440" y="1828800"/>
+            <a:ext cx="3337560" cy="3200400"/>
           </a:xfrm>
           <a:prstGeom prst="roundRect">
             <a:avLst>
-              <a:gd name="adj" fmla="val 2025"/>
+              <a:gd name="adj" fmla="val 2857"/>
             </a:avLst>
           </a:prstGeom>
           <a:solidFill>
             <a:srgbClr val="F2F3F7"/>
           </a:solidFill>
-          <a:ln w="15875">
+          <a:ln w="31750">
             <a:solidFill>
-              <a:srgbClr val="1B2A5E"/>
+              <a:srgbClr val="8A8D93"/>
             </a:solidFill>
             <a:prstDash val="solid"/>
           </a:ln>
@@ -10240,14 +10230,34 @@
       </p:sp>
       <p:sp>
         <p:nvSpPr>
-          <p:cNvPr id="14" name="Text 12"/>
-          <p:cNvSpPr/>
-          <p:nvPr/>
-        </p:nvSpPr>
-        <p:spPr>
-          <a:xfrm>
-            <a:off x="4297680" y="1773936"/>
-            <a:ext cx="3611880" cy="411480"/>
+          <p:cNvPr id="16" name="Shape 14"/>
+          <p:cNvSpPr/>
+          <p:nvPr/>
+        </p:nvSpPr>
+        <p:spPr>
+          <a:xfrm>
+            <a:off x="4663440" y="1828800"/>
+            <a:ext cx="3337560" cy="548640"/>
+          </a:xfrm>
+          <a:prstGeom prst="rect">
+            <a:avLst/>
+          </a:prstGeom>
+          <a:solidFill>
+            <a:srgbClr val="8A8D93"/>
+          </a:solidFill>
+          <a:ln/>
+        </p:spPr>
+      </p:sp>
+      <p:sp>
+        <p:nvSpPr>
+          <p:cNvPr id="17" name="Text 15"/>
+          <p:cNvSpPr/>
+          <p:nvPr/>
+        </p:nvSpPr>
+        <p:spPr>
+          <a:xfrm>
+            <a:off x="4663440" y="1828800"/>
+            <a:ext cx="3337560" cy="548640"/>
           </a:xfrm>
           <a:prstGeom prst="rect">
             <a:avLst/>
@@ -10263,27 +10273,27 @@
               <a:buNone/>
             </a:pPr>
             <a:r>
-              <a:rPr lang="en-US" sz="1600" b="1" dirty="0">
-                <a:solidFill>
-                  <a:srgbClr val="1B2A5E"/>
-                </a:solidFill>
-              </a:rPr>
-              <a:t>Faits</a:t>
-            </a:r>
-            <a:endParaRPr lang="en-US" sz="1600" dirty="0"/>
-          </a:p>
-        </p:txBody>
-      </p:sp>
-      <p:sp>
-        <p:nvSpPr>
-          <p:cNvPr id="15" name="Text 13"/>
-          <p:cNvSpPr/>
-          <p:nvPr/>
-        </p:nvSpPr>
-        <p:spPr>
-          <a:xfrm>
-            <a:off x="4498848" y="2240280"/>
-            <a:ext cx="3209544" cy="3291840"/>
+              <a:rPr lang="en-US" sz="1800" b="1" dirty="0">
+                <a:solidFill>
+                  <a:srgbClr val="FFFFFF"/>
+                </a:solidFill>
+              </a:rPr>
+              <a:t>SILVER</a:t>
+            </a:r>
+            <a:endParaRPr lang="en-US" sz="1800" dirty="0"/>
+          </a:p>
+        </p:txBody>
+      </p:sp>
+      <p:sp>
+        <p:nvSpPr>
+          <p:cNvPr id="18" name="Text 16"/>
+          <p:cNvSpPr/>
+          <p:nvPr/>
+        </p:nvSpPr>
+        <p:spPr>
+          <a:xfrm>
+            <a:off x="4892040" y="2560320"/>
+            <a:ext cx="2880360" cy="2286000"/>
           </a:xfrm>
           <a:prstGeom prst="rect">
             <a:avLst/>
@@ -10297,79 +10307,115 @@
           <a:p>
             <a:pPr marL="342900" indent="-342900">
               <a:spcAft>
-                <a:spcPts val="700"/>
+                <a:spcPts val="900"/>
               </a:spcAft>
               <a:buSzPct val="100000"/>
               <a:buChar char="•"/>
             </a:pPr>
             <a:r>
-              <a:rPr lang="en-US" sz="1250" dirty="0">
+              <a:rPr lang="en-US" sz="1300" dirty="0">
                 <a:solidFill>
                   <a:srgbClr val="222222"/>
                 </a:solidFill>
               </a:rPr>
-              <a:t>fait_resultat_election</a:t>
-            </a:r>
-            <a:endParaRPr lang="en-US" sz="1250" dirty="0"/>
+              <a:t>Typage + déduplication</a:t>
+            </a:r>
+            <a:endParaRPr lang="en-US" sz="1300" dirty="0"/>
           </a:p>
           <a:p>
             <a:pPr marL="342900" indent="-342900">
               <a:spcAft>
-                <a:spcPts val="700"/>
+                <a:spcPts val="900"/>
               </a:spcAft>
               <a:buSzPct val="100000"/>
               <a:buChar char="•"/>
             </a:pPr>
             <a:r>
-              <a:rPr lang="en-US" sz="1250" dirty="0">
+              <a:rPr lang="en-US" sz="1300" dirty="0">
                 <a:solidFill>
                   <a:srgbClr val="222222"/>
                 </a:solidFill>
               </a:rPr>
-              <a:t>fait_chomage_trimestriel</a:t>
-            </a:r>
-            <a:endParaRPr lang="en-US" sz="1250" dirty="0"/>
+              <a:t>DQM (16 contrôles)</a:t>
+            </a:r>
+            <a:endParaRPr lang="en-US" sz="1300" dirty="0"/>
           </a:p>
           <a:p>
             <a:pPr marL="342900" indent="-342900">
               <a:spcAft>
-                <a:spcPts val="700"/>
+                <a:spcPts val="900"/>
               </a:spcAft>
               <a:buSzPct val="100000"/>
               <a:buChar char="•"/>
             </a:pPr>
             <a:r>
-              <a:rPr lang="en-US" sz="1250" dirty="0">
+              <a:rPr lang="en-US" sz="1300" dirty="0">
                 <a:solidFill>
                   <a:srgbClr val="222222"/>
                 </a:solidFill>
               </a:rPr>
-              <a:t>fait_emploi_trimestriel</a:t>
-            </a:r>
-            <a:endParaRPr lang="en-US" sz="1250" dirty="0"/>
-          </a:p>
-        </p:txBody>
-      </p:sp>
-      <p:sp>
-        <p:nvSpPr>
-          <p:cNvPr id="16" name="Shape 14"/>
-          <p:cNvSpPr/>
-          <p:nvPr/>
-        </p:nvSpPr>
-        <p:spPr>
-          <a:xfrm>
-            <a:off x="8092440" y="1645920"/>
-            <a:ext cx="3611880" cy="4023360"/>
+              <a:t>Agrégats socioeco_annuel</a:t>
+            </a:r>
+            <a:endParaRPr lang="en-US" sz="1300" dirty="0"/>
+          </a:p>
+        </p:txBody>
+      </p:sp>
+      <p:sp>
+        <p:nvSpPr>
+          <p:cNvPr id="19" name="Text 17"/>
+          <p:cNvSpPr/>
+          <p:nvPr/>
+        </p:nvSpPr>
+        <p:spPr>
+          <a:xfrm>
+            <a:off x="8001000" y="3063240"/>
+            <a:ext cx="640080" cy="731520"/>
+          </a:xfrm>
+          <a:prstGeom prst="rect">
+            <a:avLst/>
+          </a:prstGeom>
+          <a:noFill/>
+          <a:ln/>
+        </p:spPr>
+        <p:txBody>
+          <a:bodyPr wrap="square" lIns="0" tIns="0" rIns="0" bIns="0" rtlCol="0" anchor="ctr"/>
+          <a:lstStyle/>
+          <a:p>
+            <a:pPr algn="ctr" indent="0" marL="0">
+              <a:buNone/>
+            </a:pPr>
+            <a:r>
+              <a:rPr lang="en-US" sz="3400" b="1" dirty="0">
+                <a:solidFill>
+                  <a:srgbClr val="1B2A5E"/>
+                </a:solidFill>
+              </a:rPr>
+              <a:t>→</a:t>
+            </a:r>
+            <a:endParaRPr lang="en-US" sz="3400" dirty="0"/>
+          </a:p>
+        </p:txBody>
+      </p:sp>
+      <p:sp>
+        <p:nvSpPr>
+          <p:cNvPr id="20" name="Shape 18"/>
+          <p:cNvSpPr/>
+          <p:nvPr/>
+        </p:nvSpPr>
+        <p:spPr>
+          <a:xfrm>
+            <a:off x="8641080" y="1828800"/>
+            <a:ext cx="3337560" cy="3200400"/>
           </a:xfrm>
           <a:prstGeom prst="roundRect">
             <a:avLst>
-              <a:gd name="adj" fmla="val 2025"/>
+              <a:gd name="adj" fmla="val 2857"/>
             </a:avLst>
           </a:prstGeom>
           <a:solidFill>
             <a:srgbClr val="F2F3F7"/>
           </a:solidFill>
-          <a:ln w="15875">
+          <a:ln w="31750">
             <a:solidFill>
               <a:srgbClr val="C9A227"/>
             </a:solidFill>
@@ -10379,14 +10425,34 @@
       </p:sp>
       <p:sp>
         <p:nvSpPr>
-          <p:cNvPr id="17" name="Text 15"/>
-          <p:cNvSpPr/>
-          <p:nvPr/>
-        </p:nvSpPr>
-        <p:spPr>
-          <a:xfrm>
-            <a:off x="8092440" y="1773936"/>
-            <a:ext cx="3611880" cy="411480"/>
+          <p:cNvPr id="21" name="Shape 19"/>
+          <p:cNvSpPr/>
+          <p:nvPr/>
+        </p:nvSpPr>
+        <p:spPr>
+          <a:xfrm>
+            <a:off x="8641080" y="1828800"/>
+            <a:ext cx="3337560" cy="548640"/>
+          </a:xfrm>
+          <a:prstGeom prst="rect">
+            <a:avLst/>
+          </a:prstGeom>
+          <a:solidFill>
+            <a:srgbClr val="C9A227"/>
+          </a:solidFill>
+          <a:ln/>
+        </p:spPr>
+      </p:sp>
+      <p:sp>
+        <p:nvSpPr>
+          <p:cNvPr id="22" name="Text 20"/>
+          <p:cNvSpPr/>
+          <p:nvPr/>
+        </p:nvSpPr>
+        <p:spPr>
+          <a:xfrm>
+            <a:off x="8641080" y="1828800"/>
+            <a:ext cx="3337560" cy="548640"/>
           </a:xfrm>
           <a:prstGeom prst="rect">
             <a:avLst/>
@@ -10402,27 +10468,27 @@
               <a:buNone/>
             </a:pPr>
             <a:r>
-              <a:rPr lang="en-US" sz="1600" b="1" dirty="0">
-                <a:solidFill>
-                  <a:srgbClr val="C9A227"/>
-                </a:solidFill>
-              </a:rPr>
-              <a:t>Gold (analytique)</a:t>
-            </a:r>
-            <a:endParaRPr lang="en-US" sz="1600" dirty="0"/>
-          </a:p>
-        </p:txBody>
-      </p:sp>
-      <p:sp>
-        <p:nvSpPr>
-          <p:cNvPr id="18" name="Text 16"/>
-          <p:cNvSpPr/>
-          <p:nvPr/>
-        </p:nvSpPr>
-        <p:spPr>
-          <a:xfrm>
-            <a:off x="8293608" y="2240280"/>
-            <a:ext cx="3209544" cy="3291840"/>
+              <a:rPr lang="en-US" sz="1800" b="1" dirty="0">
+                <a:solidFill>
+                  <a:srgbClr val="FFFFFF"/>
+                </a:solidFill>
+              </a:rPr>
+              <a:t>GOLD</a:t>
+            </a:r>
+            <a:endParaRPr lang="en-US" sz="1800" dirty="0"/>
+          </a:p>
+        </p:txBody>
+      </p:sp>
+      <p:sp>
+        <p:nvSpPr>
+          <p:cNvPr id="23" name="Text 21"/>
+          <p:cNvSpPr/>
+          <p:nvPr/>
+        </p:nvSpPr>
+        <p:spPr>
+          <a:xfrm>
+            <a:off x="8869680" y="2560320"/>
+            <a:ext cx="2880360" cy="2286000"/>
           </a:xfrm>
           <a:prstGeom prst="rect">
             <a:avLst/>
@@ -10436,69 +10502,69 @@
           <a:p>
             <a:pPr marL="342900" indent="-342900">
               <a:spcAft>
-                <a:spcPts val="700"/>
+                <a:spcPts val="900"/>
               </a:spcAft>
               <a:buSzPct val="100000"/>
               <a:buChar char="•"/>
             </a:pPr>
             <a:r>
-              <a:rPr lang="en-US" sz="1250" dirty="0">
+              <a:rPr lang="en-US" sz="1300" dirty="0">
                 <a:solidFill>
                   <a:srgbClr val="222222"/>
                 </a:solidFill>
               </a:rPr>
-              <a:t>gold_dataset_analytique</a:t>
-            </a:r>
-            <a:endParaRPr lang="en-US" sz="1250" dirty="0"/>
+              <a:t>1 ligne = 1 (dépt, élection)</a:t>
+            </a:r>
+            <a:endParaRPr lang="en-US" sz="1300" dirty="0"/>
           </a:p>
           <a:p>
             <a:pPr marL="342900" indent="-342900">
               <a:spcAft>
-                <a:spcPts val="700"/>
+                <a:spcPts val="900"/>
               </a:spcAft>
               <a:buSzPct val="100000"/>
               <a:buChar char="•"/>
             </a:pPr>
             <a:r>
-              <a:rPr lang="en-US" sz="1250" dirty="0">
+              <a:rPr lang="en-US" sz="1300" dirty="0">
                 <a:solidFill>
                   <a:srgbClr val="222222"/>
                 </a:solidFill>
               </a:rPr>
-              <a:t>Dénormalisée pour ML &amp; BI</a:t>
-            </a:r>
-            <a:endParaRPr lang="en-US" sz="1250" dirty="0"/>
+              <a:t>Features anti-leakage ≤ N−1</a:t>
+            </a:r>
+            <a:endParaRPr lang="en-US" sz="1300" dirty="0"/>
           </a:p>
           <a:p>
             <a:pPr marL="342900" indent="-342900">
               <a:spcAft>
-                <a:spcPts val="700"/>
+                <a:spcPts val="900"/>
               </a:spcAft>
               <a:buSzPct val="100000"/>
               <a:buChar char="•"/>
             </a:pPr>
             <a:r>
-              <a:rPr lang="en-US" sz="1250" dirty="0">
+              <a:rPr lang="en-US" sz="1300" dirty="0">
                 <a:solidFill>
                   <a:srgbClr val="222222"/>
                 </a:solidFill>
               </a:rPr>
-              <a:t>SQLite indexé : electio_poc.db</a:t>
-            </a:r>
-            <a:endParaRPr lang="en-US" sz="1250" dirty="0"/>
-          </a:p>
-        </p:txBody>
-      </p:sp>
-      <p:sp>
-        <p:nvSpPr>
-          <p:cNvPr id="19" name="Text 17"/>
-          <p:cNvSpPr/>
-          <p:nvPr/>
-        </p:nvSpPr>
-        <p:spPr>
-          <a:xfrm>
-            <a:off x="502920" y="5852160"/>
-            <a:ext cx="11201400" cy="365760"/>
+              <a:t>SQLite + KPI + Postgres</a:t>
+            </a:r>
+            <a:endParaRPr lang="en-US" sz="1300" dirty="0"/>
+          </a:p>
+        </p:txBody>
+      </p:sp>
+      <p:sp>
+        <p:nvSpPr>
+          <p:cNvPr id="24" name="Text 22"/>
+          <p:cNvSpPr/>
+          <p:nvPr/>
+        </p:nvSpPr>
+        <p:spPr>
+          <a:xfrm>
+            <a:off x="685800" y="5486400"/>
+            <a:ext cx="10972800" cy="457200"/>
           </a:xfrm>
           <a:prstGeom prst="rect">
             <a:avLst/>
@@ -10519,7 +10585,7 @@
                   <a:srgbClr val="1B2A5E"/>
                 </a:solidFill>
               </a:rPr>
-              <a:t>480 lignes GOLD · 384 observations ML · référentiel partagé ETL / SQL / Metabase</a:t>
+              <a:t>Orchestration : run_pipeline.py · tests pytest · suite DQM (dqm/run_checkpoint.py)</a:t>
             </a:r>
             <a:endParaRPr lang="en-US" sz="1300" dirty="0"/>
           </a:p>
@@ -10607,7 +10673,7 @@
                   <a:srgbClr val="FFFFFF"/>
                 </a:solidFill>
               </a:rPr>
-              <a:t>05</a:t>
+              <a:t>04</a:t>
             </a:r>
             <a:endParaRPr lang="en-US" sz="1300" dirty="0"/>
           </a:p>
@@ -10643,7 +10709,7 @@
                   <a:srgbClr val="1B2A5E"/>
                 </a:solidFill>
               </a:rPr>
-              <a:t>Machine Learning</a:t>
+              <a:t>Modèle de données</a:t>
             </a:r>
             <a:endParaRPr lang="en-US" sz="2900" dirty="0"/>
           </a:p>
@@ -10699,7 +10765,7 @@
                   <a:srgbClr val="0066CC"/>
                 </a:solidFill>
               </a:rPr>
-              <a:t>Classification supervisée du bloc en tête</a:t>
+              <a:t>Schéma en étoile — nommage explicite</a:t>
             </a:r>
             <a:endParaRPr lang="en-US" sz="1400" dirty="0"/>
           </a:p>
@@ -10774,11 +10840,150 @@
         <p:spPr>
           <a:xfrm>
             <a:off x="502920" y="1645920"/>
-            <a:ext cx="5440680" cy="4206240"/>
+            <a:ext cx="3611880" cy="4023360"/>
           </a:xfrm>
           <a:prstGeom prst="roundRect">
             <a:avLst>
-              <a:gd name="adj" fmla="val 1739"/>
+              <a:gd name="adj" fmla="val 2025"/>
+            </a:avLst>
+          </a:prstGeom>
+          <a:solidFill>
+            <a:srgbClr val="F2F3F7"/>
+          </a:solidFill>
+          <a:ln w="15875">
+            <a:solidFill>
+              <a:srgbClr val="0066CC"/>
+            </a:solidFill>
+            <a:prstDash val="solid"/>
+          </a:ln>
+        </p:spPr>
+      </p:sp>
+      <p:sp>
+        <p:nvSpPr>
+          <p:cNvPr id="11" name="Text 9"/>
+          <p:cNvSpPr/>
+          <p:nvPr/>
+        </p:nvSpPr>
+        <p:spPr>
+          <a:xfrm>
+            <a:off x="502920" y="1773936"/>
+            <a:ext cx="3611880" cy="411480"/>
+          </a:xfrm>
+          <a:prstGeom prst="rect">
+            <a:avLst/>
+          </a:prstGeom>
+          <a:noFill/>
+          <a:ln/>
+        </p:spPr>
+        <p:txBody>
+          <a:bodyPr wrap="square" lIns="0" tIns="0" rIns="0" bIns="0" rtlCol="0" anchor="ctr"/>
+          <a:lstStyle/>
+          <a:p>
+            <a:pPr algn="ctr" indent="0" marL="0">
+              <a:buNone/>
+            </a:pPr>
+            <a:r>
+              <a:rPr lang="en-US" sz="1600" b="1" dirty="0">
+                <a:solidFill>
+                  <a:srgbClr val="0066CC"/>
+                </a:solidFill>
+              </a:rPr>
+              <a:t>Dimensions</a:t>
+            </a:r>
+            <a:endParaRPr lang="en-US" sz="1600" dirty="0"/>
+          </a:p>
+        </p:txBody>
+      </p:sp>
+      <p:sp>
+        <p:nvSpPr>
+          <p:cNvPr id="12" name="Text 10"/>
+          <p:cNvSpPr/>
+          <p:nvPr/>
+        </p:nvSpPr>
+        <p:spPr>
+          <a:xfrm>
+            <a:off x="704088" y="2240280"/>
+            <a:ext cx="3209544" cy="3291840"/>
+          </a:xfrm>
+          <a:prstGeom prst="rect">
+            <a:avLst/>
+          </a:prstGeom>
+          <a:noFill/>
+          <a:ln/>
+        </p:spPr>
+        <p:txBody>
+          <a:bodyPr wrap="square" rtlCol="0" anchor="t"/>
+          <a:lstStyle/>
+          <a:p>
+            <a:pPr marL="342900" indent="-342900">
+              <a:spcAft>
+                <a:spcPts val="700"/>
+              </a:spcAft>
+              <a:buSzPct val="100000"/>
+              <a:buChar char="•"/>
+            </a:pPr>
+            <a:r>
+              <a:rPr lang="en-US" sz="1250" dirty="0">
+                <a:solidFill>
+                  <a:srgbClr val="222222"/>
+                </a:solidFill>
+              </a:rPr>
+              <a:t>dim_departement</a:t>
+            </a:r>
+            <a:endParaRPr lang="en-US" sz="1250" dirty="0"/>
+          </a:p>
+          <a:p>
+            <a:pPr marL="342900" indent="-342900">
+              <a:spcAft>
+                <a:spcPts val="700"/>
+              </a:spcAft>
+              <a:buSzPct val="100000"/>
+              <a:buChar char="•"/>
+            </a:pPr>
+            <a:r>
+              <a:rPr lang="en-US" sz="1250" dirty="0">
+                <a:solidFill>
+                  <a:srgbClr val="222222"/>
+                </a:solidFill>
+              </a:rPr>
+              <a:t>dim_annee</a:t>
+            </a:r>
+            <a:endParaRPr lang="en-US" sz="1250" dirty="0"/>
+          </a:p>
+          <a:p>
+            <a:pPr marL="342900" indent="-342900">
+              <a:spcAft>
+                <a:spcPts val="700"/>
+              </a:spcAft>
+              <a:buSzPct val="100000"/>
+              <a:buChar char="•"/>
+            </a:pPr>
+            <a:r>
+              <a:rPr lang="en-US" sz="1250" dirty="0">
+                <a:solidFill>
+                  <a:srgbClr val="222222"/>
+                </a:solidFill>
+              </a:rPr>
+              <a:t>dim_bloc</a:t>
+            </a:r>
+            <a:endParaRPr lang="en-US" sz="1250" dirty="0"/>
+          </a:p>
+        </p:txBody>
+      </p:sp>
+      <p:sp>
+        <p:nvSpPr>
+          <p:cNvPr id="13" name="Shape 11"/>
+          <p:cNvSpPr/>
+          <p:nvPr/>
+        </p:nvSpPr>
+        <p:spPr>
+          <a:xfrm>
+            <a:off x="4297680" y="1645920"/>
+            <a:ext cx="3611880" cy="4023360"/>
+          </a:xfrm>
+          <a:prstGeom prst="roundRect">
+            <a:avLst>
+              <a:gd name="adj" fmla="val 2025"/>
             </a:avLst>
           </a:prstGeom>
           <a:solidFill>
@@ -10794,14 +10999,14 @@
       </p:sp>
       <p:sp>
         <p:nvSpPr>
-          <p:cNvPr id="11" name="Text 9"/>
-          <p:cNvSpPr/>
-          <p:nvPr/>
-        </p:nvSpPr>
-        <p:spPr>
-          <a:xfrm>
-            <a:off x="502920" y="1773936"/>
-            <a:ext cx="5440680" cy="411480"/>
+          <p:cNvPr id="14" name="Text 12"/>
+          <p:cNvSpPr/>
+          <p:nvPr/>
+        </p:nvSpPr>
+        <p:spPr>
+          <a:xfrm>
+            <a:off x="4297680" y="1773936"/>
+            <a:ext cx="3611880" cy="411480"/>
           </a:xfrm>
           <a:prstGeom prst="rect">
             <a:avLst/>
@@ -10822,7 +11027,7 @@
                   <a:srgbClr val="1B2A5E"/>
                 </a:solidFill>
               </a:rPr>
-              <a:t>Protocole rigoureux</a:t>
+              <a:t>Faits</a:t>
             </a:r>
             <a:endParaRPr lang="en-US" sz="1600" dirty="0"/>
           </a:p>
@@ -10830,14 +11035,14 @@
       </p:sp>
       <p:sp>
         <p:nvSpPr>
-          <p:cNvPr id="12" name="Text 10"/>
-          <p:cNvSpPr/>
-          <p:nvPr/>
-        </p:nvSpPr>
-        <p:spPr>
-          <a:xfrm>
-            <a:off x="704088" y="2240280"/>
-            <a:ext cx="5038344" cy="3474720"/>
+          <p:cNvPr id="15" name="Text 13"/>
+          <p:cNvSpPr/>
+          <p:nvPr/>
+        </p:nvSpPr>
+        <p:spPr>
+          <a:xfrm>
+            <a:off x="4498848" y="2240280"/>
+            <a:ext cx="3209544" cy="3291840"/>
           </a:xfrm>
           <a:prstGeom prst="rect">
             <a:avLst/>
@@ -10862,7 +11067,7 @@
                   <a:srgbClr val="222222"/>
                 </a:solidFill>
               </a:rPr>
-              <a:t>Split temporel : holdout = scrutin 2022</a:t>
+              <a:t>fait_resultat_election</a:t>
             </a:r>
             <a:endParaRPr lang="en-US" sz="1250" dirty="0"/>
           </a:p>
@@ -10880,7 +11085,7 @@
                   <a:srgbClr val="222222"/>
                 </a:solidFill>
               </a:rPr>
-              <a:t>Sélection : 0,4×walk-forward + 0,6×holdout</a:t>
+              <a:t>fait_chomage_trimestriel</a:t>
             </a:r>
             <a:endParaRPr lang="en-US" sz="1250" dirty="0"/>
           </a:p>
@@ -10898,10 +11103,95 @@
                   <a:srgbClr val="222222"/>
                 </a:solidFill>
               </a:rPr>
-              <a:t>CV GroupKFold = métrique secondaire</a:t>
+              <a:t>fait_emploi_trimestriel</a:t>
             </a:r>
             <a:endParaRPr lang="en-US" sz="1250" dirty="0"/>
           </a:p>
+        </p:txBody>
+      </p:sp>
+      <p:sp>
+        <p:nvSpPr>
+          <p:cNvPr id="16" name="Shape 14"/>
+          <p:cNvSpPr/>
+          <p:nvPr/>
+        </p:nvSpPr>
+        <p:spPr>
+          <a:xfrm>
+            <a:off x="8092440" y="1645920"/>
+            <a:ext cx="3611880" cy="4023360"/>
+          </a:xfrm>
+          <a:prstGeom prst="roundRect">
+            <a:avLst>
+              <a:gd name="adj" fmla="val 2025"/>
+            </a:avLst>
+          </a:prstGeom>
+          <a:solidFill>
+            <a:srgbClr val="F2F3F7"/>
+          </a:solidFill>
+          <a:ln w="15875">
+            <a:solidFill>
+              <a:srgbClr val="C9A227"/>
+            </a:solidFill>
+            <a:prstDash val="solid"/>
+          </a:ln>
+        </p:spPr>
+      </p:sp>
+      <p:sp>
+        <p:nvSpPr>
+          <p:cNvPr id="17" name="Text 15"/>
+          <p:cNvSpPr/>
+          <p:nvPr/>
+        </p:nvSpPr>
+        <p:spPr>
+          <a:xfrm>
+            <a:off x="8092440" y="1773936"/>
+            <a:ext cx="3611880" cy="411480"/>
+          </a:xfrm>
+          <a:prstGeom prst="rect">
+            <a:avLst/>
+          </a:prstGeom>
+          <a:noFill/>
+          <a:ln/>
+        </p:spPr>
+        <p:txBody>
+          <a:bodyPr wrap="square" lIns="0" tIns="0" rIns="0" bIns="0" rtlCol="0" anchor="ctr"/>
+          <a:lstStyle/>
+          <a:p>
+            <a:pPr algn="ctr" indent="0" marL="0">
+              <a:buNone/>
+            </a:pPr>
+            <a:r>
+              <a:rPr lang="en-US" sz="1600" b="1" dirty="0">
+                <a:solidFill>
+                  <a:srgbClr val="C9A227"/>
+                </a:solidFill>
+              </a:rPr>
+              <a:t>Gold (analytique)</a:t>
+            </a:r>
+            <a:endParaRPr lang="en-US" sz="1600" dirty="0"/>
+          </a:p>
+        </p:txBody>
+      </p:sp>
+      <p:sp>
+        <p:nvSpPr>
+          <p:cNvPr id="18" name="Text 16"/>
+          <p:cNvSpPr/>
+          <p:nvPr/>
+        </p:nvSpPr>
+        <p:spPr>
+          <a:xfrm>
+            <a:off x="8293608" y="2240280"/>
+            <a:ext cx="3209544" cy="3291840"/>
+          </a:xfrm>
+          <a:prstGeom prst="rect">
+            <a:avLst/>
+          </a:prstGeom>
+          <a:noFill/>
+          <a:ln/>
+        </p:spPr>
+        <p:txBody>
+          <a:bodyPr wrap="square" rtlCol="0" anchor="t"/>
+          <a:lstStyle/>
           <a:p>
             <a:pPr marL="342900" indent="-342900">
               <a:spcAft>
@@ -10916,95 +11206,10 @@
                   <a:srgbClr val="222222"/>
                 </a:solidFill>
               </a:rPr>
-              <a:t>Features ≤ N−1 (anti-leakage ETL)</a:t>
+              <a:t>gold_dataset_analytique</a:t>
             </a:r>
             <a:endParaRPr lang="en-US" sz="1250" dirty="0"/>
           </a:p>
-        </p:txBody>
-      </p:sp>
-      <p:sp>
-        <p:nvSpPr>
-          <p:cNvPr id="13" name="Shape 11"/>
-          <p:cNvSpPr/>
-          <p:nvPr/>
-        </p:nvSpPr>
-        <p:spPr>
-          <a:xfrm>
-            <a:off x="6126480" y="1645920"/>
-            <a:ext cx="5577840" cy="4206240"/>
-          </a:xfrm>
-          <a:prstGeom prst="roundRect">
-            <a:avLst>
-              <a:gd name="adj" fmla="val 1739"/>
-            </a:avLst>
-          </a:prstGeom>
-          <a:solidFill>
-            <a:srgbClr val="F2F3F7"/>
-          </a:solidFill>
-          <a:ln w="15875">
-            <a:solidFill>
-              <a:srgbClr val="0066CC"/>
-            </a:solidFill>
-            <a:prstDash val="solid"/>
-          </a:ln>
-        </p:spPr>
-      </p:sp>
-      <p:sp>
-        <p:nvSpPr>
-          <p:cNvPr id="14" name="Text 12"/>
-          <p:cNvSpPr/>
-          <p:nvPr/>
-        </p:nvSpPr>
-        <p:spPr>
-          <a:xfrm>
-            <a:off x="6126480" y="1773936"/>
-            <a:ext cx="5577840" cy="411480"/>
-          </a:xfrm>
-          <a:prstGeom prst="rect">
-            <a:avLst/>
-          </a:prstGeom>
-          <a:noFill/>
-          <a:ln/>
-        </p:spPr>
-        <p:txBody>
-          <a:bodyPr wrap="square" lIns="0" tIns="0" rIns="0" bIns="0" rtlCol="0" anchor="ctr"/>
-          <a:lstStyle/>
-          <a:p>
-            <a:pPr algn="ctr" indent="0" marL="0">
-              <a:buNone/>
-            </a:pPr>
-            <a:r>
-              <a:rPr lang="en-US" sz="1600" b="1" dirty="0">
-                <a:solidFill>
-                  <a:srgbClr val="0066CC"/>
-                </a:solidFill>
-              </a:rPr>
-              <a:t>5 modèles comparés</a:t>
-            </a:r>
-            <a:endParaRPr lang="en-US" sz="1600" dirty="0"/>
-          </a:p>
-        </p:txBody>
-      </p:sp>
-      <p:sp>
-        <p:nvSpPr>
-          <p:cNvPr id="15" name="Text 13"/>
-          <p:cNvSpPr/>
-          <p:nvPr/>
-        </p:nvSpPr>
-        <p:spPr>
-          <a:xfrm>
-            <a:off x="6327648" y="2240280"/>
-            <a:ext cx="5175504" cy="3474720"/>
-          </a:xfrm>
-          <a:prstGeom prst="rect">
-            <a:avLst/>
-          </a:prstGeom>
-          <a:noFill/>
-          <a:ln/>
-        </p:spPr>
-        <p:txBody>
-          <a:bodyPr wrap="square" rtlCol="0" anchor="t"/>
-          <a:lstStyle/>
           <a:p>
             <a:pPr marL="342900" indent="-342900">
               <a:spcAft>
@@ -11019,7 +11224,7 @@
                   <a:srgbClr val="222222"/>
                 </a:solidFill>
               </a:rPr>
-              <a:t>Baseline (classe majoritaire)</a:t>
+              <a:t>Dénormalisée pour ML &amp; BI</a:t>
             </a:r>
             <a:endParaRPr lang="en-US" sz="1250" dirty="0"/>
           </a:p>
@@ -11037,63 +11242,45 @@
                   <a:srgbClr val="222222"/>
                 </a:solidFill>
               </a:rPr>
-              <a:t>Régression logistique</a:t>
+              <a:t>SQLite indexé : electio_poc.db</a:t>
             </a:r>
             <a:endParaRPr lang="en-US" sz="1250" dirty="0"/>
           </a:p>
-          <a:p>
-            <a:pPr marL="342900" indent="-342900">
-              <a:spcAft>
-                <a:spcPts val="700"/>
-              </a:spcAft>
-              <a:buSzPct val="100000"/>
-              <a:buChar char="•"/>
-            </a:pPr>
-            <a:r>
-              <a:rPr lang="en-US" sz="1250" dirty="0">
-                <a:solidFill>
-                  <a:srgbClr val="222222"/>
-                </a:solidFill>
-              </a:rPr>
-              <a:t>Arbre de décision</a:t>
-            </a:r>
-            <a:endParaRPr lang="en-US" sz="1250" dirty="0"/>
-          </a:p>
-          <a:p>
-            <a:pPr marL="342900" indent="-342900">
-              <a:spcAft>
-                <a:spcPts val="700"/>
-              </a:spcAft>
-              <a:buSzPct val="100000"/>
-              <a:buChar char="•"/>
-            </a:pPr>
-            <a:r>
-              <a:rPr lang="en-US" sz="1250" dirty="0">
-                <a:solidFill>
-                  <a:srgbClr val="222222"/>
-                </a:solidFill>
-              </a:rPr>
-              <a:t>Random Forest (fort en CV géo)</a:t>
-            </a:r>
-            <a:endParaRPr lang="en-US" sz="1250" dirty="0"/>
-          </a:p>
-          <a:p>
-            <a:pPr marL="342900" indent="-342900">
-              <a:spcAft>
-                <a:spcPts val="700"/>
-              </a:spcAft>
-              <a:buSzPct val="100000"/>
-              <a:buChar char="•"/>
-            </a:pPr>
-            <a:r>
-              <a:rPr lang="en-US" sz="1250" dirty="0">
-                <a:solidFill>
-                  <a:srgbClr val="222222"/>
-                </a:solidFill>
-              </a:rPr>
-              <a:t>Gradient Boosting — retenu (temporel)</a:t>
-            </a:r>
-            <a:endParaRPr lang="en-US" sz="1250" dirty="0"/>
+        </p:txBody>
+      </p:sp>
+      <p:sp>
+        <p:nvSpPr>
+          <p:cNvPr id="19" name="Text 17"/>
+          <p:cNvSpPr/>
+          <p:nvPr/>
+        </p:nvSpPr>
+        <p:spPr>
+          <a:xfrm>
+            <a:off x="502920" y="5852160"/>
+            <a:ext cx="11201400" cy="365760"/>
+          </a:xfrm>
+          <a:prstGeom prst="rect">
+            <a:avLst/>
+          </a:prstGeom>
+          <a:noFill/>
+          <a:ln/>
+        </p:spPr>
+        <p:txBody>
+          <a:bodyPr wrap="square" rtlCol="0" anchor="ctr"/>
+          <a:lstStyle/>
+          <a:p>
+            <a:pPr algn="ctr" indent="0" marL="0">
+              <a:buNone/>
+            </a:pPr>
+            <a:r>
+              <a:rPr lang="en-US" sz="1300" i="1" dirty="0">
+                <a:solidFill>
+                  <a:srgbClr val="1B2A5E"/>
+                </a:solidFill>
+              </a:rPr>
+              <a:t>480 lignes GOLD · 384 observations ML · référentiel partagé ETL / SQL / Metabase</a:t>
+            </a:r>
+            <a:endParaRPr lang="en-US" sz="1300" dirty="0"/>
           </a:p>
         </p:txBody>
       </p:sp>
@@ -11179,7 +11366,7 @@
                   <a:srgbClr val="FFFFFF"/>
                 </a:solidFill>
               </a:rPr>
-              <a:t>06</a:t>
+              <a:t>05</a:t>
             </a:r>
             <a:endParaRPr lang="en-US" sz="1300" dirty="0"/>
           </a:p>
@@ -11215,7 +11402,7 @@
                   <a:srgbClr val="1B2A5E"/>
                 </a:solidFill>
               </a:rPr>
-              <a:t>Résultats &amp; accuracy</a:t>
+              <a:t>Machine Learning</a:t>
             </a:r>
             <a:endParaRPr lang="en-US" sz="2900" dirty="0"/>
           </a:p>
@@ -11271,7 +11458,7 @@
                   <a:srgbClr val="0066CC"/>
                 </a:solidFill>
               </a:rPr>
-              <a:t>Gradient Boosting — holdout 2022 = 0,53 (données réelles)</a:t>
+              <a:t>Classification supervisée du bloc en tête</a:t>
             </a:r>
             <a:endParaRPr lang="en-US" sz="1400" dirty="0"/>
           </a:p>
@@ -11337,67 +11524,20 @@
           <a:ln/>
         </p:spPr>
       </p:sp>
-      <p:pic>
-        <p:nvPicPr>
-          <p:cNvPr id="10" name="Image 0" descr="C:\Users\amine\Downloads\POC_ElectioAnalytics_projet_complet\viz\output\6_model_compare.png">    </p:cNvPr>
-          <p:cNvPicPr>
-            <a:picLocks noChangeAspect="1"/>
-          </p:cNvPicPr>
-          <p:nvPr/>
-        </p:nvPicPr>
-        <p:blipFill>
-          <a:blip r:embed="rId1"/>
-          <a:stretch>
-            <a:fillRect/>
-          </a:stretch>
-        </p:blipFill>
+      <p:sp>
+        <p:nvSpPr>
+          <p:cNvPr id="10" name="Shape 8"/>
+          <p:cNvSpPr/>
+          <p:nvPr/>
+        </p:nvSpPr>
         <p:spPr>
           <a:xfrm>
             <a:off x="502920" y="1645920"/>
-            <a:ext cx="5852160" cy="3291840"/>
-          </a:xfrm>
-          <a:prstGeom prst="rect">
-            <a:avLst/>
-          </a:prstGeom>
-        </p:spPr>
-      </p:pic>
-      <p:pic>
-        <p:nvPicPr>
-          <p:cNvPr id="11" name="Image 1" descr="C:\Users\amine\Downloads\POC_ElectioAnalytics_projet_complet\viz\output\5_confusion.png">    </p:cNvPr>
-          <p:cNvPicPr>
-            <a:picLocks noChangeAspect="1"/>
-          </p:cNvPicPr>
-          <p:nvPr/>
-        </p:nvPicPr>
-        <p:blipFill>
-          <a:blip r:embed="rId2"/>
-          <a:srcRect l="0" r="0" t="0" b="0"/>
-          <a:stretch/>
-        </p:blipFill>
-        <p:spPr>
-          <a:xfrm>
-            <a:off x="1463040" y="5029200"/>
-            <a:ext cx="3931920" cy="1371600"/>
-          </a:xfrm>
-          <a:prstGeom prst="rect">
-            <a:avLst/>
-          </a:prstGeom>
-        </p:spPr>
-      </p:pic>
-      <p:sp>
-        <p:nvSpPr>
-          <p:cNvPr id="12" name="Shape 8"/>
-          <p:cNvSpPr/>
-          <p:nvPr/>
-        </p:nvSpPr>
-        <p:spPr>
-          <a:xfrm>
-            <a:off x="6583680" y="1645920"/>
-            <a:ext cx="5120640" cy="4754880"/>
+            <a:ext cx="5440680" cy="4206240"/>
           </a:xfrm>
           <a:prstGeom prst="roundRect">
             <a:avLst>
-              <a:gd name="adj" fmla="val 1538"/>
+              <a:gd name="adj" fmla="val 1739"/>
             </a:avLst>
           </a:prstGeom>
           <a:solidFill>
@@ -11405,7 +11545,7 @@
           </a:solidFill>
           <a:ln w="15875">
             <a:solidFill>
-              <a:srgbClr val="C9A227"/>
+              <a:srgbClr val="1B2A5E"/>
             </a:solidFill>
             <a:prstDash val="solid"/>
           </a:ln>
@@ -11413,14 +11553,14 @@
       </p:sp>
       <p:sp>
         <p:nvSpPr>
-          <p:cNvPr id="13" name="Text 9"/>
-          <p:cNvSpPr/>
-          <p:nvPr/>
-        </p:nvSpPr>
-        <p:spPr>
-          <a:xfrm>
-            <a:off x="6583680" y="1773936"/>
-            <a:ext cx="5120640" cy="411480"/>
+          <p:cNvPr id="11" name="Text 9"/>
+          <p:cNvSpPr/>
+          <p:nvPr/>
+        </p:nvSpPr>
+        <p:spPr>
+          <a:xfrm>
+            <a:off x="502920" y="1773936"/>
+            <a:ext cx="5440680" cy="411480"/>
           </a:xfrm>
           <a:prstGeom prst="rect">
             <a:avLst/>
@@ -11438,10 +11578,10 @@
             <a:r>
               <a:rPr lang="en-US" sz="1600" b="1" dirty="0">
                 <a:solidFill>
-                  <a:srgbClr val="C9A227"/>
-                </a:solidFill>
-              </a:rPr>
-              <a:t>Chiffres figés (CHIFFRES_FIGES.md)</a:t>
+                  <a:srgbClr val="1B2A5E"/>
+                </a:solidFill>
+              </a:rPr>
+              <a:t>Protocole rigoureux</a:t>
             </a:r>
             <a:endParaRPr lang="en-US" sz="1600" dirty="0"/>
           </a:p>
@@ -11449,14 +11589,14 @@
       </p:sp>
       <p:sp>
         <p:nvSpPr>
-          <p:cNvPr id="14" name="Text 10"/>
-          <p:cNvSpPr/>
-          <p:nvPr/>
-        </p:nvSpPr>
-        <p:spPr>
-          <a:xfrm>
-            <a:off x="6784848" y="2240280"/>
-            <a:ext cx="4718304" cy="4023360"/>
+          <p:cNvPr id="12" name="Text 10"/>
+          <p:cNvSpPr/>
+          <p:nvPr/>
+        </p:nvSpPr>
+        <p:spPr>
+          <a:xfrm>
+            <a:off x="704088" y="2240280"/>
+            <a:ext cx="5038344" cy="3474720"/>
           </a:xfrm>
           <a:prstGeom prst="rect">
             <a:avLst/>
@@ -11481,7 +11621,7 @@
                   <a:srgbClr val="222222"/>
                 </a:solidFill>
               </a:rPr>
-              <a:t>Holdout 2022 : 0,53 (&gt; 0,5)</a:t>
+              <a:t>Split temporel : holdout = scrutin 2022</a:t>
             </a:r>
             <a:endParaRPr lang="en-US" sz="1250" dirty="0"/>
           </a:p>
@@ -11499,7 +11639,7 @@
                   <a:srgbClr val="222222"/>
                 </a:solidFill>
               </a:rPr>
-              <a:t>Walk-forward : 0,37</a:t>
+              <a:t>Sélection : 0,4×walk-forward + 0,6×holdout</a:t>
             </a:r>
             <a:endParaRPr lang="en-US" sz="1250" dirty="0"/>
           </a:p>
@@ -11517,7 +11657,7 @@
                   <a:srgbClr val="222222"/>
                 </a:solidFill>
               </a:rPr>
-              <a:t>CV géo secondaire : 0,72</a:t>
+              <a:t>CV GroupKFold = métrique secondaire</a:t>
             </a:r>
             <a:endParaRPr lang="en-US" sz="1250" dirty="0"/>
           </a:p>
@@ -11535,10 +11675,95 @@
                   <a:srgbClr val="222222"/>
                 </a:solidFill>
               </a:rPr>
-              <a:t>Baseline CV : 0,41</a:t>
+              <a:t>Features ≤ N−1 (anti-leakage ETL)</a:t>
             </a:r>
             <a:endParaRPr lang="en-US" sz="1250" dirty="0"/>
           </a:p>
+        </p:txBody>
+      </p:sp>
+      <p:sp>
+        <p:nvSpPr>
+          <p:cNvPr id="13" name="Shape 11"/>
+          <p:cNvSpPr/>
+          <p:nvPr/>
+        </p:nvSpPr>
+        <p:spPr>
+          <a:xfrm>
+            <a:off x="6126480" y="1645920"/>
+            <a:ext cx="5577840" cy="4206240"/>
+          </a:xfrm>
+          <a:prstGeom prst="roundRect">
+            <a:avLst>
+              <a:gd name="adj" fmla="val 1739"/>
+            </a:avLst>
+          </a:prstGeom>
+          <a:solidFill>
+            <a:srgbClr val="F2F3F7"/>
+          </a:solidFill>
+          <a:ln w="15875">
+            <a:solidFill>
+              <a:srgbClr val="0066CC"/>
+            </a:solidFill>
+            <a:prstDash val="solid"/>
+          </a:ln>
+        </p:spPr>
+      </p:sp>
+      <p:sp>
+        <p:nvSpPr>
+          <p:cNvPr id="14" name="Text 12"/>
+          <p:cNvSpPr/>
+          <p:nvPr/>
+        </p:nvSpPr>
+        <p:spPr>
+          <a:xfrm>
+            <a:off x="6126480" y="1773936"/>
+            <a:ext cx="5577840" cy="411480"/>
+          </a:xfrm>
+          <a:prstGeom prst="rect">
+            <a:avLst/>
+          </a:prstGeom>
+          <a:noFill/>
+          <a:ln/>
+        </p:spPr>
+        <p:txBody>
+          <a:bodyPr wrap="square" lIns="0" tIns="0" rIns="0" bIns="0" rtlCol="0" anchor="ctr"/>
+          <a:lstStyle/>
+          <a:p>
+            <a:pPr algn="ctr" indent="0" marL="0">
+              <a:buNone/>
+            </a:pPr>
+            <a:r>
+              <a:rPr lang="en-US" sz="1600" b="1" dirty="0">
+                <a:solidFill>
+                  <a:srgbClr val="0066CC"/>
+                </a:solidFill>
+              </a:rPr>
+              <a:t>5 modèles comparés</a:t>
+            </a:r>
+            <a:endParaRPr lang="en-US" sz="1600" dirty="0"/>
+          </a:p>
+        </p:txBody>
+      </p:sp>
+      <p:sp>
+        <p:nvSpPr>
+          <p:cNvPr id="15" name="Text 13"/>
+          <p:cNvSpPr/>
+          <p:nvPr/>
+        </p:nvSpPr>
+        <p:spPr>
+          <a:xfrm>
+            <a:off x="6327648" y="2240280"/>
+            <a:ext cx="5175504" cy="3474720"/>
+          </a:xfrm>
+          <a:prstGeom prst="rect">
+            <a:avLst/>
+          </a:prstGeom>
+          <a:noFill/>
+          <a:ln/>
+        </p:spPr>
+        <p:txBody>
+          <a:bodyPr wrap="square" rtlCol="0" anchor="t"/>
+          <a:lstStyle/>
           <a:p>
             <a:pPr marL="342900" indent="-342900">
               <a:spcAft>
@@ -11553,7 +11778,7 @@
                   <a:srgbClr val="222222"/>
                 </a:solidFill>
               </a:rPr>
-              <a:t>Top feature : pct gagnant précédent</a:t>
+              <a:t>Baseline (classe majoritaire)</a:t>
             </a:r>
             <a:endParaRPr lang="en-US" sz="1250" dirty="0"/>
           </a:p>
@@ -11571,7 +11796,7 @@
                   <a:srgbClr val="222222"/>
                 </a:solidFill>
               </a:rPr>
-              <a:t>Pauvreté : 40 % GOLD, hors ML</a:t>
+              <a:t>Régression logistique</a:t>
             </a:r>
             <a:endParaRPr lang="en-US" sz="1250" dirty="0"/>
           </a:p>
@@ -11589,7 +11814,43 @@
                   <a:srgbClr val="222222"/>
                 </a:solidFill>
               </a:rPr>
-              <a:t>Source : data/ml_report.json</a:t>
+              <a:t>Arbre de décision</a:t>
+            </a:r>
+            <a:endParaRPr lang="en-US" sz="1250" dirty="0"/>
+          </a:p>
+          <a:p>
+            <a:pPr marL="342900" indent="-342900">
+              <a:spcAft>
+                <a:spcPts val="700"/>
+              </a:spcAft>
+              <a:buSzPct val="100000"/>
+              <a:buChar char="•"/>
+            </a:pPr>
+            <a:r>
+              <a:rPr lang="en-US" sz="1250" dirty="0">
+                <a:solidFill>
+                  <a:srgbClr val="222222"/>
+                </a:solidFill>
+              </a:rPr>
+              <a:t>Random Forest (fort en CV géo)</a:t>
+            </a:r>
+            <a:endParaRPr lang="en-US" sz="1250" dirty="0"/>
+          </a:p>
+          <a:p>
+            <a:pPr marL="342900" indent="-342900">
+              <a:spcAft>
+                <a:spcPts val="700"/>
+              </a:spcAft>
+              <a:buSzPct val="100000"/>
+              <a:buChar char="•"/>
+            </a:pPr>
+            <a:r>
+              <a:rPr lang="en-US" sz="1250" dirty="0">
+                <a:solidFill>
+                  <a:srgbClr val="222222"/>
+                </a:solidFill>
+              </a:rPr>
+              <a:t>Gradient Boosting — retenu (temporel)</a:t>
             </a:r>
             <a:endParaRPr lang="en-US" sz="1250" dirty="0"/>
           </a:p>

--- a/docs/livrables/Support_soutenance_POC_ElectioAnalytics.pptx
+++ b/docs/livrables/Support_soutenance_POC_ElectioAnalytics.pptx
@@ -2601,7 +2601,7 @@
                   <a:srgbClr val="0066CC"/>
                 </a:solidFill>
               </a:rPr>
-              <a:t>Gradient Boosting — holdout 2022 = 0,53 (données réelles)</a:t>
+              <a:t>Oracle 0,812 / tendance 0,448 — le modèle sait la carte, pas la vague</a:t>
             </a:r>
             <a:endParaRPr lang="en-US" sz="1400" dirty="0"/>
           </a:p>
@@ -2811,7 +2811,7 @@
                   <a:srgbClr val="222222"/>
                 </a:solidFill>
               </a:rPr>
-              <a:t>Holdout 2022 : 0,53 (&gt; 0,5)</a:t>
+              <a:t>Oracle MAE : 1,394</a:t>
             </a:r>
             <a:endParaRPr lang="en-US" sz="1250" dirty="0"/>
           </a:p>
@@ -2829,7 +2829,7 @@
                   <a:srgbClr val="222222"/>
                 </a:solidFill>
               </a:rPr>
-              <a:t>Walk-forward : 0,37</a:t>
+              <a:t>Oracle argmax : 0,812</a:t>
             </a:r>
             <a:endParaRPr lang="en-US" sz="1250" dirty="0"/>
           </a:p>
@@ -2847,7 +2847,7 @@
                   <a:srgbClr val="222222"/>
                 </a:solidFill>
               </a:rPr>
-              <a:t>CV géo secondaire : 0,72</a:t>
+              <a:t>Tendance argmax : 0,448</a:t>
             </a:r>
             <a:endParaRPr lang="en-US" sz="1250" dirty="0"/>
           </a:p>
@@ -2865,7 +2865,7 @@
                   <a:srgbClr val="222222"/>
                 </a:solidFill>
               </a:rPr>
-              <a:t>Baseline CV : 0,41</a:t>
+              <a:t>Persist. écart oracle : 0,844</a:t>
             </a:r>
             <a:endParaRPr lang="en-US" sz="1250" dirty="0"/>
           </a:p>
@@ -2883,7 +2883,7 @@
                   <a:srgbClr val="222222"/>
                 </a:solidFill>
               </a:rPr>
-              <a:t>Top feature : pct gagnant précédent</a:t>
+              <a:t>Gagnant précédent : 0,521</a:t>
             </a:r>
             <a:endParaRPr lang="en-US" sz="1250" dirty="0"/>
           </a:p>
@@ -2901,7 +2901,7 @@
                   <a:srgbClr val="222222"/>
                 </a:solidFill>
               </a:rPr>
-              <a:t>Pauvreté : 40 % GOLD, hors ML</a:t>
+              <a:t>Socio-éco : 12,8 % importance</a:t>
             </a:r>
             <a:endParaRPr lang="en-US" sz="1250" dirty="0"/>
           </a:p>
@@ -9482,7 +9482,7 @@
       </p:grpSpPr>
       <p:pic>
         <p:nvPicPr>
-          <p:cNvPr id="2" name="Image 0" descr="C:\Users\julie\Documents\mspr-rattrapage\docs\mspr\02_architecture\diagrams\archi_techno_electio.png">    </p:cNvPr>
+          <p:cNvPr id="2" name="Image 0" descr="C:\Users\julie\Documents\mspr-rattrapage\docs\mspr\02_architecture\diagrams\archi_simplifiee_electio.png">    </p:cNvPr>
           <p:cNvPicPr>
             <a:picLocks noChangeAspect="1"/>
           </p:cNvPicPr>
@@ -11458,7 +11458,7 @@
                   <a:srgbClr val="0066CC"/>
                 </a:solidFill>
               </a:rPr>
-              <a:t>Classification supervisée du bloc en tête</a:t>
+              <a:t>Régression des écarts + scénario national</a:t>
             </a:r>
             <a:endParaRPr lang="en-US" sz="1400" dirty="0"/>
           </a:p>
@@ -11639,7 +11639,7 @@
                   <a:srgbClr val="222222"/>
                 </a:solidFill>
               </a:rPr>
-              <a:t>Sélection : 0,4×walk-forward + 0,6×holdout</a:t>
+              <a:t>Sélection : walk-forward hors holdout uniquement</a:t>
             </a:r>
             <a:endParaRPr lang="en-US" sz="1250" dirty="0"/>
           </a:p>
@@ -11738,7 +11738,7 @@
                   <a:srgbClr val="0066CC"/>
                 </a:solidFill>
               </a:rPr>
-              <a:t>5 modèles comparés</a:t>
+              <a:t>4 modèles comparés</a:t>
             </a:r>
             <a:endParaRPr lang="en-US" sz="1600" dirty="0"/>
           </a:p>
@@ -11778,7 +11778,7 @@
                   <a:srgbClr val="222222"/>
                 </a:solidFill>
               </a:rPr>
-              <a:t>Baseline (classe majoritaire)</a:t>
+              <a:t>Persistance de l’écart</a:t>
             </a:r>
             <a:endParaRPr lang="en-US" sz="1250" dirty="0"/>
           </a:p>
@@ -11796,7 +11796,7 @@
                   <a:srgbClr val="222222"/>
                 </a:solidFill>
               </a:rPr>
-              <a:t>Régression logistique</a:t>
+              <a:t>Ridge écart par bloc</a:t>
             </a:r>
             <a:endParaRPr lang="en-US" sz="1250" dirty="0"/>
           </a:p>
@@ -11814,7 +11814,7 @@
                   <a:srgbClr val="222222"/>
                 </a:solidFill>
               </a:rPr>
-              <a:t>Arbre de décision</a:t>
+              <a:t>Ridge écart multi-sorties — retenu</a:t>
             </a:r>
             <a:endParaRPr lang="en-US" sz="1250" dirty="0"/>
           </a:p>
@@ -11832,25 +11832,7 @@
                   <a:srgbClr val="222222"/>
                 </a:solidFill>
               </a:rPr>
-              <a:t>Random Forest (fort en CV géo)</a:t>
-            </a:r>
-            <a:endParaRPr lang="en-US" sz="1250" dirty="0"/>
-          </a:p>
-          <a:p>
-            <a:pPr marL="342900" indent="-342900">
-              <a:spcAft>
-                <a:spcPts val="700"/>
-              </a:spcAft>
-              <a:buSzPct val="100000"/>
-              <a:buChar char="•"/>
-            </a:pPr>
-            <a:r>
-              <a:rPr lang="en-US" sz="1250" dirty="0">
-                <a:solidFill>
-                  <a:srgbClr val="222222"/>
-                </a:solidFill>
-              </a:rPr>
-              <a:t>Gradient Boosting — retenu (temporel)</a:t>
+              <a:t>Forêt écart multi-sorties</a:t>
             </a:r>
             <a:endParaRPr lang="en-US" sz="1250" dirty="0"/>
           </a:p>
